--- a/126/NMOP/draft-netana-nmop-message-broker-bmp-telemetry-msg-03.pptx
+++ b/126/NMOP/draft-netana-nmop-message-broker-bmp-telemetry-msg-03.pptx
@@ -5,21 +5,23 @@
     <p:sldMasterId id="2147483648" r:id="rId1"/>
   </p:sldMasterIdLst>
   <p:notesMasterIdLst>
-    <p:notesMasterId r:id="rId14"/>
+    <p:notesMasterId r:id="rId16"/>
   </p:notesMasterIdLst>
   <p:sldIdLst>
     <p:sldId id="1041" r:id="rId2"/>
     <p:sldId id="2145706243" r:id="rId3"/>
     <p:sldId id="2145706298" r:id="rId4"/>
-    <p:sldId id="2145706303" r:id="rId5"/>
-    <p:sldId id="2145706313" r:id="rId6"/>
+    <p:sldId id="2145706313" r:id="rId5"/>
+    <p:sldId id="2145706316" r:id="rId6"/>
     <p:sldId id="2145706311" r:id="rId7"/>
     <p:sldId id="2145706312" r:id="rId8"/>
-    <p:sldId id="2145706310" r:id="rId9"/>
-    <p:sldId id="2145706302" r:id="rId10"/>
-    <p:sldId id="2145706306" r:id="rId11"/>
-    <p:sldId id="2145706309" r:id="rId12"/>
-    <p:sldId id="2145706220" r:id="rId13"/>
+    <p:sldId id="2145706303" r:id="rId9"/>
+    <p:sldId id="2145706310" r:id="rId10"/>
+    <p:sldId id="2145706315" r:id="rId11"/>
+    <p:sldId id="2145706317" r:id="rId12"/>
+    <p:sldId id="2145706306" r:id="rId13"/>
+    <p:sldId id="2145706309" r:id="rId14"/>
+    <p:sldId id="2145706220" r:id="rId15"/>
   </p:sldIdLst>
   <p:sldSz cx="12192000" cy="6858000"/>
   <p:notesSz cx="6858000" cy="9144000"/>
@@ -372,232 +374,6 @@
         <pc:sldMkLst>
           <pc:docMk/>
           <pc:sldMk cId="1838475321" sldId="2145706295"/>
-        </pc:sldMkLst>
-      </pc:sldChg>
-    </pc:docChg>
-  </pc:docChgLst>
-  <pc:docChgLst>
-    <pc:chgData name="Graf Thomas, SCS-INI-NET-VNC-E2E" userId="487bc3e3-9ce7-4cdd-b7b4-8899ea88d289" providerId="ADAL" clId="{54A39940-08FA-4A7E-9BB9-600FEA25ABAF}"/>
-    <pc:docChg chg="undo redo custSel addSld delSld modSld sldOrd">
-      <pc:chgData name="Graf Thomas, SCS-INI-NET-VNC-E2E" userId="487bc3e3-9ce7-4cdd-b7b4-8899ea88d289" providerId="ADAL" clId="{54A39940-08FA-4A7E-9BB9-600FEA25ABAF}" dt="2025-10-26T13:07:06.475" v="9735" actId="14100"/>
-      <pc:docMkLst>
-        <pc:docMk/>
-      </pc:docMkLst>
-      <pc:sldChg chg="modSp mod">
-        <pc:chgData name="Graf Thomas, SCS-INI-NET-VNC-E2E" userId="487bc3e3-9ce7-4cdd-b7b4-8899ea88d289" providerId="ADAL" clId="{54A39940-08FA-4A7E-9BB9-600FEA25ABAF}" dt="2025-10-26T13:05:39.020" v="9726" actId="20577"/>
-        <pc:sldMkLst>
-          <pc:docMk/>
-          <pc:sldMk cId="3578665336" sldId="1041"/>
-        </pc:sldMkLst>
-      </pc:sldChg>
-      <pc:sldChg chg="addSp delSp modSp mod ord">
-        <pc:chgData name="Graf Thomas, SCS-INI-NET-VNC-E2E" userId="487bc3e3-9ce7-4cdd-b7b4-8899ea88d289" providerId="ADAL" clId="{54A39940-08FA-4A7E-9BB9-600FEA25ABAF}" dt="2025-10-18T07:13:55.081" v="9527" actId="20577"/>
-        <pc:sldMkLst>
-          <pc:docMk/>
-          <pc:sldMk cId="1088069469" sldId="26422"/>
-        </pc:sldMkLst>
-      </pc:sldChg>
-      <pc:sldChg chg="del">
-        <pc:chgData name="Graf Thomas, SCS-INI-NET-VNC-E2E" userId="487bc3e3-9ce7-4cdd-b7b4-8899ea88d289" providerId="ADAL" clId="{54A39940-08FA-4A7E-9BB9-600FEA25ABAF}" dt="2025-10-17T08:44:45.036" v="3045" actId="47"/>
-        <pc:sldMkLst>
-          <pc:docMk/>
-          <pc:sldMk cId="2325717052" sldId="2145706246"/>
-        </pc:sldMkLst>
-      </pc:sldChg>
-      <pc:sldChg chg="del">
-        <pc:chgData name="Graf Thomas, SCS-INI-NET-VNC-E2E" userId="487bc3e3-9ce7-4cdd-b7b4-8899ea88d289" providerId="ADAL" clId="{54A39940-08FA-4A7E-9BB9-600FEA25ABAF}" dt="2025-10-17T08:44:45.036" v="3045" actId="47"/>
-        <pc:sldMkLst>
-          <pc:docMk/>
-          <pc:sldMk cId="2701002203" sldId="2145706256"/>
-        </pc:sldMkLst>
-      </pc:sldChg>
-      <pc:sldChg chg="del">
-        <pc:chgData name="Graf Thomas, SCS-INI-NET-VNC-E2E" userId="487bc3e3-9ce7-4cdd-b7b4-8899ea88d289" providerId="ADAL" clId="{54A39940-08FA-4A7E-9BB9-600FEA25ABAF}" dt="2025-10-17T08:44:45.036" v="3045" actId="47"/>
-        <pc:sldMkLst>
-          <pc:docMk/>
-          <pc:sldMk cId="3965782337" sldId="2145706257"/>
-        </pc:sldMkLst>
-      </pc:sldChg>
-      <pc:sldChg chg="del">
-        <pc:chgData name="Graf Thomas, SCS-INI-NET-VNC-E2E" userId="487bc3e3-9ce7-4cdd-b7b4-8899ea88d289" providerId="ADAL" clId="{54A39940-08FA-4A7E-9BB9-600FEA25ABAF}" dt="2025-10-17T08:44:45.036" v="3045" actId="47"/>
-        <pc:sldMkLst>
-          <pc:docMk/>
-          <pc:sldMk cId="218410027" sldId="2145706260"/>
-        </pc:sldMkLst>
-      </pc:sldChg>
-      <pc:sldChg chg="addSp delSp modSp del mod ord">
-        <pc:chgData name="Graf Thomas, SCS-INI-NET-VNC-E2E" userId="487bc3e3-9ce7-4cdd-b7b4-8899ea88d289" providerId="ADAL" clId="{54A39940-08FA-4A7E-9BB9-600FEA25ABAF}" dt="2025-10-18T06:57:04.074" v="9521" actId="2696"/>
-        <pc:sldMkLst>
-          <pc:docMk/>
-          <pc:sldMk cId="461661054" sldId="2145706267"/>
-        </pc:sldMkLst>
-      </pc:sldChg>
-      <pc:sldChg chg="del">
-        <pc:chgData name="Graf Thomas, SCS-INI-NET-VNC-E2E" userId="487bc3e3-9ce7-4cdd-b7b4-8899ea88d289" providerId="ADAL" clId="{54A39940-08FA-4A7E-9BB9-600FEA25ABAF}" dt="2025-10-17T08:44:45.036" v="3045" actId="47"/>
-        <pc:sldMkLst>
-          <pc:docMk/>
-          <pc:sldMk cId="3562000331" sldId="2145706269"/>
-        </pc:sldMkLst>
-      </pc:sldChg>
-      <pc:sldChg chg="del">
-        <pc:chgData name="Graf Thomas, SCS-INI-NET-VNC-E2E" userId="487bc3e3-9ce7-4cdd-b7b4-8899ea88d289" providerId="ADAL" clId="{54A39940-08FA-4A7E-9BB9-600FEA25ABAF}" dt="2025-10-17T08:44:45.036" v="3045" actId="47"/>
-        <pc:sldMkLst>
-          <pc:docMk/>
-          <pc:sldMk cId="2855098073" sldId="2145706270"/>
-        </pc:sldMkLst>
-      </pc:sldChg>
-      <pc:sldChg chg="del">
-        <pc:chgData name="Graf Thomas, SCS-INI-NET-VNC-E2E" userId="487bc3e3-9ce7-4cdd-b7b4-8899ea88d289" providerId="ADAL" clId="{54A39940-08FA-4A7E-9BB9-600FEA25ABAF}" dt="2025-10-17T08:44:45.036" v="3045" actId="47"/>
-        <pc:sldMkLst>
-          <pc:docMk/>
-          <pc:sldMk cId="1062704173" sldId="2145706274"/>
-        </pc:sldMkLst>
-      </pc:sldChg>
-      <pc:sldChg chg="del">
-        <pc:chgData name="Graf Thomas, SCS-INI-NET-VNC-E2E" userId="487bc3e3-9ce7-4cdd-b7b4-8899ea88d289" providerId="ADAL" clId="{54A39940-08FA-4A7E-9BB9-600FEA25ABAF}" dt="2025-10-17T08:44:45.036" v="3045" actId="47"/>
-        <pc:sldMkLst>
-          <pc:docMk/>
-          <pc:sldMk cId="3524404663" sldId="2145706275"/>
-        </pc:sldMkLst>
-      </pc:sldChg>
-      <pc:sldChg chg="del">
-        <pc:chgData name="Graf Thomas, SCS-INI-NET-VNC-E2E" userId="487bc3e3-9ce7-4cdd-b7b4-8899ea88d289" providerId="ADAL" clId="{54A39940-08FA-4A7E-9BB9-600FEA25ABAF}" dt="2025-10-17T07:49:59.140" v="177" actId="47"/>
-        <pc:sldMkLst>
-          <pc:docMk/>
-          <pc:sldMk cId="2764131050" sldId="2145706278"/>
-        </pc:sldMkLst>
-      </pc:sldChg>
-      <pc:sldChg chg="addSp delSp modSp mod ord">
-        <pc:chgData name="Graf Thomas, SCS-INI-NET-VNC-E2E" userId="487bc3e3-9ce7-4cdd-b7b4-8899ea88d289" providerId="ADAL" clId="{54A39940-08FA-4A7E-9BB9-600FEA25ABAF}" dt="2025-10-18T06:49:48.158" v="9408" actId="14100"/>
-        <pc:sldMkLst>
-          <pc:docMk/>
-          <pc:sldMk cId="1315775908" sldId="2145706280"/>
-        </pc:sldMkLst>
-      </pc:sldChg>
-      <pc:sldChg chg="del">
-        <pc:chgData name="Graf Thomas, SCS-INI-NET-VNC-E2E" userId="487bc3e3-9ce7-4cdd-b7b4-8899ea88d289" providerId="ADAL" clId="{54A39940-08FA-4A7E-9BB9-600FEA25ABAF}" dt="2025-10-17T08:44:45.036" v="3045" actId="47"/>
-        <pc:sldMkLst>
-          <pc:docMk/>
-          <pc:sldMk cId="1875627337" sldId="2145706281"/>
-        </pc:sldMkLst>
-      </pc:sldChg>
-      <pc:sldChg chg="del">
-        <pc:chgData name="Graf Thomas, SCS-INI-NET-VNC-E2E" userId="487bc3e3-9ce7-4cdd-b7b4-8899ea88d289" providerId="ADAL" clId="{54A39940-08FA-4A7E-9BB9-600FEA25ABAF}" dt="2025-10-17T08:44:45.036" v="3045" actId="47"/>
-        <pc:sldMkLst>
-          <pc:docMk/>
-          <pc:sldMk cId="3325836654" sldId="2145706282"/>
-        </pc:sldMkLst>
-      </pc:sldChg>
-      <pc:sldChg chg="del">
-        <pc:chgData name="Graf Thomas, SCS-INI-NET-VNC-E2E" userId="487bc3e3-9ce7-4cdd-b7b4-8899ea88d289" providerId="ADAL" clId="{54A39940-08FA-4A7E-9BB9-600FEA25ABAF}" dt="2025-10-17T08:44:45.036" v="3045" actId="47"/>
-        <pc:sldMkLst>
-          <pc:docMk/>
-          <pc:sldMk cId="1552717135" sldId="2145706283"/>
-        </pc:sldMkLst>
-      </pc:sldChg>
-      <pc:sldChg chg="del">
-        <pc:chgData name="Graf Thomas, SCS-INI-NET-VNC-E2E" userId="487bc3e3-9ce7-4cdd-b7b4-8899ea88d289" providerId="ADAL" clId="{54A39940-08FA-4A7E-9BB9-600FEA25ABAF}" dt="2025-10-17T08:44:45.036" v="3045" actId="47"/>
-        <pc:sldMkLst>
-          <pc:docMk/>
-          <pc:sldMk cId="1033377780" sldId="2145706293"/>
-        </pc:sldMkLst>
-      </pc:sldChg>
-      <pc:sldChg chg="del ord">
-        <pc:chgData name="Graf Thomas, SCS-INI-NET-VNC-E2E" userId="487bc3e3-9ce7-4cdd-b7b4-8899ea88d289" providerId="ADAL" clId="{54A39940-08FA-4A7E-9BB9-600FEA25ABAF}" dt="2025-10-17T10:25:52.156" v="5436" actId="47"/>
-        <pc:sldMkLst>
-          <pc:docMk/>
-          <pc:sldMk cId="3181337443" sldId="2145706294"/>
-        </pc:sldMkLst>
-      </pc:sldChg>
-      <pc:sldChg chg="addSp delSp modSp add mod ord">
-        <pc:chgData name="Graf Thomas, SCS-INI-NET-VNC-E2E" userId="487bc3e3-9ce7-4cdd-b7b4-8899ea88d289" providerId="ADAL" clId="{54A39940-08FA-4A7E-9BB9-600FEA25ABAF}" dt="2025-10-18T06:49:37.411" v="9406" actId="255"/>
-        <pc:sldMkLst>
-          <pc:docMk/>
-          <pc:sldMk cId="3685482022" sldId="2145706295"/>
-        </pc:sldMkLst>
-      </pc:sldChg>
-      <pc:sldChg chg="addSp delSp modSp add mod">
-        <pc:chgData name="Graf Thomas, SCS-INI-NET-VNC-E2E" userId="487bc3e3-9ce7-4cdd-b7b4-8899ea88d289" providerId="ADAL" clId="{54A39940-08FA-4A7E-9BB9-600FEA25ABAF}" dt="2025-10-18T07:15:00.500" v="9550" actId="20577"/>
-        <pc:sldMkLst>
-          <pc:docMk/>
-          <pc:sldMk cId="1475201924" sldId="2145706296"/>
-        </pc:sldMkLst>
-      </pc:sldChg>
-      <pc:sldChg chg="addSp delSp modSp add mod ord">
-        <pc:chgData name="Graf Thomas, SCS-INI-NET-VNC-E2E" userId="487bc3e3-9ce7-4cdd-b7b4-8899ea88d289" providerId="ADAL" clId="{54A39940-08FA-4A7E-9BB9-600FEA25ABAF}" dt="2025-10-18T06:52:01.348" v="9487"/>
-        <pc:sldMkLst>
-          <pc:docMk/>
-          <pc:sldMk cId="710783608" sldId="2145706297"/>
-        </pc:sldMkLst>
-      </pc:sldChg>
-      <pc:sldChg chg="addSp delSp modSp add mod ord">
-        <pc:chgData name="Graf Thomas, SCS-INI-NET-VNC-E2E" userId="487bc3e3-9ce7-4cdd-b7b4-8899ea88d289" providerId="ADAL" clId="{54A39940-08FA-4A7E-9BB9-600FEA25ABAF}" dt="2025-10-18T06:51:55.628" v="9485"/>
-        <pc:sldMkLst>
-          <pc:docMk/>
-          <pc:sldMk cId="3625312977" sldId="2145706298"/>
-        </pc:sldMkLst>
-      </pc:sldChg>
-      <pc:sldChg chg="addSp delSp modSp add mod ord">
-        <pc:chgData name="Graf Thomas, SCS-INI-NET-VNC-E2E" userId="487bc3e3-9ce7-4cdd-b7b4-8899ea88d289" providerId="ADAL" clId="{54A39940-08FA-4A7E-9BB9-600FEA25ABAF}" dt="2025-10-18T06:51:34.868" v="9477" actId="20577"/>
-        <pc:sldMkLst>
-          <pc:docMk/>
-          <pc:sldMk cId="2117458142" sldId="2145706299"/>
-        </pc:sldMkLst>
-      </pc:sldChg>
-      <pc:sldChg chg="addSp delSp modSp add mod">
-        <pc:chgData name="Graf Thomas, SCS-INI-NET-VNC-E2E" userId="487bc3e3-9ce7-4cdd-b7b4-8899ea88d289" providerId="ADAL" clId="{54A39940-08FA-4A7E-9BB9-600FEA25ABAF}" dt="2025-10-18T07:13:35.576" v="9523" actId="20577"/>
-        <pc:sldMkLst>
-          <pc:docMk/>
-          <pc:sldMk cId="1230411846" sldId="2145706300"/>
-        </pc:sldMkLst>
-      </pc:sldChg>
-      <pc:sldChg chg="addSp delSp modSp add mod">
-        <pc:chgData name="Graf Thomas, SCS-INI-NET-VNC-E2E" userId="487bc3e3-9ce7-4cdd-b7b4-8899ea88d289" providerId="ADAL" clId="{54A39940-08FA-4A7E-9BB9-600FEA25ABAF}" dt="2025-10-18T07:13:58.738" v="9531" actId="20577"/>
-        <pc:sldMkLst>
-          <pc:docMk/>
-          <pc:sldMk cId="4162477740" sldId="2145706301"/>
-        </pc:sldMkLst>
-      </pc:sldChg>
-      <pc:sldChg chg="delSp modSp add mod ord">
-        <pc:chgData name="Graf Thomas, SCS-INI-NET-VNC-E2E" userId="487bc3e3-9ce7-4cdd-b7b4-8899ea88d289" providerId="ADAL" clId="{54A39940-08FA-4A7E-9BB9-600FEA25ABAF}" dt="2025-10-18T06:10:02.903" v="6169" actId="20577"/>
-        <pc:sldMkLst>
-          <pc:docMk/>
-          <pc:sldMk cId="1190312228" sldId="2145706302"/>
-        </pc:sldMkLst>
-      </pc:sldChg>
-      <pc:sldChg chg="modSp add mod">
-        <pc:chgData name="Graf Thomas, SCS-INI-NET-VNC-E2E" userId="487bc3e3-9ce7-4cdd-b7b4-8899ea88d289" providerId="ADAL" clId="{54A39940-08FA-4A7E-9BB9-600FEA25ABAF}" dt="2025-10-18T06:09:55.667" v="6164" actId="20577"/>
-        <pc:sldMkLst>
-          <pc:docMk/>
-          <pc:sldMk cId="4251917088" sldId="2145706303"/>
-        </pc:sldMkLst>
-      </pc:sldChg>
-      <pc:sldChg chg="modSp add mod ord">
-        <pc:chgData name="Graf Thomas, SCS-INI-NET-VNC-E2E" userId="487bc3e3-9ce7-4cdd-b7b4-8899ea88d289" providerId="ADAL" clId="{54A39940-08FA-4A7E-9BB9-600FEA25ABAF}" dt="2025-10-18T06:55:07.919" v="9511" actId="207"/>
-        <pc:sldMkLst>
-          <pc:docMk/>
-          <pc:sldMk cId="2204044421" sldId="2145706304"/>
-        </pc:sldMkLst>
-      </pc:sldChg>
-      <pc:sldChg chg="modSp add mod ord">
-        <pc:chgData name="Graf Thomas, SCS-INI-NET-VNC-E2E" userId="487bc3e3-9ce7-4cdd-b7b4-8899ea88d289" providerId="ADAL" clId="{54A39940-08FA-4A7E-9BB9-600FEA25ABAF}" dt="2025-10-18T07:18:31.215" v="9724" actId="20577"/>
-        <pc:sldMkLst>
-          <pc:docMk/>
-          <pc:sldMk cId="3686017286" sldId="2145706305"/>
-        </pc:sldMkLst>
-      </pc:sldChg>
-      <pc:sldChg chg="new del">
-        <pc:chgData name="Graf Thomas, SCS-INI-NET-VNC-E2E" userId="487bc3e3-9ce7-4cdd-b7b4-8899ea88d289" providerId="ADAL" clId="{54A39940-08FA-4A7E-9BB9-600FEA25ABAF}" dt="2025-10-18T06:39:45.686" v="8594" actId="47"/>
-        <pc:sldMkLst>
-          <pc:docMk/>
-          <pc:sldMk cId="1436051656" sldId="2145706306"/>
-        </pc:sldMkLst>
-      </pc:sldChg>
-      <pc:sldChg chg="addSp modSp add mod">
-        <pc:chgData name="Graf Thomas, SCS-INI-NET-VNC-E2E" userId="487bc3e3-9ce7-4cdd-b7b4-8899ea88d289" providerId="ADAL" clId="{54A39940-08FA-4A7E-9BB9-600FEA25ABAF}" dt="2025-10-26T13:07:06.475" v="9735" actId="14100"/>
-        <pc:sldMkLst>
-          <pc:docMk/>
-          <pc:sldMk cId="3305081943" sldId="2145706306"/>
         </pc:sldMkLst>
       </pc:sldChg>
     </pc:docChg>
@@ -1044,6 +820,232 @@
       </pc:sldChg>
     </pc:docChg>
   </pc:docChgLst>
+  <pc:docChgLst>
+    <pc:chgData name="Graf Thomas, SCS-INI-NET-VNC-E2E" userId="487bc3e3-9ce7-4cdd-b7b4-8899ea88d289" providerId="ADAL" clId="{54A39940-08FA-4A7E-9BB9-600FEA25ABAF}"/>
+    <pc:docChg chg="undo redo custSel addSld delSld modSld sldOrd">
+      <pc:chgData name="Graf Thomas, SCS-INI-NET-VNC-E2E" userId="487bc3e3-9ce7-4cdd-b7b4-8899ea88d289" providerId="ADAL" clId="{54A39940-08FA-4A7E-9BB9-600FEA25ABAF}" dt="2025-10-26T13:07:06.475" v="9735" actId="14100"/>
+      <pc:docMkLst>
+        <pc:docMk/>
+      </pc:docMkLst>
+      <pc:sldChg chg="modSp mod">
+        <pc:chgData name="Graf Thomas, SCS-INI-NET-VNC-E2E" userId="487bc3e3-9ce7-4cdd-b7b4-8899ea88d289" providerId="ADAL" clId="{54A39940-08FA-4A7E-9BB9-600FEA25ABAF}" dt="2025-10-26T13:05:39.020" v="9726" actId="20577"/>
+        <pc:sldMkLst>
+          <pc:docMk/>
+          <pc:sldMk cId="3578665336" sldId="1041"/>
+        </pc:sldMkLst>
+      </pc:sldChg>
+      <pc:sldChg chg="addSp delSp modSp mod ord">
+        <pc:chgData name="Graf Thomas, SCS-INI-NET-VNC-E2E" userId="487bc3e3-9ce7-4cdd-b7b4-8899ea88d289" providerId="ADAL" clId="{54A39940-08FA-4A7E-9BB9-600FEA25ABAF}" dt="2025-10-18T07:13:55.081" v="9527" actId="20577"/>
+        <pc:sldMkLst>
+          <pc:docMk/>
+          <pc:sldMk cId="1088069469" sldId="26422"/>
+        </pc:sldMkLst>
+      </pc:sldChg>
+      <pc:sldChg chg="del">
+        <pc:chgData name="Graf Thomas, SCS-INI-NET-VNC-E2E" userId="487bc3e3-9ce7-4cdd-b7b4-8899ea88d289" providerId="ADAL" clId="{54A39940-08FA-4A7E-9BB9-600FEA25ABAF}" dt="2025-10-17T08:44:45.036" v="3045" actId="47"/>
+        <pc:sldMkLst>
+          <pc:docMk/>
+          <pc:sldMk cId="2325717052" sldId="2145706246"/>
+        </pc:sldMkLst>
+      </pc:sldChg>
+      <pc:sldChg chg="del">
+        <pc:chgData name="Graf Thomas, SCS-INI-NET-VNC-E2E" userId="487bc3e3-9ce7-4cdd-b7b4-8899ea88d289" providerId="ADAL" clId="{54A39940-08FA-4A7E-9BB9-600FEA25ABAF}" dt="2025-10-17T08:44:45.036" v="3045" actId="47"/>
+        <pc:sldMkLst>
+          <pc:docMk/>
+          <pc:sldMk cId="2701002203" sldId="2145706256"/>
+        </pc:sldMkLst>
+      </pc:sldChg>
+      <pc:sldChg chg="del">
+        <pc:chgData name="Graf Thomas, SCS-INI-NET-VNC-E2E" userId="487bc3e3-9ce7-4cdd-b7b4-8899ea88d289" providerId="ADAL" clId="{54A39940-08FA-4A7E-9BB9-600FEA25ABAF}" dt="2025-10-17T08:44:45.036" v="3045" actId="47"/>
+        <pc:sldMkLst>
+          <pc:docMk/>
+          <pc:sldMk cId="3965782337" sldId="2145706257"/>
+        </pc:sldMkLst>
+      </pc:sldChg>
+      <pc:sldChg chg="del">
+        <pc:chgData name="Graf Thomas, SCS-INI-NET-VNC-E2E" userId="487bc3e3-9ce7-4cdd-b7b4-8899ea88d289" providerId="ADAL" clId="{54A39940-08FA-4A7E-9BB9-600FEA25ABAF}" dt="2025-10-17T08:44:45.036" v="3045" actId="47"/>
+        <pc:sldMkLst>
+          <pc:docMk/>
+          <pc:sldMk cId="218410027" sldId="2145706260"/>
+        </pc:sldMkLst>
+      </pc:sldChg>
+      <pc:sldChg chg="addSp delSp modSp del mod ord">
+        <pc:chgData name="Graf Thomas, SCS-INI-NET-VNC-E2E" userId="487bc3e3-9ce7-4cdd-b7b4-8899ea88d289" providerId="ADAL" clId="{54A39940-08FA-4A7E-9BB9-600FEA25ABAF}" dt="2025-10-18T06:57:04.074" v="9521" actId="2696"/>
+        <pc:sldMkLst>
+          <pc:docMk/>
+          <pc:sldMk cId="461661054" sldId="2145706267"/>
+        </pc:sldMkLst>
+      </pc:sldChg>
+      <pc:sldChg chg="del">
+        <pc:chgData name="Graf Thomas, SCS-INI-NET-VNC-E2E" userId="487bc3e3-9ce7-4cdd-b7b4-8899ea88d289" providerId="ADAL" clId="{54A39940-08FA-4A7E-9BB9-600FEA25ABAF}" dt="2025-10-17T08:44:45.036" v="3045" actId="47"/>
+        <pc:sldMkLst>
+          <pc:docMk/>
+          <pc:sldMk cId="3562000331" sldId="2145706269"/>
+        </pc:sldMkLst>
+      </pc:sldChg>
+      <pc:sldChg chg="del">
+        <pc:chgData name="Graf Thomas, SCS-INI-NET-VNC-E2E" userId="487bc3e3-9ce7-4cdd-b7b4-8899ea88d289" providerId="ADAL" clId="{54A39940-08FA-4A7E-9BB9-600FEA25ABAF}" dt="2025-10-17T08:44:45.036" v="3045" actId="47"/>
+        <pc:sldMkLst>
+          <pc:docMk/>
+          <pc:sldMk cId="2855098073" sldId="2145706270"/>
+        </pc:sldMkLst>
+      </pc:sldChg>
+      <pc:sldChg chg="del">
+        <pc:chgData name="Graf Thomas, SCS-INI-NET-VNC-E2E" userId="487bc3e3-9ce7-4cdd-b7b4-8899ea88d289" providerId="ADAL" clId="{54A39940-08FA-4A7E-9BB9-600FEA25ABAF}" dt="2025-10-17T08:44:45.036" v="3045" actId="47"/>
+        <pc:sldMkLst>
+          <pc:docMk/>
+          <pc:sldMk cId="1062704173" sldId="2145706274"/>
+        </pc:sldMkLst>
+      </pc:sldChg>
+      <pc:sldChg chg="del">
+        <pc:chgData name="Graf Thomas, SCS-INI-NET-VNC-E2E" userId="487bc3e3-9ce7-4cdd-b7b4-8899ea88d289" providerId="ADAL" clId="{54A39940-08FA-4A7E-9BB9-600FEA25ABAF}" dt="2025-10-17T08:44:45.036" v="3045" actId="47"/>
+        <pc:sldMkLst>
+          <pc:docMk/>
+          <pc:sldMk cId="3524404663" sldId="2145706275"/>
+        </pc:sldMkLst>
+      </pc:sldChg>
+      <pc:sldChg chg="del">
+        <pc:chgData name="Graf Thomas, SCS-INI-NET-VNC-E2E" userId="487bc3e3-9ce7-4cdd-b7b4-8899ea88d289" providerId="ADAL" clId="{54A39940-08FA-4A7E-9BB9-600FEA25ABAF}" dt="2025-10-17T07:49:59.140" v="177" actId="47"/>
+        <pc:sldMkLst>
+          <pc:docMk/>
+          <pc:sldMk cId="2764131050" sldId="2145706278"/>
+        </pc:sldMkLst>
+      </pc:sldChg>
+      <pc:sldChg chg="addSp delSp modSp mod ord">
+        <pc:chgData name="Graf Thomas, SCS-INI-NET-VNC-E2E" userId="487bc3e3-9ce7-4cdd-b7b4-8899ea88d289" providerId="ADAL" clId="{54A39940-08FA-4A7E-9BB9-600FEA25ABAF}" dt="2025-10-18T06:49:48.158" v="9408" actId="14100"/>
+        <pc:sldMkLst>
+          <pc:docMk/>
+          <pc:sldMk cId="1315775908" sldId="2145706280"/>
+        </pc:sldMkLst>
+      </pc:sldChg>
+      <pc:sldChg chg="del">
+        <pc:chgData name="Graf Thomas, SCS-INI-NET-VNC-E2E" userId="487bc3e3-9ce7-4cdd-b7b4-8899ea88d289" providerId="ADAL" clId="{54A39940-08FA-4A7E-9BB9-600FEA25ABAF}" dt="2025-10-17T08:44:45.036" v="3045" actId="47"/>
+        <pc:sldMkLst>
+          <pc:docMk/>
+          <pc:sldMk cId="1875627337" sldId="2145706281"/>
+        </pc:sldMkLst>
+      </pc:sldChg>
+      <pc:sldChg chg="del">
+        <pc:chgData name="Graf Thomas, SCS-INI-NET-VNC-E2E" userId="487bc3e3-9ce7-4cdd-b7b4-8899ea88d289" providerId="ADAL" clId="{54A39940-08FA-4A7E-9BB9-600FEA25ABAF}" dt="2025-10-17T08:44:45.036" v="3045" actId="47"/>
+        <pc:sldMkLst>
+          <pc:docMk/>
+          <pc:sldMk cId="3325836654" sldId="2145706282"/>
+        </pc:sldMkLst>
+      </pc:sldChg>
+      <pc:sldChg chg="del">
+        <pc:chgData name="Graf Thomas, SCS-INI-NET-VNC-E2E" userId="487bc3e3-9ce7-4cdd-b7b4-8899ea88d289" providerId="ADAL" clId="{54A39940-08FA-4A7E-9BB9-600FEA25ABAF}" dt="2025-10-17T08:44:45.036" v="3045" actId="47"/>
+        <pc:sldMkLst>
+          <pc:docMk/>
+          <pc:sldMk cId="1552717135" sldId="2145706283"/>
+        </pc:sldMkLst>
+      </pc:sldChg>
+      <pc:sldChg chg="del">
+        <pc:chgData name="Graf Thomas, SCS-INI-NET-VNC-E2E" userId="487bc3e3-9ce7-4cdd-b7b4-8899ea88d289" providerId="ADAL" clId="{54A39940-08FA-4A7E-9BB9-600FEA25ABAF}" dt="2025-10-17T08:44:45.036" v="3045" actId="47"/>
+        <pc:sldMkLst>
+          <pc:docMk/>
+          <pc:sldMk cId="1033377780" sldId="2145706293"/>
+        </pc:sldMkLst>
+      </pc:sldChg>
+      <pc:sldChg chg="del ord">
+        <pc:chgData name="Graf Thomas, SCS-INI-NET-VNC-E2E" userId="487bc3e3-9ce7-4cdd-b7b4-8899ea88d289" providerId="ADAL" clId="{54A39940-08FA-4A7E-9BB9-600FEA25ABAF}" dt="2025-10-17T10:25:52.156" v="5436" actId="47"/>
+        <pc:sldMkLst>
+          <pc:docMk/>
+          <pc:sldMk cId="3181337443" sldId="2145706294"/>
+        </pc:sldMkLst>
+      </pc:sldChg>
+      <pc:sldChg chg="addSp delSp modSp add mod ord">
+        <pc:chgData name="Graf Thomas, SCS-INI-NET-VNC-E2E" userId="487bc3e3-9ce7-4cdd-b7b4-8899ea88d289" providerId="ADAL" clId="{54A39940-08FA-4A7E-9BB9-600FEA25ABAF}" dt="2025-10-18T06:49:37.411" v="9406" actId="255"/>
+        <pc:sldMkLst>
+          <pc:docMk/>
+          <pc:sldMk cId="3685482022" sldId="2145706295"/>
+        </pc:sldMkLst>
+      </pc:sldChg>
+      <pc:sldChg chg="addSp delSp modSp add mod">
+        <pc:chgData name="Graf Thomas, SCS-INI-NET-VNC-E2E" userId="487bc3e3-9ce7-4cdd-b7b4-8899ea88d289" providerId="ADAL" clId="{54A39940-08FA-4A7E-9BB9-600FEA25ABAF}" dt="2025-10-18T07:15:00.500" v="9550" actId="20577"/>
+        <pc:sldMkLst>
+          <pc:docMk/>
+          <pc:sldMk cId="1475201924" sldId="2145706296"/>
+        </pc:sldMkLst>
+      </pc:sldChg>
+      <pc:sldChg chg="addSp delSp modSp add mod ord">
+        <pc:chgData name="Graf Thomas, SCS-INI-NET-VNC-E2E" userId="487bc3e3-9ce7-4cdd-b7b4-8899ea88d289" providerId="ADAL" clId="{54A39940-08FA-4A7E-9BB9-600FEA25ABAF}" dt="2025-10-18T06:52:01.348" v="9487"/>
+        <pc:sldMkLst>
+          <pc:docMk/>
+          <pc:sldMk cId="710783608" sldId="2145706297"/>
+        </pc:sldMkLst>
+      </pc:sldChg>
+      <pc:sldChg chg="addSp delSp modSp add mod ord">
+        <pc:chgData name="Graf Thomas, SCS-INI-NET-VNC-E2E" userId="487bc3e3-9ce7-4cdd-b7b4-8899ea88d289" providerId="ADAL" clId="{54A39940-08FA-4A7E-9BB9-600FEA25ABAF}" dt="2025-10-18T06:51:55.628" v="9485"/>
+        <pc:sldMkLst>
+          <pc:docMk/>
+          <pc:sldMk cId="3625312977" sldId="2145706298"/>
+        </pc:sldMkLst>
+      </pc:sldChg>
+      <pc:sldChg chg="addSp delSp modSp add mod ord">
+        <pc:chgData name="Graf Thomas, SCS-INI-NET-VNC-E2E" userId="487bc3e3-9ce7-4cdd-b7b4-8899ea88d289" providerId="ADAL" clId="{54A39940-08FA-4A7E-9BB9-600FEA25ABAF}" dt="2025-10-18T06:51:34.868" v="9477" actId="20577"/>
+        <pc:sldMkLst>
+          <pc:docMk/>
+          <pc:sldMk cId="2117458142" sldId="2145706299"/>
+        </pc:sldMkLst>
+      </pc:sldChg>
+      <pc:sldChg chg="addSp delSp modSp add mod">
+        <pc:chgData name="Graf Thomas, SCS-INI-NET-VNC-E2E" userId="487bc3e3-9ce7-4cdd-b7b4-8899ea88d289" providerId="ADAL" clId="{54A39940-08FA-4A7E-9BB9-600FEA25ABAF}" dt="2025-10-18T07:13:35.576" v="9523" actId="20577"/>
+        <pc:sldMkLst>
+          <pc:docMk/>
+          <pc:sldMk cId="1230411846" sldId="2145706300"/>
+        </pc:sldMkLst>
+      </pc:sldChg>
+      <pc:sldChg chg="addSp delSp modSp add mod">
+        <pc:chgData name="Graf Thomas, SCS-INI-NET-VNC-E2E" userId="487bc3e3-9ce7-4cdd-b7b4-8899ea88d289" providerId="ADAL" clId="{54A39940-08FA-4A7E-9BB9-600FEA25ABAF}" dt="2025-10-18T07:13:58.738" v="9531" actId="20577"/>
+        <pc:sldMkLst>
+          <pc:docMk/>
+          <pc:sldMk cId="4162477740" sldId="2145706301"/>
+        </pc:sldMkLst>
+      </pc:sldChg>
+      <pc:sldChg chg="delSp modSp add mod ord">
+        <pc:chgData name="Graf Thomas, SCS-INI-NET-VNC-E2E" userId="487bc3e3-9ce7-4cdd-b7b4-8899ea88d289" providerId="ADAL" clId="{54A39940-08FA-4A7E-9BB9-600FEA25ABAF}" dt="2025-10-18T06:10:02.903" v="6169" actId="20577"/>
+        <pc:sldMkLst>
+          <pc:docMk/>
+          <pc:sldMk cId="1190312228" sldId="2145706302"/>
+        </pc:sldMkLst>
+      </pc:sldChg>
+      <pc:sldChg chg="modSp add mod">
+        <pc:chgData name="Graf Thomas, SCS-INI-NET-VNC-E2E" userId="487bc3e3-9ce7-4cdd-b7b4-8899ea88d289" providerId="ADAL" clId="{54A39940-08FA-4A7E-9BB9-600FEA25ABAF}" dt="2025-10-18T06:09:55.667" v="6164" actId="20577"/>
+        <pc:sldMkLst>
+          <pc:docMk/>
+          <pc:sldMk cId="4251917088" sldId="2145706303"/>
+        </pc:sldMkLst>
+      </pc:sldChg>
+      <pc:sldChg chg="modSp add mod ord">
+        <pc:chgData name="Graf Thomas, SCS-INI-NET-VNC-E2E" userId="487bc3e3-9ce7-4cdd-b7b4-8899ea88d289" providerId="ADAL" clId="{54A39940-08FA-4A7E-9BB9-600FEA25ABAF}" dt="2025-10-18T06:55:07.919" v="9511" actId="207"/>
+        <pc:sldMkLst>
+          <pc:docMk/>
+          <pc:sldMk cId="2204044421" sldId="2145706304"/>
+        </pc:sldMkLst>
+      </pc:sldChg>
+      <pc:sldChg chg="modSp add mod ord">
+        <pc:chgData name="Graf Thomas, SCS-INI-NET-VNC-E2E" userId="487bc3e3-9ce7-4cdd-b7b4-8899ea88d289" providerId="ADAL" clId="{54A39940-08FA-4A7E-9BB9-600FEA25ABAF}" dt="2025-10-18T07:18:31.215" v="9724" actId="20577"/>
+        <pc:sldMkLst>
+          <pc:docMk/>
+          <pc:sldMk cId="3686017286" sldId="2145706305"/>
+        </pc:sldMkLst>
+      </pc:sldChg>
+      <pc:sldChg chg="new del">
+        <pc:chgData name="Graf Thomas, SCS-INI-NET-VNC-E2E" userId="487bc3e3-9ce7-4cdd-b7b4-8899ea88d289" providerId="ADAL" clId="{54A39940-08FA-4A7E-9BB9-600FEA25ABAF}" dt="2025-10-18T06:39:45.686" v="8594" actId="47"/>
+        <pc:sldMkLst>
+          <pc:docMk/>
+          <pc:sldMk cId="1436051656" sldId="2145706306"/>
+        </pc:sldMkLst>
+      </pc:sldChg>
+      <pc:sldChg chg="addSp modSp add mod">
+        <pc:chgData name="Graf Thomas, SCS-INI-NET-VNC-E2E" userId="487bc3e3-9ce7-4cdd-b7b4-8899ea88d289" providerId="ADAL" clId="{54A39940-08FA-4A7E-9BB9-600FEA25ABAF}" dt="2025-10-26T13:07:06.475" v="9735" actId="14100"/>
+        <pc:sldMkLst>
+          <pc:docMk/>
+          <pc:sldMk cId="3305081943" sldId="2145706306"/>
+        </pc:sldMkLst>
+      </pc:sldChg>
+    </pc:docChg>
+  </pc:docChgLst>
 </pc:chgInfo>
 </file>
 
@@ -1129,7 +1131,7 @@
           <a:p>
             <a:fld id="{E5E705E9-673F-4AC4-B29E-A7B26F3B8523}" type="datetimeFigureOut">
               <a:rPr lang="de-CH" smtClean="0"/>
-              <a:t>14.07.2026</a:t>
+              <a:t>16.07.2026</a:t>
             </a:fld>
             <a:endParaRPr lang="de-CH"/>
           </a:p>
@@ -1467,7 +1469,7 @@
           <a:p>
             <a:fld id="{E5BBCCF6-F8A8-4C49-BF3D-CA1AA74CA975}" type="slidenum">
               <a:rPr lang="de-DE" sz="1000" smtClean="0"/>
-              <a:t>12</a:t>
+              <a:t>14</a:t>
             </a:fld>
             <a:endParaRPr lang="de-DE" sz="1000"/>
           </a:p>
@@ -1635,7 +1637,7 @@
           <a:p>
             <a:fld id="{9E9B238C-2335-4007-98C9-471C02CC43B6}" type="datetimeFigureOut">
               <a:rPr lang="de-CH" smtClean="0"/>
-              <a:t>14.07.2026</a:t>
+              <a:t>16.07.2026</a:t>
             </a:fld>
             <a:endParaRPr lang="de-CH"/>
           </a:p>
@@ -1835,7 +1837,7 @@
           <a:p>
             <a:fld id="{9E9B238C-2335-4007-98C9-471C02CC43B6}" type="datetimeFigureOut">
               <a:rPr lang="de-CH" smtClean="0"/>
-              <a:t>14.07.2026</a:t>
+              <a:t>16.07.2026</a:t>
             </a:fld>
             <a:endParaRPr lang="de-CH"/>
           </a:p>
@@ -2045,7 +2047,7 @@
           <a:p>
             <a:fld id="{9E9B238C-2335-4007-98C9-471C02CC43B6}" type="datetimeFigureOut">
               <a:rPr lang="de-CH" smtClean="0"/>
-              <a:t>14.07.2026</a:t>
+              <a:t>16.07.2026</a:t>
             </a:fld>
             <a:endParaRPr lang="de-CH"/>
           </a:p>
@@ -3487,7 +3489,7 @@
           <a:p>
             <a:fld id="{9E9B238C-2335-4007-98C9-471C02CC43B6}" type="datetimeFigureOut">
               <a:rPr lang="de-CH" smtClean="0"/>
-              <a:t>14.07.2026</a:t>
+              <a:t>16.07.2026</a:t>
             </a:fld>
             <a:endParaRPr lang="de-CH"/>
           </a:p>
@@ -3763,7 +3765,7 @@
           <a:p>
             <a:fld id="{9E9B238C-2335-4007-98C9-471C02CC43B6}" type="datetimeFigureOut">
               <a:rPr lang="de-CH" smtClean="0"/>
-              <a:t>14.07.2026</a:t>
+              <a:t>16.07.2026</a:t>
             </a:fld>
             <a:endParaRPr lang="de-CH"/>
           </a:p>
@@ -4031,7 +4033,7 @@
           <a:p>
             <a:fld id="{9E9B238C-2335-4007-98C9-471C02CC43B6}" type="datetimeFigureOut">
               <a:rPr lang="de-CH" smtClean="0"/>
-              <a:t>14.07.2026</a:t>
+              <a:t>16.07.2026</a:t>
             </a:fld>
             <a:endParaRPr lang="de-CH"/>
           </a:p>
@@ -4446,7 +4448,7 @@
           <a:p>
             <a:fld id="{9E9B238C-2335-4007-98C9-471C02CC43B6}" type="datetimeFigureOut">
               <a:rPr lang="de-CH" smtClean="0"/>
-              <a:t>14.07.2026</a:t>
+              <a:t>16.07.2026</a:t>
             </a:fld>
             <a:endParaRPr lang="de-CH"/>
           </a:p>
@@ -4588,7 +4590,7 @@
           <a:p>
             <a:fld id="{9E9B238C-2335-4007-98C9-471C02CC43B6}" type="datetimeFigureOut">
               <a:rPr lang="de-CH" smtClean="0"/>
-              <a:t>14.07.2026</a:t>
+              <a:t>16.07.2026</a:t>
             </a:fld>
             <a:endParaRPr lang="de-CH"/>
           </a:p>
@@ -4701,7 +4703,7 @@
           <a:p>
             <a:fld id="{9E9B238C-2335-4007-98C9-471C02CC43B6}" type="datetimeFigureOut">
               <a:rPr lang="de-CH" smtClean="0"/>
-              <a:t>14.07.2026</a:t>
+              <a:t>16.07.2026</a:t>
             </a:fld>
             <a:endParaRPr lang="de-CH"/>
           </a:p>
@@ -5014,7 +5016,7 @@
           <a:p>
             <a:fld id="{9E9B238C-2335-4007-98C9-471C02CC43B6}" type="datetimeFigureOut">
               <a:rPr lang="de-CH" smtClean="0"/>
-              <a:t>14.07.2026</a:t>
+              <a:t>16.07.2026</a:t>
             </a:fld>
             <a:endParaRPr lang="de-CH"/>
           </a:p>
@@ -5303,7 +5305,7 @@
           <a:p>
             <a:fld id="{9E9B238C-2335-4007-98C9-471C02CC43B6}" type="datetimeFigureOut">
               <a:rPr lang="de-CH" smtClean="0"/>
-              <a:t>14.07.2026</a:t>
+              <a:t>16.07.2026</a:t>
             </a:fld>
             <a:endParaRPr lang="de-CH"/>
           </a:p>
@@ -5546,7 +5548,7 @@
           <a:p>
             <a:fld id="{9E9B238C-2335-4007-98C9-471C02CC43B6}" type="datetimeFigureOut">
               <a:rPr lang="de-CH" smtClean="0"/>
-              <a:t>14.07.2026</a:t>
+              <a:t>16.07.2026</a:t>
             </a:fld>
             <a:endParaRPr lang="de-CH"/>
           </a:p>
@@ -6432,6 +6434,1691 @@
         <p:cNvPr id="1" name="">
           <a:extLst>
             <a:ext uri="{FF2B5EF4-FFF2-40B4-BE49-F238E27FC236}">
+              <a16:creationId xmlns:a16="http://schemas.microsoft.com/office/drawing/2014/main" id="{3E56840C-DAAE-6648-8B27-D9DB4B898284}"/>
+            </a:ext>
+          </a:extLst>
+        </p:cNvPr>
+        <p:cNvGrpSpPr/>
+        <p:nvPr/>
+      </p:nvGrpSpPr>
+      <p:grpSpPr>
+        <a:xfrm>
+          <a:off x="0" y="0"/>
+          <a:ext cx="0" cy="0"/>
+          <a:chOff x="0" y="0"/>
+          <a:chExt cx="0" cy="0"/>
+        </a:xfrm>
+      </p:grpSpPr>
+      <p:sp>
+        <p:nvSpPr>
+          <p:cNvPr id="2" name="Title 1">
+            <a:extLst>
+              <a:ext uri="{FF2B5EF4-FFF2-40B4-BE49-F238E27FC236}">
+                <a16:creationId xmlns:a16="http://schemas.microsoft.com/office/drawing/2014/main" id="{8DBAD13A-522E-1688-6551-3F12079557CA}"/>
+              </a:ext>
+            </a:extLst>
+          </p:cNvPr>
+          <p:cNvSpPr>
+            <a:spLocks noGrp="1"/>
+          </p:cNvSpPr>
+          <p:nvPr>
+            <p:ph type="title"/>
+          </p:nvPr>
+        </p:nvSpPr>
+        <p:spPr/>
+        <p:txBody>
+          <a:bodyPr>
+            <a:normAutofit/>
+          </a:bodyPr>
+          <a:lstStyle/>
+          <a:p>
+            <a:r>
+              <a:rPr lang="en-US" sz="3200" b="1" dirty="0"/>
+              <a:t>BMP YANG Telemetry Message</a:t>
+            </a:r>
+            <a:br>
+              <a:rPr lang="en-US" sz="4000" dirty="0"/>
+            </a:br>
+            <a:r>
+              <a:rPr lang="en-US" sz="2800" dirty="0" err="1">
+                <a:solidFill>
+                  <a:schemeClr val="bg2">
+                    <a:lumMod val="75000"/>
+                  </a:schemeClr>
+                </a:solidFill>
+              </a:rPr>
+              <a:t>Message</a:t>
+            </a:r>
+            <a:r>
+              <a:rPr lang="en-US" sz="2800" dirty="0">
+                <a:solidFill>
+                  <a:schemeClr val="bg2">
+                    <a:lumMod val="75000"/>
+                  </a:schemeClr>
+                </a:solidFill>
+              </a:rPr>
+              <a:t> Broker Keys and Indexes</a:t>
+            </a:r>
+            <a:endParaRPr lang="en-US" sz="2700" dirty="0">
+              <a:solidFill>
+                <a:schemeClr val="bg2">
+                  <a:lumMod val="75000"/>
+                </a:schemeClr>
+              </a:solidFill>
+            </a:endParaRPr>
+          </a:p>
+        </p:txBody>
+      </p:sp>
+      <p:sp>
+        <p:nvSpPr>
+          <p:cNvPr id="3" name="Content Placeholder 2">
+            <a:extLst>
+              <a:ext uri="{FF2B5EF4-FFF2-40B4-BE49-F238E27FC236}">
+                <a16:creationId xmlns:a16="http://schemas.microsoft.com/office/drawing/2014/main" id="{C3BE6826-2677-F704-29DF-A2C833731421}"/>
+              </a:ext>
+            </a:extLst>
+          </p:cNvPr>
+          <p:cNvSpPr>
+            <a:spLocks noGrp="1"/>
+          </p:cNvSpPr>
+          <p:nvPr>
+            <p:ph idx="1"/>
+          </p:nvPr>
+        </p:nvSpPr>
+        <p:spPr>
+          <a:xfrm>
+            <a:off x="838200" y="1690688"/>
+            <a:ext cx="5477692" cy="4486275"/>
+          </a:xfrm>
+        </p:spPr>
+        <p:txBody>
+          <a:bodyPr>
+            <a:noAutofit/>
+          </a:bodyPr>
+          <a:lstStyle/>
+          <a:p>
+            <a:pPr marL="0" indent="0">
+              <a:spcBef>
+                <a:spcPts val="600"/>
+              </a:spcBef>
+              <a:spcAft>
+                <a:spcPts val="600"/>
+              </a:spcAft>
+              <a:buNone/>
+            </a:pPr>
+            <a:r>
+              <a:rPr lang="en-US" sz="2100" dirty="0"/>
+              <a:t>Message Key is a 2-line byte string constructed with:</a:t>
+            </a:r>
+          </a:p>
+          <a:p>
+            <a:pPr>
+              <a:spcBef>
+                <a:spcPts val="600"/>
+              </a:spcBef>
+              <a:spcAft>
+                <a:spcPts val="600"/>
+              </a:spcAft>
+            </a:pPr>
+            <a:r>
+              <a:rPr lang="en-US" sz="2100" dirty="0"/>
+              <a:t>Node hostname</a:t>
+            </a:r>
+          </a:p>
+          <a:p>
+            <a:pPr>
+              <a:spcBef>
+                <a:spcPts val="600"/>
+              </a:spcBef>
+              <a:spcAft>
+                <a:spcPts val="600"/>
+              </a:spcAft>
+            </a:pPr>
+            <a:r>
+              <a:rPr lang="en-US" sz="2100" dirty="0"/>
+              <a:t>YANG instance-identifier path into the </a:t>
+            </a:r>
+            <a:r>
+              <a:rPr lang="en-US" sz="2100" dirty="0" err="1"/>
+              <a:t>ietf</a:t>
+            </a:r>
+            <a:r>
+              <a:rPr lang="en-US" sz="2100" dirty="0"/>
+              <a:t>-bmp-telemetry-message instance data</a:t>
+            </a:r>
+          </a:p>
+          <a:p>
+            <a:pPr marL="0" indent="0">
+              <a:spcBef>
+                <a:spcPts val="600"/>
+              </a:spcBef>
+              <a:spcAft>
+                <a:spcPts val="600"/>
+              </a:spcAft>
+              <a:buNone/>
+            </a:pPr>
+            <a:endParaRPr lang="en-US" sz="2100" dirty="0"/>
+          </a:p>
+          <a:p>
+            <a:pPr marL="0" indent="0">
+              <a:spcBef>
+                <a:spcPts val="600"/>
+              </a:spcBef>
+              <a:spcAft>
+                <a:spcPts val="600"/>
+              </a:spcAft>
+              <a:buNone/>
+            </a:pPr>
+            <a:r>
+              <a:rPr lang="en-US" sz="2100" dirty="0"/>
+              <a:t>Used by the Message Broker for indexing and topic compaction.</a:t>
+            </a:r>
+          </a:p>
+          <a:p>
+            <a:pPr marL="0" indent="0">
+              <a:spcBef>
+                <a:spcPts val="600"/>
+              </a:spcBef>
+              <a:spcAft>
+                <a:spcPts val="600"/>
+              </a:spcAft>
+              <a:buNone/>
+            </a:pPr>
+            <a:r>
+              <a:rPr lang="en-US" sz="2100" dirty="0"/>
+              <a:t>For a route-monitoring message, adding prefix and path-id to the key means the message key uniquely identifies a single rib-entry, so topic compaction naturally keeps only the latest update per prefix from the same peer.</a:t>
+            </a:r>
+          </a:p>
+        </p:txBody>
+      </p:sp>
+      <p:sp>
+        <p:nvSpPr>
+          <p:cNvPr id="6" name="Slide Number Placeholder 1">
+            <a:extLst>
+              <a:ext uri="{FF2B5EF4-FFF2-40B4-BE49-F238E27FC236}">
+                <a16:creationId xmlns:a16="http://schemas.microsoft.com/office/drawing/2014/main" id="{C9C28F97-C284-A5D4-2E31-35CFAA14BB73}"/>
+              </a:ext>
+            </a:extLst>
+          </p:cNvPr>
+          <p:cNvSpPr>
+            <a:spLocks noGrp="1"/>
+          </p:cNvSpPr>
+          <p:nvPr>
+            <p:ph type="sldNum" sz="quarter" idx="12"/>
+          </p:nvPr>
+        </p:nvSpPr>
+        <p:spPr>
+          <a:xfrm>
+            <a:off x="11587892" y="6361637"/>
+            <a:ext cx="414251" cy="365125"/>
+          </a:xfrm>
+        </p:spPr>
+        <p:txBody>
+          <a:bodyPr/>
+          <a:lstStyle/>
+          <a:p>
+            <a:fld id="{FC4AC485-25DE-431E-B345-9C0A15BB7F8A}" type="slidenum">
+              <a:rPr lang="en-US" sz="1400" smtClean="0"/>
+              <a:t>10</a:t>
+            </a:fld>
+            <a:endParaRPr lang="en-US" sz="1400" dirty="0"/>
+          </a:p>
+        </p:txBody>
+      </p:sp>
+      <p:sp>
+        <p:nvSpPr>
+          <p:cNvPr id="8" name="TextBox 7">
+            <a:extLst>
+              <a:ext uri="{FF2B5EF4-FFF2-40B4-BE49-F238E27FC236}">
+                <a16:creationId xmlns:a16="http://schemas.microsoft.com/office/drawing/2014/main" id="{B576167F-DA0A-5A14-7DE0-7DF3A32D2FCA}"/>
+              </a:ext>
+            </a:extLst>
+          </p:cNvPr>
+          <p:cNvSpPr txBox="1"/>
+          <p:nvPr/>
+        </p:nvSpPr>
+        <p:spPr>
+          <a:xfrm>
+            <a:off x="7576457" y="1690688"/>
+            <a:ext cx="4136572" cy="3970318"/>
+          </a:xfrm>
+          <a:prstGeom prst="rect">
+            <a:avLst/>
+          </a:prstGeom>
+          <a:noFill/>
+        </p:spPr>
+        <p:txBody>
+          <a:bodyPr wrap="square">
+            <a:spAutoFit/>
+          </a:bodyPr>
+          <a:lstStyle/>
+          <a:p>
+            <a:r>
+              <a:rPr lang="de-CH" sz="1200" dirty="0">
+                <a:latin typeface="Courier New" panose="02070309020205020404" pitchFamily="49" charset="0"/>
+                <a:cs typeface="Courier New" panose="02070309020205020404" pitchFamily="49" charset="0"/>
+              </a:rPr>
+              <a:t>NOTE: '\' </a:t>
+            </a:r>
+            <a:r>
+              <a:rPr lang="de-CH" sz="1200" dirty="0" err="1">
+                <a:latin typeface="Courier New" panose="02070309020205020404" pitchFamily="49" charset="0"/>
+                <a:cs typeface="Courier New" panose="02070309020205020404" pitchFamily="49" charset="0"/>
+              </a:rPr>
+              <a:t>is</a:t>
+            </a:r>
+            <a:r>
+              <a:rPr lang="de-CH" sz="1200" dirty="0">
+                <a:latin typeface="Courier New" panose="02070309020205020404" pitchFamily="49" charset="0"/>
+                <a:cs typeface="Courier New" panose="02070309020205020404" pitchFamily="49" charset="0"/>
+              </a:rPr>
+              <a:t> </a:t>
+            </a:r>
+            <a:r>
+              <a:rPr lang="de-CH" sz="1200" dirty="0" err="1">
+                <a:latin typeface="Courier New" panose="02070309020205020404" pitchFamily="49" charset="0"/>
+                <a:cs typeface="Courier New" panose="02070309020205020404" pitchFamily="49" charset="0"/>
+              </a:rPr>
+              <a:t>used</a:t>
+            </a:r>
+            <a:r>
+              <a:rPr lang="de-CH" sz="1200" dirty="0">
+                <a:latin typeface="Courier New" panose="02070309020205020404" pitchFamily="49" charset="0"/>
+                <a:cs typeface="Courier New" panose="02070309020205020404" pitchFamily="49" charset="0"/>
+              </a:rPr>
+              <a:t> </a:t>
+            </a:r>
+            <a:r>
+              <a:rPr lang="de-CH" sz="1200" dirty="0" err="1">
+                <a:latin typeface="Courier New" panose="02070309020205020404" pitchFamily="49" charset="0"/>
+                <a:cs typeface="Courier New" panose="02070309020205020404" pitchFamily="49" charset="0"/>
+              </a:rPr>
+              <a:t>for</a:t>
+            </a:r>
+            <a:r>
+              <a:rPr lang="de-CH" sz="1200" dirty="0">
+                <a:latin typeface="Courier New" panose="02070309020205020404" pitchFamily="49" charset="0"/>
+                <a:cs typeface="Courier New" panose="02070309020205020404" pitchFamily="49" charset="0"/>
+              </a:rPr>
+              <a:t> </a:t>
+            </a:r>
+            <a:r>
+              <a:rPr lang="de-CH" sz="1200" dirty="0" err="1">
+                <a:latin typeface="Courier New" panose="02070309020205020404" pitchFamily="49" charset="0"/>
+                <a:cs typeface="Courier New" panose="02070309020205020404" pitchFamily="49" charset="0"/>
+              </a:rPr>
+              <a:t>line</a:t>
+            </a:r>
+            <a:r>
+              <a:rPr lang="de-CH" sz="1200" dirty="0">
+                <a:latin typeface="Courier New" panose="02070309020205020404" pitchFamily="49" charset="0"/>
+                <a:cs typeface="Courier New" panose="02070309020205020404" pitchFamily="49" charset="0"/>
+              </a:rPr>
+              <a:t> </a:t>
+            </a:r>
+            <a:r>
+              <a:rPr lang="de-CH" sz="1200" dirty="0" err="1">
+                <a:latin typeface="Courier New" panose="02070309020205020404" pitchFamily="49" charset="0"/>
+                <a:cs typeface="Courier New" panose="02070309020205020404" pitchFamily="49" charset="0"/>
+              </a:rPr>
+              <a:t>folding</a:t>
+            </a:r>
+            <a:r>
+              <a:rPr lang="de-CH" sz="1200" dirty="0">
+                <a:latin typeface="Courier New" panose="02070309020205020404" pitchFamily="49" charset="0"/>
+                <a:cs typeface="Courier New" panose="02070309020205020404" pitchFamily="49" charset="0"/>
+              </a:rPr>
+              <a:t>.</a:t>
+            </a:r>
+          </a:p>
+          <a:p>
+            <a:endParaRPr lang="de-CH" sz="1200" dirty="0">
+              <a:latin typeface="Courier New" panose="02070309020205020404" pitchFamily="49" charset="0"/>
+              <a:cs typeface="Courier New" panose="02070309020205020404" pitchFamily="49" charset="0"/>
+            </a:endParaRPr>
+          </a:p>
+          <a:p>
+            <a:r>
+              <a:rPr lang="de-CH" sz="1200" dirty="0">
+                <a:latin typeface="Courier New" panose="02070309020205020404" pitchFamily="49" charset="0"/>
+                <a:cs typeface="Courier New" panose="02070309020205020404" pitchFamily="49" charset="0"/>
+              </a:rPr>
+              <a:t>Key:</a:t>
+            </a:r>
+          </a:p>
+          <a:p>
+            <a:r>
+              <a:rPr lang="de-CH" sz="1200" dirty="0">
+                <a:highlight>
+                  <a:srgbClr val="FFFF00"/>
+                </a:highlight>
+                <a:latin typeface="Courier New" panose="02070309020205020404" pitchFamily="49" charset="0"/>
+                <a:cs typeface="Courier New" panose="02070309020205020404" pitchFamily="49" charset="0"/>
+              </a:rPr>
+              <a:t>  router-nyc-01</a:t>
+            </a:r>
+          </a:p>
+          <a:p>
+            <a:r>
+              <a:rPr lang="de-CH" sz="1200" dirty="0">
+                <a:highlight>
+                  <a:srgbClr val="FFFF00"/>
+                </a:highlight>
+                <a:latin typeface="Courier New" panose="02070309020205020404" pitchFamily="49" charset="0"/>
+                <a:cs typeface="Courier New" panose="02070309020205020404" pitchFamily="49" charset="0"/>
+              </a:rPr>
+              <a:t>  /</a:t>
+            </a:r>
+            <a:r>
+              <a:rPr lang="de-CH" sz="1200" dirty="0" err="1">
+                <a:highlight>
+                  <a:srgbClr val="FFFF00"/>
+                </a:highlight>
+                <a:latin typeface="Courier New" panose="02070309020205020404" pitchFamily="49" charset="0"/>
+                <a:cs typeface="Courier New" panose="02070309020205020404" pitchFamily="49" charset="0"/>
+              </a:rPr>
+              <a:t>ietf</a:t>
+            </a:r>
+            <a:r>
+              <a:rPr lang="de-CH" sz="1200" dirty="0">
+                <a:highlight>
+                  <a:srgbClr val="FFFF00"/>
+                </a:highlight>
+                <a:latin typeface="Courier New" panose="02070309020205020404" pitchFamily="49" charset="0"/>
+                <a:cs typeface="Courier New" panose="02070309020205020404" pitchFamily="49" charset="0"/>
+              </a:rPr>
+              <a:t>-</a:t>
+            </a:r>
+            <a:r>
+              <a:rPr lang="de-CH" sz="1200" dirty="0" err="1">
+                <a:highlight>
+                  <a:srgbClr val="FFFF00"/>
+                </a:highlight>
+                <a:latin typeface="Courier New" panose="02070309020205020404" pitchFamily="49" charset="0"/>
+                <a:cs typeface="Courier New" panose="02070309020205020404" pitchFamily="49" charset="0"/>
+              </a:rPr>
+              <a:t>bmp</a:t>
+            </a:r>
+            <a:r>
+              <a:rPr lang="de-CH" sz="1200" dirty="0">
+                <a:highlight>
+                  <a:srgbClr val="FFFF00"/>
+                </a:highlight>
+                <a:latin typeface="Courier New" panose="02070309020205020404" pitchFamily="49" charset="0"/>
+                <a:cs typeface="Courier New" panose="02070309020205020404" pitchFamily="49" charset="0"/>
+              </a:rPr>
+              <a:t>-</a:t>
+            </a:r>
+            <a:r>
+              <a:rPr lang="de-CH" sz="1200" dirty="0" err="1">
+                <a:highlight>
+                  <a:srgbClr val="FFFF00"/>
+                </a:highlight>
+                <a:latin typeface="Courier New" panose="02070309020205020404" pitchFamily="49" charset="0"/>
+                <a:cs typeface="Courier New" panose="02070309020205020404" pitchFamily="49" charset="0"/>
+              </a:rPr>
+              <a:t>telemetry</a:t>
+            </a:r>
+            <a:r>
+              <a:rPr lang="de-CH" sz="1200" dirty="0">
+                <a:highlight>
+                  <a:srgbClr val="FFFF00"/>
+                </a:highlight>
+                <a:latin typeface="Courier New" panose="02070309020205020404" pitchFamily="49" charset="0"/>
+                <a:cs typeface="Courier New" panose="02070309020205020404" pitchFamily="49" charset="0"/>
+              </a:rPr>
+              <a:t>-message:/</a:t>
+            </a:r>
+          </a:p>
+          <a:p>
+            <a:r>
+              <a:rPr lang="de-CH" sz="1200" dirty="0" err="1">
+                <a:highlight>
+                  <a:srgbClr val="FFFF00"/>
+                </a:highlight>
+                <a:latin typeface="Courier New" panose="02070309020205020404" pitchFamily="49" charset="0"/>
+                <a:cs typeface="Courier New" panose="02070309020205020404" pitchFamily="49" charset="0"/>
+              </a:rPr>
+              <a:t>message</a:t>
+            </a:r>
+            <a:r>
+              <a:rPr lang="de-CH" sz="1200" dirty="0">
+                <a:highlight>
+                  <a:srgbClr val="FFFF00"/>
+                </a:highlight>
+                <a:latin typeface="Courier New" panose="02070309020205020404" pitchFamily="49" charset="0"/>
+                <a:cs typeface="Courier New" panose="02070309020205020404" pitchFamily="49" charset="0"/>
+              </a:rPr>
+              <a:t>/route-monitoring\</a:t>
+            </a:r>
+          </a:p>
+          <a:p>
+            <a:r>
+              <a:rPr lang="de-CH" sz="1200" dirty="0">
+                <a:highlight>
+                  <a:srgbClr val="FFFF00"/>
+                </a:highlight>
+                <a:latin typeface="Courier New" panose="02070309020205020404" pitchFamily="49" charset="0"/>
+                <a:cs typeface="Courier New" panose="02070309020205020404" pitchFamily="49" charset="0"/>
+              </a:rPr>
+              <a:t>[peer-type='global-</a:t>
+            </a:r>
+            <a:r>
+              <a:rPr lang="de-CH" sz="1200" dirty="0" err="1">
+                <a:highlight>
+                  <a:srgbClr val="FFFF00"/>
+                </a:highlight>
+                <a:latin typeface="Courier New" panose="02070309020205020404" pitchFamily="49" charset="0"/>
+                <a:cs typeface="Courier New" panose="02070309020205020404" pitchFamily="49" charset="0"/>
+              </a:rPr>
+              <a:t>instance</a:t>
+            </a:r>
+            <a:r>
+              <a:rPr lang="de-CH" sz="1200" dirty="0">
+                <a:highlight>
+                  <a:srgbClr val="FFFF00"/>
+                </a:highlight>
+                <a:latin typeface="Courier New" panose="02070309020205020404" pitchFamily="49" charset="0"/>
+                <a:cs typeface="Courier New" panose="02070309020205020404" pitchFamily="49" charset="0"/>
+              </a:rPr>
+              <a:t>-</a:t>
+            </a:r>
+            <a:r>
+              <a:rPr lang="de-CH" sz="1200" dirty="0" err="1">
+                <a:highlight>
+                  <a:srgbClr val="FFFF00"/>
+                </a:highlight>
+                <a:latin typeface="Courier New" panose="02070309020205020404" pitchFamily="49" charset="0"/>
+                <a:cs typeface="Courier New" panose="02070309020205020404" pitchFamily="49" charset="0"/>
+              </a:rPr>
+              <a:t>peer</a:t>
+            </a:r>
+            <a:r>
+              <a:rPr lang="de-CH" sz="1200" dirty="0">
+                <a:highlight>
+                  <a:srgbClr val="FFFF00"/>
+                </a:highlight>
+                <a:latin typeface="Courier New" panose="02070309020205020404" pitchFamily="49" charset="0"/>
+                <a:cs typeface="Courier New" panose="02070309020205020404" pitchFamily="49" charset="0"/>
+              </a:rPr>
+              <a:t>']\</a:t>
+            </a:r>
+          </a:p>
+          <a:p>
+            <a:r>
+              <a:rPr lang="de-CH" sz="1200" dirty="0">
+                <a:highlight>
+                  <a:srgbClr val="FFFF00"/>
+                </a:highlight>
+                <a:latin typeface="Courier New" panose="02070309020205020404" pitchFamily="49" charset="0"/>
+                <a:cs typeface="Courier New" panose="02070309020205020404" pitchFamily="49" charset="0"/>
+              </a:rPr>
+              <a:t>[peer-</a:t>
+            </a:r>
+            <a:r>
+              <a:rPr lang="de-CH" sz="1200" dirty="0" err="1">
+                <a:highlight>
+                  <a:srgbClr val="FFFF00"/>
+                </a:highlight>
+                <a:latin typeface="Courier New" panose="02070309020205020404" pitchFamily="49" charset="0"/>
+                <a:cs typeface="Courier New" panose="02070309020205020404" pitchFamily="49" charset="0"/>
+              </a:rPr>
+              <a:t>distinguisher</a:t>
+            </a:r>
+            <a:r>
+              <a:rPr lang="de-CH" sz="1200" dirty="0">
+                <a:highlight>
+                  <a:srgbClr val="FFFF00"/>
+                </a:highlight>
+                <a:latin typeface="Courier New" panose="02070309020205020404" pitchFamily="49" charset="0"/>
+                <a:cs typeface="Courier New" panose="02070309020205020404" pitchFamily="49" charset="0"/>
+              </a:rPr>
+              <a:t>='0:0:0']\</a:t>
+            </a:r>
+          </a:p>
+          <a:p>
+            <a:r>
+              <a:rPr lang="de-CH" sz="1200" dirty="0">
+                <a:highlight>
+                  <a:srgbClr val="FFFF00"/>
+                </a:highlight>
+                <a:latin typeface="Courier New" panose="02070309020205020404" pitchFamily="49" charset="0"/>
+                <a:cs typeface="Courier New" panose="02070309020205020404" pitchFamily="49" charset="0"/>
+              </a:rPr>
+              <a:t>[peer-</a:t>
+            </a:r>
+            <a:r>
+              <a:rPr lang="de-CH" sz="1200" dirty="0" err="1">
+                <a:highlight>
+                  <a:srgbClr val="FFFF00"/>
+                </a:highlight>
+                <a:latin typeface="Courier New" panose="02070309020205020404" pitchFamily="49" charset="0"/>
+                <a:cs typeface="Courier New" panose="02070309020205020404" pitchFamily="49" charset="0"/>
+              </a:rPr>
+              <a:t>address</a:t>
+            </a:r>
+            <a:r>
+              <a:rPr lang="de-CH" sz="1200" dirty="0">
+                <a:highlight>
+                  <a:srgbClr val="FFFF00"/>
+                </a:highlight>
+                <a:latin typeface="Courier New" panose="02070309020205020404" pitchFamily="49" charset="0"/>
+                <a:cs typeface="Courier New" panose="02070309020205020404" pitchFamily="49" charset="0"/>
+              </a:rPr>
+              <a:t>='203.0.113.45']\</a:t>
+            </a:r>
+          </a:p>
+          <a:p>
+            <a:r>
+              <a:rPr lang="de-CH" sz="1200" dirty="0">
+                <a:highlight>
+                  <a:srgbClr val="FFFF00"/>
+                </a:highlight>
+                <a:latin typeface="Courier New" panose="02070309020205020404" pitchFamily="49" charset="0"/>
+                <a:cs typeface="Courier New" panose="02070309020205020404" pitchFamily="49" charset="0"/>
+              </a:rPr>
+              <a:t>[peer-</a:t>
+            </a:r>
+            <a:r>
+              <a:rPr lang="de-CH" sz="1200" dirty="0" err="1">
+                <a:highlight>
+                  <a:srgbClr val="FFFF00"/>
+                </a:highlight>
+                <a:latin typeface="Courier New" panose="02070309020205020404" pitchFamily="49" charset="0"/>
+                <a:cs typeface="Courier New" panose="02070309020205020404" pitchFamily="49" charset="0"/>
+              </a:rPr>
+              <a:t>as</a:t>
+            </a:r>
+            <a:r>
+              <a:rPr lang="de-CH" sz="1200" dirty="0">
+                <a:highlight>
+                  <a:srgbClr val="FFFF00"/>
+                </a:highlight>
+                <a:latin typeface="Courier New" panose="02070309020205020404" pitchFamily="49" charset="0"/>
+                <a:cs typeface="Courier New" panose="02070309020205020404" pitchFamily="49" charset="0"/>
+              </a:rPr>
+              <a:t>='65002']\</a:t>
+            </a:r>
+          </a:p>
+          <a:p>
+            <a:r>
+              <a:rPr lang="de-CH" sz="1200" dirty="0">
+                <a:highlight>
+                  <a:srgbClr val="FFFF00"/>
+                </a:highlight>
+                <a:latin typeface="Courier New" panose="02070309020205020404" pitchFamily="49" charset="0"/>
+                <a:cs typeface="Courier New" panose="02070309020205020404" pitchFamily="49" charset="0"/>
+              </a:rPr>
+              <a:t>[peer-</a:t>
+            </a:r>
+            <a:r>
+              <a:rPr lang="de-CH" sz="1200" dirty="0" err="1">
+                <a:highlight>
+                  <a:srgbClr val="FFFF00"/>
+                </a:highlight>
+                <a:latin typeface="Courier New" panose="02070309020205020404" pitchFamily="49" charset="0"/>
+                <a:cs typeface="Courier New" panose="02070309020205020404" pitchFamily="49" charset="0"/>
+              </a:rPr>
+              <a:t>bgp</a:t>
+            </a:r>
+            <a:r>
+              <a:rPr lang="de-CH" sz="1200" dirty="0">
+                <a:highlight>
+                  <a:srgbClr val="FFFF00"/>
+                </a:highlight>
+                <a:latin typeface="Courier New" panose="02070309020205020404" pitchFamily="49" charset="0"/>
+                <a:cs typeface="Courier New" panose="02070309020205020404" pitchFamily="49" charset="0"/>
+              </a:rPr>
+              <a:t>-</a:t>
+            </a:r>
+            <a:r>
+              <a:rPr lang="de-CH" sz="1200" dirty="0" err="1">
+                <a:highlight>
+                  <a:srgbClr val="FFFF00"/>
+                </a:highlight>
+                <a:latin typeface="Courier New" panose="02070309020205020404" pitchFamily="49" charset="0"/>
+                <a:cs typeface="Courier New" panose="02070309020205020404" pitchFamily="49" charset="0"/>
+              </a:rPr>
+              <a:t>id</a:t>
+            </a:r>
+            <a:r>
+              <a:rPr lang="de-CH" sz="1200" dirty="0">
+                <a:highlight>
+                  <a:srgbClr val="FFFF00"/>
+                </a:highlight>
+                <a:latin typeface="Courier New" panose="02070309020205020404" pitchFamily="49" charset="0"/>
+                <a:cs typeface="Courier New" panose="02070309020205020404" pitchFamily="49" charset="0"/>
+              </a:rPr>
+              <a:t>='203.0.113.1']\</a:t>
+            </a:r>
+          </a:p>
+          <a:p>
+            <a:r>
+              <a:rPr lang="de-CH" sz="1200" dirty="0">
+                <a:highlight>
+                  <a:srgbClr val="FFFF00"/>
+                </a:highlight>
+                <a:latin typeface="Courier New" panose="02070309020205020404" pitchFamily="49" charset="0"/>
+                <a:cs typeface="Courier New" panose="02070309020205020404" pitchFamily="49" charset="0"/>
+              </a:rPr>
+              <a:t>/</a:t>
+            </a:r>
+            <a:r>
+              <a:rPr lang="de-CH" sz="1200" dirty="0" err="1">
+                <a:highlight>
+                  <a:srgbClr val="FFFF00"/>
+                </a:highlight>
+                <a:latin typeface="Courier New" panose="02070309020205020404" pitchFamily="49" charset="0"/>
+                <a:cs typeface="Courier New" panose="02070309020205020404" pitchFamily="49" charset="0"/>
+              </a:rPr>
+              <a:t>rib-entry</a:t>
+            </a:r>
+            <a:r>
+              <a:rPr lang="de-CH" sz="1200" dirty="0">
+                <a:highlight>
+                  <a:srgbClr val="FFFF00"/>
+                </a:highlight>
+                <a:latin typeface="Courier New" panose="02070309020205020404" pitchFamily="49" charset="0"/>
+                <a:cs typeface="Courier New" panose="02070309020205020404" pitchFamily="49" charset="0"/>
+              </a:rPr>
+              <a:t>/ipv4-unicast/</a:t>
+            </a:r>
+            <a:r>
+              <a:rPr lang="de-CH" sz="1200" dirty="0" err="1">
+                <a:highlight>
+                  <a:srgbClr val="FFFF00"/>
+                </a:highlight>
+                <a:latin typeface="Courier New" panose="02070309020205020404" pitchFamily="49" charset="0"/>
+                <a:cs typeface="Courier New" panose="02070309020205020404" pitchFamily="49" charset="0"/>
+              </a:rPr>
+              <a:t>adj</a:t>
+            </a:r>
+            <a:r>
+              <a:rPr lang="de-CH" sz="1200" dirty="0">
+                <a:highlight>
+                  <a:srgbClr val="FFFF00"/>
+                </a:highlight>
+                <a:latin typeface="Courier New" panose="02070309020205020404" pitchFamily="49" charset="0"/>
+                <a:cs typeface="Courier New" panose="02070309020205020404" pitchFamily="49" charset="0"/>
+              </a:rPr>
+              <a:t>-</a:t>
+            </a:r>
+            <a:r>
+              <a:rPr lang="de-CH" sz="1200" dirty="0" err="1">
+                <a:highlight>
+                  <a:srgbClr val="FFFF00"/>
+                </a:highlight>
+                <a:latin typeface="Courier New" panose="02070309020205020404" pitchFamily="49" charset="0"/>
+                <a:cs typeface="Courier New" panose="02070309020205020404" pitchFamily="49" charset="0"/>
+              </a:rPr>
+              <a:t>rib</a:t>
+            </a:r>
+            <a:r>
+              <a:rPr lang="de-CH" sz="1200" dirty="0">
+                <a:highlight>
+                  <a:srgbClr val="FFFF00"/>
+                </a:highlight>
+                <a:latin typeface="Courier New" panose="02070309020205020404" pitchFamily="49" charset="0"/>
+                <a:cs typeface="Courier New" panose="02070309020205020404" pitchFamily="49" charset="0"/>
+              </a:rPr>
+              <a:t>-in-post/route\</a:t>
+            </a:r>
+          </a:p>
+          <a:p>
+            <a:r>
+              <a:rPr lang="de-CH" sz="1200" dirty="0">
+                <a:highlight>
+                  <a:srgbClr val="FFFF00"/>
+                </a:highlight>
+                <a:latin typeface="Courier New" panose="02070309020205020404" pitchFamily="49" charset="0"/>
+                <a:cs typeface="Courier New" panose="02070309020205020404" pitchFamily="49" charset="0"/>
+              </a:rPr>
+              <a:t>[</a:t>
+            </a:r>
+            <a:r>
+              <a:rPr lang="de-CH" sz="1200" dirty="0" err="1">
+                <a:highlight>
+                  <a:srgbClr val="FFFF00"/>
+                </a:highlight>
+                <a:latin typeface="Courier New" panose="02070309020205020404" pitchFamily="49" charset="0"/>
+                <a:cs typeface="Courier New" panose="02070309020205020404" pitchFamily="49" charset="0"/>
+              </a:rPr>
+              <a:t>prefix</a:t>
+            </a:r>
+            <a:r>
+              <a:rPr lang="de-CH" sz="1200" dirty="0">
+                <a:highlight>
+                  <a:srgbClr val="FFFF00"/>
+                </a:highlight>
+                <a:latin typeface="Courier New" panose="02070309020205020404" pitchFamily="49" charset="0"/>
+                <a:cs typeface="Courier New" panose="02070309020205020404" pitchFamily="49" charset="0"/>
+              </a:rPr>
+              <a:t>='192.0.2.0/24']\</a:t>
+            </a:r>
+          </a:p>
+          <a:p>
+            <a:r>
+              <a:rPr lang="de-CH" sz="1200" dirty="0">
+                <a:highlight>
+                  <a:srgbClr val="FFFF00"/>
+                </a:highlight>
+                <a:latin typeface="Courier New" panose="02070309020205020404" pitchFamily="49" charset="0"/>
+                <a:cs typeface="Courier New" panose="02070309020205020404" pitchFamily="49" charset="0"/>
+              </a:rPr>
+              <a:t>[</a:t>
+            </a:r>
+            <a:r>
+              <a:rPr lang="de-CH" sz="1200" dirty="0" err="1">
+                <a:highlight>
+                  <a:srgbClr val="FFFF00"/>
+                </a:highlight>
+                <a:latin typeface="Courier New" panose="02070309020205020404" pitchFamily="49" charset="0"/>
+                <a:cs typeface="Courier New" panose="02070309020205020404" pitchFamily="49" charset="0"/>
+              </a:rPr>
+              <a:t>path-id</a:t>
+            </a:r>
+            <a:r>
+              <a:rPr lang="de-CH" sz="1200" dirty="0">
+                <a:highlight>
+                  <a:srgbClr val="FFFF00"/>
+                </a:highlight>
+                <a:latin typeface="Courier New" panose="02070309020205020404" pitchFamily="49" charset="0"/>
+                <a:cs typeface="Courier New" panose="02070309020205020404" pitchFamily="49" charset="0"/>
+              </a:rPr>
+              <a:t>='0']</a:t>
+            </a:r>
+          </a:p>
+          <a:p>
+            <a:endParaRPr lang="de-CH" sz="1200" dirty="0">
+              <a:latin typeface="Courier New" panose="02070309020205020404" pitchFamily="49" charset="0"/>
+              <a:cs typeface="Courier New" panose="02070309020205020404" pitchFamily="49" charset="0"/>
+            </a:endParaRPr>
+          </a:p>
+          <a:p>
+            <a:r>
+              <a:rPr lang="de-CH" sz="1200" dirty="0">
+                <a:latin typeface="Courier New" panose="02070309020205020404" pitchFamily="49" charset="0"/>
+                <a:cs typeface="Courier New" panose="02070309020205020404" pitchFamily="49" charset="0"/>
+              </a:rPr>
+              <a:t>Headers:</a:t>
+            </a:r>
+          </a:p>
+          <a:p>
+            <a:r>
+              <a:rPr lang="de-CH" sz="1200" dirty="0">
+                <a:latin typeface="Courier New" panose="02070309020205020404" pitchFamily="49" charset="0"/>
+                <a:cs typeface="Courier New" panose="02070309020205020404" pitchFamily="49" charset="0"/>
+              </a:rPr>
+              <a:t>  schema-</a:t>
+            </a:r>
+            <a:r>
+              <a:rPr lang="de-CH" sz="1200" dirty="0" err="1">
+                <a:latin typeface="Courier New" panose="02070309020205020404" pitchFamily="49" charset="0"/>
+                <a:cs typeface="Courier New" panose="02070309020205020404" pitchFamily="49" charset="0"/>
+              </a:rPr>
+              <a:t>id</a:t>
+            </a:r>
+            <a:r>
+              <a:rPr lang="de-CH" sz="1200" dirty="0">
+                <a:latin typeface="Courier New" panose="02070309020205020404" pitchFamily="49" charset="0"/>
+                <a:cs typeface="Courier New" panose="02070309020205020404" pitchFamily="49" charset="0"/>
+              </a:rPr>
+              <a:t>:     5</a:t>
+            </a:r>
+          </a:p>
+          <a:p>
+            <a:r>
+              <a:rPr lang="de-CH" sz="1200" dirty="0">
+                <a:latin typeface="Courier New" panose="02070309020205020404" pitchFamily="49" charset="0"/>
+                <a:cs typeface="Courier New" panose="02070309020205020404" pitchFamily="49" charset="0"/>
+              </a:rPr>
+              <a:t>  </a:t>
+            </a:r>
+            <a:r>
+              <a:rPr lang="de-CH" sz="1200" dirty="0" err="1">
+                <a:latin typeface="Courier New" panose="02070309020205020404" pitchFamily="49" charset="0"/>
+                <a:cs typeface="Courier New" panose="02070309020205020404" pitchFamily="49" charset="0"/>
+              </a:rPr>
+              <a:t>content</a:t>
+            </a:r>
+            <a:r>
+              <a:rPr lang="de-CH" sz="1200" dirty="0">
+                <a:latin typeface="Courier New" panose="02070309020205020404" pitchFamily="49" charset="0"/>
+                <a:cs typeface="Courier New" panose="02070309020205020404" pitchFamily="49" charset="0"/>
+              </a:rPr>
+              <a:t>-type:  </a:t>
+            </a:r>
+            <a:r>
+              <a:rPr lang="de-CH" sz="1200" dirty="0" err="1">
+                <a:latin typeface="Courier New" panose="02070309020205020404" pitchFamily="49" charset="0"/>
+                <a:cs typeface="Courier New" panose="02070309020205020404" pitchFamily="49" charset="0"/>
+              </a:rPr>
+              <a:t>application</a:t>
+            </a:r>
+            <a:r>
+              <a:rPr lang="de-CH" sz="1200" dirty="0">
+                <a:latin typeface="Courier New" panose="02070309020205020404" pitchFamily="49" charset="0"/>
+                <a:cs typeface="Courier New" panose="02070309020205020404" pitchFamily="49" charset="0"/>
+              </a:rPr>
+              <a:t>/</a:t>
+            </a:r>
+            <a:r>
+              <a:rPr lang="de-CH" sz="1200" dirty="0" err="1">
+                <a:latin typeface="Courier New" panose="02070309020205020404" pitchFamily="49" charset="0"/>
+                <a:cs typeface="Courier New" panose="02070309020205020404" pitchFamily="49" charset="0"/>
+              </a:rPr>
+              <a:t>yang-data+json</a:t>
+            </a:r>
+            <a:endParaRPr lang="de-CH" sz="1200" dirty="0">
+              <a:latin typeface="Courier New" panose="02070309020205020404" pitchFamily="49" charset="0"/>
+              <a:cs typeface="Courier New" panose="02070309020205020404" pitchFamily="49" charset="0"/>
+            </a:endParaRPr>
+          </a:p>
+          <a:p>
+            <a:r>
+              <a:rPr lang="de-CH" sz="1200" dirty="0">
+                <a:latin typeface="Courier New" panose="02070309020205020404" pitchFamily="49" charset="0"/>
+                <a:cs typeface="Courier New" panose="02070309020205020404" pitchFamily="49" charset="0"/>
+              </a:rPr>
+              <a:t>  </a:t>
+            </a:r>
+            <a:r>
+              <a:rPr lang="de-CH" sz="1200" dirty="0" err="1">
+                <a:latin typeface="Courier New" panose="02070309020205020404" pitchFamily="49" charset="0"/>
+                <a:cs typeface="Courier New" panose="02070309020205020404" pitchFamily="49" charset="0"/>
+              </a:rPr>
+              <a:t>partition-key</a:t>
+            </a:r>
+            <a:r>
+              <a:rPr lang="de-CH" sz="1200" dirty="0">
+                <a:latin typeface="Courier New" panose="02070309020205020404" pitchFamily="49" charset="0"/>
+                <a:cs typeface="Courier New" panose="02070309020205020404" pitchFamily="49" charset="0"/>
+              </a:rPr>
+              <a:t>: router-nyc-01</a:t>
+            </a:r>
+          </a:p>
+        </p:txBody>
+      </p:sp>
+    </p:spTree>
+    <p:extLst>
+      <p:ext uri="{BB962C8B-B14F-4D97-AF65-F5344CB8AC3E}">
+        <p14:creationId xmlns:p14="http://schemas.microsoft.com/office/powerpoint/2010/main" val="2939312507"/>
+      </p:ext>
+    </p:extLst>
+  </p:cSld>
+  <p:clrMapOvr>
+    <a:masterClrMapping/>
+  </p:clrMapOvr>
+</p:sld>
+</file>
+
+<file path=ppt/slides/slide11.xml><?xml version="1.0" encoding="utf-8"?>
+<p:sld xmlns:a="http://schemas.openxmlformats.org/drawingml/2006/main" xmlns:r="http://schemas.openxmlformats.org/officeDocument/2006/relationships" xmlns:p="http://schemas.openxmlformats.org/presentationml/2006/main">
+  <p:cSld>
+    <p:spTree>
+      <p:nvGrpSpPr>
+        <p:cNvPr id="1" name="">
+          <a:extLst>
+            <a:ext uri="{FF2B5EF4-FFF2-40B4-BE49-F238E27FC236}">
+              <a16:creationId xmlns:a16="http://schemas.microsoft.com/office/drawing/2014/main" id="{EB1C9425-9D9D-9EE6-DD4D-262D2012CA5B}"/>
+            </a:ext>
+          </a:extLst>
+        </p:cNvPr>
+        <p:cNvGrpSpPr/>
+        <p:nvPr/>
+      </p:nvGrpSpPr>
+      <p:grpSpPr>
+        <a:xfrm>
+          <a:off x="0" y="0"/>
+          <a:ext cx="0" cy="0"/>
+          <a:chOff x="0" y="0"/>
+          <a:chExt cx="0" cy="0"/>
+        </a:xfrm>
+      </p:grpSpPr>
+      <p:sp>
+        <p:nvSpPr>
+          <p:cNvPr id="2" name="Title 1">
+            <a:extLst>
+              <a:ext uri="{FF2B5EF4-FFF2-40B4-BE49-F238E27FC236}">
+                <a16:creationId xmlns:a16="http://schemas.microsoft.com/office/drawing/2014/main" id="{3C35F642-DED8-EEC1-9913-FF49451EF037}"/>
+              </a:ext>
+            </a:extLst>
+          </p:cNvPr>
+          <p:cNvSpPr>
+            <a:spLocks noGrp="1"/>
+          </p:cNvSpPr>
+          <p:nvPr>
+            <p:ph type="title"/>
+          </p:nvPr>
+        </p:nvSpPr>
+        <p:spPr/>
+        <p:txBody>
+          <a:bodyPr>
+            <a:normAutofit/>
+          </a:bodyPr>
+          <a:lstStyle/>
+          <a:p>
+            <a:r>
+              <a:rPr lang="en-US" sz="3200" b="1" dirty="0"/>
+              <a:t>BMP YANG Telemetry Message</a:t>
+            </a:r>
+            <a:br>
+              <a:rPr lang="en-US" sz="4000" dirty="0"/>
+            </a:br>
+            <a:r>
+              <a:rPr lang="en-US" sz="2800" dirty="0">
+                <a:solidFill>
+                  <a:schemeClr val="bg2">
+                    <a:lumMod val="75000"/>
+                  </a:schemeClr>
+                </a:solidFill>
+              </a:rPr>
+              <a:t>Dedicated Partition Key for deterministic per-router partitioning</a:t>
+            </a:r>
+            <a:endParaRPr lang="en-US" sz="2700" dirty="0">
+              <a:solidFill>
+                <a:schemeClr val="bg2">
+                  <a:lumMod val="75000"/>
+                </a:schemeClr>
+              </a:solidFill>
+            </a:endParaRPr>
+          </a:p>
+        </p:txBody>
+      </p:sp>
+      <p:sp>
+        <p:nvSpPr>
+          <p:cNvPr id="3" name="Content Placeholder 2">
+            <a:extLst>
+              <a:ext uri="{FF2B5EF4-FFF2-40B4-BE49-F238E27FC236}">
+                <a16:creationId xmlns:a16="http://schemas.microsoft.com/office/drawing/2014/main" id="{7C24CAAB-0245-BE83-EBA7-2995DD375A9F}"/>
+              </a:ext>
+            </a:extLst>
+          </p:cNvPr>
+          <p:cNvSpPr>
+            <a:spLocks noGrp="1"/>
+          </p:cNvSpPr>
+          <p:nvPr>
+            <p:ph idx="1"/>
+          </p:nvPr>
+        </p:nvSpPr>
+        <p:spPr>
+          <a:xfrm>
+            <a:off x="838200" y="1690688"/>
+            <a:ext cx="5477692" cy="4486275"/>
+          </a:xfrm>
+        </p:spPr>
+        <p:txBody>
+          <a:bodyPr>
+            <a:noAutofit/>
+          </a:bodyPr>
+          <a:lstStyle/>
+          <a:p>
+            <a:pPr marL="0" indent="0">
+              <a:spcBef>
+                <a:spcPts val="600"/>
+              </a:spcBef>
+              <a:spcAft>
+                <a:spcPts val="600"/>
+              </a:spcAft>
+              <a:buNone/>
+            </a:pPr>
+            <a:r>
+              <a:rPr lang="en-US" sz="2100" dirty="0"/>
+              <a:t>BMP requires message ordering, and Message Brokers only guarantee ordering within a partition.</a:t>
+            </a:r>
+          </a:p>
+          <a:p>
+            <a:pPr marL="0" indent="0">
+              <a:spcBef>
+                <a:spcPts val="600"/>
+              </a:spcBef>
+              <a:spcAft>
+                <a:spcPts val="600"/>
+              </a:spcAft>
+              <a:buNone/>
+            </a:pPr>
+            <a:r>
+              <a:rPr lang="en-US" sz="2100" dirty="0"/>
+              <a:t>Introduce a Partition Key (=hostname of the network node), distinct from the Message Key.</a:t>
+            </a:r>
+          </a:p>
+          <a:p>
+            <a:pPr marL="0" indent="0">
+              <a:spcBef>
+                <a:spcPts val="600"/>
+              </a:spcBef>
+              <a:spcAft>
+                <a:spcPts val="600"/>
+              </a:spcAft>
+              <a:buNone/>
+            </a:pPr>
+            <a:r>
+              <a:rPr lang="en-US" sz="2100" dirty="0"/>
+              <a:t>Partition Key is used by a </a:t>
+            </a:r>
+            <a:r>
+              <a:rPr lang="en-US" sz="2100" b="1" dirty="0"/>
+              <a:t>custom partitioner implementation in the Message Broker producer </a:t>
+            </a:r>
+            <a:r>
+              <a:rPr lang="en-US" sz="2100" dirty="0"/>
+              <a:t>to ensure that all BMP messages from a given router end up in the same partition.</a:t>
+            </a:r>
+          </a:p>
+        </p:txBody>
+      </p:sp>
+      <p:sp>
+        <p:nvSpPr>
+          <p:cNvPr id="6" name="Slide Number Placeholder 1">
+            <a:extLst>
+              <a:ext uri="{FF2B5EF4-FFF2-40B4-BE49-F238E27FC236}">
+                <a16:creationId xmlns:a16="http://schemas.microsoft.com/office/drawing/2014/main" id="{EB221BCE-0033-AF59-B34A-0118DC3045AA}"/>
+              </a:ext>
+            </a:extLst>
+          </p:cNvPr>
+          <p:cNvSpPr>
+            <a:spLocks noGrp="1"/>
+          </p:cNvSpPr>
+          <p:nvPr>
+            <p:ph type="sldNum" sz="quarter" idx="12"/>
+          </p:nvPr>
+        </p:nvSpPr>
+        <p:spPr>
+          <a:xfrm>
+            <a:off x="11587892" y="6361637"/>
+            <a:ext cx="414251" cy="365125"/>
+          </a:xfrm>
+        </p:spPr>
+        <p:txBody>
+          <a:bodyPr/>
+          <a:lstStyle/>
+          <a:p>
+            <a:fld id="{FC4AC485-25DE-431E-B345-9C0A15BB7F8A}" type="slidenum">
+              <a:rPr lang="en-US" sz="1400" smtClean="0"/>
+              <a:t>11</a:t>
+            </a:fld>
+            <a:endParaRPr lang="en-US" sz="1400" dirty="0"/>
+          </a:p>
+        </p:txBody>
+      </p:sp>
+      <p:sp>
+        <p:nvSpPr>
+          <p:cNvPr id="8" name="TextBox 7">
+            <a:extLst>
+              <a:ext uri="{FF2B5EF4-FFF2-40B4-BE49-F238E27FC236}">
+                <a16:creationId xmlns:a16="http://schemas.microsoft.com/office/drawing/2014/main" id="{96987BA9-C93C-4BAD-F703-D4F3143CF927}"/>
+              </a:ext>
+            </a:extLst>
+          </p:cNvPr>
+          <p:cNvSpPr txBox="1"/>
+          <p:nvPr/>
+        </p:nvSpPr>
+        <p:spPr>
+          <a:xfrm>
+            <a:off x="7576457" y="1690688"/>
+            <a:ext cx="4136572" cy="3970318"/>
+          </a:xfrm>
+          <a:prstGeom prst="rect">
+            <a:avLst/>
+          </a:prstGeom>
+          <a:noFill/>
+        </p:spPr>
+        <p:txBody>
+          <a:bodyPr wrap="square">
+            <a:spAutoFit/>
+          </a:bodyPr>
+          <a:lstStyle/>
+          <a:p>
+            <a:r>
+              <a:rPr lang="de-CH" sz="1200" dirty="0">
+                <a:latin typeface="Courier New" panose="02070309020205020404" pitchFamily="49" charset="0"/>
+                <a:cs typeface="Courier New" panose="02070309020205020404" pitchFamily="49" charset="0"/>
+              </a:rPr>
+              <a:t>NOTE: '\' </a:t>
+            </a:r>
+            <a:r>
+              <a:rPr lang="de-CH" sz="1200" dirty="0" err="1">
+                <a:latin typeface="Courier New" panose="02070309020205020404" pitchFamily="49" charset="0"/>
+                <a:cs typeface="Courier New" panose="02070309020205020404" pitchFamily="49" charset="0"/>
+              </a:rPr>
+              <a:t>is</a:t>
+            </a:r>
+            <a:r>
+              <a:rPr lang="de-CH" sz="1200" dirty="0">
+                <a:latin typeface="Courier New" panose="02070309020205020404" pitchFamily="49" charset="0"/>
+                <a:cs typeface="Courier New" panose="02070309020205020404" pitchFamily="49" charset="0"/>
+              </a:rPr>
+              <a:t> </a:t>
+            </a:r>
+            <a:r>
+              <a:rPr lang="de-CH" sz="1200" dirty="0" err="1">
+                <a:latin typeface="Courier New" panose="02070309020205020404" pitchFamily="49" charset="0"/>
+                <a:cs typeface="Courier New" panose="02070309020205020404" pitchFamily="49" charset="0"/>
+              </a:rPr>
+              <a:t>used</a:t>
+            </a:r>
+            <a:r>
+              <a:rPr lang="de-CH" sz="1200" dirty="0">
+                <a:latin typeface="Courier New" panose="02070309020205020404" pitchFamily="49" charset="0"/>
+                <a:cs typeface="Courier New" panose="02070309020205020404" pitchFamily="49" charset="0"/>
+              </a:rPr>
+              <a:t> </a:t>
+            </a:r>
+            <a:r>
+              <a:rPr lang="de-CH" sz="1200" dirty="0" err="1">
+                <a:latin typeface="Courier New" panose="02070309020205020404" pitchFamily="49" charset="0"/>
+                <a:cs typeface="Courier New" panose="02070309020205020404" pitchFamily="49" charset="0"/>
+              </a:rPr>
+              <a:t>for</a:t>
+            </a:r>
+            <a:r>
+              <a:rPr lang="de-CH" sz="1200" dirty="0">
+                <a:latin typeface="Courier New" panose="02070309020205020404" pitchFamily="49" charset="0"/>
+                <a:cs typeface="Courier New" panose="02070309020205020404" pitchFamily="49" charset="0"/>
+              </a:rPr>
+              <a:t> </a:t>
+            </a:r>
+            <a:r>
+              <a:rPr lang="de-CH" sz="1200" dirty="0" err="1">
+                <a:latin typeface="Courier New" panose="02070309020205020404" pitchFamily="49" charset="0"/>
+                <a:cs typeface="Courier New" panose="02070309020205020404" pitchFamily="49" charset="0"/>
+              </a:rPr>
+              <a:t>line</a:t>
+            </a:r>
+            <a:r>
+              <a:rPr lang="de-CH" sz="1200" dirty="0">
+                <a:latin typeface="Courier New" panose="02070309020205020404" pitchFamily="49" charset="0"/>
+                <a:cs typeface="Courier New" panose="02070309020205020404" pitchFamily="49" charset="0"/>
+              </a:rPr>
+              <a:t> </a:t>
+            </a:r>
+            <a:r>
+              <a:rPr lang="de-CH" sz="1200" dirty="0" err="1">
+                <a:latin typeface="Courier New" panose="02070309020205020404" pitchFamily="49" charset="0"/>
+                <a:cs typeface="Courier New" panose="02070309020205020404" pitchFamily="49" charset="0"/>
+              </a:rPr>
+              <a:t>folding</a:t>
+            </a:r>
+            <a:r>
+              <a:rPr lang="de-CH" sz="1200" dirty="0">
+                <a:latin typeface="Courier New" panose="02070309020205020404" pitchFamily="49" charset="0"/>
+                <a:cs typeface="Courier New" panose="02070309020205020404" pitchFamily="49" charset="0"/>
+              </a:rPr>
+              <a:t>.</a:t>
+            </a:r>
+          </a:p>
+          <a:p>
+            <a:endParaRPr lang="de-CH" sz="1200" dirty="0">
+              <a:latin typeface="Courier New" panose="02070309020205020404" pitchFamily="49" charset="0"/>
+              <a:cs typeface="Courier New" panose="02070309020205020404" pitchFamily="49" charset="0"/>
+            </a:endParaRPr>
+          </a:p>
+          <a:p>
+            <a:r>
+              <a:rPr lang="de-CH" sz="1200" dirty="0">
+                <a:latin typeface="Courier New" panose="02070309020205020404" pitchFamily="49" charset="0"/>
+                <a:cs typeface="Courier New" panose="02070309020205020404" pitchFamily="49" charset="0"/>
+              </a:rPr>
+              <a:t>Key:</a:t>
+            </a:r>
+          </a:p>
+          <a:p>
+            <a:r>
+              <a:rPr lang="de-CH" sz="1200" dirty="0">
+                <a:latin typeface="Courier New" panose="02070309020205020404" pitchFamily="49" charset="0"/>
+                <a:cs typeface="Courier New" panose="02070309020205020404" pitchFamily="49" charset="0"/>
+              </a:rPr>
+              <a:t>  router-nyc-01</a:t>
+            </a:r>
+          </a:p>
+          <a:p>
+            <a:r>
+              <a:rPr lang="de-CH" sz="1200" dirty="0">
+                <a:latin typeface="Courier New" panose="02070309020205020404" pitchFamily="49" charset="0"/>
+                <a:cs typeface="Courier New" panose="02070309020205020404" pitchFamily="49" charset="0"/>
+              </a:rPr>
+              <a:t>  /</a:t>
+            </a:r>
+            <a:r>
+              <a:rPr lang="de-CH" sz="1200" dirty="0" err="1">
+                <a:latin typeface="Courier New" panose="02070309020205020404" pitchFamily="49" charset="0"/>
+                <a:cs typeface="Courier New" panose="02070309020205020404" pitchFamily="49" charset="0"/>
+              </a:rPr>
+              <a:t>ietf</a:t>
+            </a:r>
+            <a:r>
+              <a:rPr lang="de-CH" sz="1200" dirty="0">
+                <a:latin typeface="Courier New" panose="02070309020205020404" pitchFamily="49" charset="0"/>
+                <a:cs typeface="Courier New" panose="02070309020205020404" pitchFamily="49" charset="0"/>
+              </a:rPr>
+              <a:t>-</a:t>
+            </a:r>
+            <a:r>
+              <a:rPr lang="de-CH" sz="1200" dirty="0" err="1">
+                <a:latin typeface="Courier New" panose="02070309020205020404" pitchFamily="49" charset="0"/>
+                <a:cs typeface="Courier New" panose="02070309020205020404" pitchFamily="49" charset="0"/>
+              </a:rPr>
+              <a:t>bmp</a:t>
+            </a:r>
+            <a:r>
+              <a:rPr lang="de-CH" sz="1200" dirty="0">
+                <a:latin typeface="Courier New" panose="02070309020205020404" pitchFamily="49" charset="0"/>
+                <a:cs typeface="Courier New" panose="02070309020205020404" pitchFamily="49" charset="0"/>
+              </a:rPr>
+              <a:t>-</a:t>
+            </a:r>
+            <a:r>
+              <a:rPr lang="de-CH" sz="1200" dirty="0" err="1">
+                <a:latin typeface="Courier New" panose="02070309020205020404" pitchFamily="49" charset="0"/>
+                <a:cs typeface="Courier New" panose="02070309020205020404" pitchFamily="49" charset="0"/>
+              </a:rPr>
+              <a:t>telemetry</a:t>
+            </a:r>
+            <a:r>
+              <a:rPr lang="de-CH" sz="1200" dirty="0">
+                <a:latin typeface="Courier New" panose="02070309020205020404" pitchFamily="49" charset="0"/>
+                <a:cs typeface="Courier New" panose="02070309020205020404" pitchFamily="49" charset="0"/>
+              </a:rPr>
+              <a:t>-message:/</a:t>
+            </a:r>
+          </a:p>
+          <a:p>
+            <a:r>
+              <a:rPr lang="de-CH" sz="1200" dirty="0" err="1">
+                <a:latin typeface="Courier New" panose="02070309020205020404" pitchFamily="49" charset="0"/>
+                <a:cs typeface="Courier New" panose="02070309020205020404" pitchFamily="49" charset="0"/>
+              </a:rPr>
+              <a:t>message</a:t>
+            </a:r>
+            <a:r>
+              <a:rPr lang="de-CH" sz="1200" dirty="0">
+                <a:latin typeface="Courier New" panose="02070309020205020404" pitchFamily="49" charset="0"/>
+                <a:cs typeface="Courier New" panose="02070309020205020404" pitchFamily="49" charset="0"/>
+              </a:rPr>
+              <a:t>/route-monitoring\</a:t>
+            </a:r>
+          </a:p>
+          <a:p>
+            <a:r>
+              <a:rPr lang="de-CH" sz="1200" dirty="0">
+                <a:latin typeface="Courier New" panose="02070309020205020404" pitchFamily="49" charset="0"/>
+                <a:cs typeface="Courier New" panose="02070309020205020404" pitchFamily="49" charset="0"/>
+              </a:rPr>
+              <a:t>[peer-type='global-</a:t>
+            </a:r>
+            <a:r>
+              <a:rPr lang="de-CH" sz="1200" dirty="0" err="1">
+                <a:latin typeface="Courier New" panose="02070309020205020404" pitchFamily="49" charset="0"/>
+                <a:cs typeface="Courier New" panose="02070309020205020404" pitchFamily="49" charset="0"/>
+              </a:rPr>
+              <a:t>instance</a:t>
+            </a:r>
+            <a:r>
+              <a:rPr lang="de-CH" sz="1200" dirty="0">
+                <a:latin typeface="Courier New" panose="02070309020205020404" pitchFamily="49" charset="0"/>
+                <a:cs typeface="Courier New" panose="02070309020205020404" pitchFamily="49" charset="0"/>
+              </a:rPr>
+              <a:t>-</a:t>
+            </a:r>
+            <a:r>
+              <a:rPr lang="de-CH" sz="1200" dirty="0" err="1">
+                <a:latin typeface="Courier New" panose="02070309020205020404" pitchFamily="49" charset="0"/>
+                <a:cs typeface="Courier New" panose="02070309020205020404" pitchFamily="49" charset="0"/>
+              </a:rPr>
+              <a:t>peer</a:t>
+            </a:r>
+            <a:r>
+              <a:rPr lang="de-CH" sz="1200" dirty="0">
+                <a:latin typeface="Courier New" panose="02070309020205020404" pitchFamily="49" charset="0"/>
+                <a:cs typeface="Courier New" panose="02070309020205020404" pitchFamily="49" charset="0"/>
+              </a:rPr>
+              <a:t>']\</a:t>
+            </a:r>
+          </a:p>
+          <a:p>
+            <a:r>
+              <a:rPr lang="de-CH" sz="1200" dirty="0">
+                <a:latin typeface="Courier New" panose="02070309020205020404" pitchFamily="49" charset="0"/>
+                <a:cs typeface="Courier New" panose="02070309020205020404" pitchFamily="49" charset="0"/>
+              </a:rPr>
+              <a:t>[peer-</a:t>
+            </a:r>
+            <a:r>
+              <a:rPr lang="de-CH" sz="1200" dirty="0" err="1">
+                <a:latin typeface="Courier New" panose="02070309020205020404" pitchFamily="49" charset="0"/>
+                <a:cs typeface="Courier New" panose="02070309020205020404" pitchFamily="49" charset="0"/>
+              </a:rPr>
+              <a:t>distinguisher</a:t>
+            </a:r>
+            <a:r>
+              <a:rPr lang="de-CH" sz="1200" dirty="0">
+                <a:latin typeface="Courier New" panose="02070309020205020404" pitchFamily="49" charset="0"/>
+                <a:cs typeface="Courier New" panose="02070309020205020404" pitchFamily="49" charset="0"/>
+              </a:rPr>
+              <a:t>='0:0:0']\</a:t>
+            </a:r>
+          </a:p>
+          <a:p>
+            <a:r>
+              <a:rPr lang="de-CH" sz="1200" dirty="0">
+                <a:latin typeface="Courier New" panose="02070309020205020404" pitchFamily="49" charset="0"/>
+                <a:cs typeface="Courier New" panose="02070309020205020404" pitchFamily="49" charset="0"/>
+              </a:rPr>
+              <a:t>[peer-</a:t>
+            </a:r>
+            <a:r>
+              <a:rPr lang="de-CH" sz="1200" dirty="0" err="1">
+                <a:latin typeface="Courier New" panose="02070309020205020404" pitchFamily="49" charset="0"/>
+                <a:cs typeface="Courier New" panose="02070309020205020404" pitchFamily="49" charset="0"/>
+              </a:rPr>
+              <a:t>address</a:t>
+            </a:r>
+            <a:r>
+              <a:rPr lang="de-CH" sz="1200" dirty="0">
+                <a:latin typeface="Courier New" panose="02070309020205020404" pitchFamily="49" charset="0"/>
+                <a:cs typeface="Courier New" panose="02070309020205020404" pitchFamily="49" charset="0"/>
+              </a:rPr>
+              <a:t>='203.0.113.45']\</a:t>
+            </a:r>
+          </a:p>
+          <a:p>
+            <a:r>
+              <a:rPr lang="de-CH" sz="1200" dirty="0">
+                <a:latin typeface="Courier New" panose="02070309020205020404" pitchFamily="49" charset="0"/>
+                <a:cs typeface="Courier New" panose="02070309020205020404" pitchFamily="49" charset="0"/>
+              </a:rPr>
+              <a:t>[peer-</a:t>
+            </a:r>
+            <a:r>
+              <a:rPr lang="de-CH" sz="1200" dirty="0" err="1">
+                <a:latin typeface="Courier New" panose="02070309020205020404" pitchFamily="49" charset="0"/>
+                <a:cs typeface="Courier New" panose="02070309020205020404" pitchFamily="49" charset="0"/>
+              </a:rPr>
+              <a:t>as</a:t>
+            </a:r>
+            <a:r>
+              <a:rPr lang="de-CH" sz="1200" dirty="0">
+                <a:latin typeface="Courier New" panose="02070309020205020404" pitchFamily="49" charset="0"/>
+                <a:cs typeface="Courier New" panose="02070309020205020404" pitchFamily="49" charset="0"/>
+              </a:rPr>
+              <a:t>='65002']\</a:t>
+            </a:r>
+          </a:p>
+          <a:p>
+            <a:r>
+              <a:rPr lang="de-CH" sz="1200" dirty="0">
+                <a:latin typeface="Courier New" panose="02070309020205020404" pitchFamily="49" charset="0"/>
+                <a:cs typeface="Courier New" panose="02070309020205020404" pitchFamily="49" charset="0"/>
+              </a:rPr>
+              <a:t>[peer-</a:t>
+            </a:r>
+            <a:r>
+              <a:rPr lang="de-CH" sz="1200" dirty="0" err="1">
+                <a:latin typeface="Courier New" panose="02070309020205020404" pitchFamily="49" charset="0"/>
+                <a:cs typeface="Courier New" panose="02070309020205020404" pitchFamily="49" charset="0"/>
+              </a:rPr>
+              <a:t>bgp</a:t>
+            </a:r>
+            <a:r>
+              <a:rPr lang="de-CH" sz="1200" dirty="0">
+                <a:latin typeface="Courier New" panose="02070309020205020404" pitchFamily="49" charset="0"/>
+                <a:cs typeface="Courier New" panose="02070309020205020404" pitchFamily="49" charset="0"/>
+              </a:rPr>
+              <a:t>-</a:t>
+            </a:r>
+            <a:r>
+              <a:rPr lang="de-CH" sz="1200" dirty="0" err="1">
+                <a:latin typeface="Courier New" panose="02070309020205020404" pitchFamily="49" charset="0"/>
+                <a:cs typeface="Courier New" panose="02070309020205020404" pitchFamily="49" charset="0"/>
+              </a:rPr>
+              <a:t>id</a:t>
+            </a:r>
+            <a:r>
+              <a:rPr lang="de-CH" sz="1200" dirty="0">
+                <a:latin typeface="Courier New" panose="02070309020205020404" pitchFamily="49" charset="0"/>
+                <a:cs typeface="Courier New" panose="02070309020205020404" pitchFamily="49" charset="0"/>
+              </a:rPr>
+              <a:t>='203.0.113.1']\</a:t>
+            </a:r>
+          </a:p>
+          <a:p>
+            <a:r>
+              <a:rPr lang="de-CH" sz="1200" dirty="0">
+                <a:latin typeface="Courier New" panose="02070309020205020404" pitchFamily="49" charset="0"/>
+                <a:cs typeface="Courier New" panose="02070309020205020404" pitchFamily="49" charset="0"/>
+              </a:rPr>
+              <a:t>/</a:t>
+            </a:r>
+            <a:r>
+              <a:rPr lang="de-CH" sz="1200" dirty="0" err="1">
+                <a:latin typeface="Courier New" panose="02070309020205020404" pitchFamily="49" charset="0"/>
+                <a:cs typeface="Courier New" panose="02070309020205020404" pitchFamily="49" charset="0"/>
+              </a:rPr>
+              <a:t>rib-entry</a:t>
+            </a:r>
+            <a:r>
+              <a:rPr lang="de-CH" sz="1200" dirty="0">
+                <a:latin typeface="Courier New" panose="02070309020205020404" pitchFamily="49" charset="0"/>
+                <a:cs typeface="Courier New" panose="02070309020205020404" pitchFamily="49" charset="0"/>
+              </a:rPr>
+              <a:t>/ipv4-unicast/</a:t>
+            </a:r>
+            <a:r>
+              <a:rPr lang="de-CH" sz="1200" dirty="0" err="1">
+                <a:latin typeface="Courier New" panose="02070309020205020404" pitchFamily="49" charset="0"/>
+                <a:cs typeface="Courier New" panose="02070309020205020404" pitchFamily="49" charset="0"/>
+              </a:rPr>
+              <a:t>adj</a:t>
+            </a:r>
+            <a:r>
+              <a:rPr lang="de-CH" sz="1200" dirty="0">
+                <a:latin typeface="Courier New" panose="02070309020205020404" pitchFamily="49" charset="0"/>
+                <a:cs typeface="Courier New" panose="02070309020205020404" pitchFamily="49" charset="0"/>
+              </a:rPr>
+              <a:t>-</a:t>
+            </a:r>
+            <a:r>
+              <a:rPr lang="de-CH" sz="1200" dirty="0" err="1">
+                <a:latin typeface="Courier New" panose="02070309020205020404" pitchFamily="49" charset="0"/>
+                <a:cs typeface="Courier New" panose="02070309020205020404" pitchFamily="49" charset="0"/>
+              </a:rPr>
+              <a:t>rib</a:t>
+            </a:r>
+            <a:r>
+              <a:rPr lang="de-CH" sz="1200" dirty="0">
+                <a:latin typeface="Courier New" panose="02070309020205020404" pitchFamily="49" charset="0"/>
+                <a:cs typeface="Courier New" panose="02070309020205020404" pitchFamily="49" charset="0"/>
+              </a:rPr>
+              <a:t>-in-post/route\</a:t>
+            </a:r>
+          </a:p>
+          <a:p>
+            <a:r>
+              <a:rPr lang="de-CH" sz="1200" dirty="0">
+                <a:latin typeface="Courier New" panose="02070309020205020404" pitchFamily="49" charset="0"/>
+                <a:cs typeface="Courier New" panose="02070309020205020404" pitchFamily="49" charset="0"/>
+              </a:rPr>
+              <a:t>[</a:t>
+            </a:r>
+            <a:r>
+              <a:rPr lang="de-CH" sz="1200" dirty="0" err="1">
+                <a:latin typeface="Courier New" panose="02070309020205020404" pitchFamily="49" charset="0"/>
+                <a:cs typeface="Courier New" panose="02070309020205020404" pitchFamily="49" charset="0"/>
+              </a:rPr>
+              <a:t>prefix</a:t>
+            </a:r>
+            <a:r>
+              <a:rPr lang="de-CH" sz="1200" dirty="0">
+                <a:latin typeface="Courier New" panose="02070309020205020404" pitchFamily="49" charset="0"/>
+                <a:cs typeface="Courier New" panose="02070309020205020404" pitchFamily="49" charset="0"/>
+              </a:rPr>
+              <a:t>='192.0.2.0/24']\</a:t>
+            </a:r>
+          </a:p>
+          <a:p>
+            <a:r>
+              <a:rPr lang="de-CH" sz="1200" dirty="0">
+                <a:latin typeface="Courier New" panose="02070309020205020404" pitchFamily="49" charset="0"/>
+                <a:cs typeface="Courier New" panose="02070309020205020404" pitchFamily="49" charset="0"/>
+              </a:rPr>
+              <a:t>[</a:t>
+            </a:r>
+            <a:r>
+              <a:rPr lang="de-CH" sz="1200" dirty="0" err="1">
+                <a:latin typeface="Courier New" panose="02070309020205020404" pitchFamily="49" charset="0"/>
+                <a:cs typeface="Courier New" panose="02070309020205020404" pitchFamily="49" charset="0"/>
+              </a:rPr>
+              <a:t>path-id</a:t>
+            </a:r>
+            <a:r>
+              <a:rPr lang="de-CH" sz="1200" dirty="0">
+                <a:latin typeface="Courier New" panose="02070309020205020404" pitchFamily="49" charset="0"/>
+                <a:cs typeface="Courier New" panose="02070309020205020404" pitchFamily="49" charset="0"/>
+              </a:rPr>
+              <a:t>='0']</a:t>
+            </a:r>
+          </a:p>
+          <a:p>
+            <a:endParaRPr lang="de-CH" sz="1200" dirty="0">
+              <a:latin typeface="Courier New" panose="02070309020205020404" pitchFamily="49" charset="0"/>
+              <a:cs typeface="Courier New" panose="02070309020205020404" pitchFamily="49" charset="0"/>
+            </a:endParaRPr>
+          </a:p>
+          <a:p>
+            <a:r>
+              <a:rPr lang="de-CH" sz="1200" dirty="0">
+                <a:latin typeface="Courier New" panose="02070309020205020404" pitchFamily="49" charset="0"/>
+                <a:cs typeface="Courier New" panose="02070309020205020404" pitchFamily="49" charset="0"/>
+              </a:rPr>
+              <a:t>Headers:</a:t>
+            </a:r>
+          </a:p>
+          <a:p>
+            <a:r>
+              <a:rPr lang="de-CH" sz="1200" dirty="0">
+                <a:latin typeface="Courier New" panose="02070309020205020404" pitchFamily="49" charset="0"/>
+                <a:cs typeface="Courier New" panose="02070309020205020404" pitchFamily="49" charset="0"/>
+              </a:rPr>
+              <a:t>  schema-</a:t>
+            </a:r>
+            <a:r>
+              <a:rPr lang="de-CH" sz="1200" dirty="0" err="1">
+                <a:latin typeface="Courier New" panose="02070309020205020404" pitchFamily="49" charset="0"/>
+                <a:cs typeface="Courier New" panose="02070309020205020404" pitchFamily="49" charset="0"/>
+              </a:rPr>
+              <a:t>id</a:t>
+            </a:r>
+            <a:r>
+              <a:rPr lang="de-CH" sz="1200" dirty="0">
+                <a:latin typeface="Courier New" panose="02070309020205020404" pitchFamily="49" charset="0"/>
+                <a:cs typeface="Courier New" panose="02070309020205020404" pitchFamily="49" charset="0"/>
+              </a:rPr>
+              <a:t>:     5</a:t>
+            </a:r>
+          </a:p>
+          <a:p>
+            <a:r>
+              <a:rPr lang="de-CH" sz="1200" dirty="0">
+                <a:latin typeface="Courier New" panose="02070309020205020404" pitchFamily="49" charset="0"/>
+                <a:cs typeface="Courier New" panose="02070309020205020404" pitchFamily="49" charset="0"/>
+              </a:rPr>
+              <a:t>  </a:t>
+            </a:r>
+            <a:r>
+              <a:rPr lang="de-CH" sz="1200" dirty="0" err="1">
+                <a:latin typeface="Courier New" panose="02070309020205020404" pitchFamily="49" charset="0"/>
+                <a:cs typeface="Courier New" panose="02070309020205020404" pitchFamily="49" charset="0"/>
+              </a:rPr>
+              <a:t>content</a:t>
+            </a:r>
+            <a:r>
+              <a:rPr lang="de-CH" sz="1200" dirty="0">
+                <a:latin typeface="Courier New" panose="02070309020205020404" pitchFamily="49" charset="0"/>
+                <a:cs typeface="Courier New" panose="02070309020205020404" pitchFamily="49" charset="0"/>
+              </a:rPr>
+              <a:t>-type:  </a:t>
+            </a:r>
+            <a:r>
+              <a:rPr lang="de-CH" sz="1200" dirty="0" err="1">
+                <a:latin typeface="Courier New" panose="02070309020205020404" pitchFamily="49" charset="0"/>
+                <a:cs typeface="Courier New" panose="02070309020205020404" pitchFamily="49" charset="0"/>
+              </a:rPr>
+              <a:t>application</a:t>
+            </a:r>
+            <a:r>
+              <a:rPr lang="de-CH" sz="1200" dirty="0">
+                <a:latin typeface="Courier New" panose="02070309020205020404" pitchFamily="49" charset="0"/>
+                <a:cs typeface="Courier New" panose="02070309020205020404" pitchFamily="49" charset="0"/>
+              </a:rPr>
+              <a:t>/</a:t>
+            </a:r>
+            <a:r>
+              <a:rPr lang="de-CH" sz="1200" dirty="0" err="1">
+                <a:latin typeface="Courier New" panose="02070309020205020404" pitchFamily="49" charset="0"/>
+                <a:cs typeface="Courier New" panose="02070309020205020404" pitchFamily="49" charset="0"/>
+              </a:rPr>
+              <a:t>yang-data+json</a:t>
+            </a:r>
+            <a:endParaRPr lang="de-CH" sz="1200" dirty="0">
+              <a:latin typeface="Courier New" panose="02070309020205020404" pitchFamily="49" charset="0"/>
+              <a:cs typeface="Courier New" panose="02070309020205020404" pitchFamily="49" charset="0"/>
+            </a:endParaRPr>
+          </a:p>
+          <a:p>
+            <a:r>
+              <a:rPr lang="de-CH" sz="1200" dirty="0">
+                <a:highlight>
+                  <a:srgbClr val="FFFF00"/>
+                </a:highlight>
+                <a:latin typeface="Courier New" panose="02070309020205020404" pitchFamily="49" charset="0"/>
+                <a:cs typeface="Courier New" panose="02070309020205020404" pitchFamily="49" charset="0"/>
+              </a:rPr>
+              <a:t>  </a:t>
+            </a:r>
+            <a:r>
+              <a:rPr lang="de-CH" sz="1200" dirty="0" err="1">
+                <a:highlight>
+                  <a:srgbClr val="FFFF00"/>
+                </a:highlight>
+                <a:latin typeface="Courier New" panose="02070309020205020404" pitchFamily="49" charset="0"/>
+                <a:cs typeface="Courier New" panose="02070309020205020404" pitchFamily="49" charset="0"/>
+              </a:rPr>
+              <a:t>partition-key</a:t>
+            </a:r>
+            <a:r>
+              <a:rPr lang="de-CH" sz="1200" dirty="0">
+                <a:highlight>
+                  <a:srgbClr val="FFFF00"/>
+                </a:highlight>
+                <a:latin typeface="Courier New" panose="02070309020205020404" pitchFamily="49" charset="0"/>
+                <a:cs typeface="Courier New" panose="02070309020205020404" pitchFamily="49" charset="0"/>
+              </a:rPr>
+              <a:t>: router-nyc-01</a:t>
+            </a:r>
+          </a:p>
+        </p:txBody>
+      </p:sp>
+    </p:spTree>
+    <p:extLst>
+      <p:ext uri="{BB962C8B-B14F-4D97-AF65-F5344CB8AC3E}">
+        <p14:creationId xmlns:p14="http://schemas.microsoft.com/office/powerpoint/2010/main" val="555040859"/>
+      </p:ext>
+    </p:extLst>
+  </p:cSld>
+  <p:clrMapOvr>
+    <a:masterClrMapping/>
+  </p:clrMapOvr>
+</p:sld>
+</file>
+
+<file path=ppt/slides/slide12.xml><?xml version="1.0" encoding="utf-8"?>
+<p:sld xmlns:a="http://schemas.openxmlformats.org/drawingml/2006/main" xmlns:r="http://schemas.openxmlformats.org/officeDocument/2006/relationships" xmlns:p="http://schemas.openxmlformats.org/presentationml/2006/main">
+  <p:cSld>
+    <p:spTree>
+      <p:nvGrpSpPr>
+        <p:cNvPr id="1" name="">
+          <a:extLst>
+            <a:ext uri="{FF2B5EF4-FFF2-40B4-BE49-F238E27FC236}">
               <a16:creationId xmlns:a16="http://schemas.microsoft.com/office/drawing/2014/main" id="{FB330A70-FC9F-6E89-ADE8-150C7C6DAFBB}"/>
             </a:ext>
           </a:extLst>
@@ -6536,7 +8223,7 @@
             </a:pPr>
             <a:r>
               <a:rPr lang="en-US" sz="2100" noProof="0" dirty="0"/>
-              <a:t>Do you agree on the data modelling of the BMP related metadata. Any comments?</a:t>
+              <a:t>Do you agree on the data modeling of the BMP related metadata. Any comments?</a:t>
             </a:r>
           </a:p>
           <a:p>
@@ -6580,7 +8267,7 @@
           <a:p>
             <a:fld id="{FC4AC485-25DE-431E-B345-9C0A15BB7F8A}" type="slidenum">
               <a:rPr lang="en-US" sz="1400" noProof="0" smtClean="0"/>
-              <a:t>10</a:t>
+              <a:t>12</a:t>
             </a:fld>
             <a:endParaRPr lang="en-US" sz="1400" noProof="0" dirty="0"/>
           </a:p>
@@ -6599,7 +8286,7 @@
 </p:sld>
 </file>
 
-<file path=ppt/slides/slide11.xml><?xml version="1.0" encoding="utf-8"?>
+<file path=ppt/slides/slide13.xml><?xml version="1.0" encoding="utf-8"?>
 <p:sld xmlns:a="http://schemas.openxmlformats.org/drawingml/2006/main" xmlns:r="http://schemas.openxmlformats.org/officeDocument/2006/relationships" xmlns:p="http://schemas.openxmlformats.org/presentationml/2006/main">
   <p:cSld>
     <p:spTree>
@@ -6711,22 +8398,77 @@
             </a:pPr>
             <a:r>
               <a:rPr lang="en-US" sz="2100" dirty="0"/>
-              <a:t>Additional BGP address families</a:t>
+              <a:t>Support additional BGP address families (labeled-unicast, l3vpn-unicast, l2vpn,…)</a:t>
+            </a:r>
+          </a:p>
+          <a:p>
+            <a:pPr lvl="1">
+              <a:spcBef>
+                <a:spcPts val="600"/>
+              </a:spcBef>
+            </a:pPr>
+            <a:r>
+              <a:rPr lang="en-US" sz="2100" dirty="0"/>
+              <a:t>Improve BMP Statistics modeling (</a:t>
+            </a:r>
+            <a:r>
+              <a:rPr lang="en-US" sz="2100" dirty="0" err="1"/>
+              <a:t>identityref</a:t>
+            </a:r>
+            <a:r>
+              <a:rPr lang="en-US" sz="2100" dirty="0"/>
+              <a:t>/enumeration of statistics-type)</a:t>
+            </a:r>
+          </a:p>
+          <a:p>
+            <a:pPr lvl="1">
+              <a:spcBef>
+                <a:spcPts val="600"/>
+              </a:spcBef>
+            </a:pPr>
+            <a:r>
+              <a:rPr lang="en-US" sz="2100" dirty="0"/>
+              <a:t>Clarify authoritative timestamps (when BMP header timestamp and TLVs are present</a:t>
             </a:r>
           </a:p>
           <a:p>
             <a:pPr>
+              <a:lnSpc>
+                <a:spcPct val="100000"/>
+              </a:lnSpc>
               <a:spcBef>
                 <a:spcPts val="1800"/>
               </a:spcBef>
             </a:pPr>
             <a:r>
               <a:rPr lang="en-US" sz="2100" dirty="0"/>
+              <a:t>Address mailing </a:t>
+            </a:r>
+            <a:r>
+              <a:rPr lang="en-US" sz="2100"/>
+              <a:t>list feedback </a:t>
+            </a:r>
+            <a:endParaRPr lang="en-US" sz="2100" dirty="0"/>
+          </a:p>
+          <a:p>
+            <a:pPr>
+              <a:lnSpc>
+                <a:spcPct val="100000"/>
+              </a:lnSpc>
+              <a:spcBef>
+                <a:spcPts val="1800"/>
+              </a:spcBef>
+            </a:pPr>
+            <a:r>
+              <a:rPr lang="en-US" sz="2100" dirty="0"/>
               <a:t>Request NMOP working group feedback adoption.</a:t>
             </a:r>
           </a:p>
           <a:p>
             <a:pPr>
+              <a:lnSpc>
+                <a:spcPct val="100000"/>
+              </a:lnSpc>
               <a:spcBef>
                 <a:spcPts val="600"/>
               </a:spcBef>
@@ -6766,7 +8508,7 @@
           <a:p>
             <a:fld id="{FC4AC485-25DE-431E-B345-9C0A15BB7F8A}" type="slidenum">
               <a:rPr lang="en-US" sz="1400" smtClean="0"/>
-              <a:t>11</a:t>
+              <a:t>13</a:t>
             </a:fld>
             <a:endParaRPr lang="en-US" sz="1400" dirty="0"/>
           </a:p>
@@ -6785,7 +8527,7 @@
 </p:sld>
 </file>
 
-<file path=ppt/slides/slide12.xml><?xml version="1.0" encoding="utf-8"?>
+<file path=ppt/slides/slide14.xml><?xml version="1.0" encoding="utf-8"?>
 <p:sld xmlns:a="http://schemas.openxmlformats.org/drawingml/2006/main" xmlns:r="http://schemas.openxmlformats.org/officeDocument/2006/relationships" xmlns:p="http://schemas.openxmlformats.org/presentationml/2006/main">
   <p:cSld>
     <p:spTree>
@@ -6876,7 +8618,7 @@
                   <a:spcPts val="600"/>
                 </a:spcAft>
               </a:pPr>
-              <a:t>12</a:t>
+              <a:t>14</a:t>
             </a:fld>
             <a:endParaRPr lang="de-CH"/>
           </a:p>
@@ -7437,6 +9179,52 @@
               <a:t>2</a:t>
             </a:fld>
             <a:endParaRPr lang="de-CH" sz="1400" dirty="0"/>
+          </a:p>
+        </p:txBody>
+      </p:sp>
+      <p:sp>
+        <p:nvSpPr>
+          <p:cNvPr id="4" name="Arrow: Right 3">
+            <a:extLst>
+              <a:ext uri="{FF2B5EF4-FFF2-40B4-BE49-F238E27FC236}">
+                <a16:creationId xmlns:a16="http://schemas.microsoft.com/office/drawing/2014/main" id="{7F2E1516-6D8B-CD02-571E-A20DF37CEB35}"/>
+              </a:ext>
+            </a:extLst>
+          </p:cNvPr>
+          <p:cNvSpPr/>
+          <p:nvPr/>
+        </p:nvSpPr>
+        <p:spPr>
+          <a:xfrm>
+            <a:off x="287383" y="6176964"/>
+            <a:ext cx="550817" cy="184673"/>
+          </a:xfrm>
+          <a:prstGeom prst="rightArrow">
+            <a:avLst/>
+          </a:prstGeom>
+        </p:spPr>
+        <p:style>
+          <a:lnRef idx="2">
+            <a:schemeClr val="accent2">
+              <a:shade val="15000"/>
+            </a:schemeClr>
+          </a:lnRef>
+          <a:fillRef idx="1">
+            <a:schemeClr val="accent2"/>
+          </a:fillRef>
+          <a:effectRef idx="0">
+            <a:schemeClr val="accent2"/>
+          </a:effectRef>
+          <a:fontRef idx="minor">
+            <a:schemeClr val="lt1"/>
+          </a:fontRef>
+        </p:style>
+        <p:txBody>
+          <a:bodyPr rtlCol="0" anchor="ctr"/>
+          <a:lstStyle/>
+          <a:p>
+            <a:pPr algn="ctr"/>
+            <a:endParaRPr lang="de-CH"/>
           </a:p>
         </p:txBody>
       </p:sp>
@@ -7908,676 +9696,6 @@
         <p:cNvPr id="1" name="">
           <a:extLst>
             <a:ext uri="{FF2B5EF4-FFF2-40B4-BE49-F238E27FC236}">
-              <a16:creationId xmlns:a16="http://schemas.microsoft.com/office/drawing/2014/main" id="{AAC0F139-79A7-236E-B422-F9027B252B94}"/>
-            </a:ext>
-          </a:extLst>
-        </p:cNvPr>
-        <p:cNvGrpSpPr/>
-        <p:nvPr/>
-      </p:nvGrpSpPr>
-      <p:grpSpPr>
-        <a:xfrm>
-          <a:off x="0" y="0"/>
-          <a:ext cx="0" cy="0"/>
-          <a:chOff x="0" y="0"/>
-          <a:chExt cx="0" cy="0"/>
-        </a:xfrm>
-      </p:grpSpPr>
-      <p:sp>
-        <p:nvSpPr>
-          <p:cNvPr id="2" name="Title 1">
-            <a:extLst>
-              <a:ext uri="{FF2B5EF4-FFF2-40B4-BE49-F238E27FC236}">
-                <a16:creationId xmlns:a16="http://schemas.microsoft.com/office/drawing/2014/main" id="{9D734BEF-C196-3BAF-0F2E-FB66BF042884}"/>
-              </a:ext>
-            </a:extLst>
-          </p:cNvPr>
-          <p:cNvSpPr>
-            <a:spLocks noGrp="1"/>
-          </p:cNvSpPr>
-          <p:nvPr>
-            <p:ph type="title"/>
-          </p:nvPr>
-        </p:nvSpPr>
-        <p:spPr/>
-        <p:txBody>
-          <a:bodyPr>
-            <a:normAutofit/>
-          </a:bodyPr>
-          <a:lstStyle/>
-          <a:p>
-            <a:r>
-              <a:rPr lang="en-US" sz="2800" b="1" dirty="0"/>
-              <a:t>BMP YANG Telemetry Message</a:t>
-            </a:r>
-            <a:br>
-              <a:rPr lang="en-US" sz="3600" dirty="0"/>
-            </a:br>
-            <a:r>
-              <a:rPr lang="en-US" sz="2700" dirty="0">
-                <a:solidFill>
-                  <a:schemeClr val="bg2">
-                    <a:lumMod val="75000"/>
-                  </a:schemeClr>
-                </a:solidFill>
-              </a:rPr>
-              <a:t>session metadata</a:t>
-            </a:r>
-          </a:p>
-        </p:txBody>
-      </p:sp>
-      <p:sp>
-        <p:nvSpPr>
-          <p:cNvPr id="3" name="Content Placeholder 2">
-            <a:extLst>
-              <a:ext uri="{FF2B5EF4-FFF2-40B4-BE49-F238E27FC236}">
-                <a16:creationId xmlns:a16="http://schemas.microsoft.com/office/drawing/2014/main" id="{6EA985DA-ABCF-AB10-5C45-1B7050950E17}"/>
-              </a:ext>
-            </a:extLst>
-          </p:cNvPr>
-          <p:cNvSpPr>
-            <a:spLocks noGrp="1"/>
-          </p:cNvSpPr>
-          <p:nvPr>
-            <p:ph idx="1"/>
-          </p:nvPr>
-        </p:nvSpPr>
-        <p:spPr>
-          <a:xfrm>
-            <a:off x="838199" y="1690688"/>
-            <a:ext cx="5553809" cy="4486275"/>
-          </a:xfrm>
-        </p:spPr>
-        <p:txBody>
-          <a:bodyPr>
-            <a:noAutofit/>
-          </a:bodyPr>
-          <a:lstStyle/>
-          <a:p>
-            <a:pPr marL="0" indent="0">
-              <a:spcBef>
-                <a:spcPts val="600"/>
-              </a:spcBef>
-              <a:spcAft>
-                <a:spcPts val="600"/>
-              </a:spcAft>
-              <a:buNone/>
-            </a:pPr>
-            <a:r>
-              <a:rPr lang="en-US" sz="2100" dirty="0"/>
-              <a:t>Each </a:t>
-            </a:r>
-            <a:r>
-              <a:rPr lang="de-CH" sz="2100" dirty="0" err="1"/>
-              <a:t>ietf</a:t>
-            </a:r>
-            <a:r>
-              <a:rPr lang="de-CH" sz="2100" dirty="0"/>
-              <a:t>-</a:t>
-            </a:r>
-            <a:r>
-              <a:rPr lang="de-CH" sz="2100" dirty="0" err="1"/>
-              <a:t>bmp</a:t>
-            </a:r>
-            <a:r>
-              <a:rPr lang="de-CH" sz="2100" dirty="0"/>
-              <a:t>-</a:t>
-            </a:r>
-            <a:r>
-              <a:rPr lang="de-CH" sz="2100" dirty="0" err="1"/>
-              <a:t>telemetry</a:t>
-            </a:r>
-            <a:r>
-              <a:rPr lang="de-CH" sz="2100" dirty="0"/>
-              <a:t>-message </a:t>
-            </a:r>
-            <a:r>
-              <a:rPr lang="de-CH" sz="2100" dirty="0" err="1"/>
-              <a:t>contains</a:t>
-            </a:r>
-            <a:r>
-              <a:rPr lang="de-CH" sz="2100" dirty="0"/>
-              <a:t> </a:t>
-            </a:r>
-            <a:r>
-              <a:rPr lang="de-CH" sz="2100" dirty="0" err="1"/>
-              <a:t>now</a:t>
-            </a:r>
-            <a:r>
-              <a:rPr lang="de-CH" sz="2100" dirty="0"/>
-              <a:t> BMP </a:t>
-            </a:r>
-            <a:r>
-              <a:rPr lang="de-CH" sz="2100" dirty="0" err="1"/>
-              <a:t>session-metadata</a:t>
-            </a:r>
-            <a:r>
-              <a:rPr lang="de-CH" sz="2100" dirty="0"/>
-              <a:t> </a:t>
-            </a:r>
-            <a:r>
-              <a:rPr lang="de-CH" sz="2100" dirty="0" err="1"/>
-              <a:t>from</a:t>
-            </a:r>
-            <a:r>
-              <a:rPr lang="de-CH" sz="2100" dirty="0"/>
-              <a:t> </a:t>
-            </a:r>
-            <a:r>
-              <a:rPr lang="de-CH" sz="2100" dirty="0" err="1"/>
-              <a:t>the</a:t>
-            </a:r>
-            <a:r>
-              <a:rPr lang="de-CH" sz="2100" dirty="0"/>
-              <a:t> </a:t>
-            </a:r>
-            <a:r>
-              <a:rPr lang="de-CH" sz="2100" dirty="0" err="1"/>
-              <a:t>received</a:t>
-            </a:r>
-            <a:r>
-              <a:rPr lang="de-CH" sz="2100" dirty="0"/>
-              <a:t> BMP </a:t>
-            </a:r>
-            <a:r>
-              <a:rPr lang="de-CH" sz="2100" dirty="0" err="1"/>
-              <a:t>initiation</a:t>
-            </a:r>
-            <a:r>
-              <a:rPr lang="de-CH" sz="2100" dirty="0"/>
-              <a:t> </a:t>
-            </a:r>
-            <a:r>
-              <a:rPr lang="de-CH" sz="2100" dirty="0" err="1"/>
-              <a:t>message</a:t>
-            </a:r>
-            <a:r>
-              <a:rPr lang="de-CH" sz="2100" dirty="0"/>
-              <a:t>.</a:t>
-            </a:r>
-            <a:endParaRPr lang="en-US" sz="2100" dirty="0"/>
-          </a:p>
-        </p:txBody>
-      </p:sp>
-      <p:sp>
-        <p:nvSpPr>
-          <p:cNvPr id="6" name="Slide Number Placeholder 1">
-            <a:extLst>
-              <a:ext uri="{FF2B5EF4-FFF2-40B4-BE49-F238E27FC236}">
-                <a16:creationId xmlns:a16="http://schemas.microsoft.com/office/drawing/2014/main" id="{6FA6137A-D97E-E8DA-4B6E-B20E079C61E4}"/>
-              </a:ext>
-            </a:extLst>
-          </p:cNvPr>
-          <p:cNvSpPr>
-            <a:spLocks noGrp="1"/>
-          </p:cNvSpPr>
-          <p:nvPr>
-            <p:ph type="sldNum" sz="quarter" idx="12"/>
-          </p:nvPr>
-        </p:nvSpPr>
-        <p:spPr>
-          <a:xfrm>
-            <a:off x="11587892" y="6361637"/>
-            <a:ext cx="414251" cy="365125"/>
-          </a:xfrm>
-        </p:spPr>
-        <p:txBody>
-          <a:bodyPr/>
-          <a:lstStyle/>
-          <a:p>
-            <a:fld id="{FC4AC485-25DE-431E-B345-9C0A15BB7F8A}" type="slidenum">
-              <a:rPr lang="en-US" sz="1400" smtClean="0"/>
-              <a:t>4</a:t>
-            </a:fld>
-            <a:endParaRPr lang="en-US" sz="1400" dirty="0"/>
-          </a:p>
-        </p:txBody>
-      </p:sp>
-      <p:sp>
-        <p:nvSpPr>
-          <p:cNvPr id="5" name="TextBox 4">
-            <a:extLst>
-              <a:ext uri="{FF2B5EF4-FFF2-40B4-BE49-F238E27FC236}">
-                <a16:creationId xmlns:a16="http://schemas.microsoft.com/office/drawing/2014/main" id="{9656C51F-D666-FF4B-6E06-11C9E3E8A8A2}"/>
-              </a:ext>
-            </a:extLst>
-          </p:cNvPr>
-          <p:cNvSpPr txBox="1"/>
-          <p:nvPr/>
-        </p:nvSpPr>
-        <p:spPr>
-          <a:xfrm>
-            <a:off x="7787787" y="1690688"/>
-            <a:ext cx="3925242" cy="1938992"/>
-          </a:xfrm>
-          <a:prstGeom prst="rect">
-            <a:avLst/>
-          </a:prstGeom>
-          <a:noFill/>
-        </p:spPr>
-        <p:txBody>
-          <a:bodyPr wrap="square">
-            <a:spAutoFit/>
-          </a:bodyPr>
-          <a:lstStyle/>
-          <a:p>
-            <a:r>
-              <a:rPr lang="de-CH" sz="1200" dirty="0" err="1">
-                <a:latin typeface="Courier New" panose="02070309020205020404" pitchFamily="49" charset="0"/>
-                <a:cs typeface="Courier New" panose="02070309020205020404" pitchFamily="49" charset="0"/>
-              </a:rPr>
-              <a:t>module</a:t>
-            </a:r>
-            <a:r>
-              <a:rPr lang="de-CH" sz="1200" dirty="0">
-                <a:latin typeface="Courier New" panose="02070309020205020404" pitchFamily="49" charset="0"/>
-                <a:cs typeface="Courier New" panose="02070309020205020404" pitchFamily="49" charset="0"/>
-              </a:rPr>
-              <a:t>: </a:t>
-            </a:r>
-            <a:r>
-              <a:rPr lang="de-CH" sz="1200" dirty="0" err="1">
-                <a:latin typeface="Courier New" panose="02070309020205020404" pitchFamily="49" charset="0"/>
-                <a:cs typeface="Courier New" panose="02070309020205020404" pitchFamily="49" charset="0"/>
-              </a:rPr>
-              <a:t>ietf</a:t>
-            </a:r>
-            <a:r>
-              <a:rPr lang="de-CH" sz="1200" dirty="0">
-                <a:latin typeface="Courier New" panose="02070309020205020404" pitchFamily="49" charset="0"/>
-                <a:cs typeface="Courier New" panose="02070309020205020404" pitchFamily="49" charset="0"/>
-              </a:rPr>
-              <a:t>-</a:t>
-            </a:r>
-            <a:r>
-              <a:rPr lang="de-CH" sz="1200" dirty="0" err="1">
-                <a:latin typeface="Courier New" panose="02070309020205020404" pitchFamily="49" charset="0"/>
-                <a:cs typeface="Courier New" panose="02070309020205020404" pitchFamily="49" charset="0"/>
-              </a:rPr>
-              <a:t>bmp</a:t>
-            </a:r>
-            <a:r>
-              <a:rPr lang="de-CH" sz="1200" dirty="0">
-                <a:latin typeface="Courier New" panose="02070309020205020404" pitchFamily="49" charset="0"/>
-                <a:cs typeface="Courier New" panose="02070309020205020404" pitchFamily="49" charset="0"/>
-              </a:rPr>
-              <a:t>-</a:t>
-            </a:r>
-            <a:r>
-              <a:rPr lang="de-CH" sz="1200" dirty="0" err="1">
-                <a:latin typeface="Courier New" panose="02070309020205020404" pitchFamily="49" charset="0"/>
-                <a:cs typeface="Courier New" panose="02070309020205020404" pitchFamily="49" charset="0"/>
-              </a:rPr>
-              <a:t>telemetry</a:t>
-            </a:r>
-            <a:r>
-              <a:rPr lang="de-CH" sz="1200" dirty="0">
-                <a:latin typeface="Courier New" panose="02070309020205020404" pitchFamily="49" charset="0"/>
-                <a:cs typeface="Courier New" panose="02070309020205020404" pitchFamily="49" charset="0"/>
-              </a:rPr>
-              <a:t>-message</a:t>
-            </a:r>
-          </a:p>
-          <a:p>
-            <a:endParaRPr lang="de-CH" sz="1200" dirty="0">
-              <a:latin typeface="Courier New" panose="02070309020205020404" pitchFamily="49" charset="0"/>
-              <a:cs typeface="Courier New" panose="02070309020205020404" pitchFamily="49" charset="0"/>
-            </a:endParaRPr>
-          </a:p>
-          <a:p>
-            <a:r>
-              <a:rPr lang="de-CH" sz="1200" dirty="0">
-                <a:latin typeface="Courier New" panose="02070309020205020404" pitchFamily="49" charset="0"/>
-                <a:cs typeface="Courier New" panose="02070309020205020404" pitchFamily="49" charset="0"/>
-              </a:rPr>
-              <a:t>  </a:t>
-            </a:r>
-            <a:r>
-              <a:rPr lang="de-CH" sz="1200" dirty="0" err="1">
-                <a:latin typeface="Courier New" panose="02070309020205020404" pitchFamily="49" charset="0"/>
-                <a:cs typeface="Courier New" panose="02070309020205020404" pitchFamily="49" charset="0"/>
-              </a:rPr>
-              <a:t>structure</a:t>
-            </a:r>
-            <a:r>
-              <a:rPr lang="de-CH" sz="1200" dirty="0">
-                <a:latin typeface="Courier New" panose="02070309020205020404" pitchFamily="49" charset="0"/>
-                <a:cs typeface="Courier New" panose="02070309020205020404" pitchFamily="49" charset="0"/>
-              </a:rPr>
-              <a:t> </a:t>
-            </a:r>
-            <a:r>
-              <a:rPr lang="de-CH" sz="1200" dirty="0" err="1">
-                <a:latin typeface="Courier New" panose="02070309020205020404" pitchFamily="49" charset="0"/>
-                <a:cs typeface="Courier New" panose="02070309020205020404" pitchFamily="49" charset="0"/>
-              </a:rPr>
-              <a:t>message</a:t>
-            </a:r>
-            <a:r>
-              <a:rPr lang="de-CH" sz="1200" dirty="0">
-                <a:latin typeface="Courier New" panose="02070309020205020404" pitchFamily="49" charset="0"/>
-                <a:cs typeface="Courier New" panose="02070309020205020404" pitchFamily="49" charset="0"/>
-              </a:rPr>
-              <a:t>:</a:t>
-            </a:r>
-          </a:p>
-          <a:p>
-            <a:r>
-              <a:rPr lang="de-CH" sz="1200" dirty="0">
-                <a:highlight>
-                  <a:srgbClr val="FFFF00"/>
-                </a:highlight>
-                <a:latin typeface="Courier New" panose="02070309020205020404" pitchFamily="49" charset="0"/>
-                <a:cs typeface="Courier New" panose="02070309020205020404" pitchFamily="49" charset="0"/>
-              </a:rPr>
-              <a:t>    +-- </a:t>
-            </a:r>
-            <a:r>
-              <a:rPr lang="de-CH" sz="1200" dirty="0" err="1">
-                <a:highlight>
-                  <a:srgbClr val="FFFF00"/>
-                </a:highlight>
-                <a:latin typeface="Courier New" panose="02070309020205020404" pitchFamily="49" charset="0"/>
-                <a:cs typeface="Courier New" panose="02070309020205020404" pitchFamily="49" charset="0"/>
-              </a:rPr>
-              <a:t>session-metadata</a:t>
-            </a:r>
-            <a:r>
-              <a:rPr lang="de-CH" sz="1200" dirty="0">
-                <a:highlight>
-                  <a:srgbClr val="FFFF00"/>
-                </a:highlight>
-                <a:latin typeface="Courier New" panose="02070309020205020404" pitchFamily="49" charset="0"/>
-                <a:cs typeface="Courier New" panose="02070309020205020404" pitchFamily="49" charset="0"/>
-              </a:rPr>
-              <a:t>!</a:t>
-            </a:r>
-          </a:p>
-          <a:p>
-            <a:r>
-              <a:rPr lang="de-CH" sz="1200" dirty="0">
-                <a:highlight>
-                  <a:srgbClr val="FFFF00"/>
-                </a:highlight>
-                <a:latin typeface="Courier New" panose="02070309020205020404" pitchFamily="49" charset="0"/>
-                <a:cs typeface="Courier New" panose="02070309020205020404" pitchFamily="49" charset="0"/>
-              </a:rPr>
-              <a:t>    |  +-- </a:t>
-            </a:r>
-            <a:r>
-              <a:rPr lang="de-CH" sz="1200" dirty="0" err="1">
-                <a:highlight>
-                  <a:srgbClr val="FFFF00"/>
-                </a:highlight>
-                <a:latin typeface="Courier New" panose="02070309020205020404" pitchFamily="49" charset="0"/>
-                <a:cs typeface="Courier New" panose="02070309020205020404" pitchFamily="49" charset="0"/>
-              </a:rPr>
-              <a:t>string</a:t>
-            </a:r>
-            <a:r>
-              <a:rPr lang="de-CH" sz="1200" dirty="0">
-                <a:highlight>
-                  <a:srgbClr val="FFFF00"/>
-                </a:highlight>
-                <a:latin typeface="Courier New" panose="02070309020205020404" pitchFamily="49" charset="0"/>
-                <a:cs typeface="Courier New" panose="02070309020205020404" pitchFamily="49" charset="0"/>
-              </a:rPr>
-              <a:t>*           </a:t>
-            </a:r>
-            <a:r>
-              <a:rPr lang="de-CH" sz="1200" dirty="0" err="1">
-                <a:highlight>
-                  <a:srgbClr val="FFFF00"/>
-                </a:highlight>
-                <a:latin typeface="Courier New" panose="02070309020205020404" pitchFamily="49" charset="0"/>
-                <a:cs typeface="Courier New" panose="02070309020205020404" pitchFamily="49" charset="0"/>
-              </a:rPr>
-              <a:t>string</a:t>
-            </a:r>
-            <a:endParaRPr lang="de-CH" sz="1200" dirty="0">
-              <a:highlight>
-                <a:srgbClr val="FFFF00"/>
-              </a:highlight>
-              <a:latin typeface="Courier New" panose="02070309020205020404" pitchFamily="49" charset="0"/>
-              <a:cs typeface="Courier New" panose="02070309020205020404" pitchFamily="49" charset="0"/>
-            </a:endParaRPr>
-          </a:p>
-          <a:p>
-            <a:r>
-              <a:rPr lang="de-CH" sz="1200" dirty="0">
-                <a:highlight>
-                  <a:srgbClr val="FFFF00"/>
-                </a:highlight>
-                <a:latin typeface="Courier New" panose="02070309020205020404" pitchFamily="49" charset="0"/>
-                <a:cs typeface="Courier New" panose="02070309020205020404" pitchFamily="49" charset="0"/>
-              </a:rPr>
-              <a:t>    |  +-- </a:t>
-            </a:r>
-            <a:r>
-              <a:rPr lang="de-CH" sz="1200" dirty="0" err="1">
-                <a:highlight>
-                  <a:srgbClr val="FFFF00"/>
-                </a:highlight>
-                <a:latin typeface="Courier New" panose="02070309020205020404" pitchFamily="49" charset="0"/>
-                <a:cs typeface="Courier New" panose="02070309020205020404" pitchFamily="49" charset="0"/>
-              </a:rPr>
-              <a:t>sys-descr</a:t>
-            </a:r>
-            <a:r>
-              <a:rPr lang="de-CH" sz="1200" dirty="0">
-                <a:highlight>
-                  <a:srgbClr val="FFFF00"/>
-                </a:highlight>
-                <a:latin typeface="Courier New" panose="02070309020205020404" pitchFamily="49" charset="0"/>
-                <a:cs typeface="Courier New" panose="02070309020205020404" pitchFamily="49" charset="0"/>
-              </a:rPr>
-              <a:t>?        </a:t>
-            </a:r>
-            <a:r>
-              <a:rPr lang="de-CH" sz="1200" dirty="0" err="1">
-                <a:highlight>
-                  <a:srgbClr val="FFFF00"/>
-                </a:highlight>
-                <a:latin typeface="Courier New" panose="02070309020205020404" pitchFamily="49" charset="0"/>
-                <a:cs typeface="Courier New" panose="02070309020205020404" pitchFamily="49" charset="0"/>
-              </a:rPr>
-              <a:t>string</a:t>
-            </a:r>
-            <a:endParaRPr lang="de-CH" sz="1200" dirty="0">
-              <a:highlight>
-                <a:srgbClr val="FFFF00"/>
-              </a:highlight>
-              <a:latin typeface="Courier New" panose="02070309020205020404" pitchFamily="49" charset="0"/>
-              <a:cs typeface="Courier New" panose="02070309020205020404" pitchFamily="49" charset="0"/>
-            </a:endParaRPr>
-          </a:p>
-          <a:p>
-            <a:r>
-              <a:rPr lang="de-CH" sz="1200" dirty="0">
-                <a:highlight>
-                  <a:srgbClr val="FFFF00"/>
-                </a:highlight>
-                <a:latin typeface="Courier New" panose="02070309020205020404" pitchFamily="49" charset="0"/>
-                <a:cs typeface="Courier New" panose="02070309020205020404" pitchFamily="49" charset="0"/>
-              </a:rPr>
-              <a:t>    |  +-- </a:t>
-            </a:r>
-            <a:r>
-              <a:rPr lang="de-CH" sz="1200" dirty="0" err="1">
-                <a:highlight>
-                  <a:srgbClr val="FFFF00"/>
-                </a:highlight>
-                <a:latin typeface="Courier New" panose="02070309020205020404" pitchFamily="49" charset="0"/>
-                <a:cs typeface="Courier New" panose="02070309020205020404" pitchFamily="49" charset="0"/>
-              </a:rPr>
-              <a:t>sys</a:t>
-            </a:r>
-            <a:r>
-              <a:rPr lang="de-CH" sz="1200" dirty="0">
-                <a:highlight>
-                  <a:srgbClr val="FFFF00"/>
-                </a:highlight>
-                <a:latin typeface="Courier New" panose="02070309020205020404" pitchFamily="49" charset="0"/>
-                <a:cs typeface="Courier New" panose="02070309020205020404" pitchFamily="49" charset="0"/>
-              </a:rPr>
-              <a:t>-name?         </a:t>
-            </a:r>
-            <a:r>
-              <a:rPr lang="de-CH" sz="1200" dirty="0" err="1">
-                <a:highlight>
-                  <a:srgbClr val="FFFF00"/>
-                </a:highlight>
-                <a:latin typeface="Courier New" panose="02070309020205020404" pitchFamily="49" charset="0"/>
-                <a:cs typeface="Courier New" panose="02070309020205020404" pitchFamily="49" charset="0"/>
-              </a:rPr>
-              <a:t>string</a:t>
-            </a:r>
-            <a:endParaRPr lang="de-CH" sz="1200" dirty="0">
-              <a:highlight>
-                <a:srgbClr val="FFFF00"/>
-              </a:highlight>
-              <a:latin typeface="Courier New" panose="02070309020205020404" pitchFamily="49" charset="0"/>
-              <a:cs typeface="Courier New" panose="02070309020205020404" pitchFamily="49" charset="0"/>
-            </a:endParaRPr>
-          </a:p>
-          <a:p>
-            <a:r>
-              <a:rPr lang="de-CH" sz="1200" dirty="0">
-                <a:highlight>
-                  <a:srgbClr val="FFFF00"/>
-                </a:highlight>
-                <a:latin typeface="Courier New" panose="02070309020205020404" pitchFamily="49" charset="0"/>
-                <a:cs typeface="Courier New" panose="02070309020205020404" pitchFamily="49" charset="0"/>
-              </a:rPr>
-              <a:t>    |  +-- </a:t>
-            </a:r>
-            <a:r>
-              <a:rPr lang="de-CH" sz="1200" dirty="0" err="1">
-                <a:highlight>
-                  <a:srgbClr val="FFFF00"/>
-                </a:highlight>
-                <a:latin typeface="Courier New" panose="02070309020205020404" pitchFamily="49" charset="0"/>
-                <a:cs typeface="Courier New" panose="02070309020205020404" pitchFamily="49" charset="0"/>
-              </a:rPr>
-              <a:t>vrf</a:t>
-            </a:r>
-            <a:r>
-              <a:rPr lang="de-CH" sz="1200" dirty="0">
-                <a:highlight>
-                  <a:srgbClr val="FFFF00"/>
-                </a:highlight>
-                <a:latin typeface="Courier New" panose="02070309020205020404" pitchFamily="49" charset="0"/>
-                <a:cs typeface="Courier New" panose="02070309020205020404" pitchFamily="49" charset="0"/>
-              </a:rPr>
-              <a:t>-</a:t>
-            </a:r>
-            <a:r>
-              <a:rPr lang="de-CH" sz="1200" dirty="0" err="1">
-                <a:highlight>
-                  <a:srgbClr val="FFFF00"/>
-                </a:highlight>
-                <a:latin typeface="Courier New" panose="02070309020205020404" pitchFamily="49" charset="0"/>
-                <a:cs typeface="Courier New" panose="02070309020205020404" pitchFamily="49" charset="0"/>
-              </a:rPr>
-              <a:t>table</a:t>
-            </a:r>
-            <a:r>
-              <a:rPr lang="de-CH" sz="1200" dirty="0">
-                <a:highlight>
-                  <a:srgbClr val="FFFF00"/>
-                </a:highlight>
-                <a:latin typeface="Courier New" panose="02070309020205020404" pitchFamily="49" charset="0"/>
-                <a:cs typeface="Courier New" panose="02070309020205020404" pitchFamily="49" charset="0"/>
-              </a:rPr>
-              <a:t>-name?   </a:t>
-            </a:r>
-            <a:r>
-              <a:rPr lang="de-CH" sz="1200" dirty="0" err="1">
-                <a:highlight>
-                  <a:srgbClr val="FFFF00"/>
-                </a:highlight>
-                <a:latin typeface="Courier New" panose="02070309020205020404" pitchFamily="49" charset="0"/>
-                <a:cs typeface="Courier New" panose="02070309020205020404" pitchFamily="49" charset="0"/>
-              </a:rPr>
-              <a:t>string</a:t>
-            </a:r>
-            <a:endParaRPr lang="de-CH" sz="1200" dirty="0">
-              <a:highlight>
-                <a:srgbClr val="FFFF00"/>
-              </a:highlight>
-              <a:latin typeface="Courier New" panose="02070309020205020404" pitchFamily="49" charset="0"/>
-              <a:cs typeface="Courier New" panose="02070309020205020404" pitchFamily="49" charset="0"/>
-            </a:endParaRPr>
-          </a:p>
-          <a:p>
-            <a:r>
-              <a:rPr lang="de-CH" sz="1200" dirty="0">
-                <a:latin typeface="Courier New" panose="02070309020205020404" pitchFamily="49" charset="0"/>
-                <a:cs typeface="Courier New" panose="02070309020205020404" pitchFamily="49" charset="0"/>
-              </a:rPr>
-              <a:t>    +-- </a:t>
-            </a:r>
-            <a:r>
-              <a:rPr lang="de-CH" sz="1200" dirty="0" err="1">
-                <a:latin typeface="Courier New" panose="02070309020205020404" pitchFamily="49" charset="0"/>
-                <a:cs typeface="Courier New" panose="02070309020205020404" pitchFamily="49" charset="0"/>
-              </a:rPr>
-              <a:t>version</a:t>
-            </a:r>
-            <a:r>
-              <a:rPr lang="de-CH" sz="1200" dirty="0">
-                <a:latin typeface="Courier New" panose="02070309020205020404" pitchFamily="49" charset="0"/>
-                <a:cs typeface="Courier New" panose="02070309020205020404" pitchFamily="49" charset="0"/>
-              </a:rPr>
-              <a:t>             uint8</a:t>
-            </a:r>
-          </a:p>
-          <a:p>
-            <a:r>
-              <a:rPr lang="de-CH" sz="1200" dirty="0">
-                <a:latin typeface="Courier New" panose="02070309020205020404" pitchFamily="49" charset="0"/>
-                <a:cs typeface="Courier New" panose="02070309020205020404" pitchFamily="49" charset="0"/>
-              </a:rPr>
-              <a:t>    +-- (</a:t>
-            </a:r>
-            <a:r>
-              <a:rPr lang="de-CH" sz="1200" dirty="0" err="1">
-                <a:latin typeface="Courier New" panose="02070309020205020404" pitchFamily="49" charset="0"/>
-                <a:cs typeface="Courier New" panose="02070309020205020404" pitchFamily="49" charset="0"/>
-              </a:rPr>
-              <a:t>message</a:t>
-            </a:r>
-            <a:r>
-              <a:rPr lang="de-CH" sz="1200" dirty="0">
-                <a:latin typeface="Courier New" panose="02070309020205020404" pitchFamily="49" charset="0"/>
-                <a:cs typeface="Courier New" panose="02070309020205020404" pitchFamily="49" charset="0"/>
-              </a:rPr>
-              <a:t>-type)?</a:t>
-            </a:r>
-          </a:p>
-        </p:txBody>
-      </p:sp>
-    </p:spTree>
-    <p:extLst>
-      <p:ext uri="{BB962C8B-B14F-4D97-AF65-F5344CB8AC3E}">
-        <p14:creationId xmlns:p14="http://schemas.microsoft.com/office/powerpoint/2010/main" val="4251917088"/>
-      </p:ext>
-    </p:extLst>
-  </p:cSld>
-  <p:clrMapOvr>
-    <a:masterClrMapping/>
-  </p:clrMapOvr>
-</p:sld>
-</file>
-
-<file path=ppt/slides/slide5.xml><?xml version="1.0" encoding="utf-8"?>
-<p:sld xmlns:a="http://schemas.openxmlformats.org/drawingml/2006/main" xmlns:r="http://schemas.openxmlformats.org/officeDocument/2006/relationships" xmlns:p="http://schemas.openxmlformats.org/presentationml/2006/main">
-  <p:cSld>
-    <p:spTree>
-      <p:nvGrpSpPr>
-        <p:cNvPr id="1" name="">
-          <a:extLst>
-            <a:ext uri="{FF2B5EF4-FFF2-40B4-BE49-F238E27FC236}">
               <a16:creationId xmlns:a16="http://schemas.microsoft.com/office/drawing/2014/main" id="{8BFACB8B-1E2B-7BF8-1C7C-AE9FEEAFD1D7}"/>
             </a:ext>
           </a:extLst>
@@ -8624,6 +9742,16 @@
               <a:rPr lang="en-US" sz="3600" dirty="0"/>
             </a:br>
             <a:r>
+              <a:rPr lang="en-US" sz="2700" dirty="0">
+                <a:solidFill>
+                  <a:schemeClr val="bg2">
+                    <a:lumMod val="75000"/>
+                  </a:schemeClr>
+                </a:solidFill>
+              </a:rPr>
+              <a:t>Relationship with `</a:t>
+            </a:r>
+            <a:r>
               <a:rPr lang="en-US" sz="2700" dirty="0" err="1">
                 <a:solidFill>
                   <a:schemeClr val="bg2">
@@ -8631,7 +9759,7 @@
                   </a:schemeClr>
                 </a:solidFill>
               </a:rPr>
-              <a:t>vrf</a:t>
+              <a:t>ietf-bgp</a:t>
             </a:r>
             <a:r>
               <a:rPr lang="en-US" sz="2700" dirty="0">
@@ -8641,7 +9769,7 @@
                   </a:schemeClr>
                 </a:solidFill>
               </a:rPr>
-              <a:t>, sequence-number and timestamp metadata</a:t>
+              <a:t>` module (IDR)</a:t>
             </a:r>
           </a:p>
         </p:txBody>
@@ -8665,7 +9793,7 @@
         <p:spPr>
           <a:xfrm>
             <a:off x="838199" y="1690688"/>
-            <a:ext cx="6302830" cy="4486275"/>
+            <a:ext cx="7188927" cy="4486275"/>
           </a:xfrm>
         </p:spPr>
         <p:txBody>
@@ -8684,130 +9812,119 @@
               <a:buNone/>
             </a:pPr>
             <a:r>
-              <a:rPr lang="de-CH" sz="2100" dirty="0">
+              <a:rPr lang="en-US" sz="2100" dirty="0">
                 <a:latin typeface="Calibri body"/>
               </a:rPr>
-              <a:t>BMP </a:t>
-            </a:r>
-            <a:r>
-              <a:rPr lang="de-CH" sz="2100" dirty="0" err="1">
+              <a:t>Replaced the previously redefined BGP submodules with standalone modules (</a:t>
+            </a:r>
+            <a:r>
+              <a:rPr lang="en-US" sz="2100" dirty="0" err="1">
                 <a:latin typeface="Calibri body"/>
               </a:rPr>
-              <a:t>initiation</a:t>
-            </a:r>
-            <a:r>
-              <a:rPr lang="de-CH" sz="2100" dirty="0">
+              <a:t>ietf</a:t>
+            </a:r>
+            <a:r>
+              <a:rPr lang="en-US" sz="2100" dirty="0">
                 <a:latin typeface="Calibri body"/>
               </a:rPr>
-              <a:t>, peer-</a:t>
-            </a:r>
-            <a:r>
-              <a:rPr lang="de-CH" sz="2100" dirty="0" err="1">
+              <a:t>-</a:t>
+            </a:r>
+            <a:r>
+              <a:rPr lang="en-US" sz="2100" dirty="0" err="1">
                 <a:latin typeface="Calibri body"/>
               </a:rPr>
-              <a:t>up</a:t>
-            </a:r>
-            <a:r>
-              <a:rPr lang="de-CH" sz="2100" dirty="0">
+              <a:t>bgp</a:t>
+            </a:r>
+            <a:r>
+              <a:rPr lang="en-US" sz="2100" dirty="0">
                 <a:latin typeface="Calibri body"/>
               </a:rPr>
-              <a:t> and route-monitoring </a:t>
-            </a:r>
-            <a:r>
-              <a:rPr lang="de-CH" sz="2100" dirty="0" err="1">
+              <a:t>-rib-entry, </a:t>
+            </a:r>
+            <a:r>
+              <a:rPr lang="en-US" sz="2100" dirty="0" err="1">
                 <a:latin typeface="Calibri body"/>
               </a:rPr>
               <a:t>ietf</a:t>
             </a:r>
             <a:r>
-              <a:rPr lang="de-CH" sz="2100" dirty="0">
+              <a:rPr lang="en-US" sz="2100" dirty="0">
                 <a:latin typeface="Calibri body"/>
               </a:rPr>
               <a:t>-</a:t>
             </a:r>
             <a:r>
-              <a:rPr lang="de-CH" sz="2100" dirty="0" err="1">
+              <a:rPr lang="en-US" sz="2100" dirty="0" err="1">
                 <a:latin typeface="Calibri body"/>
               </a:rPr>
-              <a:t>bmp</a:t>
-            </a:r>
-            <a:r>
-              <a:rPr lang="de-CH" sz="2100" dirty="0">
+              <a:t>bgp</a:t>
+            </a:r>
+            <a:r>
+              <a:rPr lang="en-US" sz="2100" dirty="0">
                 <a:latin typeface="Calibri body"/>
               </a:rPr>
+              <a:t>-open) that </a:t>
+            </a:r>
+            <a:r>
+              <a:rPr lang="en-US" sz="2100" b="1" dirty="0">
+                <a:latin typeface="Calibri body"/>
+              </a:rPr>
+              <a:t>import groupings and typedefs from </a:t>
+            </a:r>
+            <a:r>
+              <a:rPr lang="en-US" sz="2100" b="1" dirty="0">
+                <a:latin typeface="Calibri body"/>
+                <a:hlinkClick r:id="rId2"/>
+              </a:rPr>
+              <a:t>draft-</a:t>
+            </a:r>
+            <a:r>
+              <a:rPr lang="en-US" sz="2100" b="1" dirty="0" err="1">
+                <a:latin typeface="Calibri body"/>
+                <a:hlinkClick r:id="rId2"/>
+              </a:rPr>
+              <a:t>ietf</a:t>
+            </a:r>
+            <a:r>
+              <a:rPr lang="en-US" sz="2100" b="1" dirty="0">
+                <a:latin typeface="Calibri body"/>
+                <a:hlinkClick r:id="rId2"/>
+              </a:rPr>
               <a:t>-</a:t>
             </a:r>
             <a:r>
-              <a:rPr lang="de-CH" sz="2100" dirty="0" err="1">
+              <a:rPr lang="en-US" sz="2100" b="1" dirty="0" err="1">
                 <a:latin typeface="Calibri body"/>
-              </a:rPr>
-              <a:t>telemetry</a:t>
-            </a:r>
-            <a:r>
-              <a:rPr lang="de-CH" sz="2100" dirty="0">
+                <a:hlinkClick r:id="rId2"/>
+              </a:rPr>
+              <a:t>idr</a:t>
+            </a:r>
+            <a:r>
+              <a:rPr lang="en-US" sz="2100" b="1" dirty="0">
                 <a:latin typeface="Calibri body"/>
-              </a:rPr>
-              <a:t>-message </a:t>
-            </a:r>
-            <a:r>
-              <a:rPr lang="de-CH" sz="2100" dirty="0" err="1">
+                <a:hlinkClick r:id="rId2"/>
+              </a:rPr>
+              <a:t>-</a:t>
+            </a:r>
+            <a:r>
+              <a:rPr lang="en-US" sz="2100" b="1" dirty="0" err="1">
                 <a:latin typeface="Calibri body"/>
-              </a:rPr>
-              <a:t>contains</a:t>
-            </a:r>
-            <a:r>
-              <a:rPr lang="de-CH" sz="2100" dirty="0">
+                <a:hlinkClick r:id="rId2"/>
+              </a:rPr>
+              <a:t>bgp</a:t>
+            </a:r>
+            <a:r>
+              <a:rPr lang="en-US" sz="2100" b="1" dirty="0">
                 <a:latin typeface="Calibri body"/>
-              </a:rPr>
-              <a:t> </a:t>
-            </a:r>
-            <a:r>
-              <a:rPr lang="de-CH" sz="2100" dirty="0" err="1">
+                <a:hlinkClick r:id="rId2"/>
+              </a:rPr>
+              <a:t>-model</a:t>
+            </a:r>
+            <a:r>
+              <a:rPr lang="en-US" sz="2100" dirty="0">
                 <a:latin typeface="Calibri body"/>
               </a:rPr>
-              <a:t>now</a:t>
-            </a:r>
-            <a:r>
-              <a:rPr lang="de-CH" sz="2100" dirty="0">
-                <a:latin typeface="Calibri body"/>
-              </a:rPr>
-              <a:t> also </a:t>
-            </a:r>
-            <a:r>
-              <a:rPr lang="de-CH" sz="2100" dirty="0" err="1">
-                <a:latin typeface="Calibri body"/>
-              </a:rPr>
-              <a:t>the</a:t>
-            </a:r>
-            <a:r>
-              <a:rPr lang="de-CH" sz="2100" dirty="0">
-                <a:latin typeface="Calibri body"/>
-              </a:rPr>
-              <a:t> </a:t>
-            </a:r>
-            <a:r>
-              <a:rPr lang="de-CH" sz="2100" dirty="0" err="1">
-                <a:latin typeface="Calibri body"/>
-              </a:rPr>
-              <a:t>following</a:t>
-            </a:r>
-            <a:r>
-              <a:rPr lang="de-CH" sz="2100" dirty="0">
-                <a:latin typeface="Calibri body"/>
-              </a:rPr>
-              <a:t> BMP </a:t>
-            </a:r>
-            <a:r>
-              <a:rPr lang="de-CH" sz="2100" dirty="0" err="1">
-                <a:latin typeface="Calibri body"/>
-              </a:rPr>
-              <a:t>metadata</a:t>
-            </a:r>
-            <a:r>
-              <a:rPr lang="de-CH" sz="2100" dirty="0">
-                <a:latin typeface="Calibri body"/>
-              </a:rPr>
-              <a:t>:</a:t>
+              <a:t>).</a:t>
             </a:r>
           </a:p>
           <a:p>
@@ -8821,103 +9938,11 @@
               <a:buNone/>
             </a:pPr>
             <a:r>
-              <a:rPr lang="de-CH" sz="2100" dirty="0" err="1">
+              <a:rPr lang="en-US" sz="2100" dirty="0">
                 <a:latin typeface="Calibri body"/>
               </a:rPr>
-              <a:t>Timestamp</a:t>
-            </a:r>
-            <a:r>
-              <a:rPr lang="de-CH" sz="2100" dirty="0">
-                <a:latin typeface="Calibri body"/>
-              </a:rPr>
-              <a:t>, </a:t>
-            </a:r>
-            <a:r>
-              <a:rPr lang="de-CH" sz="2100" dirty="0" err="1">
-                <a:latin typeface="Calibri body"/>
-              </a:rPr>
-              <a:t>timestamp</a:t>
-            </a:r>
-            <a:r>
-              <a:rPr lang="de-CH" sz="2100" dirty="0">
-                <a:latin typeface="Calibri body"/>
-              </a:rPr>
-              <a:t>-type, </a:t>
-            </a:r>
-            <a:r>
-              <a:rPr lang="de-CH" sz="2100" dirty="0" err="1">
-                <a:latin typeface="Calibri body"/>
-              </a:rPr>
-              <a:t>vrf</a:t>
-            </a:r>
-            <a:r>
-              <a:rPr lang="de-CH" sz="2100" dirty="0">
-                <a:latin typeface="Calibri body"/>
-              </a:rPr>
-              <a:t>-</a:t>
-            </a:r>
-            <a:r>
-              <a:rPr lang="de-CH" sz="2100" dirty="0" err="1">
-                <a:latin typeface="Calibri body"/>
-              </a:rPr>
-              <a:t>table</a:t>
-            </a:r>
-            <a:r>
-              <a:rPr lang="de-CH" sz="2100" dirty="0">
-                <a:latin typeface="Calibri body"/>
-              </a:rPr>
-              <a:t>-name and </a:t>
-            </a:r>
-            <a:r>
-              <a:rPr lang="de-CH" sz="2100" dirty="0" err="1">
-                <a:latin typeface="Calibri body"/>
-              </a:rPr>
-              <a:t>sequence</a:t>
-            </a:r>
-            <a:r>
-              <a:rPr lang="de-CH" sz="2100" dirty="0">
-                <a:latin typeface="Calibri body"/>
-              </a:rPr>
-              <a:t> </a:t>
-            </a:r>
-            <a:r>
-              <a:rPr lang="de-CH" sz="2100" dirty="0" err="1">
-                <a:latin typeface="Calibri body"/>
-              </a:rPr>
-              <a:t>number</a:t>
-            </a:r>
-            <a:r>
-              <a:rPr lang="de-CH" sz="2100" dirty="0">
-                <a:latin typeface="Calibri body"/>
-              </a:rPr>
-              <a:t> </a:t>
-            </a:r>
-            <a:r>
-              <a:rPr lang="de-CH" sz="2100" dirty="0" err="1">
-                <a:latin typeface="Calibri body"/>
-              </a:rPr>
-              <a:t>from</a:t>
-            </a:r>
-            <a:r>
-              <a:rPr lang="de-CH" sz="2100" dirty="0">
-                <a:latin typeface="Calibri body"/>
-              </a:rPr>
-              <a:t> </a:t>
-            </a:r>
-            <a:r>
-              <a:rPr lang="de-CH" sz="2100" dirty="0">
-                <a:latin typeface="Calibri body"/>
-                <a:hlinkClick r:id="rId2"/>
-              </a:rPr>
-              <a:t>draft-ietf-grow-bmp-tlv</a:t>
-            </a:r>
-            <a:r>
-              <a:rPr lang="de-CH" sz="2100" dirty="0">
-                <a:latin typeface="Calibri body"/>
-              </a:rPr>
-              <a:t>.</a:t>
-            </a:r>
-            <a:endParaRPr lang="de-CH" sz="2100" dirty="0"/>
+              <a:t>Avoid duplicating BGP semantics already standardized in IDR.</a:t>
+            </a:r>
           </a:p>
           <a:p>
             <a:pPr marL="0" indent="0">
@@ -8929,6 +9954,89 @@
               </a:spcAft>
               <a:buNone/>
             </a:pPr>
+            <a:r>
+              <a:rPr lang="en-US" sz="2100" dirty="0">
+                <a:latin typeface="Calibri body"/>
+              </a:rPr>
+              <a:t>We have an open request to draft-</a:t>
+            </a:r>
+            <a:r>
+              <a:rPr lang="en-US" sz="2100" dirty="0" err="1">
+                <a:latin typeface="Calibri body"/>
+              </a:rPr>
+              <a:t>ietf</a:t>
+            </a:r>
+            <a:r>
+              <a:rPr lang="en-US" sz="2100" dirty="0">
+                <a:latin typeface="Calibri body"/>
+              </a:rPr>
+              <a:t>-</a:t>
+            </a:r>
+            <a:r>
+              <a:rPr lang="en-US" sz="2100" dirty="0" err="1">
+                <a:latin typeface="Calibri body"/>
+              </a:rPr>
+              <a:t>idr</a:t>
+            </a:r>
+            <a:r>
+              <a:rPr lang="en-US" sz="2100" dirty="0">
+                <a:latin typeface="Calibri body"/>
+              </a:rPr>
+              <a:t>-</a:t>
+            </a:r>
+            <a:r>
+              <a:rPr lang="en-US" sz="2100" dirty="0" err="1">
+                <a:latin typeface="Calibri body"/>
+              </a:rPr>
+              <a:t>bgp</a:t>
+            </a:r>
+            <a:r>
+              <a:rPr lang="en-US" sz="2100" dirty="0">
+                <a:latin typeface="Calibri body"/>
+              </a:rPr>
+              <a:t>-model authors to </a:t>
+            </a:r>
+            <a:r>
+              <a:rPr lang="en-US" sz="2100" b="1" dirty="0">
+                <a:latin typeface="Calibri body"/>
+              </a:rPr>
+              <a:t>restructure </a:t>
+            </a:r>
+            <a:r>
+              <a:rPr lang="en-US" sz="2100" b="1" dirty="0" err="1">
+                <a:latin typeface="Calibri body"/>
+              </a:rPr>
+              <a:t>ietf-bgp</a:t>
+            </a:r>
+            <a:r>
+              <a:rPr lang="en-US" sz="2100" b="1" dirty="0">
+                <a:latin typeface="Calibri body"/>
+              </a:rPr>
+              <a:t> from submodules to standalone reusable modules </a:t>
+            </a:r>
+            <a:r>
+              <a:rPr lang="en-US" sz="2100" dirty="0">
+                <a:latin typeface="Calibri body"/>
+              </a:rPr>
+              <a:t>(since submodules cannot be imported independently of the main module).</a:t>
+            </a:r>
+          </a:p>
+          <a:p>
+            <a:pPr marL="0" indent="0">
+              <a:spcBef>
+                <a:spcPts val="600"/>
+              </a:spcBef>
+              <a:spcAft>
+                <a:spcPts val="600"/>
+              </a:spcAft>
+              <a:buNone/>
+            </a:pPr>
+            <a:r>
+              <a:rPr lang="en-US" sz="2100" dirty="0">
+                <a:latin typeface="Calibri body"/>
+              </a:rPr>
+              <a:t>YANG modules in this draft could then be simplified to import only the specific modules needed, avoiding to pull in BGP configuration and policy related content which is not needed for telemetry use cases.</a:t>
+            </a:r>
             <a:endParaRPr lang="en-US" sz="2100" dirty="0"/>
           </a:p>
         </p:txBody>
@@ -8961,6 +10069,1227 @@
           <a:p>
             <a:fld id="{FC4AC485-25DE-431E-B345-9C0A15BB7F8A}" type="slidenum">
               <a:rPr lang="en-US" sz="1400" smtClean="0"/>
+              <a:t>4</a:t>
+            </a:fld>
+            <a:endParaRPr lang="en-US" sz="1400" dirty="0"/>
+          </a:p>
+        </p:txBody>
+      </p:sp>
+      <p:sp>
+        <p:nvSpPr>
+          <p:cNvPr id="4" name="TextBox 3">
+            <a:extLst>
+              <a:ext uri="{FF2B5EF4-FFF2-40B4-BE49-F238E27FC236}">
+                <a16:creationId xmlns:a16="http://schemas.microsoft.com/office/drawing/2014/main" id="{121A1905-BF39-944D-1A1A-CBC53B6F2062}"/>
+              </a:ext>
+            </a:extLst>
+          </p:cNvPr>
+          <p:cNvSpPr txBox="1"/>
+          <p:nvPr/>
+        </p:nvSpPr>
+        <p:spPr>
+          <a:xfrm>
+            <a:off x="8183880" y="1599256"/>
+            <a:ext cx="4008120" cy="2862322"/>
+          </a:xfrm>
+          <a:prstGeom prst="rect">
+            <a:avLst/>
+          </a:prstGeom>
+          <a:noFill/>
+        </p:spPr>
+        <p:txBody>
+          <a:bodyPr wrap="square">
+            <a:spAutoFit/>
+          </a:bodyPr>
+          <a:lstStyle/>
+          <a:p>
+            <a:endParaRPr lang="de-CH" sz="1200" dirty="0">
+              <a:latin typeface="Courier New" panose="02070309020205020404" pitchFamily="49" charset="0"/>
+              <a:cs typeface="Courier New" panose="02070309020205020404" pitchFamily="49" charset="0"/>
+            </a:endParaRPr>
+          </a:p>
+          <a:p>
+            <a:r>
+              <a:rPr lang="de-CH" sz="1200" dirty="0" err="1">
+                <a:latin typeface="Courier New" panose="02070309020205020404" pitchFamily="49" charset="0"/>
+                <a:cs typeface="Courier New" panose="02070309020205020404" pitchFamily="49" charset="0"/>
+              </a:rPr>
+              <a:t>module</a:t>
+            </a:r>
+            <a:r>
+              <a:rPr lang="de-CH" sz="1200" dirty="0">
+                <a:latin typeface="Courier New" panose="02070309020205020404" pitchFamily="49" charset="0"/>
+                <a:cs typeface="Courier New" panose="02070309020205020404" pitchFamily="49" charset="0"/>
+              </a:rPr>
+              <a:t> </a:t>
+            </a:r>
+            <a:r>
+              <a:rPr lang="de-CH" sz="1200" dirty="0" err="1">
+                <a:latin typeface="Courier New" panose="02070309020205020404" pitchFamily="49" charset="0"/>
+                <a:cs typeface="Courier New" panose="02070309020205020404" pitchFamily="49" charset="0"/>
+              </a:rPr>
+              <a:t>ietf-bgp-rib-entry</a:t>
+            </a:r>
+            <a:r>
+              <a:rPr lang="de-CH" sz="1200" dirty="0">
+                <a:latin typeface="Courier New" panose="02070309020205020404" pitchFamily="49" charset="0"/>
+                <a:cs typeface="Courier New" panose="02070309020205020404" pitchFamily="49" charset="0"/>
+              </a:rPr>
+              <a:t> {</a:t>
+            </a:r>
+          </a:p>
+          <a:p>
+            <a:r>
+              <a:rPr lang="de-CH" sz="1200" dirty="0">
+                <a:latin typeface="Courier New" panose="02070309020205020404" pitchFamily="49" charset="0"/>
+                <a:cs typeface="Courier New" panose="02070309020205020404" pitchFamily="49" charset="0"/>
+              </a:rPr>
+              <a:t>  </a:t>
+            </a:r>
+            <a:r>
+              <a:rPr lang="de-CH" sz="1200" dirty="0" err="1">
+                <a:latin typeface="Courier New" panose="02070309020205020404" pitchFamily="49" charset="0"/>
+                <a:cs typeface="Courier New" panose="02070309020205020404" pitchFamily="49" charset="0"/>
+              </a:rPr>
+              <a:t>yang</a:t>
+            </a:r>
+            <a:r>
+              <a:rPr lang="de-CH" sz="1200" dirty="0">
+                <a:latin typeface="Courier New" panose="02070309020205020404" pitchFamily="49" charset="0"/>
+                <a:cs typeface="Courier New" panose="02070309020205020404" pitchFamily="49" charset="0"/>
+              </a:rPr>
+              <a:t>-version 1.1;</a:t>
+            </a:r>
+          </a:p>
+          <a:p>
+            <a:r>
+              <a:rPr lang="de-CH" sz="1200" dirty="0">
+                <a:latin typeface="Courier New" panose="02070309020205020404" pitchFamily="49" charset="0"/>
+                <a:cs typeface="Courier New" panose="02070309020205020404" pitchFamily="49" charset="0"/>
+              </a:rPr>
+              <a:t>  </a:t>
+            </a:r>
+            <a:r>
+              <a:rPr lang="de-CH" sz="1200" dirty="0" err="1">
+                <a:latin typeface="Courier New" panose="02070309020205020404" pitchFamily="49" charset="0"/>
+                <a:cs typeface="Courier New" panose="02070309020205020404" pitchFamily="49" charset="0"/>
+              </a:rPr>
+              <a:t>namespace</a:t>
+            </a:r>
+            <a:r>
+              <a:rPr lang="de-CH" sz="1200" dirty="0">
+                <a:latin typeface="Courier New" panose="02070309020205020404" pitchFamily="49" charset="0"/>
+                <a:cs typeface="Courier New" panose="02070309020205020404" pitchFamily="49" charset="0"/>
+              </a:rPr>
+              <a:t> "</a:t>
+            </a:r>
+            <a:r>
+              <a:rPr lang="de-CH" sz="1200" dirty="0" err="1">
+                <a:latin typeface="Courier New" panose="02070309020205020404" pitchFamily="49" charset="0"/>
+                <a:cs typeface="Courier New" panose="02070309020205020404" pitchFamily="49" charset="0"/>
+              </a:rPr>
+              <a:t>urn:ietf:params:xml:ns:yang:ietf-bgp-rib-entry</a:t>
+            </a:r>
+            <a:r>
+              <a:rPr lang="de-CH" sz="1200" dirty="0">
+                <a:latin typeface="Courier New" panose="02070309020205020404" pitchFamily="49" charset="0"/>
+                <a:cs typeface="Courier New" panose="02070309020205020404" pitchFamily="49" charset="0"/>
+              </a:rPr>
+              <a:t>";</a:t>
+            </a:r>
+          </a:p>
+          <a:p>
+            <a:r>
+              <a:rPr lang="de-CH" sz="1200" dirty="0">
+                <a:latin typeface="Courier New" panose="02070309020205020404" pitchFamily="49" charset="0"/>
+                <a:cs typeface="Courier New" panose="02070309020205020404" pitchFamily="49" charset="0"/>
+              </a:rPr>
+              <a:t>  </a:t>
+            </a:r>
+            <a:r>
+              <a:rPr lang="de-CH" sz="1200" dirty="0" err="1">
+                <a:latin typeface="Courier New" panose="02070309020205020404" pitchFamily="49" charset="0"/>
+                <a:cs typeface="Courier New" panose="02070309020205020404" pitchFamily="49" charset="0"/>
+              </a:rPr>
+              <a:t>prefix</a:t>
+            </a:r>
+            <a:r>
+              <a:rPr lang="de-CH" sz="1200" dirty="0">
+                <a:latin typeface="Courier New" panose="02070309020205020404" pitchFamily="49" charset="0"/>
+                <a:cs typeface="Courier New" panose="02070309020205020404" pitchFamily="49" charset="0"/>
+              </a:rPr>
+              <a:t> </a:t>
+            </a:r>
+            <a:r>
+              <a:rPr lang="de-CH" sz="1200" dirty="0" err="1">
+                <a:latin typeface="Courier New" panose="02070309020205020404" pitchFamily="49" charset="0"/>
+                <a:cs typeface="Courier New" panose="02070309020205020404" pitchFamily="49" charset="0"/>
+              </a:rPr>
+              <a:t>bre</a:t>
+            </a:r>
+            <a:r>
+              <a:rPr lang="de-CH" sz="1200" dirty="0">
+                <a:latin typeface="Courier New" panose="02070309020205020404" pitchFamily="49" charset="0"/>
+                <a:cs typeface="Courier New" panose="02070309020205020404" pitchFamily="49" charset="0"/>
+              </a:rPr>
+              <a:t>;</a:t>
+            </a:r>
+          </a:p>
+          <a:p>
+            <a:r>
+              <a:rPr lang="de-CH" sz="1200" dirty="0">
+                <a:latin typeface="Courier New" panose="02070309020205020404" pitchFamily="49" charset="0"/>
+                <a:cs typeface="Courier New" panose="02070309020205020404" pitchFamily="49" charset="0"/>
+              </a:rPr>
+              <a:t>  </a:t>
+            </a:r>
+          </a:p>
+          <a:p>
+            <a:r>
+              <a:rPr lang="de-CH" sz="1200" dirty="0">
+                <a:latin typeface="Courier New" panose="02070309020205020404" pitchFamily="49" charset="0"/>
+                <a:cs typeface="Courier New" panose="02070309020205020404" pitchFamily="49" charset="0"/>
+              </a:rPr>
+              <a:t>  </a:t>
+            </a:r>
+            <a:r>
+              <a:rPr lang="de-CH" sz="1200" dirty="0" err="1">
+                <a:latin typeface="Courier New" panose="02070309020205020404" pitchFamily="49" charset="0"/>
+                <a:cs typeface="Courier New" panose="02070309020205020404" pitchFamily="49" charset="0"/>
+              </a:rPr>
+              <a:t>import</a:t>
+            </a:r>
+            <a:r>
+              <a:rPr lang="de-CH" sz="1200" dirty="0">
+                <a:latin typeface="Courier New" panose="02070309020205020404" pitchFamily="49" charset="0"/>
+                <a:cs typeface="Courier New" panose="02070309020205020404" pitchFamily="49" charset="0"/>
+              </a:rPr>
+              <a:t> </a:t>
+            </a:r>
+            <a:r>
+              <a:rPr lang="de-CH" sz="1200" dirty="0" err="1">
+                <a:latin typeface="Courier New" panose="02070309020205020404" pitchFamily="49" charset="0"/>
+                <a:cs typeface="Courier New" panose="02070309020205020404" pitchFamily="49" charset="0"/>
+              </a:rPr>
+              <a:t>ietf-inet-types</a:t>
+            </a:r>
+            <a:r>
+              <a:rPr lang="de-CH" sz="1200" dirty="0">
+                <a:latin typeface="Courier New" panose="02070309020205020404" pitchFamily="49" charset="0"/>
+                <a:cs typeface="Courier New" panose="02070309020205020404" pitchFamily="49" charset="0"/>
+              </a:rPr>
+              <a:t> { </a:t>
+            </a:r>
+            <a:r>
+              <a:rPr lang="de-CH" sz="1200" dirty="0" err="1">
+                <a:latin typeface="Courier New" panose="02070309020205020404" pitchFamily="49" charset="0"/>
+                <a:cs typeface="Courier New" panose="02070309020205020404" pitchFamily="49" charset="0"/>
+              </a:rPr>
+              <a:t>prefix</a:t>
+            </a:r>
+            <a:r>
+              <a:rPr lang="de-CH" sz="1200" dirty="0">
+                <a:latin typeface="Courier New" panose="02070309020205020404" pitchFamily="49" charset="0"/>
+                <a:cs typeface="Courier New" panose="02070309020205020404" pitchFamily="49" charset="0"/>
+              </a:rPr>
+              <a:t> </a:t>
+            </a:r>
+            <a:r>
+              <a:rPr lang="de-CH" sz="1200" dirty="0" err="1">
+                <a:latin typeface="Courier New" panose="02070309020205020404" pitchFamily="49" charset="0"/>
+                <a:cs typeface="Courier New" panose="02070309020205020404" pitchFamily="49" charset="0"/>
+              </a:rPr>
+              <a:t>inet</a:t>
+            </a:r>
+            <a:r>
+              <a:rPr lang="de-CH" sz="1200" dirty="0">
+                <a:latin typeface="Courier New" panose="02070309020205020404" pitchFamily="49" charset="0"/>
+                <a:cs typeface="Courier New" panose="02070309020205020404" pitchFamily="49" charset="0"/>
+              </a:rPr>
+              <a:t>; }</a:t>
+            </a:r>
+          </a:p>
+          <a:p>
+            <a:r>
+              <a:rPr lang="de-CH" sz="1200" dirty="0">
+                <a:latin typeface="Courier New" panose="02070309020205020404" pitchFamily="49" charset="0"/>
+                <a:cs typeface="Courier New" panose="02070309020205020404" pitchFamily="49" charset="0"/>
+              </a:rPr>
+              <a:t>  </a:t>
+            </a:r>
+            <a:r>
+              <a:rPr lang="de-CH" sz="1200" dirty="0" err="1">
+                <a:latin typeface="Courier New" panose="02070309020205020404" pitchFamily="49" charset="0"/>
+                <a:cs typeface="Courier New" panose="02070309020205020404" pitchFamily="49" charset="0"/>
+              </a:rPr>
+              <a:t>import</a:t>
+            </a:r>
+            <a:r>
+              <a:rPr lang="de-CH" sz="1200" dirty="0">
+                <a:latin typeface="Courier New" panose="02070309020205020404" pitchFamily="49" charset="0"/>
+                <a:cs typeface="Courier New" panose="02070309020205020404" pitchFamily="49" charset="0"/>
+              </a:rPr>
+              <a:t> </a:t>
+            </a:r>
+            <a:r>
+              <a:rPr lang="de-CH" sz="1200" dirty="0" err="1">
+                <a:latin typeface="Courier New" panose="02070309020205020404" pitchFamily="49" charset="0"/>
+                <a:cs typeface="Courier New" panose="02070309020205020404" pitchFamily="49" charset="0"/>
+              </a:rPr>
+              <a:t>ietf-yang-types</a:t>
+            </a:r>
+            <a:r>
+              <a:rPr lang="de-CH" sz="1200" dirty="0">
+                <a:latin typeface="Courier New" panose="02070309020205020404" pitchFamily="49" charset="0"/>
+                <a:cs typeface="Courier New" panose="02070309020205020404" pitchFamily="49" charset="0"/>
+              </a:rPr>
+              <a:t> { </a:t>
+            </a:r>
+            <a:r>
+              <a:rPr lang="de-CH" sz="1200" dirty="0" err="1">
+                <a:latin typeface="Courier New" panose="02070309020205020404" pitchFamily="49" charset="0"/>
+                <a:cs typeface="Courier New" panose="02070309020205020404" pitchFamily="49" charset="0"/>
+              </a:rPr>
+              <a:t>prefix</a:t>
+            </a:r>
+            <a:r>
+              <a:rPr lang="de-CH" sz="1200" dirty="0">
+                <a:latin typeface="Courier New" panose="02070309020205020404" pitchFamily="49" charset="0"/>
+                <a:cs typeface="Courier New" panose="02070309020205020404" pitchFamily="49" charset="0"/>
+              </a:rPr>
+              <a:t> </a:t>
+            </a:r>
+            <a:r>
+              <a:rPr lang="de-CH" sz="1200" dirty="0" err="1">
+                <a:latin typeface="Courier New" panose="02070309020205020404" pitchFamily="49" charset="0"/>
+                <a:cs typeface="Courier New" panose="02070309020205020404" pitchFamily="49" charset="0"/>
+              </a:rPr>
+              <a:t>yang</a:t>
+            </a:r>
+            <a:r>
+              <a:rPr lang="de-CH" sz="1200" dirty="0">
+                <a:latin typeface="Courier New" panose="02070309020205020404" pitchFamily="49" charset="0"/>
+                <a:cs typeface="Courier New" panose="02070309020205020404" pitchFamily="49" charset="0"/>
+              </a:rPr>
+              <a:t>; }</a:t>
+            </a:r>
+          </a:p>
+          <a:p>
+            <a:r>
+              <a:rPr lang="de-CH" sz="1200" dirty="0">
+                <a:latin typeface="Courier New" panose="02070309020205020404" pitchFamily="49" charset="0"/>
+                <a:cs typeface="Courier New" panose="02070309020205020404" pitchFamily="49" charset="0"/>
+              </a:rPr>
+              <a:t>  </a:t>
+            </a:r>
+            <a:r>
+              <a:rPr lang="de-CH" sz="1200" dirty="0" err="1">
+                <a:latin typeface="Courier New" panose="02070309020205020404" pitchFamily="49" charset="0"/>
+                <a:cs typeface="Courier New" panose="02070309020205020404" pitchFamily="49" charset="0"/>
+              </a:rPr>
+              <a:t>import</a:t>
+            </a:r>
+            <a:r>
+              <a:rPr lang="de-CH" sz="1200" dirty="0">
+                <a:latin typeface="Courier New" panose="02070309020205020404" pitchFamily="49" charset="0"/>
+                <a:cs typeface="Courier New" panose="02070309020205020404" pitchFamily="49" charset="0"/>
+              </a:rPr>
+              <a:t> </a:t>
+            </a:r>
+            <a:r>
+              <a:rPr lang="de-CH" sz="1200" dirty="0" err="1">
+                <a:latin typeface="Courier New" panose="02070309020205020404" pitchFamily="49" charset="0"/>
+                <a:cs typeface="Courier New" panose="02070309020205020404" pitchFamily="49" charset="0"/>
+              </a:rPr>
+              <a:t>iana-bgp-types</a:t>
+            </a:r>
+            <a:r>
+              <a:rPr lang="de-CH" sz="1200" dirty="0">
+                <a:latin typeface="Courier New" panose="02070309020205020404" pitchFamily="49" charset="0"/>
+                <a:cs typeface="Courier New" panose="02070309020205020404" pitchFamily="49" charset="0"/>
+              </a:rPr>
+              <a:t>   { </a:t>
+            </a:r>
+            <a:r>
+              <a:rPr lang="de-CH" sz="1200" dirty="0" err="1">
+                <a:latin typeface="Courier New" panose="02070309020205020404" pitchFamily="49" charset="0"/>
+                <a:cs typeface="Courier New" panose="02070309020205020404" pitchFamily="49" charset="0"/>
+              </a:rPr>
+              <a:t>prefix</a:t>
+            </a:r>
+            <a:r>
+              <a:rPr lang="de-CH" sz="1200" dirty="0">
+                <a:latin typeface="Courier New" panose="02070309020205020404" pitchFamily="49" charset="0"/>
+                <a:cs typeface="Courier New" panose="02070309020205020404" pitchFamily="49" charset="0"/>
+              </a:rPr>
+              <a:t> </a:t>
+            </a:r>
+            <a:r>
+              <a:rPr lang="de-CH" sz="1200" dirty="0" err="1">
+                <a:latin typeface="Courier New" panose="02070309020205020404" pitchFamily="49" charset="0"/>
+                <a:cs typeface="Courier New" panose="02070309020205020404" pitchFamily="49" charset="0"/>
+              </a:rPr>
+              <a:t>bt</a:t>
+            </a:r>
+            <a:r>
+              <a:rPr lang="de-CH" sz="1200" dirty="0">
+                <a:latin typeface="Courier New" panose="02070309020205020404" pitchFamily="49" charset="0"/>
+                <a:cs typeface="Courier New" panose="02070309020205020404" pitchFamily="49" charset="0"/>
+              </a:rPr>
+              <a:t>; }</a:t>
+            </a:r>
+          </a:p>
+          <a:p>
+            <a:r>
+              <a:rPr lang="de-CH" sz="1200" dirty="0">
+                <a:latin typeface="Courier New" panose="02070309020205020404" pitchFamily="49" charset="0"/>
+                <a:cs typeface="Courier New" panose="02070309020205020404" pitchFamily="49" charset="0"/>
+              </a:rPr>
+              <a:t>  </a:t>
+            </a:r>
+          </a:p>
+          <a:p>
+            <a:r>
+              <a:rPr lang="de-CH" sz="1200" dirty="0">
+                <a:latin typeface="Courier New" panose="02070309020205020404" pitchFamily="49" charset="0"/>
+                <a:cs typeface="Courier New" panose="02070309020205020404" pitchFamily="49" charset="0"/>
+              </a:rPr>
+              <a:t>  // </a:t>
+            </a:r>
+            <a:r>
+              <a:rPr lang="de-CH" sz="1200" dirty="0" err="1">
+                <a:latin typeface="Courier New" panose="02070309020205020404" pitchFamily="49" charset="0"/>
+                <a:cs typeface="Courier New" panose="02070309020205020404" pitchFamily="49" charset="0"/>
+              </a:rPr>
+              <a:t>from</a:t>
+            </a:r>
+            <a:r>
+              <a:rPr lang="de-CH" sz="1200" dirty="0">
+                <a:latin typeface="Courier New" panose="02070309020205020404" pitchFamily="49" charset="0"/>
+                <a:cs typeface="Courier New" panose="02070309020205020404" pitchFamily="49" charset="0"/>
+              </a:rPr>
+              <a:t> draft-</a:t>
+            </a:r>
+            <a:r>
+              <a:rPr lang="de-CH" sz="1200" dirty="0" err="1">
+                <a:latin typeface="Courier New" panose="02070309020205020404" pitchFamily="49" charset="0"/>
+                <a:cs typeface="Courier New" panose="02070309020205020404" pitchFamily="49" charset="0"/>
+              </a:rPr>
+              <a:t>ietf</a:t>
+            </a:r>
+            <a:r>
+              <a:rPr lang="de-CH" sz="1200" dirty="0">
+                <a:latin typeface="Courier New" panose="02070309020205020404" pitchFamily="49" charset="0"/>
+                <a:cs typeface="Courier New" panose="02070309020205020404" pitchFamily="49" charset="0"/>
+              </a:rPr>
+              <a:t>-</a:t>
+            </a:r>
+            <a:r>
+              <a:rPr lang="de-CH" sz="1200" dirty="0" err="1">
+                <a:latin typeface="Courier New" panose="02070309020205020404" pitchFamily="49" charset="0"/>
+                <a:cs typeface="Courier New" panose="02070309020205020404" pitchFamily="49" charset="0"/>
+              </a:rPr>
+              <a:t>idr</a:t>
+            </a:r>
+            <a:r>
+              <a:rPr lang="de-CH" sz="1200" dirty="0">
+                <a:latin typeface="Courier New" panose="02070309020205020404" pitchFamily="49" charset="0"/>
+                <a:cs typeface="Courier New" panose="02070309020205020404" pitchFamily="49" charset="0"/>
+              </a:rPr>
+              <a:t>-</a:t>
+            </a:r>
+            <a:r>
+              <a:rPr lang="de-CH" sz="1200" dirty="0" err="1">
+                <a:latin typeface="Courier New" panose="02070309020205020404" pitchFamily="49" charset="0"/>
+                <a:cs typeface="Courier New" panose="02070309020205020404" pitchFamily="49" charset="0"/>
+              </a:rPr>
+              <a:t>bgp</a:t>
+            </a:r>
+            <a:r>
+              <a:rPr lang="de-CH" sz="1200" dirty="0">
+                <a:latin typeface="Courier New" panose="02070309020205020404" pitchFamily="49" charset="0"/>
+                <a:cs typeface="Courier New" panose="02070309020205020404" pitchFamily="49" charset="0"/>
+              </a:rPr>
+              <a:t>-model</a:t>
+            </a:r>
+          </a:p>
+          <a:p>
+            <a:r>
+              <a:rPr lang="de-CH" sz="1200" dirty="0">
+                <a:latin typeface="Courier New" panose="02070309020205020404" pitchFamily="49" charset="0"/>
+                <a:cs typeface="Courier New" panose="02070309020205020404" pitchFamily="49" charset="0"/>
+              </a:rPr>
+              <a:t>  </a:t>
+            </a:r>
+            <a:r>
+              <a:rPr lang="de-CH" sz="1200" dirty="0" err="1">
+                <a:highlight>
+                  <a:srgbClr val="FFFF00"/>
+                </a:highlight>
+                <a:latin typeface="Courier New" panose="02070309020205020404" pitchFamily="49" charset="0"/>
+                <a:cs typeface="Courier New" panose="02070309020205020404" pitchFamily="49" charset="0"/>
+              </a:rPr>
+              <a:t>import</a:t>
+            </a:r>
+            <a:r>
+              <a:rPr lang="de-CH" sz="1200" dirty="0">
+                <a:highlight>
+                  <a:srgbClr val="FFFF00"/>
+                </a:highlight>
+                <a:latin typeface="Courier New" panose="02070309020205020404" pitchFamily="49" charset="0"/>
+                <a:cs typeface="Courier New" panose="02070309020205020404" pitchFamily="49" charset="0"/>
+              </a:rPr>
+              <a:t> </a:t>
+            </a:r>
+            <a:r>
+              <a:rPr lang="de-CH" sz="1200" dirty="0" err="1">
+                <a:highlight>
+                  <a:srgbClr val="FFFF00"/>
+                </a:highlight>
+                <a:latin typeface="Courier New" panose="02070309020205020404" pitchFamily="49" charset="0"/>
+                <a:cs typeface="Courier New" panose="02070309020205020404" pitchFamily="49" charset="0"/>
+              </a:rPr>
+              <a:t>ietf-bgp</a:t>
+            </a:r>
+            <a:r>
+              <a:rPr lang="de-CH" sz="1200" dirty="0">
+                <a:highlight>
+                  <a:srgbClr val="FFFF00"/>
+                </a:highlight>
+                <a:latin typeface="Courier New" panose="02070309020205020404" pitchFamily="49" charset="0"/>
+                <a:cs typeface="Courier New" panose="02070309020205020404" pitchFamily="49" charset="0"/>
+              </a:rPr>
+              <a:t> { </a:t>
+            </a:r>
+            <a:r>
+              <a:rPr lang="de-CH" sz="1200" dirty="0" err="1">
+                <a:highlight>
+                  <a:srgbClr val="FFFF00"/>
+                </a:highlight>
+                <a:latin typeface="Courier New" panose="02070309020205020404" pitchFamily="49" charset="0"/>
+                <a:cs typeface="Courier New" panose="02070309020205020404" pitchFamily="49" charset="0"/>
+              </a:rPr>
+              <a:t>prefix</a:t>
+            </a:r>
+            <a:r>
+              <a:rPr lang="de-CH" sz="1200" dirty="0">
+                <a:highlight>
+                  <a:srgbClr val="FFFF00"/>
+                </a:highlight>
+                <a:latin typeface="Courier New" panose="02070309020205020404" pitchFamily="49" charset="0"/>
+                <a:cs typeface="Courier New" panose="02070309020205020404" pitchFamily="49" charset="0"/>
+              </a:rPr>
+              <a:t> </a:t>
+            </a:r>
+            <a:r>
+              <a:rPr lang="de-CH" sz="1200" dirty="0" err="1">
+                <a:highlight>
+                  <a:srgbClr val="FFFF00"/>
+                </a:highlight>
+                <a:latin typeface="Courier New" panose="02070309020205020404" pitchFamily="49" charset="0"/>
+                <a:cs typeface="Courier New" panose="02070309020205020404" pitchFamily="49" charset="0"/>
+              </a:rPr>
+              <a:t>bgp</a:t>
+            </a:r>
+            <a:r>
+              <a:rPr lang="de-CH" sz="1200" dirty="0">
+                <a:highlight>
+                  <a:srgbClr val="FFFF00"/>
+                </a:highlight>
+                <a:latin typeface="Courier New" panose="02070309020205020404" pitchFamily="49" charset="0"/>
+                <a:cs typeface="Courier New" panose="02070309020205020404" pitchFamily="49" charset="0"/>
+              </a:rPr>
+              <a:t>; }</a:t>
+            </a:r>
+          </a:p>
+          <a:p>
+            <a:r>
+              <a:rPr lang="de-CH" sz="1200" dirty="0">
+                <a:latin typeface="Courier New" panose="02070309020205020404" pitchFamily="49" charset="0"/>
+                <a:cs typeface="Courier New" panose="02070309020205020404" pitchFamily="49" charset="0"/>
+              </a:rPr>
+              <a:t>}</a:t>
+            </a:r>
+          </a:p>
+        </p:txBody>
+      </p:sp>
+    </p:spTree>
+    <p:extLst>
+      <p:ext uri="{BB962C8B-B14F-4D97-AF65-F5344CB8AC3E}">
+        <p14:creationId xmlns:p14="http://schemas.microsoft.com/office/powerpoint/2010/main" val="1452467401"/>
+      </p:ext>
+    </p:extLst>
+  </p:cSld>
+  <p:clrMapOvr>
+    <a:masterClrMapping/>
+  </p:clrMapOvr>
+</p:sld>
+</file>
+
+<file path=ppt/slides/slide5.xml><?xml version="1.0" encoding="utf-8"?>
+<p:sld xmlns:a="http://schemas.openxmlformats.org/drawingml/2006/main" xmlns:r="http://schemas.openxmlformats.org/officeDocument/2006/relationships" xmlns:p="http://schemas.openxmlformats.org/presentationml/2006/main">
+  <p:cSld>
+    <p:spTree>
+      <p:nvGrpSpPr>
+        <p:cNvPr id="1" name="">
+          <a:extLst>
+            <a:ext uri="{FF2B5EF4-FFF2-40B4-BE49-F238E27FC236}">
+              <a16:creationId xmlns:a16="http://schemas.microsoft.com/office/drawing/2014/main" id="{52AFC713-712E-7764-69F8-8260573A376E}"/>
+            </a:ext>
+          </a:extLst>
+        </p:cNvPr>
+        <p:cNvGrpSpPr/>
+        <p:nvPr/>
+      </p:nvGrpSpPr>
+      <p:grpSpPr>
+        <a:xfrm>
+          <a:off x="0" y="0"/>
+          <a:ext cx="0" cy="0"/>
+          <a:chOff x="0" y="0"/>
+          <a:chExt cx="0" cy="0"/>
+        </a:xfrm>
+      </p:grpSpPr>
+      <p:sp>
+        <p:nvSpPr>
+          <p:cNvPr id="2" name="Title 1">
+            <a:extLst>
+              <a:ext uri="{FF2B5EF4-FFF2-40B4-BE49-F238E27FC236}">
+                <a16:creationId xmlns:a16="http://schemas.microsoft.com/office/drawing/2014/main" id="{C139E37C-89FD-6EBA-520E-409ED1136494}"/>
+              </a:ext>
+            </a:extLst>
+          </p:cNvPr>
+          <p:cNvSpPr>
+            <a:spLocks noGrp="1"/>
+          </p:cNvSpPr>
+          <p:nvPr>
+            <p:ph type="title"/>
+          </p:nvPr>
+        </p:nvSpPr>
+        <p:spPr/>
+        <p:txBody>
+          <a:bodyPr>
+            <a:normAutofit/>
+          </a:bodyPr>
+          <a:lstStyle/>
+          <a:p>
+            <a:r>
+              <a:rPr lang="en-US" sz="2800" b="1" dirty="0"/>
+              <a:t>BMP YANG Telemetry Message</a:t>
+            </a:r>
+            <a:br>
+              <a:rPr lang="en-US" sz="3600" dirty="0"/>
+            </a:br>
+            <a:r>
+              <a:rPr lang="en-US" sz="2700" dirty="0">
+                <a:solidFill>
+                  <a:schemeClr val="bg2">
+                    <a:lumMod val="75000"/>
+                  </a:schemeClr>
+                </a:solidFill>
+              </a:rPr>
+              <a:t>New `</a:t>
+            </a:r>
+            <a:r>
+              <a:rPr lang="en-US" sz="2700" dirty="0" err="1">
+                <a:solidFill>
+                  <a:schemeClr val="bg2">
+                    <a:lumMod val="75000"/>
+                  </a:schemeClr>
+                </a:solidFill>
+              </a:rPr>
+              <a:t>ietf</a:t>
+            </a:r>
+            <a:r>
+              <a:rPr lang="en-US" sz="2700" dirty="0">
+                <a:solidFill>
+                  <a:schemeClr val="bg2">
+                    <a:lumMod val="75000"/>
+                  </a:schemeClr>
+                </a:solidFill>
+              </a:rPr>
+              <a:t>-bmp-</a:t>
+            </a:r>
+            <a:r>
+              <a:rPr lang="en-US" sz="2700" dirty="0" err="1">
+                <a:solidFill>
+                  <a:schemeClr val="bg2">
+                    <a:lumMod val="75000"/>
+                  </a:schemeClr>
+                </a:solidFill>
+              </a:rPr>
+              <a:t>tlv</a:t>
+            </a:r>
+            <a:r>
+              <a:rPr lang="en-US" sz="2700" dirty="0">
+                <a:solidFill>
+                  <a:schemeClr val="bg2">
+                    <a:lumMod val="75000"/>
+                  </a:schemeClr>
+                </a:solidFill>
+              </a:rPr>
+              <a:t>` module</a:t>
+            </a:r>
+          </a:p>
+        </p:txBody>
+      </p:sp>
+      <p:sp>
+        <p:nvSpPr>
+          <p:cNvPr id="3" name="Content Placeholder 2">
+            <a:extLst>
+              <a:ext uri="{FF2B5EF4-FFF2-40B4-BE49-F238E27FC236}">
+                <a16:creationId xmlns:a16="http://schemas.microsoft.com/office/drawing/2014/main" id="{14533B4E-F532-2573-F0DA-58EA96731AA3}"/>
+              </a:ext>
+            </a:extLst>
+          </p:cNvPr>
+          <p:cNvSpPr>
+            <a:spLocks noGrp="1"/>
+          </p:cNvSpPr>
+          <p:nvPr>
+            <p:ph idx="1"/>
+          </p:nvPr>
+        </p:nvSpPr>
+        <p:spPr>
+          <a:xfrm>
+            <a:off x="838199" y="1690688"/>
+            <a:ext cx="6302830" cy="4486275"/>
+          </a:xfrm>
+        </p:spPr>
+        <p:txBody>
+          <a:bodyPr>
+            <a:noAutofit/>
+          </a:bodyPr>
+          <a:lstStyle/>
+          <a:p>
+            <a:pPr marL="0" indent="0">
+              <a:spcBef>
+                <a:spcPts val="600"/>
+              </a:spcBef>
+              <a:spcAft>
+                <a:spcPts val="600"/>
+              </a:spcAft>
+              <a:buNone/>
+            </a:pPr>
+            <a:r>
+              <a:rPr lang="de-CH" sz="2100" dirty="0">
+                <a:latin typeface="Calibri body"/>
+              </a:rPr>
+              <a:t>Dedicated </a:t>
+            </a:r>
+            <a:r>
+              <a:rPr lang="de-CH" sz="2100" dirty="0" err="1">
+                <a:latin typeface="Calibri body"/>
+              </a:rPr>
+              <a:t>module</a:t>
+            </a:r>
+            <a:r>
+              <a:rPr lang="de-CH" sz="2100" dirty="0">
+                <a:latin typeface="Calibri body"/>
+              </a:rPr>
+              <a:t> </a:t>
+            </a:r>
+            <a:r>
+              <a:rPr lang="de-CH" sz="2100" dirty="0" err="1">
+                <a:latin typeface="Calibri body"/>
+              </a:rPr>
+              <a:t>modeling</a:t>
+            </a:r>
+            <a:r>
+              <a:rPr lang="de-CH" sz="2100" dirty="0">
+                <a:latin typeface="Calibri body"/>
+              </a:rPr>
+              <a:t> </a:t>
+            </a:r>
+            <a:r>
+              <a:rPr lang="de-CH" sz="2100" dirty="0" err="1">
+                <a:latin typeface="Calibri body"/>
+              </a:rPr>
+              <a:t>the</a:t>
+            </a:r>
+            <a:r>
+              <a:rPr lang="de-CH" sz="2100" dirty="0">
+                <a:latin typeface="Calibri body"/>
+              </a:rPr>
+              <a:t> </a:t>
+            </a:r>
+            <a:r>
+              <a:rPr lang="de-CH" sz="2100" dirty="0" err="1">
+                <a:latin typeface="Calibri body"/>
+              </a:rPr>
+              <a:t>decoded</a:t>
+            </a:r>
+            <a:r>
+              <a:rPr lang="de-CH" sz="2100" dirty="0">
+                <a:latin typeface="Calibri body"/>
+              </a:rPr>
+              <a:t> </a:t>
+            </a:r>
+            <a:r>
+              <a:rPr lang="de-CH" sz="2100" dirty="0" err="1">
+                <a:latin typeface="Calibri body"/>
+              </a:rPr>
+              <a:t>value</a:t>
+            </a:r>
+            <a:r>
+              <a:rPr lang="de-CH" sz="2100" dirty="0">
+                <a:latin typeface="Calibri body"/>
+              </a:rPr>
+              <a:t> </a:t>
+            </a:r>
+            <a:r>
+              <a:rPr lang="de-CH" sz="2100" dirty="0" err="1">
+                <a:latin typeface="Calibri body"/>
+              </a:rPr>
+              <a:t>of</a:t>
+            </a:r>
+            <a:r>
+              <a:rPr lang="de-CH" sz="2100" dirty="0">
+                <a:latin typeface="Calibri body"/>
+              </a:rPr>
+              <a:t> BMP TLVs, </a:t>
+            </a:r>
+            <a:r>
+              <a:rPr lang="de-CH" sz="2100" dirty="0" err="1">
+                <a:latin typeface="Calibri body"/>
+              </a:rPr>
+              <a:t>consolidates</a:t>
+            </a:r>
+            <a:r>
+              <a:rPr lang="de-CH" sz="2100" dirty="0">
+                <a:latin typeface="Calibri body"/>
+              </a:rPr>
+              <a:t> TLV </a:t>
+            </a:r>
+            <a:r>
+              <a:rPr lang="de-CH" sz="2100" dirty="0" err="1">
+                <a:latin typeface="Calibri body"/>
+              </a:rPr>
+              <a:t>groupings</a:t>
+            </a:r>
+            <a:r>
+              <a:rPr lang="de-CH" sz="2100" dirty="0">
+                <a:latin typeface="Calibri body"/>
+              </a:rPr>
+              <a:t> </a:t>
+            </a:r>
+            <a:r>
+              <a:rPr lang="de-CH" sz="2100" dirty="0" err="1">
+                <a:latin typeface="Calibri body"/>
+              </a:rPr>
+              <a:t>from</a:t>
+            </a:r>
+            <a:r>
+              <a:rPr lang="de-CH" sz="2100" dirty="0">
+                <a:latin typeface="Calibri body"/>
+              </a:rPr>
+              <a:t> multiple </a:t>
+            </a:r>
+            <a:r>
+              <a:rPr lang="de-CH" sz="2100" dirty="0" err="1">
+                <a:latin typeface="Calibri body"/>
+              </a:rPr>
+              <a:t>specs</a:t>
+            </a:r>
+            <a:r>
+              <a:rPr lang="de-CH" sz="2100" dirty="0">
+                <a:latin typeface="Calibri body"/>
+              </a:rPr>
+              <a:t> in </a:t>
+            </a:r>
+            <a:r>
+              <a:rPr lang="de-CH" sz="2100" dirty="0" err="1">
+                <a:latin typeface="Calibri body"/>
+              </a:rPr>
+              <a:t>one</a:t>
+            </a:r>
+            <a:r>
+              <a:rPr lang="de-CH" sz="2100" dirty="0">
+                <a:latin typeface="Calibri body"/>
+              </a:rPr>
+              <a:t> </a:t>
+            </a:r>
+            <a:r>
+              <a:rPr lang="de-CH" sz="2100" dirty="0" err="1">
+                <a:latin typeface="Calibri body"/>
+              </a:rPr>
+              <a:t>place</a:t>
+            </a:r>
+            <a:r>
+              <a:rPr lang="de-CH" sz="2100" dirty="0">
+                <a:latin typeface="Calibri body"/>
+              </a:rPr>
+              <a:t>:</a:t>
+            </a:r>
+          </a:p>
+          <a:p>
+            <a:pPr>
+              <a:lnSpc>
+                <a:spcPct val="100000"/>
+              </a:lnSpc>
+              <a:spcBef>
+                <a:spcPts val="0"/>
+              </a:spcBef>
+            </a:pPr>
+            <a:r>
+              <a:rPr lang="de-CH" sz="2100" dirty="0">
+                <a:latin typeface="Calibri body"/>
+                <a:hlinkClick r:id="rId2"/>
+              </a:rPr>
+              <a:t>RFC 7854</a:t>
+            </a:r>
+            <a:r>
+              <a:rPr lang="de-CH" sz="2100" dirty="0">
+                <a:latin typeface="Calibri body"/>
+              </a:rPr>
+              <a:t> (BMP): Info, Term, RM TLVs</a:t>
+            </a:r>
+          </a:p>
+          <a:p>
+            <a:pPr>
+              <a:lnSpc>
+                <a:spcPct val="100000"/>
+              </a:lnSpc>
+              <a:spcBef>
+                <a:spcPts val="0"/>
+              </a:spcBef>
+            </a:pPr>
+            <a:r>
+              <a:rPr lang="de-CH" sz="2100" dirty="0">
+                <a:latin typeface="Calibri body"/>
+                <a:hlinkClick r:id="rId3"/>
+              </a:rPr>
+              <a:t>RFC 9069 </a:t>
+            </a:r>
+            <a:r>
+              <a:rPr lang="de-CH" sz="2100" dirty="0">
+                <a:latin typeface="Calibri body"/>
+              </a:rPr>
+              <a:t>(</a:t>
+            </a:r>
+            <a:r>
+              <a:rPr lang="de-CH" sz="2100" dirty="0" err="1">
+                <a:latin typeface="Calibri body"/>
+              </a:rPr>
+              <a:t>Loc-Rib</a:t>
+            </a:r>
+            <a:r>
+              <a:rPr lang="de-CH" sz="2100" dirty="0">
+                <a:latin typeface="Calibri body"/>
+              </a:rPr>
+              <a:t>): VRF/Table Name TLV</a:t>
+            </a:r>
+          </a:p>
+          <a:p>
+            <a:pPr>
+              <a:lnSpc>
+                <a:spcPct val="100000"/>
+              </a:lnSpc>
+              <a:spcBef>
+                <a:spcPts val="0"/>
+              </a:spcBef>
+            </a:pPr>
+            <a:r>
+              <a:rPr lang="de-CH" sz="2100" dirty="0">
+                <a:latin typeface="Calibri body"/>
+                <a:hlinkClick r:id="rId4"/>
+              </a:rPr>
+              <a:t>draft-ietf-grow-bmp-tlv</a:t>
+            </a:r>
+            <a:r>
+              <a:rPr lang="de-CH" sz="2100" dirty="0">
+                <a:latin typeface="Calibri body"/>
+              </a:rPr>
+              <a:t> (BMP v4)</a:t>
+            </a:r>
+          </a:p>
+          <a:p>
+            <a:pPr>
+              <a:lnSpc>
+                <a:spcPct val="100000"/>
+              </a:lnSpc>
+              <a:spcBef>
+                <a:spcPts val="0"/>
+              </a:spcBef>
+            </a:pPr>
+            <a:endParaRPr lang="de-CH" sz="2100" dirty="0">
+              <a:latin typeface="Calibri body"/>
+            </a:endParaRPr>
+          </a:p>
+          <a:p>
+            <a:pPr marL="0" indent="0">
+              <a:spcBef>
+                <a:spcPts val="600"/>
+              </a:spcBef>
+              <a:spcAft>
+                <a:spcPts val="600"/>
+              </a:spcAft>
+              <a:buNone/>
+            </a:pPr>
+            <a:r>
+              <a:rPr lang="de-CH" sz="2100" dirty="0">
+                <a:latin typeface="Calibri body"/>
+              </a:rPr>
+              <a:t>Message-type </a:t>
+            </a:r>
+            <a:r>
+              <a:rPr lang="de-CH" sz="2100" dirty="0" err="1">
+                <a:latin typeface="Calibri body"/>
+              </a:rPr>
+              <a:t>specific</a:t>
+            </a:r>
+            <a:r>
+              <a:rPr lang="de-CH" sz="2100" dirty="0">
+                <a:latin typeface="Calibri body"/>
+              </a:rPr>
+              <a:t> </a:t>
+            </a:r>
+            <a:r>
+              <a:rPr lang="de-CH" sz="2100" dirty="0" err="1">
+                <a:latin typeface="Calibri body"/>
+              </a:rPr>
+              <a:t>groupings</a:t>
+            </a:r>
+            <a:r>
+              <a:rPr lang="de-CH" sz="2100" dirty="0">
+                <a:latin typeface="Calibri body"/>
+              </a:rPr>
+              <a:t> </a:t>
+            </a:r>
+            <a:r>
+              <a:rPr lang="de-CH" sz="2100" dirty="0" err="1">
+                <a:latin typeface="Calibri body"/>
+              </a:rPr>
+              <a:t>are</a:t>
+            </a:r>
+            <a:r>
+              <a:rPr lang="de-CH" sz="2100" dirty="0">
+                <a:latin typeface="Calibri body"/>
+              </a:rPr>
+              <a:t> </a:t>
+            </a:r>
+            <a:r>
+              <a:rPr lang="de-CH" sz="2100" dirty="0" err="1">
+                <a:latin typeface="Calibri body"/>
+              </a:rPr>
+              <a:t>provided</a:t>
+            </a:r>
+            <a:r>
+              <a:rPr lang="de-CH" sz="2100" dirty="0">
+                <a:latin typeface="Calibri body"/>
+              </a:rPr>
+              <a:t>, </a:t>
+            </a:r>
+            <a:r>
+              <a:rPr lang="de-CH" sz="2100" dirty="0" err="1">
+                <a:latin typeface="Calibri body"/>
+              </a:rPr>
+              <a:t>to</a:t>
+            </a:r>
+            <a:r>
+              <a:rPr lang="de-CH" sz="2100" dirty="0">
+                <a:latin typeface="Calibri body"/>
+              </a:rPr>
+              <a:t> </a:t>
+            </a:r>
+            <a:r>
+              <a:rPr lang="de-CH" sz="2100" dirty="0" err="1">
+                <a:latin typeface="Calibri body"/>
+              </a:rPr>
+              <a:t>determine</a:t>
+            </a:r>
+            <a:r>
+              <a:rPr lang="de-CH" sz="2100" dirty="0">
+                <a:latin typeface="Calibri body"/>
+              </a:rPr>
+              <a:t> </a:t>
+            </a:r>
+            <a:r>
+              <a:rPr lang="de-CH" sz="2100" dirty="0" err="1">
+                <a:latin typeface="Calibri body"/>
+              </a:rPr>
+              <a:t>which</a:t>
+            </a:r>
+            <a:r>
+              <a:rPr lang="de-CH" sz="2100" dirty="0">
+                <a:latin typeface="Calibri body"/>
+              </a:rPr>
+              <a:t> TLVs </a:t>
+            </a:r>
+            <a:r>
+              <a:rPr lang="de-CH" sz="2100" dirty="0" err="1">
+                <a:latin typeface="Calibri body"/>
+              </a:rPr>
+              <a:t>are</a:t>
+            </a:r>
+            <a:r>
+              <a:rPr lang="de-CH" sz="2100" dirty="0">
+                <a:latin typeface="Calibri body"/>
+              </a:rPr>
+              <a:t> </a:t>
+            </a:r>
+            <a:r>
+              <a:rPr lang="de-CH" sz="2100" dirty="0" err="1">
+                <a:latin typeface="Calibri body"/>
+              </a:rPr>
+              <a:t>applicable</a:t>
+            </a:r>
+            <a:r>
+              <a:rPr lang="de-CH" sz="2100" dirty="0">
+                <a:latin typeface="Calibri body"/>
+              </a:rPr>
+              <a:t>. All </a:t>
+            </a:r>
+            <a:r>
+              <a:rPr lang="de-CH" sz="2100" dirty="0" err="1">
+                <a:latin typeface="Calibri body"/>
+              </a:rPr>
+              <a:t>message-types</a:t>
+            </a:r>
+            <a:r>
+              <a:rPr lang="de-CH" sz="2100" dirty="0">
+                <a:latin typeface="Calibri body"/>
+              </a:rPr>
+              <a:t> </a:t>
+            </a:r>
+            <a:r>
+              <a:rPr lang="de-CH" sz="2100" dirty="0" err="1">
+                <a:latin typeface="Calibri body"/>
+              </a:rPr>
+              <a:t>have</a:t>
+            </a:r>
+            <a:r>
+              <a:rPr lang="de-CH" sz="2100" dirty="0">
+                <a:latin typeface="Calibri body"/>
+              </a:rPr>
+              <a:t> a </a:t>
+            </a:r>
+            <a:r>
+              <a:rPr lang="de-CH" sz="2100" dirty="0" err="1">
+                <a:latin typeface="Calibri body"/>
+              </a:rPr>
+              <a:t>common</a:t>
+            </a:r>
+            <a:r>
+              <a:rPr lang="de-CH" sz="2100" dirty="0">
+                <a:latin typeface="Calibri body"/>
+              </a:rPr>
+              <a:t> </a:t>
+            </a:r>
+            <a:r>
+              <a:rPr lang="de-CH" sz="2100" dirty="0" err="1">
+                <a:latin typeface="Calibri body"/>
+              </a:rPr>
+              <a:t>set</a:t>
+            </a:r>
+            <a:r>
+              <a:rPr lang="de-CH" sz="2100" dirty="0">
+                <a:latin typeface="Calibri body"/>
+              </a:rPr>
+              <a:t> </a:t>
+            </a:r>
+            <a:r>
+              <a:rPr lang="de-CH" sz="2100" dirty="0" err="1">
+                <a:latin typeface="Calibri body"/>
+              </a:rPr>
+              <a:t>of</a:t>
+            </a:r>
+            <a:r>
+              <a:rPr lang="de-CH" sz="2100" dirty="0">
+                <a:latin typeface="Calibri body"/>
+              </a:rPr>
+              <a:t> TLVs </a:t>
+            </a:r>
+            <a:r>
+              <a:rPr lang="de-CH" sz="2100" dirty="0" err="1">
+                <a:latin typeface="Calibri body"/>
+              </a:rPr>
+              <a:t>represented</a:t>
+            </a:r>
+            <a:r>
+              <a:rPr lang="de-CH" sz="2100" dirty="0">
+                <a:latin typeface="Calibri body"/>
+              </a:rPr>
+              <a:t> </a:t>
+            </a:r>
+            <a:r>
+              <a:rPr lang="de-CH" sz="2100" dirty="0" err="1">
+                <a:latin typeface="Calibri body"/>
+              </a:rPr>
+              <a:t>by</a:t>
+            </a:r>
+            <a:r>
+              <a:rPr lang="de-CH" sz="2100" dirty="0">
+                <a:latin typeface="Calibri body"/>
+              </a:rPr>
+              <a:t> </a:t>
+            </a:r>
+            <a:r>
+              <a:rPr lang="de-CH" sz="2100" dirty="0" err="1">
+                <a:latin typeface="Calibri body"/>
+              </a:rPr>
+              <a:t>sequence-number</a:t>
+            </a:r>
+            <a:r>
+              <a:rPr lang="de-CH" sz="2100" dirty="0">
+                <a:latin typeface="Calibri body"/>
+              </a:rPr>
+              <a:t>, </a:t>
+            </a:r>
+            <a:r>
+              <a:rPr lang="de-CH" sz="2100" dirty="0" err="1">
+                <a:latin typeface="Calibri body"/>
+              </a:rPr>
+              <a:t>timestamps</a:t>
+            </a:r>
+            <a:r>
+              <a:rPr lang="de-CH" sz="2100" dirty="0">
+                <a:latin typeface="Calibri body"/>
+              </a:rPr>
+              <a:t>, and </a:t>
+            </a:r>
+            <a:r>
+              <a:rPr lang="de-CH" sz="2100" dirty="0" err="1">
+                <a:latin typeface="Calibri body"/>
+              </a:rPr>
+              <a:t>extended-flags</a:t>
+            </a:r>
+            <a:r>
+              <a:rPr lang="de-CH" sz="2100" dirty="0">
+                <a:latin typeface="Calibri body"/>
+              </a:rPr>
+              <a:t>. </a:t>
+            </a:r>
+            <a:endParaRPr lang="en-US" sz="2100" dirty="0"/>
+          </a:p>
+        </p:txBody>
+      </p:sp>
+      <p:sp>
+        <p:nvSpPr>
+          <p:cNvPr id="6" name="Slide Number Placeholder 1">
+            <a:extLst>
+              <a:ext uri="{FF2B5EF4-FFF2-40B4-BE49-F238E27FC236}">
+                <a16:creationId xmlns:a16="http://schemas.microsoft.com/office/drawing/2014/main" id="{AB67B72F-E7A1-6923-AC3C-23DB42139983}"/>
+              </a:ext>
+            </a:extLst>
+          </p:cNvPr>
+          <p:cNvSpPr>
+            <a:spLocks noGrp="1"/>
+          </p:cNvSpPr>
+          <p:nvPr>
+            <p:ph type="sldNum" sz="quarter" idx="12"/>
+          </p:nvPr>
+        </p:nvSpPr>
+        <p:spPr>
+          <a:xfrm>
+            <a:off x="11587892" y="6361637"/>
+            <a:ext cx="414251" cy="365125"/>
+          </a:xfrm>
+        </p:spPr>
+        <p:txBody>
+          <a:bodyPr/>
+          <a:lstStyle/>
+          <a:p>
+            <a:fld id="{FC4AC485-25DE-431E-B345-9C0A15BB7F8A}" type="slidenum">
+              <a:rPr lang="en-US" sz="1400" smtClean="0"/>
               <a:t>5</a:t>
             </a:fld>
             <a:endParaRPr lang="en-US" sz="1400" dirty="0"/>
@@ -8972,7 +11301,7 @@
           <p:cNvPr id="5" name="TextBox 4">
             <a:extLst>
               <a:ext uri="{FF2B5EF4-FFF2-40B4-BE49-F238E27FC236}">
-                <a16:creationId xmlns:a16="http://schemas.microsoft.com/office/drawing/2014/main" id="{7B8D7887-C93D-FC29-FE8D-AB3A78A80370}"/>
+                <a16:creationId xmlns:a16="http://schemas.microsoft.com/office/drawing/2014/main" id="{2D7ED6FF-80FC-84F4-9A7F-3E310B55AD18}"/>
               </a:ext>
             </a:extLst>
           </p:cNvPr>
@@ -9853,6 +12182,9 @@
           <a:p>
             <a:r>
               <a:rPr lang="de-CH" sz="900" dirty="0">
+                <a:highlight>
+                  <a:srgbClr val="FFFF00"/>
+                </a:highlight>
                 <a:latin typeface="Courier New" panose="02070309020205020404" pitchFamily="49" charset="0"/>
                 <a:cs typeface="Courier New" panose="02070309020205020404" pitchFamily="49" charset="0"/>
               </a:rPr>
@@ -9860,6 +12192,9 @@
             </a:r>
             <a:r>
               <a:rPr lang="de-CH" sz="900" dirty="0" err="1">
+                <a:highlight>
+                  <a:srgbClr val="FFFF00"/>
+                </a:highlight>
                 <a:latin typeface="Courier New" panose="02070309020205020404" pitchFamily="49" charset="0"/>
                 <a:cs typeface="Courier New" panose="02070309020205020404" pitchFamily="49" charset="0"/>
               </a:rPr>
@@ -9867,6 +12202,9 @@
             </a:r>
             <a:r>
               <a:rPr lang="de-CH" sz="900" dirty="0">
+                <a:highlight>
+                  <a:srgbClr val="FFFF00"/>
+                </a:highlight>
                 <a:latin typeface="Courier New" panose="02070309020205020404" pitchFamily="49" charset="0"/>
                 <a:cs typeface="Courier New" panose="02070309020205020404" pitchFamily="49" charset="0"/>
               </a:rPr>
@@ -9876,6 +12214,9 @@
           <a:p>
             <a:r>
               <a:rPr lang="de-CH" sz="900" dirty="0">
+                <a:highlight>
+                  <a:srgbClr val="FFFF00"/>
+                </a:highlight>
                 <a:latin typeface="Courier New" panose="02070309020205020404" pitchFamily="49" charset="0"/>
                 <a:cs typeface="Courier New" panose="02070309020205020404" pitchFamily="49" charset="0"/>
               </a:rPr>
@@ -9883,12 +12224,18 @@
             </a:r>
             <a:r>
               <a:rPr lang="de-CH" sz="900" dirty="0" err="1">
+                <a:highlight>
+                  <a:srgbClr val="FFFF00"/>
+                </a:highlight>
                 <a:latin typeface="Courier New" panose="02070309020205020404" pitchFamily="49" charset="0"/>
                 <a:cs typeface="Courier New" panose="02070309020205020404" pitchFamily="49" charset="0"/>
               </a:rPr>
               <a:t>boolean</a:t>
             </a:r>
             <a:endParaRPr lang="de-CH" sz="900" dirty="0">
+              <a:highlight>
+                <a:srgbClr val="FFFF00"/>
+              </a:highlight>
               <a:latin typeface="Courier New" panose="02070309020205020404" pitchFamily="49" charset="0"/>
               <a:cs typeface="Courier New" panose="02070309020205020404" pitchFamily="49" charset="0"/>
             </a:endParaRPr>
@@ -9896,6 +12243,9 @@
           <a:p>
             <a:r>
               <a:rPr lang="de-CH" sz="900" dirty="0">
+                <a:highlight>
+                  <a:srgbClr val="FFFF00"/>
+                </a:highlight>
                 <a:latin typeface="Courier New" panose="02070309020205020404" pitchFamily="49" charset="0"/>
                 <a:cs typeface="Courier New" panose="02070309020205020404" pitchFamily="49" charset="0"/>
               </a:rPr>
@@ -9903,6 +12253,9 @@
             </a:r>
             <a:r>
               <a:rPr lang="de-CH" sz="900" dirty="0" err="1">
+                <a:highlight>
+                  <a:srgbClr val="FFFF00"/>
+                </a:highlight>
                 <a:latin typeface="Courier New" panose="02070309020205020404" pitchFamily="49" charset="0"/>
                 <a:cs typeface="Courier New" panose="02070309020205020404" pitchFamily="49" charset="0"/>
               </a:rPr>
@@ -9910,6 +12263,9 @@
             </a:r>
             <a:r>
               <a:rPr lang="de-CH" sz="900" dirty="0">
+                <a:highlight>
+                  <a:srgbClr val="FFFF00"/>
+                </a:highlight>
                 <a:latin typeface="Courier New" panose="02070309020205020404" pitchFamily="49" charset="0"/>
                 <a:cs typeface="Courier New" panose="02070309020205020404" pitchFamily="49" charset="0"/>
               </a:rPr>
@@ -9917,12 +12273,18 @@
             </a:r>
             <a:r>
               <a:rPr lang="de-CH" sz="900" dirty="0" err="1">
+                <a:highlight>
+                  <a:srgbClr val="FFFF00"/>
+                </a:highlight>
                 <a:latin typeface="Courier New" panose="02070309020205020404" pitchFamily="49" charset="0"/>
                 <a:cs typeface="Courier New" panose="02070309020205020404" pitchFamily="49" charset="0"/>
               </a:rPr>
               <a:t>boolean</a:t>
             </a:r>
             <a:endParaRPr lang="de-CH" sz="900" dirty="0">
+              <a:highlight>
+                <a:srgbClr val="FFFF00"/>
+              </a:highlight>
               <a:latin typeface="Courier New" panose="02070309020205020404" pitchFamily="49" charset="0"/>
               <a:cs typeface="Courier New" panose="02070309020205020404" pitchFamily="49" charset="0"/>
             </a:endParaRPr>
@@ -9930,6 +12292,9 @@
           <a:p>
             <a:r>
               <a:rPr lang="de-CH" sz="900" dirty="0">
+                <a:highlight>
+                  <a:srgbClr val="FFFF00"/>
+                </a:highlight>
                 <a:latin typeface="Courier New" panose="02070309020205020404" pitchFamily="49" charset="0"/>
                 <a:cs typeface="Courier New" panose="02070309020205020404" pitchFamily="49" charset="0"/>
               </a:rPr>
@@ -9937,6 +12302,9 @@
             </a:r>
             <a:r>
               <a:rPr lang="de-CH" sz="900" dirty="0" err="1">
+                <a:highlight>
+                  <a:srgbClr val="FFFF00"/>
+                </a:highlight>
                 <a:latin typeface="Courier New" panose="02070309020205020404" pitchFamily="49" charset="0"/>
                 <a:cs typeface="Courier New" panose="02070309020205020404" pitchFamily="49" charset="0"/>
               </a:rPr>
@@ -9944,6 +12312,9 @@
             </a:r>
             <a:r>
               <a:rPr lang="de-CH" sz="900" dirty="0">
+                <a:highlight>
+                  <a:srgbClr val="FFFF00"/>
+                </a:highlight>
                 <a:latin typeface="Courier New" panose="02070309020205020404" pitchFamily="49" charset="0"/>
                 <a:cs typeface="Courier New" panose="02070309020205020404" pitchFamily="49" charset="0"/>
               </a:rPr>
@@ -9951,6 +12322,9 @@
             </a:r>
             <a:r>
               <a:rPr lang="de-CH" sz="900" dirty="0" err="1">
+                <a:highlight>
+                  <a:srgbClr val="FFFF00"/>
+                </a:highlight>
                 <a:latin typeface="Courier New" panose="02070309020205020404" pitchFamily="49" charset="0"/>
                 <a:cs typeface="Courier New" panose="02070309020205020404" pitchFamily="49" charset="0"/>
               </a:rPr>
@@ -9958,6 +12332,9 @@
             </a:r>
             <a:r>
               <a:rPr lang="de-CH" sz="900" dirty="0">
+                <a:highlight>
+                  <a:srgbClr val="FFFF00"/>
+                </a:highlight>
                 <a:latin typeface="Courier New" panose="02070309020205020404" pitchFamily="49" charset="0"/>
                 <a:cs typeface="Courier New" panose="02070309020205020404" pitchFamily="49" charset="0"/>
               </a:rPr>
@@ -9965,12 +12342,18 @@
             </a:r>
             <a:r>
               <a:rPr lang="de-CH" sz="900" dirty="0" err="1">
+                <a:highlight>
+                  <a:srgbClr val="FFFF00"/>
+                </a:highlight>
                 <a:latin typeface="Courier New" panose="02070309020205020404" pitchFamily="49" charset="0"/>
                 <a:cs typeface="Courier New" panose="02070309020205020404" pitchFamily="49" charset="0"/>
               </a:rPr>
               <a:t>boolean</a:t>
             </a:r>
             <a:endParaRPr lang="de-CH" sz="900" dirty="0">
+              <a:highlight>
+                <a:srgbClr val="FFFF00"/>
+              </a:highlight>
               <a:latin typeface="Courier New" panose="02070309020205020404" pitchFamily="49" charset="0"/>
               <a:cs typeface="Courier New" panose="02070309020205020404" pitchFamily="49" charset="0"/>
             </a:endParaRPr>
@@ -9978,6 +12361,9 @@
           <a:p>
             <a:r>
               <a:rPr lang="de-CH" sz="900" dirty="0">
+                <a:highlight>
+                  <a:srgbClr val="FFFF00"/>
+                </a:highlight>
                 <a:latin typeface="Courier New" panose="02070309020205020404" pitchFamily="49" charset="0"/>
                 <a:cs typeface="Courier New" panose="02070309020205020404" pitchFamily="49" charset="0"/>
               </a:rPr>
@@ -9985,6 +12371,9 @@
             </a:r>
             <a:r>
               <a:rPr lang="de-CH" sz="900" dirty="0" err="1">
+                <a:highlight>
+                  <a:srgbClr val="FFFF00"/>
+                </a:highlight>
                 <a:latin typeface="Courier New" panose="02070309020205020404" pitchFamily="49" charset="0"/>
                 <a:cs typeface="Courier New" panose="02070309020205020404" pitchFamily="49" charset="0"/>
               </a:rPr>
@@ -9992,6 +12381,9 @@
             </a:r>
             <a:r>
               <a:rPr lang="de-CH" sz="900" dirty="0">
+                <a:highlight>
+                  <a:srgbClr val="FFFF00"/>
+                </a:highlight>
                 <a:latin typeface="Courier New" panose="02070309020205020404" pitchFamily="49" charset="0"/>
                 <a:cs typeface="Courier New" panose="02070309020205020404" pitchFamily="49" charset="0"/>
               </a:rPr>
@@ -9999,6 +12391,9 @@
             </a:r>
             <a:r>
               <a:rPr lang="de-CH" sz="900" dirty="0" err="1">
+                <a:highlight>
+                  <a:srgbClr val="FFFF00"/>
+                </a:highlight>
                 <a:latin typeface="Courier New" panose="02070309020205020404" pitchFamily="49" charset="0"/>
                 <a:cs typeface="Courier New" panose="02070309020205020404" pitchFamily="49" charset="0"/>
               </a:rPr>
@@ -10006,6 +12401,9 @@
             </a:r>
             <a:r>
               <a:rPr lang="de-CH" sz="900" dirty="0">
+                <a:highlight>
+                  <a:srgbClr val="FFFF00"/>
+                </a:highlight>
                 <a:latin typeface="Courier New" panose="02070309020205020404" pitchFamily="49" charset="0"/>
                 <a:cs typeface="Courier New" panose="02070309020205020404" pitchFamily="49" charset="0"/>
               </a:rPr>
@@ -10013,12 +12411,18 @@
             </a:r>
             <a:r>
               <a:rPr lang="de-CH" sz="900" dirty="0" err="1">
+                <a:highlight>
+                  <a:srgbClr val="FFFF00"/>
+                </a:highlight>
                 <a:latin typeface="Courier New" panose="02070309020205020404" pitchFamily="49" charset="0"/>
                 <a:cs typeface="Courier New" panose="02070309020205020404" pitchFamily="49" charset="0"/>
               </a:rPr>
               <a:t>boolean</a:t>
             </a:r>
             <a:endParaRPr lang="de-CH" sz="900" dirty="0">
+              <a:highlight>
+                <a:srgbClr val="FFFF00"/>
+              </a:highlight>
               <a:latin typeface="Courier New" panose="02070309020205020404" pitchFamily="49" charset="0"/>
               <a:cs typeface="Courier New" panose="02070309020205020404" pitchFamily="49" charset="0"/>
             </a:endParaRPr>
@@ -10026,6 +12430,9 @@
           <a:p>
             <a:r>
               <a:rPr lang="de-CH" sz="900" dirty="0">
+                <a:highlight>
+                  <a:srgbClr val="FFFF00"/>
+                </a:highlight>
                 <a:latin typeface="Courier New" panose="02070309020205020404" pitchFamily="49" charset="0"/>
                 <a:cs typeface="Courier New" panose="02070309020205020404" pitchFamily="49" charset="0"/>
               </a:rPr>
@@ -10033,6 +12440,9 @@
             </a:r>
             <a:r>
               <a:rPr lang="de-CH" sz="900" dirty="0" err="1">
+                <a:highlight>
+                  <a:srgbClr val="FFFF00"/>
+                </a:highlight>
                 <a:latin typeface="Courier New" panose="02070309020205020404" pitchFamily="49" charset="0"/>
                 <a:cs typeface="Courier New" panose="02070309020205020404" pitchFamily="49" charset="0"/>
               </a:rPr>
@@ -10040,6 +12450,9 @@
             </a:r>
             <a:r>
               <a:rPr lang="de-CH" sz="900" dirty="0">
+                <a:highlight>
+                  <a:srgbClr val="FFFF00"/>
+                </a:highlight>
                 <a:latin typeface="Courier New" panose="02070309020205020404" pitchFamily="49" charset="0"/>
                 <a:cs typeface="Courier New" panose="02070309020205020404" pitchFamily="49" charset="0"/>
               </a:rPr>
@@ -10047,12 +12460,18 @@
             </a:r>
             <a:r>
               <a:rPr lang="de-CH" sz="900" dirty="0" err="1">
+                <a:highlight>
+                  <a:srgbClr val="FFFF00"/>
+                </a:highlight>
                 <a:latin typeface="Courier New" panose="02070309020205020404" pitchFamily="49" charset="0"/>
                 <a:cs typeface="Courier New" panose="02070309020205020404" pitchFamily="49" charset="0"/>
               </a:rPr>
               <a:t>boolean</a:t>
             </a:r>
             <a:endParaRPr lang="de-CH" sz="900" dirty="0">
+              <a:highlight>
+                <a:srgbClr val="FFFF00"/>
+              </a:highlight>
               <a:latin typeface="Courier New" panose="02070309020205020404" pitchFamily="49" charset="0"/>
               <a:cs typeface="Courier New" panose="02070309020205020404" pitchFamily="49" charset="0"/>
             </a:endParaRPr>
@@ -10062,7 +12481,7 @@
     </p:spTree>
     <p:extLst>
       <p:ext uri="{BB962C8B-B14F-4D97-AF65-F5344CB8AC3E}">
-        <p14:creationId xmlns:p14="http://schemas.microsoft.com/office/powerpoint/2010/main" val="1452467401"/>
+        <p14:creationId xmlns:p14="http://schemas.microsoft.com/office/powerpoint/2010/main" val="1872852499"/>
       </p:ext>
     </p:extLst>
   </p:cSld>
@@ -10133,7 +12552,47 @@
                   </a:schemeClr>
                 </a:solidFill>
               </a:rPr>
-              <a:t>BGP best path decision metadata</a:t>
+              <a:t>New `</a:t>
+            </a:r>
+            <a:r>
+              <a:rPr lang="en-US" sz="2700" dirty="0" err="1">
+                <a:solidFill>
+                  <a:schemeClr val="bg2">
+                    <a:lumMod val="75000"/>
+                  </a:schemeClr>
+                </a:solidFill>
+              </a:rPr>
+              <a:t>ietf</a:t>
+            </a:r>
+            <a:r>
+              <a:rPr lang="en-US" sz="2700" dirty="0">
+                <a:solidFill>
+                  <a:schemeClr val="bg2">
+                    <a:lumMod val="75000"/>
+                  </a:schemeClr>
+                </a:solidFill>
+              </a:rPr>
+              <a:t>-bmp-</a:t>
+            </a:r>
+            <a:r>
+              <a:rPr lang="en-US" sz="2700" dirty="0" err="1">
+                <a:solidFill>
+                  <a:schemeClr val="bg2">
+                    <a:lumMod val="75000"/>
+                  </a:schemeClr>
+                </a:solidFill>
+              </a:rPr>
+              <a:t>tlv</a:t>
+            </a:r>
+            <a:r>
+              <a:rPr lang="en-US" sz="2700" dirty="0">
+                <a:solidFill>
+                  <a:schemeClr val="bg2">
+                    <a:lumMod val="75000"/>
+                  </a:schemeClr>
+                </a:solidFill>
+              </a:rPr>
+              <a:t>` module – BGP best path decision metadata</a:t>
             </a:r>
           </a:p>
         </p:txBody>
@@ -10176,106 +12635,89 @@
               <a:buNone/>
             </a:pPr>
             <a:r>
-              <a:rPr lang="de-CH" sz="2100" dirty="0">
+              <a:rPr lang="en-US" sz="2100" dirty="0">
                 <a:latin typeface="Calibri body"/>
                 <a:cs typeface="Courier New" panose="02070309020205020404" pitchFamily="49" charset="0"/>
               </a:rPr>
-              <a:t>Rhe </a:t>
-            </a:r>
-            <a:r>
-              <a:rPr lang="de-CH" sz="2100" dirty="0">
+              <a:t>Route-monitoring messages might also contain </a:t>
+            </a:r>
+            <a:r>
+              <a:rPr lang="en-US" sz="2100" b="1" dirty="0">
                 <a:latin typeface="Calibri body"/>
-              </a:rPr>
-              <a:t>route-monitoring </a:t>
-            </a:r>
-            <a:r>
-              <a:rPr lang="de-CH" sz="2100" dirty="0" err="1">
+                <a:cs typeface="Courier New" panose="02070309020205020404" pitchFamily="49" charset="0"/>
+              </a:rPr>
+              <a:t>path-status</a:t>
+            </a:r>
+            <a:r>
+              <a:rPr lang="en-US" sz="2100" dirty="0">
                 <a:latin typeface="Calibri body"/>
+                <a:cs typeface="Courier New" panose="02070309020205020404" pitchFamily="49" charset="0"/>
+              </a:rPr>
+              <a:t> and relative </a:t>
+            </a:r>
+            <a:r>
+              <a:rPr lang="en-US" sz="2100" b="1" dirty="0">
+                <a:latin typeface="Calibri body"/>
+                <a:cs typeface="Courier New" panose="02070309020205020404" pitchFamily="49" charset="0"/>
+              </a:rPr>
+              <a:t>path-status-reason-code</a:t>
+            </a:r>
+            <a:r>
+              <a:rPr lang="en-US" sz="2100" dirty="0">
+                <a:latin typeface="Calibri body"/>
+                <a:cs typeface="Courier New" panose="02070309020205020404" pitchFamily="49" charset="0"/>
+              </a:rPr>
+              <a:t> information leaves from:</a:t>
+            </a:r>
+          </a:p>
+          <a:p>
+            <a:pPr>
+              <a:spcBef>
+                <a:spcPts val="600"/>
+              </a:spcBef>
+              <a:spcAft>
+                <a:spcPts val="600"/>
+              </a:spcAft>
+            </a:pPr>
+            <a:r>
+              <a:rPr lang="en-US" sz="2100" dirty="0">
+                <a:latin typeface="Calibri body"/>
+                <a:cs typeface="Courier New" panose="02070309020205020404" pitchFamily="49" charset="0"/>
+                <a:hlinkClick r:id="rId2"/>
+              </a:rPr>
+              <a:t>draft-</a:t>
+            </a:r>
+            <a:r>
+              <a:rPr lang="en-US" sz="2100" dirty="0" err="1">
+                <a:latin typeface="Calibri body"/>
+                <a:cs typeface="Courier New" panose="02070309020205020404" pitchFamily="49" charset="0"/>
+                <a:hlinkClick r:id="rId2"/>
               </a:rPr>
               <a:t>ietf</a:t>
             </a:r>
             <a:r>
-              <a:rPr lang="de-CH" sz="2100" dirty="0">
+              <a:rPr lang="en-US" sz="2100" dirty="0">
                 <a:latin typeface="Calibri body"/>
-              </a:rPr>
-              <a:t>-</a:t>
-            </a:r>
-            <a:r>
-              <a:rPr lang="de-CH" sz="2100" dirty="0" err="1">
+                <a:cs typeface="Courier New" panose="02070309020205020404" pitchFamily="49" charset="0"/>
+                <a:hlinkClick r:id="rId2"/>
+              </a:rPr>
+              <a:t>-grow-bmp-path-marking-</a:t>
+            </a:r>
+            <a:r>
+              <a:rPr lang="en-US" sz="2100" dirty="0" err="1">
                 <a:latin typeface="Calibri body"/>
-              </a:rPr>
-              <a:t>bmp</a:t>
-            </a:r>
-            <a:r>
-              <a:rPr lang="de-CH" sz="2100" dirty="0">
+                <a:cs typeface="Courier New" panose="02070309020205020404" pitchFamily="49" charset="0"/>
+                <a:hlinkClick r:id="rId2"/>
+              </a:rPr>
+              <a:t>tlv</a:t>
+            </a:r>
+            <a:r>
+              <a:rPr lang="en-US" sz="2100" dirty="0">
                 <a:latin typeface="Calibri body"/>
-              </a:rPr>
-              <a:t>-</a:t>
-            </a:r>
-            <a:r>
-              <a:rPr lang="de-CH" sz="2100" dirty="0" err="1">
-                <a:latin typeface="Calibri body"/>
-              </a:rPr>
-              <a:t>telemetry</a:t>
-            </a:r>
-            <a:r>
-              <a:rPr lang="de-CH" sz="2100" dirty="0">
-                <a:latin typeface="Calibri body"/>
-              </a:rPr>
-              <a:t>-message </a:t>
-            </a:r>
-            <a:r>
-              <a:rPr lang="de-CH" sz="2100" dirty="0" err="1">
-                <a:latin typeface="Calibri body"/>
-              </a:rPr>
-              <a:t>contains</a:t>
-            </a:r>
-            <a:r>
-              <a:rPr lang="de-CH" sz="2100" dirty="0">
-                <a:latin typeface="Calibri body"/>
+                <a:cs typeface="Courier New" panose="02070309020205020404" pitchFamily="49" charset="0"/>
               </a:rPr>
               <a:t> </a:t>
             </a:r>
-            <a:r>
-              <a:rPr lang="de-CH" sz="2100" dirty="0" err="1">
-                <a:latin typeface="Calibri body"/>
-              </a:rPr>
-              <a:t>the</a:t>
-            </a:r>
-            <a:r>
-              <a:rPr lang="de-CH" sz="2100" dirty="0">
-                <a:latin typeface="Calibri body"/>
-              </a:rPr>
-              <a:t> </a:t>
-            </a:r>
-            <a:r>
-              <a:rPr lang="de-CH" sz="2100" dirty="0" err="1">
-                <a:latin typeface="Calibri body"/>
-              </a:rPr>
-              <a:t>following</a:t>
-            </a:r>
-            <a:r>
-              <a:rPr lang="de-CH" sz="2100" dirty="0">
-                <a:latin typeface="Calibri body"/>
-              </a:rPr>
-              <a:t> BMP </a:t>
-            </a:r>
-            <a:r>
-              <a:rPr lang="de-CH" sz="2100" dirty="0" err="1">
-                <a:latin typeface="Calibri body"/>
-              </a:rPr>
-              <a:t>metadata</a:t>
-            </a:r>
-            <a:r>
-              <a:rPr lang="de-CH" sz="2100" dirty="0">
-                <a:latin typeface="Calibri body"/>
-              </a:rPr>
-              <a:t>: </a:t>
-            </a:r>
-            <a:endParaRPr lang="de-CH" sz="2100" dirty="0">
-              <a:latin typeface="Calibri body"/>
-              <a:cs typeface="Courier New" panose="02070309020205020404" pitchFamily="49" charset="0"/>
-            </a:endParaRPr>
           </a:p>
           <a:p>
             <a:pPr marL="0" indent="0">
@@ -10288,115 +12730,25 @@
               <a:buNone/>
             </a:pPr>
             <a:r>
-              <a:rPr lang="de-CH" sz="2100" dirty="0" err="1">
+              <a:rPr lang="en-US" sz="2100" dirty="0">
                 <a:latin typeface="Calibri body"/>
                 <a:cs typeface="Courier New" panose="02070309020205020404" pitchFamily="49" charset="0"/>
               </a:rPr>
-              <a:t>path</a:t>
-            </a:r>
-            <a:r>
-              <a:rPr lang="de-CH" sz="2100" dirty="0">
+              <a:t>Presence container with </a:t>
+            </a:r>
+            <a:r>
+              <a:rPr lang="en-US" sz="2100" dirty="0" err="1">
                 <a:latin typeface="Calibri body"/>
                 <a:cs typeface="Courier New" panose="02070309020205020404" pitchFamily="49" charset="0"/>
               </a:rPr>
-              <a:t>-status and </a:t>
-            </a:r>
-            <a:r>
-              <a:rPr lang="de-CH" sz="2100" dirty="0" err="1">
+              <a:t>boolean</a:t>
+            </a:r>
+            <a:r>
+              <a:rPr lang="en-US" sz="2100" dirty="0">
                 <a:latin typeface="Calibri body"/>
                 <a:cs typeface="Courier New" panose="02070309020205020404" pitchFamily="49" charset="0"/>
               </a:rPr>
-              <a:t>reason</a:t>
-            </a:r>
-            <a:r>
-              <a:rPr lang="de-CH" sz="2100" dirty="0">
-                <a:latin typeface="Calibri body"/>
-                <a:cs typeface="Courier New" panose="02070309020205020404" pitchFamily="49" charset="0"/>
-              </a:rPr>
-              <a:t>-code </a:t>
-            </a:r>
-            <a:r>
-              <a:rPr lang="de-CH" sz="2100" dirty="0" err="1">
-                <a:latin typeface="Calibri body"/>
-                <a:cs typeface="Courier New" panose="02070309020205020404" pitchFamily="49" charset="0"/>
-              </a:rPr>
-              <a:t>leaves</a:t>
-            </a:r>
-            <a:r>
-              <a:rPr lang="de-CH" sz="2100" dirty="0">
-                <a:latin typeface="Calibri body"/>
-                <a:cs typeface="Courier New" panose="02070309020205020404" pitchFamily="49" charset="0"/>
-              </a:rPr>
-              <a:t> </a:t>
-            </a:r>
-            <a:r>
-              <a:rPr lang="de-CH" sz="2100" dirty="0" err="1">
-                <a:latin typeface="Calibri body"/>
-                <a:cs typeface="Courier New" panose="02070309020205020404" pitchFamily="49" charset="0"/>
-              </a:rPr>
-              <a:t>from</a:t>
-            </a:r>
-            <a:r>
-              <a:rPr lang="de-CH" sz="2100" dirty="0">
-                <a:latin typeface="Calibri body"/>
-                <a:cs typeface="Courier New" panose="02070309020205020404" pitchFamily="49" charset="0"/>
-              </a:rPr>
-              <a:t> </a:t>
-            </a:r>
-            <a:r>
-              <a:rPr lang="de-CH" sz="2100" dirty="0">
-                <a:latin typeface="Calibri body"/>
-                <a:cs typeface="Courier New" panose="02070309020205020404" pitchFamily="49" charset="0"/>
-                <a:hlinkClick r:id="rId2"/>
-              </a:rPr>
-              <a:t>draft-</a:t>
-            </a:r>
-            <a:r>
-              <a:rPr lang="de-CH" sz="2100" dirty="0" err="1">
-                <a:latin typeface="Calibri body"/>
-                <a:cs typeface="Courier New" panose="02070309020205020404" pitchFamily="49" charset="0"/>
-                <a:hlinkClick r:id="rId2"/>
-              </a:rPr>
-              <a:t>ietf</a:t>
-            </a:r>
-            <a:r>
-              <a:rPr lang="de-CH" sz="2100" dirty="0">
-                <a:latin typeface="Calibri body"/>
-                <a:cs typeface="Courier New" panose="02070309020205020404" pitchFamily="49" charset="0"/>
-                <a:hlinkClick r:id="rId2"/>
-              </a:rPr>
-              <a:t>-grow-</a:t>
-            </a:r>
-            <a:r>
-              <a:rPr lang="de-CH" sz="2100" dirty="0" err="1">
-                <a:latin typeface="Calibri body"/>
-                <a:cs typeface="Courier New" panose="02070309020205020404" pitchFamily="49" charset="0"/>
-                <a:hlinkClick r:id="rId2"/>
-              </a:rPr>
-              <a:t>bmp</a:t>
-            </a:r>
-            <a:r>
-              <a:rPr lang="de-CH" sz="2100" dirty="0">
-                <a:latin typeface="Calibri body"/>
-                <a:cs typeface="Courier New" panose="02070309020205020404" pitchFamily="49" charset="0"/>
-                <a:hlinkClick r:id="rId2"/>
-              </a:rPr>
-              <a:t>-</a:t>
-            </a:r>
-            <a:r>
-              <a:rPr lang="de-CH" sz="2100" dirty="0" err="1">
-                <a:latin typeface="Calibri body"/>
-                <a:cs typeface="Courier New" panose="02070309020205020404" pitchFamily="49" charset="0"/>
-                <a:hlinkClick r:id="rId2"/>
-              </a:rPr>
-              <a:t>path-marking-tlv</a:t>
-            </a:r>
-            <a:r>
-              <a:rPr lang="de-CH" sz="2100" dirty="0">
-                <a:latin typeface="Calibri body"/>
-                <a:cs typeface="Courier New" panose="02070309020205020404" pitchFamily="49" charset="0"/>
-              </a:rPr>
-              <a:t>.</a:t>
+              <a:t> leaves to represent non-mutually exclusive flags; only instantiated when router sends the Path Status TLV for the relevant route.</a:t>
             </a:r>
           </a:p>
           <a:p>
@@ -10409,7 +12761,74 @@
               </a:spcAft>
               <a:buNone/>
             </a:pPr>
-            <a:endParaRPr lang="de-CH" sz="2100" dirty="0"/>
+            <a:r>
+              <a:rPr lang="en-US" sz="2100" dirty="0">
+                <a:latin typeface="Calibri body"/>
+                <a:cs typeface="Courier New" panose="02070309020205020404" pitchFamily="49" charset="0"/>
+              </a:rPr>
+              <a:t>Optional </a:t>
+            </a:r>
+            <a:r>
+              <a:rPr lang="en-US" sz="2100" dirty="0">
+                <a:latin typeface="Calibri body"/>
+                <a:cs typeface="Courier New" panose="02070309020205020404" pitchFamily="49" charset="0"/>
+                <a:hlinkClick r:id="rId3"/>
+              </a:rPr>
+              <a:t>reason-code</a:t>
+            </a:r>
+            <a:r>
+              <a:rPr lang="en-US" sz="2100" dirty="0">
+                <a:latin typeface="Calibri body"/>
+                <a:cs typeface="Courier New" panose="02070309020205020404" pitchFamily="49" charset="0"/>
+              </a:rPr>
+              <a:t> explaining why BGP best path decision produced this path-status.</a:t>
+            </a:r>
+          </a:p>
+          <a:p>
+            <a:pPr marL="0" indent="0">
+              <a:spcBef>
+                <a:spcPts val="600"/>
+              </a:spcBef>
+              <a:spcAft>
+                <a:spcPts val="600"/>
+              </a:spcAft>
+              <a:buNone/>
+            </a:pPr>
+            <a:endParaRPr lang="en-US" sz="2100" i="1" dirty="0">
+              <a:latin typeface="Calibri body"/>
+              <a:cs typeface="Courier New" panose="02070309020205020404" pitchFamily="49" charset="0"/>
+            </a:endParaRPr>
+          </a:p>
+          <a:p>
+            <a:pPr marL="0" indent="0">
+              <a:spcBef>
+                <a:spcPts val="600"/>
+              </a:spcBef>
+              <a:spcAft>
+                <a:spcPts val="600"/>
+              </a:spcAft>
+              <a:buNone/>
+            </a:pPr>
+            <a:r>
+              <a:rPr lang="en-US" sz="2100" i="1" dirty="0"/>
+              <a:t>Mailing list feedback: address duplication between path-</a:t>
+            </a:r>
+            <a:r>
+              <a:rPr lang="en-US" sz="2100" i="1" dirty="0" err="1"/>
+              <a:t>status.best</a:t>
+            </a:r>
+            <a:r>
+              <a:rPr lang="en-US" sz="2100" i="1" dirty="0"/>
+              <a:t> and adj-rib-in-</a:t>
+            </a:r>
+            <a:r>
+              <a:rPr lang="en-US" sz="2100" i="1" dirty="0" err="1"/>
+              <a:t>post.best</a:t>
+            </a:r>
+            <a:r>
+              <a:rPr lang="en-US" sz="2100" i="1" dirty="0"/>
+              <a:t>-path.</a:t>
+            </a:r>
           </a:p>
           <a:p>
             <a:pPr marL="0" indent="0">
@@ -11828,7 +14247,47 @@
                   </a:schemeClr>
                 </a:solidFill>
               </a:rPr>
-              <a:t>BGP peer capabilities metadata</a:t>
+              <a:t>New `</a:t>
+            </a:r>
+            <a:r>
+              <a:rPr lang="en-US" sz="2700" dirty="0" err="1">
+                <a:solidFill>
+                  <a:schemeClr val="bg2">
+                    <a:lumMod val="75000"/>
+                  </a:schemeClr>
+                </a:solidFill>
+              </a:rPr>
+              <a:t>ietf</a:t>
+            </a:r>
+            <a:r>
+              <a:rPr lang="en-US" sz="2700" dirty="0">
+                <a:solidFill>
+                  <a:schemeClr val="bg2">
+                    <a:lumMod val="75000"/>
+                  </a:schemeClr>
+                </a:solidFill>
+              </a:rPr>
+              <a:t>-</a:t>
+            </a:r>
+            <a:r>
+              <a:rPr lang="en-US" sz="2700" dirty="0" err="1">
+                <a:solidFill>
+                  <a:schemeClr val="bg2">
+                    <a:lumMod val="75000"/>
+                  </a:schemeClr>
+                </a:solidFill>
+              </a:rPr>
+              <a:t>bgp</a:t>
+            </a:r>
+            <a:r>
+              <a:rPr lang="en-US" sz="2700" dirty="0">
+                <a:solidFill>
+                  <a:schemeClr val="bg2">
+                    <a:lumMod val="75000"/>
+                  </a:schemeClr>
+                </a:solidFill>
+              </a:rPr>
+              <a:t>-open` module</a:t>
             </a:r>
           </a:p>
         </p:txBody>
@@ -11871,118 +14330,78 @@
               <a:buNone/>
             </a:pPr>
             <a:r>
+              <a:rPr lang="de-CH" sz="2100" dirty="0" err="1"/>
+              <a:t>Standalone</a:t>
+            </a:r>
+            <a:r>
+              <a:rPr lang="de-CH" sz="2100" dirty="0"/>
+              <a:t> </a:t>
+            </a:r>
+            <a:r>
+              <a:rPr lang="de-CH" sz="2100" dirty="0" err="1"/>
+              <a:t>grouping</a:t>
+            </a:r>
+            <a:r>
+              <a:rPr lang="de-CH" sz="2100" dirty="0"/>
+              <a:t> `</a:t>
+            </a:r>
+            <a:r>
+              <a:rPr lang="de-CH" sz="2100" dirty="0" err="1"/>
+              <a:t>bgp</a:t>
+            </a:r>
+            <a:r>
+              <a:rPr lang="de-CH" sz="2100" dirty="0"/>
+              <a:t>-open` </a:t>
+            </a:r>
+            <a:r>
+              <a:rPr lang="de-CH" sz="2100" dirty="0" err="1"/>
+              <a:t>exposing</a:t>
+            </a:r>
+            <a:r>
+              <a:rPr lang="de-CH" sz="2100" dirty="0"/>
+              <a:t> </a:t>
+            </a:r>
+            <a:r>
+              <a:rPr lang="de-CH" sz="2100" dirty="0" err="1"/>
+              <a:t>the</a:t>
+            </a:r>
+            <a:r>
+              <a:rPr lang="de-CH" sz="2100" dirty="0"/>
+              <a:t> BGP OPEN </a:t>
+            </a:r>
+            <a:r>
+              <a:rPr lang="de-CH" sz="2100" dirty="0" err="1"/>
+              <a:t>message</a:t>
+            </a:r>
+            <a:r>
+              <a:rPr lang="de-CH" sz="2100" dirty="0"/>
+              <a:t> </a:t>
+            </a:r>
+            <a:r>
+              <a:rPr lang="de-CH" sz="2100" dirty="0" err="1"/>
+              <a:t>fields</a:t>
+            </a:r>
+            <a:r>
+              <a:rPr lang="de-CH" sz="2100" dirty="0"/>
+              <a:t> </a:t>
+            </a:r>
+            <a:r>
+              <a:rPr lang="de-CH" sz="2100" dirty="0" err="1"/>
+              <a:t>defined</a:t>
+            </a:r>
+            <a:r>
+              <a:rPr lang="de-CH" sz="2100" dirty="0"/>
+              <a:t> in </a:t>
+            </a:r>
+            <a:r>
               <a:rPr lang="de-CH" sz="2100" dirty="0">
-                <a:latin typeface="Calibri body"/>
-              </a:rPr>
-              <a:t>BMP peer-</a:t>
-            </a:r>
-            <a:r>
-              <a:rPr lang="de-CH" sz="2100" dirty="0" err="1">
-                <a:latin typeface="Calibri body"/>
-              </a:rPr>
-              <a:t>up</a:t>
-            </a:r>
-            <a:r>
-              <a:rPr lang="de-CH" sz="2100" dirty="0">
-                <a:latin typeface="Calibri body"/>
-              </a:rPr>
-              <a:t> </a:t>
-            </a:r>
-            <a:r>
-              <a:rPr lang="de-CH" sz="2100" dirty="0" err="1">
-                <a:latin typeface="Calibri body"/>
-              </a:rPr>
-              <a:t>ietf</a:t>
-            </a:r>
-            <a:r>
-              <a:rPr lang="de-CH" sz="2100" dirty="0">
-                <a:latin typeface="Calibri body"/>
-              </a:rPr>
-              <a:t>-</a:t>
-            </a:r>
-            <a:r>
-              <a:rPr lang="de-CH" sz="2100" dirty="0" err="1">
-                <a:latin typeface="Calibri body"/>
-              </a:rPr>
-              <a:t>bmp</a:t>
-            </a:r>
-            <a:r>
-              <a:rPr lang="de-CH" sz="2100" dirty="0">
-                <a:latin typeface="Calibri body"/>
-              </a:rPr>
-              <a:t>-</a:t>
-            </a:r>
-            <a:r>
-              <a:rPr lang="de-CH" sz="2100" dirty="0" err="1">
-                <a:latin typeface="Calibri body"/>
-              </a:rPr>
-              <a:t>telemetry</a:t>
-            </a:r>
-            <a:r>
-              <a:rPr lang="de-CH" sz="2100" dirty="0">
-                <a:latin typeface="Calibri body"/>
-              </a:rPr>
-              <a:t>-message </a:t>
-            </a:r>
-            <a:r>
-              <a:rPr lang="de-CH" sz="2100" dirty="0" err="1">
-                <a:latin typeface="Calibri body"/>
-              </a:rPr>
-              <a:t>contains</a:t>
-            </a:r>
-            <a:r>
-              <a:rPr lang="de-CH" sz="2100" dirty="0">
-                <a:latin typeface="Calibri body"/>
-              </a:rPr>
-              <a:t> </a:t>
-            </a:r>
-            <a:r>
-              <a:rPr lang="de-CH" sz="2100" dirty="0" err="1">
-                <a:latin typeface="Calibri body"/>
-              </a:rPr>
-              <a:t>now</a:t>
-            </a:r>
-            <a:r>
-              <a:rPr lang="de-CH" sz="2100" dirty="0">
-                <a:latin typeface="Calibri body"/>
-              </a:rPr>
-              <a:t> also </a:t>
-            </a:r>
-            <a:r>
-              <a:rPr lang="de-CH" sz="2100" dirty="0" err="1">
-                <a:latin typeface="Calibri body"/>
-              </a:rPr>
-              <a:t>the</a:t>
-            </a:r>
-            <a:r>
-              <a:rPr lang="de-CH" sz="2100" dirty="0">
-                <a:latin typeface="Calibri body"/>
-              </a:rPr>
-              <a:t> </a:t>
-            </a:r>
-            <a:r>
-              <a:rPr lang="de-CH" sz="2100" dirty="0" err="1">
-                <a:latin typeface="Calibri body"/>
-              </a:rPr>
-              <a:t>following</a:t>
-            </a:r>
-            <a:r>
-              <a:rPr lang="de-CH" sz="2100" dirty="0">
-                <a:latin typeface="Calibri body"/>
-              </a:rPr>
-              <a:t> BMP </a:t>
-            </a:r>
-            <a:r>
-              <a:rPr lang="de-CH" sz="2100" dirty="0" err="1">
-                <a:latin typeface="Calibri body"/>
-              </a:rPr>
-              <a:t>metadata</a:t>
-            </a:r>
-            <a:r>
-              <a:rPr lang="de-CH" sz="2100" dirty="0">
-                <a:latin typeface="Calibri body"/>
-              </a:rPr>
-              <a:t>:</a:t>
+                <a:hlinkClick r:id="rId2"/>
+              </a:rPr>
+              <a:t>RFC 4271 </a:t>
+            </a:r>
+            <a:r>
+              <a:rPr lang="de-CH" sz="2100" dirty="0"/>
+              <a:t>(BGP-4).</a:t>
             </a:r>
           </a:p>
           <a:p>
@@ -11996,94 +14415,85 @@
               <a:buNone/>
             </a:pPr>
             <a:r>
-              <a:rPr lang="de-CH" sz="2100" dirty="0" err="1">
-                <a:latin typeface="Calibri body"/>
-              </a:rPr>
-              <a:t>Received</a:t>
-            </a:r>
-            <a:r>
-              <a:rPr lang="de-CH" sz="2100" dirty="0">
-                <a:latin typeface="Calibri body"/>
-              </a:rPr>
-              <a:t> and </a:t>
-            </a:r>
-            <a:r>
-              <a:rPr lang="de-CH" sz="2100" dirty="0" err="1">
-                <a:latin typeface="Calibri body"/>
-              </a:rPr>
-              <a:t>sent</a:t>
-            </a:r>
-            <a:r>
-              <a:rPr lang="de-CH" sz="2100" dirty="0">
-                <a:latin typeface="Calibri body"/>
-              </a:rPr>
+              <a:rPr lang="de-CH" sz="2100" dirty="0" err="1"/>
+              <a:t>Complements</a:t>
+            </a:r>
+            <a:r>
+              <a:rPr lang="de-CH" sz="2100" dirty="0"/>
+              <a:t> </a:t>
+            </a:r>
+            <a:r>
+              <a:rPr lang="de-CH" sz="2100" dirty="0" err="1"/>
+              <a:t>ietf-bgp</a:t>
+            </a:r>
+            <a:r>
+              <a:rPr lang="de-CH" sz="2100" dirty="0"/>
+              <a:t> (IDR) </a:t>
+            </a:r>
+            <a:r>
+              <a:rPr lang="de-CH" sz="2100" dirty="0" err="1"/>
+              <a:t>by</a:t>
+            </a:r>
+            <a:r>
+              <a:rPr lang="de-CH" sz="2100" dirty="0"/>
+              <a:t> </a:t>
+            </a:r>
+            <a:r>
+              <a:rPr lang="de-CH" sz="2100" dirty="0" err="1"/>
+              <a:t>making</a:t>
+            </a:r>
+            <a:r>
+              <a:rPr lang="de-CH" sz="2100" dirty="0"/>
+              <a:t> OPEN </a:t>
+            </a:r>
+            <a:r>
+              <a:rPr lang="de-CH" sz="2100" dirty="0" err="1"/>
+              <a:t>message</a:t>
+            </a:r>
+            <a:r>
+              <a:rPr lang="de-CH" sz="2100" dirty="0"/>
+              <a:t> </a:t>
+            </a:r>
+            <a:r>
+              <a:rPr lang="de-CH" sz="2100" dirty="0" err="1"/>
+              <a:t>fields</a:t>
+            </a:r>
+            <a:r>
+              <a:rPr lang="de-CH" sz="2100" dirty="0"/>
+              <a:t> </a:t>
+            </a:r>
+            <a:r>
+              <a:rPr lang="de-CH" sz="2100" dirty="0" err="1"/>
+              <a:t>reusable</a:t>
+            </a:r>
+            <a:r>
+              <a:rPr lang="de-CH" sz="2100" dirty="0"/>
+              <a:t> outside </a:t>
+            </a:r>
+            <a:r>
+              <a:rPr lang="de-CH" sz="2100" dirty="0" err="1"/>
+              <a:t>full</a:t>
+            </a:r>
+            <a:r>
+              <a:rPr lang="de-CH" sz="2100" dirty="0"/>
               <a:t> BGP </a:t>
             </a:r>
             <a:r>
-              <a:rPr lang="de-CH" sz="2100" dirty="0" err="1">
-                <a:latin typeface="Calibri body"/>
-              </a:rPr>
-              <a:t>peer</a:t>
-            </a:r>
-            <a:r>
-              <a:rPr lang="de-CH" sz="2100" dirty="0">
-                <a:latin typeface="Calibri body"/>
-              </a:rPr>
+              <a:rPr lang="de-CH" sz="2100" dirty="0" err="1"/>
+              <a:t>config</a:t>
+            </a:r>
+            <a:r>
+              <a:rPr lang="de-CH" sz="2100" dirty="0"/>
               <a:t> </a:t>
             </a:r>
             <a:r>
-              <a:rPr lang="de-CH" sz="2100" dirty="0" err="1">
-                <a:latin typeface="Calibri body"/>
-              </a:rPr>
-              <a:t>capabilities</a:t>
-            </a:r>
-            <a:r>
-              <a:rPr lang="de-CH" sz="2100" dirty="0">
-                <a:latin typeface="Calibri body"/>
-              </a:rPr>
-              <a:t> </a:t>
-            </a:r>
-            <a:r>
-              <a:rPr lang="de-CH" sz="2100" dirty="0" err="1">
-                <a:latin typeface="Calibri body"/>
-              </a:rPr>
-              <a:t>according</a:t>
-            </a:r>
-            <a:r>
-              <a:rPr lang="de-CH" sz="2100" dirty="0">
-                <a:latin typeface="Calibri body"/>
-              </a:rPr>
-              <a:t> </a:t>
-            </a:r>
-            <a:r>
-              <a:rPr lang="de-CH" sz="2100" dirty="0" err="1">
-                <a:latin typeface="Calibri body"/>
-              </a:rPr>
-              <a:t>to</a:t>
-            </a:r>
-            <a:r>
-              <a:rPr lang="de-CH" sz="2100" dirty="0">
-                <a:latin typeface="Calibri body"/>
-              </a:rPr>
-              <a:t> </a:t>
-            </a:r>
-            <a:r>
-              <a:rPr lang="de-CH" sz="2100" dirty="0">
-                <a:latin typeface="Calibri body"/>
-                <a:hlinkClick r:id="rId2"/>
-              </a:rPr>
-              <a:t>RFC 7854</a:t>
-            </a:r>
-            <a:r>
-              <a:rPr lang="de-CH" sz="2100" dirty="0">
-                <a:latin typeface="Calibri body"/>
-              </a:rPr>
+              <a:rPr lang="de-CH" sz="2100" dirty="0" err="1"/>
+              <a:t>models</a:t>
+            </a:r>
+            <a:r>
+              <a:rPr lang="de-CH" sz="2100" dirty="0"/>
               <a:t>.</a:t>
             </a:r>
-            <a:endParaRPr lang="de-CH" sz="2100" dirty="0">
-              <a:latin typeface="Calibri body"/>
-              <a:cs typeface="Courier New" panose="02070309020205020404" pitchFamily="49" charset="0"/>
-            </a:endParaRPr>
           </a:p>
           <a:p>
             <a:pPr marL="0" indent="0">
@@ -12095,7 +14505,110 @@
               </a:spcAft>
               <a:buNone/>
             </a:pPr>
-            <a:endParaRPr lang="de-CH" sz="2100" dirty="0"/>
+            <a:r>
+              <a:rPr lang="de-CH" sz="2100" dirty="0" err="1"/>
+              <a:t>Used</a:t>
+            </a:r>
+            <a:r>
+              <a:rPr lang="de-CH" sz="2100" dirty="0"/>
+              <a:t> in peer-</a:t>
+            </a:r>
+            <a:r>
+              <a:rPr lang="de-CH" sz="2100" dirty="0" err="1"/>
+              <a:t>up</a:t>
+            </a:r>
+            <a:r>
+              <a:rPr lang="de-CH" sz="2100" dirty="0"/>
+              <a:t>-</a:t>
+            </a:r>
+            <a:r>
+              <a:rPr lang="de-CH" sz="2100" dirty="0" err="1"/>
+              <a:t>notification</a:t>
+            </a:r>
+            <a:r>
+              <a:rPr lang="de-CH" sz="2100" dirty="0"/>
+              <a:t>, </a:t>
+            </a:r>
+            <a:r>
+              <a:rPr lang="de-CH" sz="2100" dirty="0" err="1"/>
+              <a:t>capturing</a:t>
+            </a:r>
+            <a:r>
+              <a:rPr lang="de-CH" sz="2100" dirty="0"/>
+              <a:t> </a:t>
+            </a:r>
+            <a:r>
+              <a:rPr lang="de-CH" sz="2100" dirty="0" err="1"/>
+              <a:t>both</a:t>
+            </a:r>
+            <a:r>
+              <a:rPr lang="de-CH" sz="2100" dirty="0"/>
+              <a:t> </a:t>
+            </a:r>
+            <a:r>
+              <a:rPr lang="de-CH" sz="2100" dirty="0" err="1"/>
+              <a:t>sides</a:t>
+            </a:r>
+            <a:r>
+              <a:rPr lang="de-CH" sz="2100" dirty="0"/>
+              <a:t> </a:t>
+            </a:r>
+            <a:r>
+              <a:rPr lang="de-CH" sz="2100" dirty="0" err="1"/>
+              <a:t>of</a:t>
+            </a:r>
+            <a:r>
+              <a:rPr lang="de-CH" sz="2100" dirty="0"/>
+              <a:t> </a:t>
+            </a:r>
+            <a:r>
+              <a:rPr lang="de-CH" sz="2100" dirty="0" err="1"/>
+              <a:t>the</a:t>
+            </a:r>
+            <a:r>
+              <a:rPr lang="de-CH" sz="2100" dirty="0"/>
+              <a:t> </a:t>
+            </a:r>
+            <a:r>
+              <a:rPr lang="de-CH" sz="2100" dirty="0" err="1"/>
+              <a:t>negotiation</a:t>
+            </a:r>
+            <a:r>
+              <a:rPr lang="de-CH" sz="2100" dirty="0"/>
+              <a:t> </a:t>
+            </a:r>
+            <a:r>
+              <a:rPr lang="de-CH" sz="2100" dirty="0" err="1"/>
+              <a:t>with</a:t>
+            </a:r>
+            <a:r>
+              <a:rPr lang="de-CH" sz="2100" dirty="0"/>
+              <a:t> </a:t>
+            </a:r>
+            <a:r>
+              <a:rPr lang="de-CH" sz="2100" b="1" dirty="0" err="1"/>
+              <a:t>sent</a:t>
+            </a:r>
+            <a:r>
+              <a:rPr lang="de-CH" sz="2100" b="1" dirty="0"/>
+              <a:t>-open </a:t>
+            </a:r>
+            <a:r>
+              <a:rPr lang="de-CH" sz="2100" dirty="0"/>
+              <a:t>and </a:t>
+            </a:r>
+            <a:r>
+              <a:rPr lang="de-CH" sz="2100" b="1" dirty="0" err="1"/>
+              <a:t>received</a:t>
+            </a:r>
+            <a:r>
+              <a:rPr lang="de-CH" sz="2100" b="1" dirty="0"/>
+              <a:t>-open</a:t>
+            </a:r>
+            <a:r>
+              <a:rPr lang="de-CH" sz="2100" dirty="0"/>
+              <a:t>.</a:t>
+            </a:r>
           </a:p>
           <a:p>
             <a:pPr marL="0" indent="0">
@@ -14074,6 +16587,786 @@
 </file>
 
 <file path=ppt/slides/slide8.xml><?xml version="1.0" encoding="utf-8"?>
+<p:sld xmlns:a="http://schemas.openxmlformats.org/drawingml/2006/main" xmlns:r="http://schemas.openxmlformats.org/officeDocument/2006/relationships" xmlns:p="http://schemas.openxmlformats.org/presentationml/2006/main">
+  <p:cSld>
+    <p:spTree>
+      <p:nvGrpSpPr>
+        <p:cNvPr id="1" name="">
+          <a:extLst>
+            <a:ext uri="{FF2B5EF4-FFF2-40B4-BE49-F238E27FC236}">
+              <a16:creationId xmlns:a16="http://schemas.microsoft.com/office/drawing/2014/main" id="{AAC0F139-79A7-236E-B422-F9027B252B94}"/>
+            </a:ext>
+          </a:extLst>
+        </p:cNvPr>
+        <p:cNvGrpSpPr/>
+        <p:nvPr/>
+      </p:nvGrpSpPr>
+      <p:grpSpPr>
+        <a:xfrm>
+          <a:off x="0" y="0"/>
+          <a:ext cx="0" cy="0"/>
+          <a:chOff x="0" y="0"/>
+          <a:chExt cx="0" cy="0"/>
+        </a:xfrm>
+      </p:grpSpPr>
+      <p:sp>
+        <p:nvSpPr>
+          <p:cNvPr id="2" name="Title 1">
+            <a:extLst>
+              <a:ext uri="{FF2B5EF4-FFF2-40B4-BE49-F238E27FC236}">
+                <a16:creationId xmlns:a16="http://schemas.microsoft.com/office/drawing/2014/main" id="{9D734BEF-C196-3BAF-0F2E-FB66BF042884}"/>
+              </a:ext>
+            </a:extLst>
+          </p:cNvPr>
+          <p:cNvSpPr>
+            <a:spLocks noGrp="1"/>
+          </p:cNvSpPr>
+          <p:nvPr>
+            <p:ph type="title"/>
+          </p:nvPr>
+        </p:nvSpPr>
+        <p:spPr/>
+        <p:txBody>
+          <a:bodyPr>
+            <a:normAutofit/>
+          </a:bodyPr>
+          <a:lstStyle/>
+          <a:p>
+            <a:r>
+              <a:rPr lang="en-US" sz="2800" b="1" dirty="0"/>
+              <a:t>BMP YANG Telemetry Message</a:t>
+            </a:r>
+            <a:br>
+              <a:rPr lang="en-US" sz="3600" dirty="0"/>
+            </a:br>
+            <a:r>
+              <a:rPr lang="en-US" sz="2700" dirty="0">
+                <a:solidFill>
+                  <a:schemeClr val="bg2">
+                    <a:lumMod val="75000"/>
+                  </a:schemeClr>
+                </a:solidFill>
+              </a:rPr>
+              <a:t>New `session-metadata` presence container</a:t>
+            </a:r>
+          </a:p>
+        </p:txBody>
+      </p:sp>
+      <p:sp>
+        <p:nvSpPr>
+          <p:cNvPr id="3" name="Content Placeholder 2">
+            <a:extLst>
+              <a:ext uri="{FF2B5EF4-FFF2-40B4-BE49-F238E27FC236}">
+                <a16:creationId xmlns:a16="http://schemas.microsoft.com/office/drawing/2014/main" id="{6EA985DA-ABCF-AB10-5C45-1B7050950E17}"/>
+              </a:ext>
+            </a:extLst>
+          </p:cNvPr>
+          <p:cNvSpPr>
+            <a:spLocks noGrp="1"/>
+          </p:cNvSpPr>
+          <p:nvPr>
+            <p:ph idx="1"/>
+          </p:nvPr>
+        </p:nvSpPr>
+        <p:spPr>
+          <a:xfrm>
+            <a:off x="838199" y="1690688"/>
+            <a:ext cx="5553809" cy="4486275"/>
+          </a:xfrm>
+        </p:spPr>
+        <p:txBody>
+          <a:bodyPr>
+            <a:noAutofit/>
+          </a:bodyPr>
+          <a:lstStyle/>
+          <a:p>
+            <a:pPr marL="0" indent="0">
+              <a:spcBef>
+                <a:spcPts val="600"/>
+              </a:spcBef>
+              <a:spcAft>
+                <a:spcPts val="600"/>
+              </a:spcAft>
+              <a:buNone/>
+            </a:pPr>
+            <a:r>
+              <a:rPr lang="en-US" sz="2100" dirty="0"/>
+              <a:t>BMP Initiation message is sent once per session, subsequent per-peer messages carry no equivalent router-identity information.</a:t>
+            </a:r>
+          </a:p>
+          <a:p>
+            <a:pPr marL="0" indent="0">
+              <a:spcBef>
+                <a:spcPts val="600"/>
+              </a:spcBef>
+              <a:spcAft>
+                <a:spcPts val="600"/>
+              </a:spcAft>
+              <a:buNone/>
+            </a:pPr>
+            <a:r>
+              <a:rPr lang="de-CH" sz="2100" dirty="0"/>
+              <a:t>An optional </a:t>
+            </a:r>
+            <a:r>
+              <a:rPr lang="de-CH" sz="2100" dirty="0" err="1"/>
+              <a:t>presence</a:t>
+            </a:r>
+            <a:r>
+              <a:rPr lang="de-CH" sz="2100" dirty="0"/>
+              <a:t> </a:t>
+            </a:r>
+            <a:r>
+              <a:rPr lang="de-CH" sz="2100" b="1" dirty="0" err="1"/>
+              <a:t>session-metadata</a:t>
+            </a:r>
+            <a:r>
+              <a:rPr lang="de-CH" sz="2100" b="1" dirty="0"/>
+              <a:t> </a:t>
+            </a:r>
+            <a:r>
+              <a:rPr lang="de-CH" sz="2100" b="1" dirty="0" err="1"/>
+              <a:t>container</a:t>
+            </a:r>
+            <a:r>
+              <a:rPr lang="de-CH" sz="2100" b="1" dirty="0"/>
+              <a:t> </a:t>
+            </a:r>
+            <a:r>
+              <a:rPr lang="de-CH" sz="2100" dirty="0" err="1"/>
+              <a:t>is</a:t>
+            </a:r>
+            <a:r>
+              <a:rPr lang="de-CH" sz="2100" dirty="0"/>
+              <a:t> </a:t>
+            </a:r>
+            <a:r>
+              <a:rPr lang="de-CH" sz="2100" dirty="0" err="1"/>
+              <a:t>introduced</a:t>
+            </a:r>
+            <a:r>
+              <a:rPr lang="de-CH" sz="2100" dirty="0"/>
+              <a:t>, </a:t>
+            </a:r>
+            <a:r>
+              <a:rPr lang="de-CH" sz="2100" dirty="0" err="1"/>
+              <a:t>reusing</a:t>
+            </a:r>
+            <a:r>
+              <a:rPr lang="de-CH" sz="2100" dirty="0"/>
+              <a:t> </a:t>
+            </a:r>
+            <a:r>
+              <a:rPr lang="de-CH" sz="2100" dirty="0" err="1"/>
+              <a:t>previously</a:t>
+            </a:r>
+            <a:r>
+              <a:rPr lang="de-CH" sz="2100" dirty="0"/>
+              <a:t> </a:t>
+            </a:r>
+            <a:r>
+              <a:rPr lang="de-CH" sz="2100" dirty="0" err="1"/>
+              <a:t>defined</a:t>
+            </a:r>
+            <a:r>
+              <a:rPr lang="de-CH" sz="2100" dirty="0"/>
+              <a:t> </a:t>
+            </a:r>
+            <a:r>
+              <a:rPr lang="de-CH" sz="2100" dirty="0" err="1"/>
+              <a:t>ietf-bmp-tvl:information</a:t>
+            </a:r>
+            <a:r>
+              <a:rPr lang="de-CH" sz="2100" dirty="0"/>
+              <a:t> </a:t>
+            </a:r>
+            <a:r>
+              <a:rPr lang="de-CH" sz="2100" dirty="0" err="1"/>
+              <a:t>grouping</a:t>
+            </a:r>
+            <a:r>
+              <a:rPr lang="de-CH" sz="2100" dirty="0"/>
+              <a:t>.</a:t>
+            </a:r>
+          </a:p>
+          <a:p>
+            <a:pPr marL="0" indent="0">
+              <a:spcBef>
+                <a:spcPts val="600"/>
+              </a:spcBef>
+              <a:spcAft>
+                <a:spcPts val="600"/>
+              </a:spcAft>
+              <a:buNone/>
+            </a:pPr>
+            <a:r>
+              <a:rPr lang="de-CH" sz="2100" dirty="0"/>
+              <a:t>A </a:t>
+            </a:r>
+            <a:r>
+              <a:rPr lang="de-CH" sz="2100" dirty="0" err="1"/>
+              <a:t>collector</a:t>
+            </a:r>
+            <a:r>
+              <a:rPr lang="de-CH" sz="2100" dirty="0"/>
+              <a:t> </a:t>
+            </a:r>
+            <a:r>
+              <a:rPr lang="de-CH" sz="2100" dirty="0" err="1"/>
+              <a:t>implementation</a:t>
+            </a:r>
+            <a:r>
+              <a:rPr lang="de-CH" sz="2100" dirty="0"/>
+              <a:t> SHOULD </a:t>
+            </a:r>
+            <a:r>
+              <a:rPr lang="de-CH" sz="2100" dirty="0" err="1"/>
+              <a:t>cache</a:t>
+            </a:r>
+            <a:r>
+              <a:rPr lang="de-CH" sz="2100" dirty="0"/>
+              <a:t> </a:t>
+            </a:r>
+            <a:r>
+              <a:rPr lang="de-CH" sz="2100" dirty="0" err="1"/>
+              <a:t>the</a:t>
+            </a:r>
+            <a:r>
+              <a:rPr lang="de-CH" sz="2100" dirty="0"/>
+              <a:t> </a:t>
+            </a:r>
+            <a:r>
+              <a:rPr lang="de-CH" sz="2100" dirty="0" err="1"/>
+              <a:t>Init</a:t>
+            </a:r>
+            <a:r>
+              <a:rPr lang="de-CH" sz="2100" dirty="0"/>
+              <a:t> </a:t>
+            </a:r>
+            <a:r>
+              <a:rPr lang="de-CH" sz="2100" dirty="0" err="1"/>
+              <a:t>content</a:t>
+            </a:r>
+            <a:r>
+              <a:rPr lang="de-CH" sz="2100" dirty="0"/>
+              <a:t> per BMP </a:t>
+            </a:r>
+            <a:r>
+              <a:rPr lang="de-CH" sz="2100" dirty="0" err="1"/>
+              <a:t>session</a:t>
+            </a:r>
+            <a:r>
+              <a:rPr lang="de-CH" sz="2100" dirty="0"/>
+              <a:t> and </a:t>
+            </a:r>
+            <a:r>
+              <a:rPr lang="de-CH" sz="2100" dirty="0" err="1"/>
+              <a:t>populate</a:t>
+            </a:r>
+            <a:r>
+              <a:rPr lang="de-CH" sz="2100" dirty="0"/>
+              <a:t> </a:t>
+            </a:r>
+            <a:r>
+              <a:rPr lang="de-CH" sz="2100" dirty="0" err="1"/>
+              <a:t>session-metadata</a:t>
+            </a:r>
+            <a:r>
+              <a:rPr lang="de-CH" sz="2100" dirty="0"/>
+              <a:t> in </a:t>
+            </a:r>
+            <a:r>
+              <a:rPr lang="de-CH" sz="2100" dirty="0" err="1"/>
+              <a:t>every</a:t>
+            </a:r>
+            <a:r>
+              <a:rPr lang="de-CH" sz="2100" dirty="0"/>
+              <a:t> subsequent </a:t>
+            </a:r>
+            <a:r>
+              <a:rPr lang="de-CH" sz="2100" dirty="0" err="1"/>
+              <a:t>message</a:t>
+            </a:r>
+            <a:r>
+              <a:rPr lang="de-CH" sz="2100" dirty="0"/>
+              <a:t>.</a:t>
+            </a:r>
+            <a:endParaRPr lang="en-US" sz="2100" dirty="0"/>
+          </a:p>
+        </p:txBody>
+      </p:sp>
+      <p:sp>
+        <p:nvSpPr>
+          <p:cNvPr id="6" name="Slide Number Placeholder 1">
+            <a:extLst>
+              <a:ext uri="{FF2B5EF4-FFF2-40B4-BE49-F238E27FC236}">
+                <a16:creationId xmlns:a16="http://schemas.microsoft.com/office/drawing/2014/main" id="{6FA6137A-D97E-E8DA-4B6E-B20E079C61E4}"/>
+              </a:ext>
+            </a:extLst>
+          </p:cNvPr>
+          <p:cNvSpPr>
+            <a:spLocks noGrp="1"/>
+          </p:cNvSpPr>
+          <p:nvPr>
+            <p:ph type="sldNum" sz="quarter" idx="12"/>
+          </p:nvPr>
+        </p:nvSpPr>
+        <p:spPr>
+          <a:xfrm>
+            <a:off x="11587892" y="6361637"/>
+            <a:ext cx="414251" cy="365125"/>
+          </a:xfrm>
+        </p:spPr>
+        <p:txBody>
+          <a:bodyPr/>
+          <a:lstStyle/>
+          <a:p>
+            <a:fld id="{FC4AC485-25DE-431E-B345-9C0A15BB7F8A}" type="slidenum">
+              <a:rPr lang="en-US" sz="1400" smtClean="0"/>
+              <a:t>8</a:t>
+            </a:fld>
+            <a:endParaRPr lang="en-US" sz="1400" dirty="0"/>
+          </a:p>
+        </p:txBody>
+      </p:sp>
+      <p:sp>
+        <p:nvSpPr>
+          <p:cNvPr id="5" name="TextBox 4">
+            <a:extLst>
+              <a:ext uri="{FF2B5EF4-FFF2-40B4-BE49-F238E27FC236}">
+                <a16:creationId xmlns:a16="http://schemas.microsoft.com/office/drawing/2014/main" id="{9656C51F-D666-FF4B-6E06-11C9E3E8A8A2}"/>
+              </a:ext>
+            </a:extLst>
+          </p:cNvPr>
+          <p:cNvSpPr txBox="1"/>
+          <p:nvPr/>
+        </p:nvSpPr>
+        <p:spPr>
+          <a:xfrm>
+            <a:off x="7787787" y="1690688"/>
+            <a:ext cx="3925242" cy="1938992"/>
+          </a:xfrm>
+          <a:prstGeom prst="rect">
+            <a:avLst/>
+          </a:prstGeom>
+          <a:noFill/>
+        </p:spPr>
+        <p:txBody>
+          <a:bodyPr wrap="square">
+            <a:spAutoFit/>
+          </a:bodyPr>
+          <a:lstStyle/>
+          <a:p>
+            <a:r>
+              <a:rPr lang="de-CH" sz="1200" dirty="0" err="1">
+                <a:latin typeface="Courier New" panose="02070309020205020404" pitchFamily="49" charset="0"/>
+                <a:cs typeface="Courier New" panose="02070309020205020404" pitchFamily="49" charset="0"/>
+              </a:rPr>
+              <a:t>module</a:t>
+            </a:r>
+            <a:r>
+              <a:rPr lang="de-CH" sz="1200" dirty="0">
+                <a:latin typeface="Courier New" panose="02070309020205020404" pitchFamily="49" charset="0"/>
+                <a:cs typeface="Courier New" panose="02070309020205020404" pitchFamily="49" charset="0"/>
+              </a:rPr>
+              <a:t>: </a:t>
+            </a:r>
+            <a:r>
+              <a:rPr lang="de-CH" sz="1200" dirty="0" err="1">
+                <a:latin typeface="Courier New" panose="02070309020205020404" pitchFamily="49" charset="0"/>
+                <a:cs typeface="Courier New" panose="02070309020205020404" pitchFamily="49" charset="0"/>
+              </a:rPr>
+              <a:t>ietf</a:t>
+            </a:r>
+            <a:r>
+              <a:rPr lang="de-CH" sz="1200" dirty="0">
+                <a:latin typeface="Courier New" panose="02070309020205020404" pitchFamily="49" charset="0"/>
+                <a:cs typeface="Courier New" panose="02070309020205020404" pitchFamily="49" charset="0"/>
+              </a:rPr>
+              <a:t>-</a:t>
+            </a:r>
+            <a:r>
+              <a:rPr lang="de-CH" sz="1200" dirty="0" err="1">
+                <a:latin typeface="Courier New" panose="02070309020205020404" pitchFamily="49" charset="0"/>
+                <a:cs typeface="Courier New" panose="02070309020205020404" pitchFamily="49" charset="0"/>
+              </a:rPr>
+              <a:t>bmp</a:t>
+            </a:r>
+            <a:r>
+              <a:rPr lang="de-CH" sz="1200" dirty="0">
+                <a:latin typeface="Courier New" panose="02070309020205020404" pitchFamily="49" charset="0"/>
+                <a:cs typeface="Courier New" panose="02070309020205020404" pitchFamily="49" charset="0"/>
+              </a:rPr>
+              <a:t>-</a:t>
+            </a:r>
+            <a:r>
+              <a:rPr lang="de-CH" sz="1200" dirty="0" err="1">
+                <a:latin typeface="Courier New" panose="02070309020205020404" pitchFamily="49" charset="0"/>
+                <a:cs typeface="Courier New" panose="02070309020205020404" pitchFamily="49" charset="0"/>
+              </a:rPr>
+              <a:t>telemetry</a:t>
+            </a:r>
+            <a:r>
+              <a:rPr lang="de-CH" sz="1200" dirty="0">
+                <a:latin typeface="Courier New" panose="02070309020205020404" pitchFamily="49" charset="0"/>
+                <a:cs typeface="Courier New" panose="02070309020205020404" pitchFamily="49" charset="0"/>
+              </a:rPr>
+              <a:t>-message</a:t>
+            </a:r>
+          </a:p>
+          <a:p>
+            <a:endParaRPr lang="de-CH" sz="1200" dirty="0">
+              <a:latin typeface="Courier New" panose="02070309020205020404" pitchFamily="49" charset="0"/>
+              <a:cs typeface="Courier New" panose="02070309020205020404" pitchFamily="49" charset="0"/>
+            </a:endParaRPr>
+          </a:p>
+          <a:p>
+            <a:r>
+              <a:rPr lang="de-CH" sz="1200" dirty="0">
+                <a:latin typeface="Courier New" panose="02070309020205020404" pitchFamily="49" charset="0"/>
+                <a:cs typeface="Courier New" panose="02070309020205020404" pitchFamily="49" charset="0"/>
+              </a:rPr>
+              <a:t>  </a:t>
+            </a:r>
+            <a:r>
+              <a:rPr lang="de-CH" sz="1200" dirty="0" err="1">
+                <a:latin typeface="Courier New" panose="02070309020205020404" pitchFamily="49" charset="0"/>
+                <a:cs typeface="Courier New" panose="02070309020205020404" pitchFamily="49" charset="0"/>
+              </a:rPr>
+              <a:t>structure</a:t>
+            </a:r>
+            <a:r>
+              <a:rPr lang="de-CH" sz="1200" dirty="0">
+                <a:latin typeface="Courier New" panose="02070309020205020404" pitchFamily="49" charset="0"/>
+                <a:cs typeface="Courier New" panose="02070309020205020404" pitchFamily="49" charset="0"/>
+              </a:rPr>
+              <a:t> </a:t>
+            </a:r>
+            <a:r>
+              <a:rPr lang="de-CH" sz="1200" dirty="0" err="1">
+                <a:latin typeface="Courier New" panose="02070309020205020404" pitchFamily="49" charset="0"/>
+                <a:cs typeface="Courier New" panose="02070309020205020404" pitchFamily="49" charset="0"/>
+              </a:rPr>
+              <a:t>message</a:t>
+            </a:r>
+            <a:r>
+              <a:rPr lang="de-CH" sz="1200" dirty="0">
+                <a:latin typeface="Courier New" panose="02070309020205020404" pitchFamily="49" charset="0"/>
+                <a:cs typeface="Courier New" panose="02070309020205020404" pitchFamily="49" charset="0"/>
+              </a:rPr>
+              <a:t>:</a:t>
+            </a:r>
+          </a:p>
+          <a:p>
+            <a:r>
+              <a:rPr lang="de-CH" sz="1200" dirty="0">
+                <a:highlight>
+                  <a:srgbClr val="FFFF00"/>
+                </a:highlight>
+                <a:latin typeface="Courier New" panose="02070309020205020404" pitchFamily="49" charset="0"/>
+                <a:cs typeface="Courier New" panose="02070309020205020404" pitchFamily="49" charset="0"/>
+              </a:rPr>
+              <a:t>    +-- </a:t>
+            </a:r>
+            <a:r>
+              <a:rPr lang="de-CH" sz="1200" dirty="0" err="1">
+                <a:highlight>
+                  <a:srgbClr val="FFFF00"/>
+                </a:highlight>
+                <a:latin typeface="Courier New" panose="02070309020205020404" pitchFamily="49" charset="0"/>
+                <a:cs typeface="Courier New" panose="02070309020205020404" pitchFamily="49" charset="0"/>
+              </a:rPr>
+              <a:t>session-metadata</a:t>
+            </a:r>
+            <a:r>
+              <a:rPr lang="de-CH" sz="1200" dirty="0">
+                <a:highlight>
+                  <a:srgbClr val="FFFF00"/>
+                </a:highlight>
+                <a:latin typeface="Courier New" panose="02070309020205020404" pitchFamily="49" charset="0"/>
+                <a:cs typeface="Courier New" panose="02070309020205020404" pitchFamily="49" charset="0"/>
+              </a:rPr>
+              <a:t>!</a:t>
+            </a:r>
+          </a:p>
+          <a:p>
+            <a:r>
+              <a:rPr lang="de-CH" sz="1200" dirty="0">
+                <a:highlight>
+                  <a:srgbClr val="FFFF00"/>
+                </a:highlight>
+                <a:latin typeface="Courier New" panose="02070309020205020404" pitchFamily="49" charset="0"/>
+                <a:cs typeface="Courier New" panose="02070309020205020404" pitchFamily="49" charset="0"/>
+              </a:rPr>
+              <a:t>    |  +-- </a:t>
+            </a:r>
+            <a:r>
+              <a:rPr lang="de-CH" sz="1200" dirty="0" err="1">
+                <a:highlight>
+                  <a:srgbClr val="FFFF00"/>
+                </a:highlight>
+                <a:latin typeface="Courier New" panose="02070309020205020404" pitchFamily="49" charset="0"/>
+                <a:cs typeface="Courier New" panose="02070309020205020404" pitchFamily="49" charset="0"/>
+              </a:rPr>
+              <a:t>string</a:t>
+            </a:r>
+            <a:r>
+              <a:rPr lang="de-CH" sz="1200" dirty="0">
+                <a:highlight>
+                  <a:srgbClr val="FFFF00"/>
+                </a:highlight>
+                <a:latin typeface="Courier New" panose="02070309020205020404" pitchFamily="49" charset="0"/>
+                <a:cs typeface="Courier New" panose="02070309020205020404" pitchFamily="49" charset="0"/>
+              </a:rPr>
+              <a:t>*           </a:t>
+            </a:r>
+            <a:r>
+              <a:rPr lang="de-CH" sz="1200" dirty="0" err="1">
+                <a:highlight>
+                  <a:srgbClr val="FFFF00"/>
+                </a:highlight>
+                <a:latin typeface="Courier New" panose="02070309020205020404" pitchFamily="49" charset="0"/>
+                <a:cs typeface="Courier New" panose="02070309020205020404" pitchFamily="49" charset="0"/>
+              </a:rPr>
+              <a:t>string</a:t>
+            </a:r>
+            <a:endParaRPr lang="de-CH" sz="1200" dirty="0">
+              <a:highlight>
+                <a:srgbClr val="FFFF00"/>
+              </a:highlight>
+              <a:latin typeface="Courier New" panose="02070309020205020404" pitchFamily="49" charset="0"/>
+              <a:cs typeface="Courier New" panose="02070309020205020404" pitchFamily="49" charset="0"/>
+            </a:endParaRPr>
+          </a:p>
+          <a:p>
+            <a:r>
+              <a:rPr lang="de-CH" sz="1200" dirty="0">
+                <a:highlight>
+                  <a:srgbClr val="FFFF00"/>
+                </a:highlight>
+                <a:latin typeface="Courier New" panose="02070309020205020404" pitchFamily="49" charset="0"/>
+                <a:cs typeface="Courier New" panose="02070309020205020404" pitchFamily="49" charset="0"/>
+              </a:rPr>
+              <a:t>    |  +-- </a:t>
+            </a:r>
+            <a:r>
+              <a:rPr lang="de-CH" sz="1200" dirty="0" err="1">
+                <a:highlight>
+                  <a:srgbClr val="FFFF00"/>
+                </a:highlight>
+                <a:latin typeface="Courier New" panose="02070309020205020404" pitchFamily="49" charset="0"/>
+                <a:cs typeface="Courier New" panose="02070309020205020404" pitchFamily="49" charset="0"/>
+              </a:rPr>
+              <a:t>sys-descr</a:t>
+            </a:r>
+            <a:r>
+              <a:rPr lang="de-CH" sz="1200" dirty="0">
+                <a:highlight>
+                  <a:srgbClr val="FFFF00"/>
+                </a:highlight>
+                <a:latin typeface="Courier New" panose="02070309020205020404" pitchFamily="49" charset="0"/>
+                <a:cs typeface="Courier New" panose="02070309020205020404" pitchFamily="49" charset="0"/>
+              </a:rPr>
+              <a:t>?        </a:t>
+            </a:r>
+            <a:r>
+              <a:rPr lang="de-CH" sz="1200" dirty="0" err="1">
+                <a:highlight>
+                  <a:srgbClr val="FFFF00"/>
+                </a:highlight>
+                <a:latin typeface="Courier New" panose="02070309020205020404" pitchFamily="49" charset="0"/>
+                <a:cs typeface="Courier New" panose="02070309020205020404" pitchFamily="49" charset="0"/>
+              </a:rPr>
+              <a:t>string</a:t>
+            </a:r>
+            <a:endParaRPr lang="de-CH" sz="1200" dirty="0">
+              <a:highlight>
+                <a:srgbClr val="FFFF00"/>
+              </a:highlight>
+              <a:latin typeface="Courier New" panose="02070309020205020404" pitchFamily="49" charset="0"/>
+              <a:cs typeface="Courier New" panose="02070309020205020404" pitchFamily="49" charset="0"/>
+            </a:endParaRPr>
+          </a:p>
+          <a:p>
+            <a:r>
+              <a:rPr lang="de-CH" sz="1200" dirty="0">
+                <a:highlight>
+                  <a:srgbClr val="FFFF00"/>
+                </a:highlight>
+                <a:latin typeface="Courier New" panose="02070309020205020404" pitchFamily="49" charset="0"/>
+                <a:cs typeface="Courier New" panose="02070309020205020404" pitchFamily="49" charset="0"/>
+              </a:rPr>
+              <a:t>    |  +-- </a:t>
+            </a:r>
+            <a:r>
+              <a:rPr lang="de-CH" sz="1200" dirty="0" err="1">
+                <a:highlight>
+                  <a:srgbClr val="FFFF00"/>
+                </a:highlight>
+                <a:latin typeface="Courier New" panose="02070309020205020404" pitchFamily="49" charset="0"/>
+                <a:cs typeface="Courier New" panose="02070309020205020404" pitchFamily="49" charset="0"/>
+              </a:rPr>
+              <a:t>sys</a:t>
+            </a:r>
+            <a:r>
+              <a:rPr lang="de-CH" sz="1200" dirty="0">
+                <a:highlight>
+                  <a:srgbClr val="FFFF00"/>
+                </a:highlight>
+                <a:latin typeface="Courier New" panose="02070309020205020404" pitchFamily="49" charset="0"/>
+                <a:cs typeface="Courier New" panose="02070309020205020404" pitchFamily="49" charset="0"/>
+              </a:rPr>
+              <a:t>-name?         </a:t>
+            </a:r>
+            <a:r>
+              <a:rPr lang="de-CH" sz="1200" dirty="0" err="1">
+                <a:highlight>
+                  <a:srgbClr val="FFFF00"/>
+                </a:highlight>
+                <a:latin typeface="Courier New" panose="02070309020205020404" pitchFamily="49" charset="0"/>
+                <a:cs typeface="Courier New" panose="02070309020205020404" pitchFamily="49" charset="0"/>
+              </a:rPr>
+              <a:t>string</a:t>
+            </a:r>
+            <a:endParaRPr lang="de-CH" sz="1200" dirty="0">
+              <a:highlight>
+                <a:srgbClr val="FFFF00"/>
+              </a:highlight>
+              <a:latin typeface="Courier New" panose="02070309020205020404" pitchFamily="49" charset="0"/>
+              <a:cs typeface="Courier New" panose="02070309020205020404" pitchFamily="49" charset="0"/>
+            </a:endParaRPr>
+          </a:p>
+          <a:p>
+            <a:r>
+              <a:rPr lang="de-CH" sz="1200" dirty="0">
+                <a:highlight>
+                  <a:srgbClr val="FFFF00"/>
+                </a:highlight>
+                <a:latin typeface="Courier New" panose="02070309020205020404" pitchFamily="49" charset="0"/>
+                <a:cs typeface="Courier New" panose="02070309020205020404" pitchFamily="49" charset="0"/>
+              </a:rPr>
+              <a:t>    |  +-- </a:t>
+            </a:r>
+            <a:r>
+              <a:rPr lang="de-CH" sz="1200" dirty="0" err="1">
+                <a:highlight>
+                  <a:srgbClr val="FFFF00"/>
+                </a:highlight>
+                <a:latin typeface="Courier New" panose="02070309020205020404" pitchFamily="49" charset="0"/>
+                <a:cs typeface="Courier New" panose="02070309020205020404" pitchFamily="49" charset="0"/>
+              </a:rPr>
+              <a:t>vrf</a:t>
+            </a:r>
+            <a:r>
+              <a:rPr lang="de-CH" sz="1200" dirty="0">
+                <a:highlight>
+                  <a:srgbClr val="FFFF00"/>
+                </a:highlight>
+                <a:latin typeface="Courier New" panose="02070309020205020404" pitchFamily="49" charset="0"/>
+                <a:cs typeface="Courier New" panose="02070309020205020404" pitchFamily="49" charset="0"/>
+              </a:rPr>
+              <a:t>-</a:t>
+            </a:r>
+            <a:r>
+              <a:rPr lang="de-CH" sz="1200" dirty="0" err="1">
+                <a:highlight>
+                  <a:srgbClr val="FFFF00"/>
+                </a:highlight>
+                <a:latin typeface="Courier New" panose="02070309020205020404" pitchFamily="49" charset="0"/>
+                <a:cs typeface="Courier New" panose="02070309020205020404" pitchFamily="49" charset="0"/>
+              </a:rPr>
+              <a:t>table</a:t>
+            </a:r>
+            <a:r>
+              <a:rPr lang="de-CH" sz="1200" dirty="0">
+                <a:highlight>
+                  <a:srgbClr val="FFFF00"/>
+                </a:highlight>
+                <a:latin typeface="Courier New" panose="02070309020205020404" pitchFamily="49" charset="0"/>
+                <a:cs typeface="Courier New" panose="02070309020205020404" pitchFamily="49" charset="0"/>
+              </a:rPr>
+              <a:t>-name?   </a:t>
+            </a:r>
+            <a:r>
+              <a:rPr lang="de-CH" sz="1200" dirty="0" err="1">
+                <a:highlight>
+                  <a:srgbClr val="FFFF00"/>
+                </a:highlight>
+                <a:latin typeface="Courier New" panose="02070309020205020404" pitchFamily="49" charset="0"/>
+                <a:cs typeface="Courier New" panose="02070309020205020404" pitchFamily="49" charset="0"/>
+              </a:rPr>
+              <a:t>string</a:t>
+            </a:r>
+            <a:endParaRPr lang="de-CH" sz="1200" dirty="0">
+              <a:highlight>
+                <a:srgbClr val="FFFF00"/>
+              </a:highlight>
+              <a:latin typeface="Courier New" panose="02070309020205020404" pitchFamily="49" charset="0"/>
+              <a:cs typeface="Courier New" panose="02070309020205020404" pitchFamily="49" charset="0"/>
+            </a:endParaRPr>
+          </a:p>
+          <a:p>
+            <a:r>
+              <a:rPr lang="de-CH" sz="1200" dirty="0">
+                <a:latin typeface="Courier New" panose="02070309020205020404" pitchFamily="49" charset="0"/>
+                <a:cs typeface="Courier New" panose="02070309020205020404" pitchFamily="49" charset="0"/>
+              </a:rPr>
+              <a:t>    +-- </a:t>
+            </a:r>
+            <a:r>
+              <a:rPr lang="de-CH" sz="1200" dirty="0" err="1">
+                <a:latin typeface="Courier New" panose="02070309020205020404" pitchFamily="49" charset="0"/>
+                <a:cs typeface="Courier New" panose="02070309020205020404" pitchFamily="49" charset="0"/>
+              </a:rPr>
+              <a:t>version</a:t>
+            </a:r>
+            <a:r>
+              <a:rPr lang="de-CH" sz="1200" dirty="0">
+                <a:latin typeface="Courier New" panose="02070309020205020404" pitchFamily="49" charset="0"/>
+                <a:cs typeface="Courier New" panose="02070309020205020404" pitchFamily="49" charset="0"/>
+              </a:rPr>
+              <a:t>             uint8</a:t>
+            </a:r>
+          </a:p>
+          <a:p>
+            <a:r>
+              <a:rPr lang="de-CH" sz="1200" dirty="0">
+                <a:latin typeface="Courier New" panose="02070309020205020404" pitchFamily="49" charset="0"/>
+                <a:cs typeface="Courier New" panose="02070309020205020404" pitchFamily="49" charset="0"/>
+              </a:rPr>
+              <a:t>    +-- (</a:t>
+            </a:r>
+            <a:r>
+              <a:rPr lang="de-CH" sz="1200" dirty="0" err="1">
+                <a:latin typeface="Courier New" panose="02070309020205020404" pitchFamily="49" charset="0"/>
+                <a:cs typeface="Courier New" panose="02070309020205020404" pitchFamily="49" charset="0"/>
+              </a:rPr>
+              <a:t>message</a:t>
+            </a:r>
+            <a:r>
+              <a:rPr lang="de-CH" sz="1200" dirty="0">
+                <a:latin typeface="Courier New" panose="02070309020205020404" pitchFamily="49" charset="0"/>
+                <a:cs typeface="Courier New" panose="02070309020205020404" pitchFamily="49" charset="0"/>
+              </a:rPr>
+              <a:t>-type)?</a:t>
+            </a:r>
+          </a:p>
+        </p:txBody>
+      </p:sp>
+    </p:spTree>
+    <p:extLst>
+      <p:ext uri="{BB962C8B-B14F-4D97-AF65-F5344CB8AC3E}">
+        <p14:creationId xmlns:p14="http://schemas.microsoft.com/office/powerpoint/2010/main" val="4251917088"/>
+      </p:ext>
+    </p:extLst>
+  </p:cSld>
+  <p:clrMapOvr>
+    <a:masterClrMapping/>
+  </p:clrMapOvr>
+</p:sld>
+</file>
+
+<file path=ppt/slides/slide9.xml><?xml version="1.0" encoding="utf-8"?>
 <p:sld xmlns:a="http://schemas.openxmlformats.org/drawingml/2006/main" xmlns:r="http://schemas.openxmlformats.org/officeDocument/2006/relationships" xmlns:p="http://schemas.openxmlformats.org/presentationml/2006/main">
   <p:cSld>
     <p:spTree>
@@ -14120,22 +17413,39 @@
           <a:lstStyle/>
           <a:p>
             <a:r>
-              <a:rPr lang="en-US" sz="2800" b="1" dirty="0"/>
-              <a:t>BMP YANG Message Broker Topic Naming</a:t>
+              <a:rPr lang="en-US" sz="3200" b="1" dirty="0"/>
+              <a:t>BMP YANG Telemetry Message</a:t>
             </a:r>
             <a:br>
-              <a:rPr lang="en-US" sz="3600" dirty="0"/>
+              <a:rPr lang="en-US" sz="4000" dirty="0"/>
             </a:br>
             <a:r>
-              <a:rPr lang="en-US" sz="2700" dirty="0">
+              <a:rPr lang="en-US" sz="2800" dirty="0" err="1">
                 <a:solidFill>
                   <a:schemeClr val="bg2">
                     <a:lumMod val="75000"/>
                   </a:schemeClr>
                 </a:solidFill>
               </a:rPr>
-              <a:t>Created at the YANG Message Broker Producer</a:t>
-            </a:r>
+              <a:t>Message</a:t>
+            </a:r>
+            <a:r>
+              <a:rPr lang="en-US" sz="2800" dirty="0">
+                <a:solidFill>
+                  <a:schemeClr val="bg2">
+                    <a:lumMod val="75000"/>
+                  </a:schemeClr>
+                </a:solidFill>
+              </a:rPr>
+              <a:t> Broker Topic Naming Concept</a:t>
+            </a:r>
+            <a:endParaRPr lang="en-US" sz="2700" dirty="0">
+              <a:solidFill>
+                <a:schemeClr val="bg2">
+                  <a:lumMod val="75000"/>
+                </a:schemeClr>
+              </a:solidFill>
+            </a:endParaRPr>
           </a:p>
         </p:txBody>
       </p:sp>
@@ -14202,78 +17512,199 @@
               <a:buNone/>
             </a:pPr>
             <a:r>
+              <a:rPr lang="de-CH" sz="2100" dirty="0" err="1"/>
+              <a:t>Two</a:t>
+            </a:r>
+            <a:r>
+              <a:rPr lang="de-CH" sz="2100" dirty="0"/>
+              <a:t> </a:t>
+            </a:r>
+            <a:r>
+              <a:rPr lang="de-CH" sz="2100" dirty="0" err="1"/>
+              <a:t>topics</a:t>
+            </a:r>
+            <a:r>
+              <a:rPr lang="de-CH" sz="2100" dirty="0"/>
+              <a:t> carry all BMP </a:t>
+            </a:r>
+            <a:r>
+              <a:rPr lang="de-CH" sz="2100" dirty="0" err="1"/>
+              <a:t>data</a:t>
+            </a:r>
+            <a:r>
+              <a:rPr lang="de-CH" sz="2100" dirty="0"/>
+              <a:t>:</a:t>
+            </a:r>
+          </a:p>
+          <a:p>
+            <a:pPr>
+              <a:spcBef>
+                <a:spcPts val="600"/>
+              </a:spcBef>
+              <a:spcAft>
+                <a:spcPts val="600"/>
+              </a:spcAft>
+            </a:pPr>
+            <a:r>
+              <a:rPr lang="de-CH" sz="2100" dirty="0" err="1">
+                <a:solidFill>
+                  <a:srgbClr val="C00000"/>
+                </a:solidFill>
+              </a:rPr>
+              <a:t>state</a:t>
+            </a:r>
+            <a:r>
+              <a:rPr lang="de-CH" sz="2100" dirty="0">
+                <a:solidFill>
+                  <a:srgbClr val="C00000"/>
+                </a:solidFill>
+              </a:rPr>
+              <a:t>-</a:t>
+            </a:r>
+            <a:r>
+              <a:rPr lang="de-CH" sz="2100" dirty="0" err="1">
+                <a:solidFill>
+                  <a:srgbClr val="C00000"/>
+                </a:solidFill>
+              </a:rPr>
+              <a:t>changes</a:t>
+            </a:r>
+            <a:r>
+              <a:rPr lang="de-CH" sz="2100" dirty="0">
+                <a:solidFill>
+                  <a:srgbClr val="C00000"/>
+                </a:solidFill>
+              </a:rPr>
+              <a:t>-and-</a:t>
+            </a:r>
+            <a:r>
+              <a:rPr lang="de-CH" sz="2100" dirty="0" err="1">
+                <a:solidFill>
+                  <a:srgbClr val="C00000"/>
+                </a:solidFill>
+              </a:rPr>
+              <a:t>statistic</a:t>
+            </a:r>
+            <a:r>
+              <a:rPr lang="de-CH" sz="2100" dirty="0"/>
+              <a:t>: </a:t>
+            </a:r>
+            <a:r>
+              <a:rPr lang="de-CH" sz="2100" b="1" dirty="0"/>
+              <a:t>all BMP </a:t>
+            </a:r>
+            <a:r>
+              <a:rPr lang="de-CH" sz="2100" b="1" dirty="0" err="1"/>
+              <a:t>message</a:t>
+            </a:r>
+            <a:r>
+              <a:rPr lang="de-CH" sz="2100" b="1" dirty="0"/>
+              <a:t> </a:t>
+            </a:r>
+            <a:r>
+              <a:rPr lang="de-CH" sz="2100" b="1" dirty="0" err="1"/>
+              <a:t>types</a:t>
+            </a:r>
+            <a:r>
+              <a:rPr lang="de-CH" sz="2100" b="1" dirty="0"/>
+              <a:t> in real-time</a:t>
+            </a:r>
+            <a:r>
+              <a:rPr lang="de-CH" sz="2100" dirty="0"/>
+              <a:t> (</a:t>
+            </a:r>
+            <a:r>
+              <a:rPr lang="de-CH" sz="2100" dirty="0" err="1"/>
+              <a:t>included</a:t>
+            </a:r>
+            <a:r>
+              <a:rPr lang="de-CH" sz="2100" dirty="0"/>
+              <a:t> </a:t>
+            </a:r>
+            <a:r>
+              <a:rPr lang="de-CH" sz="2100" dirty="0" err="1"/>
+              <a:t>stats</a:t>
+            </a:r>
+            <a:r>
+              <a:rPr lang="de-CH" sz="2100" dirty="0"/>
+              <a:t>)</a:t>
+            </a:r>
+          </a:p>
+          <a:p>
+            <a:pPr>
+              <a:spcBef>
+                <a:spcPts val="600"/>
+              </a:spcBef>
+              <a:spcAft>
+                <a:spcPts val="600"/>
+              </a:spcAft>
+            </a:pPr>
+            <a:r>
+              <a:rPr lang="en-US" sz="2100" dirty="0">
+                <a:solidFill>
+                  <a:srgbClr val="C00000"/>
+                </a:solidFill>
+              </a:rPr>
+              <a:t>current-state</a:t>
+            </a:r>
+            <a:r>
               <a:rPr lang="en-US" sz="2100" dirty="0"/>
-              <a:t>Message Brokers topics are addressed with a unique name.  The document defines </a:t>
-            </a:r>
-            <a:r>
-              <a:rPr lang="en-US" sz="2100" b="1" dirty="0">
-                <a:solidFill>
-                  <a:srgbClr val="FF0000"/>
-                </a:solidFill>
-              </a:rPr>
-              <a:t>"s</a:t>
-            </a:r>
-            <a:r>
-              <a:rPr lang="de-CH" sz="2100" b="1" dirty="0" err="1">
-                <a:solidFill>
-                  <a:srgbClr val="FF0000"/>
-                </a:solidFill>
-              </a:rPr>
-              <a:t>tate</a:t>
-            </a:r>
-            <a:r>
-              <a:rPr lang="de-CH" sz="2100" b="1" dirty="0">
-                <a:solidFill>
-                  <a:srgbClr val="FF0000"/>
-                </a:solidFill>
-              </a:rPr>
-              <a:t>-</a:t>
-            </a:r>
-            <a:r>
-              <a:rPr lang="de-CH" sz="2100" b="1" dirty="0" err="1">
-                <a:solidFill>
-                  <a:srgbClr val="FF0000"/>
-                </a:solidFill>
-              </a:rPr>
-              <a:t>changes</a:t>
-            </a:r>
-            <a:r>
-              <a:rPr lang="de-CH" sz="2100" b="1" dirty="0">
-                <a:solidFill>
-                  <a:srgbClr val="FF0000"/>
-                </a:solidFill>
-              </a:rPr>
-              <a:t>-and-</a:t>
-            </a:r>
-            <a:r>
-              <a:rPr lang="de-CH" sz="2100" b="1" dirty="0" err="1">
-                <a:solidFill>
-                  <a:srgbClr val="FF0000"/>
-                </a:solidFill>
-              </a:rPr>
-              <a:t>statistics</a:t>
-            </a:r>
-            <a:r>
-              <a:rPr lang="en-US" sz="2100" b="1" dirty="0">
-                <a:solidFill>
-                  <a:srgbClr val="FF0000"/>
-                </a:solidFill>
-              </a:rPr>
-              <a:t>" and "current-state" </a:t>
+              <a:t>: all BMP message types except statistics</a:t>
+            </a:r>
+            <a:r>
+              <a:rPr lang="en-US" sz="2100" b="1" dirty="0"/>
+              <a:t>, topic-compacted </a:t>
             </a:r>
             <a:r>
               <a:rPr lang="en-US" sz="2100" dirty="0"/>
-              <a:t>in the topic name as the first part to denote the types of data. </a:t>
-            </a:r>
-            <a:r>
-              <a:rPr lang="en-US" sz="2100" b="1" dirty="0">
-                <a:solidFill>
-                  <a:srgbClr val="FF0000"/>
-                </a:solidFill>
-              </a:rPr>
-              <a:t>"current-state" topics are compacted.</a:t>
-            </a:r>
-            <a:endParaRPr lang="en-US" sz="2100" dirty="0"/>
+              <a:t>(i.e. the broker retains only the latest message per message-key, resulting in the current state per each router </a:t>
+            </a:r>
+            <a:r>
+              <a:rPr lang="en-US" sz="2100" dirty="0" err="1"/>
+              <a:t>RiB</a:t>
+            </a:r>
+            <a:r>
+              <a:rPr lang="en-US" sz="2100" dirty="0"/>
+              <a:t>)</a:t>
+            </a:r>
+          </a:p>
+          <a:p>
+            <a:pPr marL="0" indent="0">
+              <a:spcBef>
+                <a:spcPts val="600"/>
+              </a:spcBef>
+              <a:spcAft>
+                <a:spcPts val="600"/>
+              </a:spcAft>
+              <a:buNone/>
+            </a:pPr>
+            <a:r>
+              <a:rPr lang="en-US" sz="2100" dirty="0"/>
+              <a:t>Optional organizational prefix MAY be prepended with – separator (e.g. </a:t>
+            </a:r>
+            <a:r>
+              <a:rPr lang="en-US" sz="2100" dirty="0" err="1"/>
+              <a:t>nmop</a:t>
+            </a:r>
+            <a:r>
+              <a:rPr lang="en-US" sz="2100" dirty="0"/>
+              <a:t>-bmp-current-state).</a:t>
+            </a:r>
+          </a:p>
+          <a:p>
+            <a:pPr marL="0" indent="0">
+              <a:spcBef>
+                <a:spcPts val="600"/>
+              </a:spcBef>
+              <a:spcAft>
+                <a:spcPts val="600"/>
+              </a:spcAft>
+              <a:buNone/>
+            </a:pPr>
+            <a:r>
+              <a:rPr lang="en-US" sz="2100" dirty="0"/>
+              <a:t>A consumer MAY subscribe to either or both topics depending on the needs.</a:t>
+            </a:r>
           </a:p>
         </p:txBody>
       </p:sp>
@@ -14305,7 +17736,7 @@
           <a:p>
             <a:fld id="{FC4AC485-25DE-431E-B345-9C0A15BB7F8A}" type="slidenum">
               <a:rPr lang="en-US" sz="1400" smtClean="0"/>
-              <a:t>8</a:t>
+              <a:t>9</a:t>
             </a:fld>
             <a:endParaRPr lang="en-US" sz="1400" dirty="0"/>
           </a:p>
@@ -14315,297 +17746,6 @@
     <p:extLst>
       <p:ext uri="{BB962C8B-B14F-4D97-AF65-F5344CB8AC3E}">
         <p14:creationId xmlns:p14="http://schemas.microsoft.com/office/powerpoint/2010/main" val="4128600093"/>
-      </p:ext>
-    </p:extLst>
-  </p:cSld>
-  <p:clrMapOvr>
-    <a:masterClrMapping/>
-  </p:clrMapOvr>
-</p:sld>
-</file>
-
-<file path=ppt/slides/slide9.xml><?xml version="1.0" encoding="utf-8"?>
-<p:sld xmlns:a="http://schemas.openxmlformats.org/drawingml/2006/main" xmlns:r="http://schemas.openxmlformats.org/officeDocument/2006/relationships" xmlns:p="http://schemas.openxmlformats.org/presentationml/2006/main">
-  <p:cSld>
-    <p:spTree>
-      <p:nvGrpSpPr>
-        <p:cNvPr id="1" name="">
-          <a:extLst>
-            <a:ext uri="{FF2B5EF4-FFF2-40B4-BE49-F238E27FC236}">
-              <a16:creationId xmlns:a16="http://schemas.microsoft.com/office/drawing/2014/main" id="{9952B289-F416-C973-3B7A-15C1F41DA5AB}"/>
-            </a:ext>
-          </a:extLst>
-        </p:cNvPr>
-        <p:cNvGrpSpPr/>
-        <p:nvPr/>
-      </p:nvGrpSpPr>
-      <p:grpSpPr>
-        <a:xfrm>
-          <a:off x="0" y="0"/>
-          <a:ext cx="0" cy="0"/>
-          <a:chOff x="0" y="0"/>
-          <a:chExt cx="0" cy="0"/>
-        </a:xfrm>
-      </p:grpSpPr>
-      <p:sp>
-        <p:nvSpPr>
-          <p:cNvPr id="2" name="Title 1">
-            <a:extLst>
-              <a:ext uri="{FF2B5EF4-FFF2-40B4-BE49-F238E27FC236}">
-                <a16:creationId xmlns:a16="http://schemas.microsoft.com/office/drawing/2014/main" id="{1C0FBC70-1C05-23DB-EF3A-2482F511BD9B}"/>
-              </a:ext>
-            </a:extLst>
-          </p:cNvPr>
-          <p:cNvSpPr>
-            <a:spLocks noGrp="1"/>
-          </p:cNvSpPr>
-          <p:nvPr>
-            <p:ph type="title"/>
-          </p:nvPr>
-        </p:nvSpPr>
-        <p:spPr/>
-        <p:txBody>
-          <a:bodyPr>
-            <a:normAutofit/>
-          </a:bodyPr>
-          <a:lstStyle/>
-          <a:p>
-            <a:r>
-              <a:rPr lang="en-US" sz="2800" b="1" dirty="0"/>
-              <a:t>YANG Message Keys and Indexes</a:t>
-            </a:r>
-            <a:br>
-              <a:rPr lang="en-US" sz="3600" dirty="0"/>
-            </a:br>
-            <a:r>
-              <a:rPr lang="en-US" sz="2700" dirty="0">
-                <a:solidFill>
-                  <a:schemeClr val="bg2">
-                    <a:lumMod val="75000"/>
-                  </a:schemeClr>
-                </a:solidFill>
-              </a:rPr>
-              <a:t>Calculated and Used at the YANG Message Broker Producer</a:t>
-            </a:r>
-          </a:p>
-        </p:txBody>
-      </p:sp>
-      <p:sp>
-        <p:nvSpPr>
-          <p:cNvPr id="3" name="Content Placeholder 2">
-            <a:extLst>
-              <a:ext uri="{FF2B5EF4-FFF2-40B4-BE49-F238E27FC236}">
-                <a16:creationId xmlns:a16="http://schemas.microsoft.com/office/drawing/2014/main" id="{16030435-8548-CFD7-E67B-E4D3DD29D75F}"/>
-              </a:ext>
-            </a:extLst>
-          </p:cNvPr>
-          <p:cNvSpPr>
-            <a:spLocks noGrp="1"/>
-          </p:cNvSpPr>
-          <p:nvPr>
-            <p:ph idx="1"/>
-          </p:nvPr>
-        </p:nvSpPr>
-        <p:spPr>
-          <a:xfrm>
-            <a:off x="838199" y="1690688"/>
-            <a:ext cx="10515600" cy="4486275"/>
-          </a:xfrm>
-        </p:spPr>
-        <p:txBody>
-          <a:bodyPr>
-            <a:noAutofit/>
-          </a:bodyPr>
-          <a:lstStyle/>
-          <a:p>
-            <a:pPr marL="0" indent="0">
-              <a:spcBef>
-                <a:spcPts val="600"/>
-              </a:spcBef>
-              <a:spcAft>
-                <a:spcPts val="600"/>
-              </a:spcAft>
-              <a:buNone/>
-            </a:pPr>
-            <a:r>
-              <a:rPr lang="en-US" sz="2100" dirty="0"/>
-              <a:t>A Message Broker uses a Message Key to index the Message and a value to carry the Message content. </a:t>
-            </a:r>
-            <a:r>
-              <a:rPr lang="en-US" sz="2100" b="1" dirty="0">
-                <a:solidFill>
-                  <a:srgbClr val="FF0000"/>
-                </a:solidFill>
-              </a:rPr>
-              <a:t>The Partition Key is being used as input for the Message Broker Producer hash function to distribute across Partitions and Message Key at the Message Broker for topic compaction.</a:t>
-            </a:r>
-          </a:p>
-          <a:p>
-            <a:pPr marL="0" indent="0">
-              <a:spcBef>
-                <a:spcPts val="600"/>
-              </a:spcBef>
-              <a:spcAft>
-                <a:spcPts val="600"/>
-              </a:spcAft>
-              <a:buNone/>
-            </a:pPr>
-            <a:r>
-              <a:rPr lang="en-US" sz="2100" strike="sngStrike" dirty="0"/>
-              <a:t>For BMP, </a:t>
-            </a:r>
-            <a:r>
-              <a:rPr lang="en-US" sz="2100" b="1" strike="sngStrike" dirty="0">
-                <a:solidFill>
-                  <a:srgbClr val="FF0000"/>
-                </a:solidFill>
-              </a:rPr>
-              <a:t>the network node hostname, what BMP Message Type the data represents and </a:t>
-            </a:r>
-            <a:r>
-              <a:rPr lang="en-US" sz="2100" strike="sngStrike" dirty="0"/>
-              <a:t>apart from the initiation-message and termination-message </a:t>
-            </a:r>
-            <a:r>
-              <a:rPr lang="en-US" sz="2100" b="1" strike="sngStrike" dirty="0">
-                <a:solidFill>
-                  <a:srgbClr val="FF0000"/>
-                </a:solidFill>
-              </a:rPr>
-              <a:t>the BMP index </a:t>
-            </a:r>
-            <a:r>
-              <a:rPr lang="en-US" sz="2100" strike="sngStrike" dirty="0"/>
-              <a:t>is used to generate the Message Key. The BMP index is calculated depending on BMP Message Type as following:</a:t>
-            </a:r>
-          </a:p>
-          <a:p>
-            <a:pPr>
-              <a:spcBef>
-                <a:spcPts val="600"/>
-              </a:spcBef>
-            </a:pPr>
-            <a:r>
-              <a:rPr lang="en-US" sz="2100" strike="sngStrike" dirty="0"/>
-              <a:t>peer-up-notification: "peer-distinguisher" and "peer-address".</a:t>
-            </a:r>
-          </a:p>
-          <a:p>
-            <a:pPr>
-              <a:spcBef>
-                <a:spcPts val="600"/>
-              </a:spcBef>
-            </a:pPr>
-            <a:r>
-              <a:rPr lang="en-US" sz="2100" strike="sngStrike" dirty="0"/>
-              <a:t>peer-down-notification: "peer-distinguisher" and "peer-address".</a:t>
-            </a:r>
-          </a:p>
-          <a:p>
-            <a:pPr>
-              <a:spcBef>
-                <a:spcPts val="600"/>
-              </a:spcBef>
-            </a:pPr>
-            <a:r>
-              <a:rPr lang="en-US" sz="2100" strike="sngStrike" dirty="0"/>
-              <a:t>statistics: "peer-distinguisher" and "peer-address".</a:t>
-            </a:r>
-          </a:p>
-          <a:p>
-            <a:pPr>
-              <a:spcBef>
-                <a:spcPts val="600"/>
-              </a:spcBef>
-            </a:pPr>
-            <a:r>
-              <a:rPr lang="en-US" sz="2100" strike="sngStrike" dirty="0"/>
-              <a:t>route-monitoring: "peer-distinguisher", "peer-address" </a:t>
-            </a:r>
-            <a:r>
-              <a:rPr lang="en-US" sz="2100" strike="sngStrike" dirty="0" err="1"/>
-              <a:t>afi-safi</a:t>
-            </a:r>
-            <a:r>
-              <a:rPr lang="en-US" sz="2100" strike="sngStrike" dirty="0"/>
-              <a:t> name, address family, name of the BGP RIB, "prefix" "origin" "path-id" route attributes and the index of the used </a:t>
-            </a:r>
-            <a:r>
-              <a:rPr lang="en-US" sz="2100" strike="sngStrike" dirty="0" err="1"/>
-              <a:t>attr</a:t>
-            </a:r>
-            <a:r>
-              <a:rPr lang="en-US" sz="2100" strike="sngStrike" dirty="0"/>
-              <a:t>-set.</a:t>
-            </a:r>
-          </a:p>
-          <a:p>
-            <a:pPr>
-              <a:spcBef>
-                <a:spcPts val="600"/>
-              </a:spcBef>
-            </a:pPr>
-            <a:r>
-              <a:rPr lang="en-US" sz="2100" strike="sngStrike" dirty="0"/>
-              <a:t>route-mirroring: "peer-distinguisher", "peer-address" </a:t>
-            </a:r>
-            <a:r>
-              <a:rPr lang="en-US" sz="2100" strike="sngStrike" dirty="0" err="1"/>
-              <a:t>afi-safi</a:t>
-            </a:r>
-            <a:r>
-              <a:rPr lang="en-US" sz="2100" strike="sngStrike" dirty="0"/>
-              <a:t> name, address family, name of the BGP RIB, "prefix" "origin" "path-id" route attributes, index of the used </a:t>
-            </a:r>
-            <a:r>
-              <a:rPr lang="en-US" sz="2100" strike="sngStrike" dirty="0" err="1"/>
-              <a:t>attr</a:t>
-            </a:r>
-            <a:r>
-              <a:rPr lang="en-US" sz="2100" strike="sngStrike" dirty="0"/>
-              <a:t>-set and information enumeration.</a:t>
-            </a:r>
-          </a:p>
-        </p:txBody>
-      </p:sp>
-      <p:sp>
-        <p:nvSpPr>
-          <p:cNvPr id="6" name="Slide Number Placeholder 1">
-            <a:extLst>
-              <a:ext uri="{FF2B5EF4-FFF2-40B4-BE49-F238E27FC236}">
-                <a16:creationId xmlns:a16="http://schemas.microsoft.com/office/drawing/2014/main" id="{75FBC6C8-3CC3-D033-50B0-B7366AC7A70E}"/>
-              </a:ext>
-            </a:extLst>
-          </p:cNvPr>
-          <p:cNvSpPr>
-            <a:spLocks noGrp="1"/>
-          </p:cNvSpPr>
-          <p:nvPr>
-            <p:ph type="sldNum" sz="quarter" idx="12"/>
-          </p:nvPr>
-        </p:nvSpPr>
-        <p:spPr>
-          <a:xfrm>
-            <a:off x="11587892" y="6361637"/>
-            <a:ext cx="414251" cy="365125"/>
-          </a:xfrm>
-        </p:spPr>
-        <p:txBody>
-          <a:bodyPr/>
-          <a:lstStyle/>
-          <a:p>
-            <a:fld id="{FC4AC485-25DE-431E-B345-9C0A15BB7F8A}" type="slidenum">
-              <a:rPr lang="en-US" sz="1400" smtClean="0"/>
-              <a:t>9</a:t>
-            </a:fld>
-            <a:endParaRPr lang="en-US" sz="1400" dirty="0"/>
-          </a:p>
-        </p:txBody>
-      </p:sp>
-    </p:spTree>
-    <p:extLst>
-      <p:ext uri="{BB962C8B-B14F-4D97-AF65-F5344CB8AC3E}">
-        <p14:creationId xmlns:p14="http://schemas.microsoft.com/office/powerpoint/2010/main" val="1190312228"/>
       </p:ext>
     </p:extLst>
   </p:cSld>

--- a/126/NMOP/draft-netana-nmop-message-broker-bmp-telemetry-msg-03.pptx
+++ b/126/NMOP/draft-netana-nmop-message-broker-bmp-telemetry-msg-03.pptx
@@ -131,7 +131,7 @@
 <file path=ppt/revisionInfo.xml><?xml version="1.0" encoding="utf-8"?>
 <p1510:revInfo xmlns:a="http://schemas.openxmlformats.org/drawingml/2006/main" xmlns:r="http://schemas.openxmlformats.org/officeDocument/2006/relationships" xmlns:p1510="http://schemas.microsoft.com/office/powerpoint/2015/10/main">
   <p1510:revLst>
-    <p1510:client id="{33AB2929-1981-471E-A8B6-57E934419350}" v="24" dt="2026-07-14T13:24:33.818"/>
+    <p1510:client id="{33AB2929-1981-471E-A8B6-57E934419350}" v="26" dt="2026-07-16T14:28:36.779"/>
   </p1510:revLst>
 </p1510:revInfo>
 </file>
@@ -379,448 +379,6 @@
     </pc:docChg>
   </pc:docChgLst>
   <pc:docChgLst>
-    <pc:chgData name="Graf Thomas, SCS-INI-NET-VNC-E2E" userId="487bc3e3-9ce7-4cdd-b7b4-8899ea88d289" providerId="ADAL" clId="{ADEEF08A-D719-4B50-A383-4105EDA2C206}"/>
-    <pc:docChg chg="undo redo custSel addSld delSld modSld sldOrd">
-      <pc:chgData name="Graf Thomas, SCS-INI-NET-VNC-E2E" userId="487bc3e3-9ce7-4cdd-b7b4-8899ea88d289" providerId="ADAL" clId="{ADEEF08A-D719-4B50-A383-4105EDA2C206}" dt="2026-07-14T13:29:47.977" v="7257" actId="400"/>
-      <pc:docMkLst>
-        <pc:docMk/>
-      </pc:docMkLst>
-      <pc:sldChg chg="modSp mod">
-        <pc:chgData name="Graf Thomas, SCS-INI-NET-VNC-E2E" userId="487bc3e3-9ce7-4cdd-b7b4-8899ea88d289" providerId="ADAL" clId="{ADEEF08A-D719-4B50-A383-4105EDA2C206}" dt="2026-07-14T12:41:35.171" v="6121" actId="20577"/>
-        <pc:sldMkLst>
-          <pc:docMk/>
-          <pc:sldMk cId="3578665336" sldId="1041"/>
-        </pc:sldMkLst>
-        <pc:spChg chg="mod">
-          <ac:chgData name="Graf Thomas, SCS-INI-NET-VNC-E2E" userId="487bc3e3-9ce7-4cdd-b7b4-8899ea88d289" providerId="ADAL" clId="{ADEEF08A-D719-4B50-A383-4105EDA2C206}" dt="2026-07-14T12:41:23.213" v="6114" actId="20577"/>
-          <ac:spMkLst>
-            <pc:docMk/>
-            <pc:sldMk cId="3578665336" sldId="1041"/>
-            <ac:spMk id="5" creationId="{C26208B2-0D10-4C23-B2DE-372A62E98644}"/>
-          </ac:spMkLst>
-        </pc:spChg>
-        <pc:spChg chg="mod">
-          <ac:chgData name="Graf Thomas, SCS-INI-NET-VNC-E2E" userId="487bc3e3-9ce7-4cdd-b7b4-8899ea88d289" providerId="ADAL" clId="{ADEEF08A-D719-4B50-A383-4105EDA2C206}" dt="2026-07-14T12:41:35.171" v="6121" actId="20577"/>
-          <ac:spMkLst>
-            <pc:docMk/>
-            <pc:sldMk cId="3578665336" sldId="1041"/>
-            <ac:spMk id="6" creationId="{6CAA0765-1318-4A03-8F91-D3ECC43D8FA7}"/>
-          </ac:spMkLst>
-        </pc:spChg>
-      </pc:sldChg>
-      <pc:sldChg chg="modSp del mod">
-        <pc:chgData name="Graf Thomas, SCS-INI-NET-VNC-E2E" userId="487bc3e3-9ce7-4cdd-b7b4-8899ea88d289" providerId="ADAL" clId="{ADEEF08A-D719-4B50-A383-4105EDA2C206}" dt="2026-07-14T12:55:18.417" v="6196" actId="47"/>
-        <pc:sldMkLst>
-          <pc:docMk/>
-          <pc:sldMk cId="1088069469" sldId="26422"/>
-        </pc:sldMkLst>
-      </pc:sldChg>
-      <pc:sldChg chg="addSp modSp mod">
-        <pc:chgData name="Graf Thomas, SCS-INI-NET-VNC-E2E" userId="487bc3e3-9ce7-4cdd-b7b4-8899ea88d289" providerId="ADAL" clId="{ADEEF08A-D719-4B50-A383-4105EDA2C206}" dt="2026-03-06T15:14:32.681" v="6011" actId="14100"/>
-        <pc:sldMkLst>
-          <pc:docMk/>
-          <pc:sldMk cId="670772560" sldId="2145706220"/>
-        </pc:sldMkLst>
-      </pc:sldChg>
-      <pc:sldChg chg="delSp modSp add mod">
-        <pc:chgData name="Graf Thomas, SCS-INI-NET-VNC-E2E" userId="487bc3e3-9ce7-4cdd-b7b4-8899ea88d289" providerId="ADAL" clId="{ADEEF08A-D719-4B50-A383-4105EDA2C206}" dt="2026-07-14T12:41:55.778" v="6133"/>
-        <pc:sldMkLst>
-          <pc:docMk/>
-          <pc:sldMk cId="2750719351" sldId="2145706243"/>
-        </pc:sldMkLst>
-        <pc:spChg chg="mod">
-          <ac:chgData name="Graf Thomas, SCS-INI-NET-VNC-E2E" userId="487bc3e3-9ce7-4cdd-b7b4-8899ea88d289" providerId="ADAL" clId="{ADEEF08A-D719-4B50-A383-4105EDA2C206}" dt="2026-07-14T12:41:55.778" v="6133"/>
-          <ac:spMkLst>
-            <pc:docMk/>
-            <pc:sldMk cId="2750719351" sldId="2145706243"/>
-            <ac:spMk id="3" creationId="{E1C8AC62-B5C5-ADE4-1957-88D3A14E964A}"/>
-          </ac:spMkLst>
-        </pc:spChg>
-      </pc:sldChg>
-      <pc:sldChg chg="addSp delSp modSp del mod">
-        <pc:chgData name="Graf Thomas, SCS-INI-NET-VNC-E2E" userId="487bc3e3-9ce7-4cdd-b7b4-8899ea88d289" providerId="ADAL" clId="{ADEEF08A-D719-4B50-A383-4105EDA2C206}" dt="2026-07-14T12:55:56.511" v="6197" actId="47"/>
-        <pc:sldMkLst>
-          <pc:docMk/>
-          <pc:sldMk cId="1315775908" sldId="2145706280"/>
-        </pc:sldMkLst>
-      </pc:sldChg>
-      <pc:sldChg chg="addSp delSp modSp del mod">
-        <pc:chgData name="Graf Thomas, SCS-INI-NET-VNC-E2E" userId="487bc3e3-9ce7-4cdd-b7b4-8899ea88d289" providerId="ADAL" clId="{ADEEF08A-D719-4B50-A383-4105EDA2C206}" dt="2026-07-14T12:55:56.511" v="6197" actId="47"/>
-        <pc:sldMkLst>
-          <pc:docMk/>
-          <pc:sldMk cId="3685482022" sldId="2145706295"/>
-        </pc:sldMkLst>
-        <pc:spChg chg="mod">
-          <ac:chgData name="Graf Thomas, SCS-INI-NET-VNC-E2E" userId="487bc3e3-9ce7-4cdd-b7b4-8899ea88d289" providerId="ADAL" clId="{ADEEF08A-D719-4B50-A383-4105EDA2C206}" dt="2026-07-14T12:48:43.491" v="6138" actId="1076"/>
-          <ac:spMkLst>
-            <pc:docMk/>
-            <pc:sldMk cId="3685482022" sldId="2145706295"/>
-            <ac:spMk id="9" creationId="{B59BD151-8C28-BD0B-5959-748ED326249A}"/>
-          </ac:spMkLst>
-        </pc:spChg>
-      </pc:sldChg>
-      <pc:sldChg chg="addSp delSp modSp del mod">
-        <pc:chgData name="Graf Thomas, SCS-INI-NET-VNC-E2E" userId="487bc3e3-9ce7-4cdd-b7b4-8899ea88d289" providerId="ADAL" clId="{ADEEF08A-D719-4B50-A383-4105EDA2C206}" dt="2026-07-14T12:56:53.974" v="6205" actId="47"/>
-        <pc:sldMkLst>
-          <pc:docMk/>
-          <pc:sldMk cId="1475201924" sldId="2145706296"/>
-        </pc:sldMkLst>
-        <pc:picChg chg="mod">
-          <ac:chgData name="Graf Thomas, SCS-INI-NET-VNC-E2E" userId="487bc3e3-9ce7-4cdd-b7b4-8899ea88d289" providerId="ADAL" clId="{ADEEF08A-D719-4B50-A383-4105EDA2C206}" dt="2026-07-14T12:49:12.783" v="6139" actId="14826"/>
-          <ac:picMkLst>
-            <pc:docMk/>
-            <pc:sldMk cId="1475201924" sldId="2145706296"/>
-            <ac:picMk id="3" creationId="{7FE1D9BE-38E0-66CE-DDC0-29019F670C04}"/>
-          </ac:picMkLst>
-        </pc:picChg>
-      </pc:sldChg>
-      <pc:sldChg chg="addSp delSp modSp del mod">
-        <pc:chgData name="Graf Thomas, SCS-INI-NET-VNC-E2E" userId="487bc3e3-9ce7-4cdd-b7b4-8899ea88d289" providerId="ADAL" clId="{ADEEF08A-D719-4B50-A383-4105EDA2C206}" dt="2026-07-14T12:56:44.698" v="6204" actId="47"/>
-        <pc:sldMkLst>
-          <pc:docMk/>
-          <pc:sldMk cId="710783608" sldId="2145706297"/>
-        </pc:sldMkLst>
-        <pc:spChg chg="mod">
-          <ac:chgData name="Graf Thomas, SCS-INI-NET-VNC-E2E" userId="487bc3e3-9ce7-4cdd-b7b4-8899ea88d289" providerId="ADAL" clId="{ADEEF08A-D719-4B50-A383-4105EDA2C206}" dt="2026-07-14T12:51:15.075" v="6146" actId="14100"/>
-          <ac:spMkLst>
-            <pc:docMk/>
-            <pc:sldMk cId="710783608" sldId="2145706297"/>
-            <ac:spMk id="5" creationId="{749FD0AD-E617-98E7-0E99-692C31C4B242}"/>
-          </ac:spMkLst>
-        </pc:spChg>
-        <pc:picChg chg="add mod">
-          <ac:chgData name="Graf Thomas, SCS-INI-NET-VNC-E2E" userId="487bc3e3-9ce7-4cdd-b7b4-8899ea88d289" providerId="ADAL" clId="{ADEEF08A-D719-4B50-A383-4105EDA2C206}" dt="2026-07-14T12:50:35.309" v="6144" actId="1076"/>
-          <ac:picMkLst>
-            <pc:docMk/>
-            <pc:sldMk cId="710783608" sldId="2145706297"/>
-            <ac:picMk id="3" creationId="{883A53C0-0E1E-9DCE-9996-F8C9123C6621}"/>
-          </ac:picMkLst>
-        </pc:picChg>
-        <pc:picChg chg="del mod">
-          <ac:chgData name="Graf Thomas, SCS-INI-NET-VNC-E2E" userId="487bc3e3-9ce7-4cdd-b7b4-8899ea88d289" providerId="ADAL" clId="{ADEEF08A-D719-4B50-A383-4105EDA2C206}" dt="2026-07-14T12:50:27.664" v="6142" actId="478"/>
-          <ac:picMkLst>
-            <pc:docMk/>
-            <pc:sldMk cId="710783608" sldId="2145706297"/>
-            <ac:picMk id="4" creationId="{428EBA8D-181B-508E-90C7-3CCEC074640A}"/>
-          </ac:picMkLst>
-        </pc:picChg>
-      </pc:sldChg>
-      <pc:sldChg chg="addSp delSp modSp mod ord">
-        <pc:chgData name="Graf Thomas, SCS-INI-NET-VNC-E2E" userId="487bc3e3-9ce7-4cdd-b7b4-8899ea88d289" providerId="ADAL" clId="{ADEEF08A-D719-4B50-A383-4105EDA2C206}" dt="2026-07-14T12:56:59.627" v="6207"/>
-        <pc:sldMkLst>
-          <pc:docMk/>
-          <pc:sldMk cId="3625312977" sldId="2145706298"/>
-        </pc:sldMkLst>
-        <pc:picChg chg="add mod">
-          <ac:chgData name="Graf Thomas, SCS-INI-NET-VNC-E2E" userId="487bc3e3-9ce7-4cdd-b7b4-8899ea88d289" providerId="ADAL" clId="{ADEEF08A-D719-4B50-A383-4105EDA2C206}" dt="2026-07-14T12:56:39.058" v="6203" actId="1076"/>
-          <ac:picMkLst>
-            <pc:docMk/>
-            <pc:sldMk cId="3625312977" sldId="2145706298"/>
-            <ac:picMk id="3" creationId="{3D20887A-63D9-A4B9-AA81-58DA821129FA}"/>
-          </ac:picMkLst>
-        </pc:picChg>
-        <pc:picChg chg="del">
-          <ac:chgData name="Graf Thomas, SCS-INI-NET-VNC-E2E" userId="487bc3e3-9ce7-4cdd-b7b4-8899ea88d289" providerId="ADAL" clId="{ADEEF08A-D719-4B50-A383-4105EDA2C206}" dt="2026-07-14T12:56:26.908" v="6198" actId="478"/>
-          <ac:picMkLst>
-            <pc:docMk/>
-            <pc:sldMk cId="3625312977" sldId="2145706298"/>
-            <ac:picMk id="4" creationId="{5B845DB1-AD33-F165-0A69-794539AA8954}"/>
-          </ac:picMkLst>
-        </pc:picChg>
-      </pc:sldChg>
-      <pc:sldChg chg="del">
-        <pc:chgData name="Graf Thomas, SCS-INI-NET-VNC-E2E" userId="487bc3e3-9ce7-4cdd-b7b4-8899ea88d289" providerId="ADAL" clId="{ADEEF08A-D719-4B50-A383-4105EDA2C206}" dt="2026-03-06T12:57:35.600" v="1725" actId="47"/>
-        <pc:sldMkLst>
-          <pc:docMk/>
-          <pc:sldMk cId="2117458142" sldId="2145706299"/>
-        </pc:sldMkLst>
-      </pc:sldChg>
-      <pc:sldChg chg="del">
-        <pc:chgData name="Graf Thomas, SCS-INI-NET-VNC-E2E" userId="487bc3e3-9ce7-4cdd-b7b4-8899ea88d289" providerId="ADAL" clId="{ADEEF08A-D719-4B50-A383-4105EDA2C206}" dt="2026-07-14T12:55:18.417" v="6196" actId="47"/>
-        <pc:sldMkLst>
-          <pc:docMk/>
-          <pc:sldMk cId="1230411846" sldId="2145706300"/>
-        </pc:sldMkLst>
-      </pc:sldChg>
-      <pc:sldChg chg="modSp del mod">
-        <pc:chgData name="Graf Thomas, SCS-INI-NET-VNC-E2E" userId="487bc3e3-9ce7-4cdd-b7b4-8899ea88d289" providerId="ADAL" clId="{ADEEF08A-D719-4B50-A383-4105EDA2C206}" dt="2026-07-14T12:55:18.417" v="6196" actId="47"/>
-        <pc:sldMkLst>
-          <pc:docMk/>
-          <pc:sldMk cId="4162477740" sldId="2145706301"/>
-        </pc:sldMkLst>
-      </pc:sldChg>
-      <pc:sldChg chg="modSp mod ord">
-        <pc:chgData name="Graf Thomas, SCS-INI-NET-VNC-E2E" userId="487bc3e3-9ce7-4cdd-b7b4-8899ea88d289" providerId="ADAL" clId="{ADEEF08A-D719-4B50-A383-4105EDA2C206}" dt="2026-07-14T13:29:47.977" v="7257" actId="400"/>
-        <pc:sldMkLst>
-          <pc:docMk/>
-          <pc:sldMk cId="1190312228" sldId="2145706302"/>
-        </pc:sldMkLst>
-        <pc:spChg chg="mod">
-          <ac:chgData name="Graf Thomas, SCS-INI-NET-VNC-E2E" userId="487bc3e3-9ce7-4cdd-b7b4-8899ea88d289" providerId="ADAL" clId="{ADEEF08A-D719-4B50-A383-4105EDA2C206}" dt="2026-07-14T13:29:47.977" v="7257" actId="400"/>
-          <ac:spMkLst>
-            <pc:docMk/>
-            <pc:sldMk cId="1190312228" sldId="2145706302"/>
-            <ac:spMk id="3" creationId="{16030435-8548-CFD7-E67B-E4D3DD29D75F}"/>
-          </ac:spMkLst>
-        </pc:spChg>
-      </pc:sldChg>
-      <pc:sldChg chg="addSp modSp mod ord">
-        <pc:chgData name="Graf Thomas, SCS-INI-NET-VNC-E2E" userId="487bc3e3-9ce7-4cdd-b7b4-8899ea88d289" providerId="ADAL" clId="{ADEEF08A-D719-4B50-A383-4105EDA2C206}" dt="2026-07-14T13:14:24.593" v="6603" actId="13926"/>
-        <pc:sldMkLst>
-          <pc:docMk/>
-          <pc:sldMk cId="4251917088" sldId="2145706303"/>
-        </pc:sldMkLst>
-        <pc:spChg chg="mod">
-          <ac:chgData name="Graf Thomas, SCS-INI-NET-VNC-E2E" userId="487bc3e3-9ce7-4cdd-b7b4-8899ea88d289" providerId="ADAL" clId="{ADEEF08A-D719-4B50-A383-4105EDA2C206}" dt="2026-07-14T13:14:03.698" v="6600" actId="20577"/>
-          <ac:spMkLst>
-            <pc:docMk/>
-            <pc:sldMk cId="4251917088" sldId="2145706303"/>
-            <ac:spMk id="2" creationId="{9D734BEF-C196-3BAF-0F2E-FB66BF042884}"/>
-          </ac:spMkLst>
-        </pc:spChg>
-        <pc:spChg chg="mod">
-          <ac:chgData name="Graf Thomas, SCS-INI-NET-VNC-E2E" userId="487bc3e3-9ce7-4cdd-b7b4-8899ea88d289" providerId="ADAL" clId="{ADEEF08A-D719-4B50-A383-4105EDA2C206}" dt="2026-07-14T13:06:13.034" v="6332" actId="20577"/>
-          <ac:spMkLst>
-            <pc:docMk/>
-            <pc:sldMk cId="4251917088" sldId="2145706303"/>
-            <ac:spMk id="3" creationId="{6EA985DA-ABCF-AB10-5C45-1B7050950E17}"/>
-          </ac:spMkLst>
-        </pc:spChg>
-        <pc:spChg chg="add mod">
-          <ac:chgData name="Graf Thomas, SCS-INI-NET-VNC-E2E" userId="487bc3e3-9ce7-4cdd-b7b4-8899ea88d289" providerId="ADAL" clId="{ADEEF08A-D719-4B50-A383-4105EDA2C206}" dt="2026-07-14T13:14:24.593" v="6603" actId="13926"/>
-          <ac:spMkLst>
-            <pc:docMk/>
-            <pc:sldMk cId="4251917088" sldId="2145706303"/>
-            <ac:spMk id="5" creationId="{9656C51F-D666-FF4B-6E06-11C9E3E8A8A2}"/>
-          </ac:spMkLst>
-        </pc:spChg>
-      </pc:sldChg>
-      <pc:sldChg chg="modSp del mod">
-        <pc:chgData name="Graf Thomas, SCS-INI-NET-VNC-E2E" userId="487bc3e3-9ce7-4cdd-b7b4-8899ea88d289" providerId="ADAL" clId="{ADEEF08A-D719-4B50-A383-4105EDA2C206}" dt="2026-07-14T12:57:44.073" v="6210" actId="47"/>
-        <pc:sldMkLst>
-          <pc:docMk/>
-          <pc:sldMk cId="2204044421" sldId="2145706304"/>
-        </pc:sldMkLst>
-      </pc:sldChg>
-      <pc:sldChg chg="modSp del mod ord">
-        <pc:chgData name="Graf Thomas, SCS-INI-NET-VNC-E2E" userId="487bc3e3-9ce7-4cdd-b7b4-8899ea88d289" providerId="ADAL" clId="{ADEEF08A-D719-4B50-A383-4105EDA2C206}" dt="2026-07-14T13:25:45.052" v="6971" actId="47"/>
-        <pc:sldMkLst>
-          <pc:docMk/>
-          <pc:sldMk cId="3686017286" sldId="2145706305"/>
-        </pc:sldMkLst>
-      </pc:sldChg>
-      <pc:sldChg chg="delSp modSp mod">
-        <pc:chgData name="Graf Thomas, SCS-INI-NET-VNC-E2E" userId="487bc3e3-9ce7-4cdd-b7b4-8899ea88d289" providerId="ADAL" clId="{ADEEF08A-D719-4B50-A383-4105EDA2C206}" dt="2026-07-14T13:27:26.795" v="7186" actId="20577"/>
-        <pc:sldMkLst>
-          <pc:docMk/>
-          <pc:sldMk cId="3305081943" sldId="2145706306"/>
-        </pc:sldMkLst>
-        <pc:spChg chg="mod">
-          <ac:chgData name="Graf Thomas, SCS-INI-NET-VNC-E2E" userId="487bc3e3-9ce7-4cdd-b7b4-8899ea88d289" providerId="ADAL" clId="{ADEEF08A-D719-4B50-A383-4105EDA2C206}" dt="2026-07-14T13:25:50.342" v="6972" actId="20577"/>
-          <ac:spMkLst>
-            <pc:docMk/>
-            <pc:sldMk cId="3305081943" sldId="2145706306"/>
-            <ac:spMk id="2" creationId="{B37520E1-A4E0-F3CA-29AD-D2D9ADADBEF0}"/>
-          </ac:spMkLst>
-        </pc:spChg>
-        <pc:spChg chg="mod">
-          <ac:chgData name="Graf Thomas, SCS-INI-NET-VNC-E2E" userId="487bc3e3-9ce7-4cdd-b7b4-8899ea88d289" providerId="ADAL" clId="{ADEEF08A-D719-4B50-A383-4105EDA2C206}" dt="2026-07-14T13:27:26.795" v="7186" actId="20577"/>
-          <ac:spMkLst>
-            <pc:docMk/>
-            <pc:sldMk cId="3305081943" sldId="2145706306"/>
-            <ac:spMk id="3" creationId="{3EA36F6F-A76C-ACD7-BA9E-6565DCCE91FE}"/>
-          </ac:spMkLst>
-        </pc:spChg>
-      </pc:sldChg>
-      <pc:sldChg chg="addSp delSp modSp add del mod">
-        <pc:chgData name="Graf Thomas, SCS-INI-NET-VNC-E2E" userId="487bc3e3-9ce7-4cdd-b7b4-8899ea88d289" providerId="ADAL" clId="{ADEEF08A-D719-4B50-A383-4105EDA2C206}" dt="2026-07-14T12:55:18.417" v="6196" actId="47"/>
-        <pc:sldMkLst>
-          <pc:docMk/>
-          <pc:sldMk cId="2590364080" sldId="2145706307"/>
-        </pc:sldMkLst>
-      </pc:sldChg>
-      <pc:sldChg chg="addSp delSp modSp add del mod">
-        <pc:chgData name="Graf Thomas, SCS-INI-NET-VNC-E2E" userId="487bc3e3-9ce7-4cdd-b7b4-8899ea88d289" providerId="ADAL" clId="{ADEEF08A-D719-4B50-A383-4105EDA2C206}" dt="2026-07-14T12:55:18.417" v="6196" actId="47"/>
-        <pc:sldMkLst>
-          <pc:docMk/>
-          <pc:sldMk cId="1296954665" sldId="2145706308"/>
-        </pc:sldMkLst>
-      </pc:sldChg>
-      <pc:sldChg chg="addSp delSp modSp add del mod">
-        <pc:chgData name="Graf Thomas, SCS-INI-NET-VNC-E2E" userId="487bc3e3-9ce7-4cdd-b7b4-8899ea88d289" providerId="ADAL" clId="{ADEEF08A-D719-4B50-A383-4105EDA2C206}" dt="2026-07-14T13:29:15.698" v="7256" actId="20577"/>
-        <pc:sldMkLst>
-          <pc:docMk/>
-          <pc:sldMk cId="2961389282" sldId="2145706309"/>
-        </pc:sldMkLst>
-        <pc:spChg chg="mod">
-          <ac:chgData name="Graf Thomas, SCS-INI-NET-VNC-E2E" userId="487bc3e3-9ce7-4cdd-b7b4-8899ea88d289" providerId="ADAL" clId="{ADEEF08A-D719-4B50-A383-4105EDA2C206}" dt="2026-07-14T13:29:15.698" v="7256" actId="20577"/>
-          <ac:spMkLst>
-            <pc:docMk/>
-            <pc:sldMk cId="2961389282" sldId="2145706309"/>
-            <ac:spMk id="3" creationId="{3F4CBE7F-1450-A754-E524-9EE662BEDE60}"/>
-          </ac:spMkLst>
-        </pc:spChg>
-      </pc:sldChg>
-      <pc:sldChg chg="modSp add del mod">
-        <pc:chgData name="Graf Thomas, SCS-INI-NET-VNC-E2E" userId="487bc3e3-9ce7-4cdd-b7b4-8899ea88d289" providerId="ADAL" clId="{ADEEF08A-D719-4B50-A383-4105EDA2C206}" dt="2026-07-14T12:54:53.444" v="6195" actId="47"/>
-        <pc:sldMkLst>
-          <pc:docMk/>
-          <pc:sldMk cId="3526121720" sldId="2145706310"/>
-        </pc:sldMkLst>
-      </pc:sldChg>
-      <pc:sldChg chg="modSp add mod">
-        <pc:chgData name="Graf Thomas, SCS-INI-NET-VNC-E2E" userId="487bc3e3-9ce7-4cdd-b7b4-8899ea88d289" providerId="ADAL" clId="{ADEEF08A-D719-4B50-A383-4105EDA2C206}" dt="2026-07-14T13:24:39.640" v="6968" actId="20577"/>
-        <pc:sldMkLst>
-          <pc:docMk/>
-          <pc:sldMk cId="4128600093" sldId="2145706310"/>
-        </pc:sldMkLst>
-        <pc:spChg chg="mod">
-          <ac:chgData name="Graf Thomas, SCS-INI-NET-VNC-E2E" userId="487bc3e3-9ce7-4cdd-b7b4-8899ea88d289" providerId="ADAL" clId="{ADEEF08A-D719-4B50-A383-4105EDA2C206}" dt="2026-07-14T13:24:39.640" v="6968" actId="20577"/>
-          <ac:spMkLst>
-            <pc:docMk/>
-            <pc:sldMk cId="4128600093" sldId="2145706310"/>
-            <ac:spMk id="3" creationId="{CB0EE0D0-E2FC-EC67-C3D8-B007AACC1C77}"/>
-          </ac:spMkLst>
-        </pc:spChg>
-      </pc:sldChg>
-      <pc:sldChg chg="add del">
-        <pc:chgData name="Graf Thomas, SCS-INI-NET-VNC-E2E" userId="487bc3e3-9ce7-4cdd-b7b4-8899ea88d289" providerId="ADAL" clId="{ADEEF08A-D719-4B50-A383-4105EDA2C206}" dt="2026-07-14T12:42:45.033" v="6134" actId="47"/>
-        <pc:sldMkLst>
-          <pc:docMk/>
-          <pc:sldMk cId="1403244520" sldId="2145706311"/>
-        </pc:sldMkLst>
-      </pc:sldChg>
-      <pc:sldChg chg="modSp add mod">
-        <pc:chgData name="Graf Thomas, SCS-INI-NET-VNC-E2E" userId="487bc3e3-9ce7-4cdd-b7b4-8899ea88d289" providerId="ADAL" clId="{ADEEF08A-D719-4B50-A383-4105EDA2C206}" dt="2026-07-14T13:23:36.982" v="6930" actId="1076"/>
-        <pc:sldMkLst>
-          <pc:docMk/>
-          <pc:sldMk cId="2687771710" sldId="2145706311"/>
-        </pc:sldMkLst>
-        <pc:spChg chg="mod">
-          <ac:chgData name="Graf Thomas, SCS-INI-NET-VNC-E2E" userId="487bc3e3-9ce7-4cdd-b7b4-8899ea88d289" providerId="ADAL" clId="{ADEEF08A-D719-4B50-A383-4105EDA2C206}" dt="2026-07-14T13:22:33.586" v="6903" actId="5793"/>
-          <ac:spMkLst>
-            <pc:docMk/>
-            <pc:sldMk cId="2687771710" sldId="2145706311"/>
-            <ac:spMk id="2" creationId="{AB2DDFA9-710A-5629-89B2-FB87E211CD78}"/>
-          </ac:spMkLst>
-        </pc:spChg>
-        <pc:spChg chg="mod">
-          <ac:chgData name="Graf Thomas, SCS-INI-NET-VNC-E2E" userId="487bc3e3-9ce7-4cdd-b7b4-8899ea88d289" providerId="ADAL" clId="{ADEEF08A-D719-4B50-A383-4105EDA2C206}" dt="2026-07-14T13:22:55.594" v="6923" actId="20577"/>
-          <ac:spMkLst>
-            <pc:docMk/>
-            <pc:sldMk cId="2687771710" sldId="2145706311"/>
-            <ac:spMk id="3" creationId="{421E468E-B525-66BD-FBA4-8EB776CE47B6}"/>
-          </ac:spMkLst>
-        </pc:spChg>
-        <pc:spChg chg="mod">
-          <ac:chgData name="Graf Thomas, SCS-INI-NET-VNC-E2E" userId="487bc3e3-9ce7-4cdd-b7b4-8899ea88d289" providerId="ADAL" clId="{ADEEF08A-D719-4B50-A383-4105EDA2C206}" dt="2026-07-14T13:23:36.982" v="6930" actId="1076"/>
-          <ac:spMkLst>
-            <pc:docMk/>
-            <pc:sldMk cId="2687771710" sldId="2145706311"/>
-            <ac:spMk id="5" creationId="{2D333956-C5AE-D528-B067-D9A012810329}"/>
-          </ac:spMkLst>
-        </pc:spChg>
-      </pc:sldChg>
-      <pc:sldChg chg="add del">
-        <pc:chgData name="Graf Thomas, SCS-INI-NET-VNC-E2E" userId="487bc3e3-9ce7-4cdd-b7b4-8899ea88d289" providerId="ADAL" clId="{ADEEF08A-D719-4B50-A383-4105EDA2C206}" dt="2026-07-14T12:42:45.033" v="6134" actId="47"/>
-        <pc:sldMkLst>
-          <pc:docMk/>
-          <pc:sldMk cId="632967186" sldId="2145706312"/>
-        </pc:sldMkLst>
-      </pc:sldChg>
-      <pc:sldChg chg="modSp add mod">
-        <pc:chgData name="Graf Thomas, SCS-INI-NET-VNC-E2E" userId="487bc3e3-9ce7-4cdd-b7b4-8899ea88d289" providerId="ADAL" clId="{ADEEF08A-D719-4B50-A383-4105EDA2C206}" dt="2026-07-14T13:23:50.593" v="6938" actId="20577"/>
-        <pc:sldMkLst>
-          <pc:docMk/>
-          <pc:sldMk cId="3807185294" sldId="2145706312"/>
-        </pc:sldMkLst>
-        <pc:spChg chg="mod">
-          <ac:chgData name="Graf Thomas, SCS-INI-NET-VNC-E2E" userId="487bc3e3-9ce7-4cdd-b7b4-8899ea88d289" providerId="ADAL" clId="{ADEEF08A-D719-4B50-A383-4105EDA2C206}" dt="2026-07-14T13:23:50.593" v="6938" actId="20577"/>
-          <ac:spMkLst>
-            <pc:docMk/>
-            <pc:sldMk cId="3807185294" sldId="2145706312"/>
-            <ac:spMk id="2" creationId="{5B8888DB-A90D-A25F-9FAA-CB0DFB34C2A9}"/>
-          </ac:spMkLst>
-        </pc:spChg>
-        <pc:spChg chg="mod">
-          <ac:chgData name="Graf Thomas, SCS-INI-NET-VNC-E2E" userId="487bc3e3-9ce7-4cdd-b7b4-8899ea88d289" providerId="ADAL" clId="{ADEEF08A-D719-4B50-A383-4105EDA2C206}" dt="2026-07-14T13:18:52.189" v="6783" actId="20577"/>
-          <ac:spMkLst>
-            <pc:docMk/>
-            <pc:sldMk cId="3807185294" sldId="2145706312"/>
-            <ac:spMk id="3" creationId="{D1A52B7B-3570-1B5D-1F67-9B38890F5748}"/>
-          </ac:spMkLst>
-        </pc:spChg>
-        <pc:spChg chg="mod">
-          <ac:chgData name="Graf Thomas, SCS-INI-NET-VNC-E2E" userId="487bc3e3-9ce7-4cdd-b7b4-8899ea88d289" providerId="ADAL" clId="{ADEEF08A-D719-4B50-A383-4105EDA2C206}" dt="2026-07-14T13:21:02.081" v="6809" actId="13926"/>
-          <ac:spMkLst>
-            <pc:docMk/>
-            <pc:sldMk cId="3807185294" sldId="2145706312"/>
-            <ac:spMk id="5" creationId="{ACF3B6D0-4561-839A-14B8-04636B057F64}"/>
-          </ac:spMkLst>
-        </pc:spChg>
-      </pc:sldChg>
-      <pc:sldChg chg="modSp add mod ord">
-        <pc:chgData name="Graf Thomas, SCS-INI-NET-VNC-E2E" userId="487bc3e3-9ce7-4cdd-b7b4-8899ea88d289" providerId="ADAL" clId="{ADEEF08A-D719-4B50-A383-4105EDA2C206}" dt="2026-07-14T13:22:20.653" v="6862"/>
-        <pc:sldMkLst>
-          <pc:docMk/>
-          <pc:sldMk cId="1452467401" sldId="2145706313"/>
-        </pc:sldMkLst>
-        <pc:spChg chg="mod">
-          <ac:chgData name="Graf Thomas, SCS-INI-NET-VNC-E2E" userId="487bc3e3-9ce7-4cdd-b7b4-8899ea88d289" providerId="ADAL" clId="{ADEEF08A-D719-4B50-A383-4105EDA2C206}" dt="2026-07-14T13:21:32.190" v="6845" actId="20577"/>
-          <ac:spMkLst>
-            <pc:docMk/>
-            <pc:sldMk cId="1452467401" sldId="2145706313"/>
-            <ac:spMk id="2" creationId="{8DE65009-4589-3EEA-F6BA-6387E69395C3}"/>
-          </ac:spMkLst>
-        </pc:spChg>
-        <pc:spChg chg="mod">
-          <ac:chgData name="Graf Thomas, SCS-INI-NET-VNC-E2E" userId="487bc3e3-9ce7-4cdd-b7b4-8899ea88d289" providerId="ADAL" clId="{ADEEF08A-D719-4B50-A383-4105EDA2C206}" dt="2026-07-14T13:21:37.895" v="6847" actId="20577"/>
-          <ac:spMkLst>
-            <pc:docMk/>
-            <pc:sldMk cId="1452467401" sldId="2145706313"/>
-            <ac:spMk id="3" creationId="{BC3C6DC3-F83A-8266-9A3C-EC72FFB72F03}"/>
-          </ac:spMkLst>
-        </pc:spChg>
-        <pc:spChg chg="mod">
-          <ac:chgData name="Graf Thomas, SCS-INI-NET-VNC-E2E" userId="487bc3e3-9ce7-4cdd-b7b4-8899ea88d289" providerId="ADAL" clId="{ADEEF08A-D719-4B50-A383-4105EDA2C206}" dt="2026-07-14T13:22:09.634" v="6860" actId="1076"/>
-          <ac:spMkLst>
-            <pc:docMk/>
-            <pc:sldMk cId="1452467401" sldId="2145706313"/>
-            <ac:spMk id="5" creationId="{7B8D7887-C93D-FC29-FE8D-AB3A78A80370}"/>
-          </ac:spMkLst>
-        </pc:spChg>
-      </pc:sldChg>
-      <pc:sldChg chg="add del">
-        <pc:chgData name="Graf Thomas, SCS-INI-NET-VNC-E2E" userId="487bc3e3-9ce7-4cdd-b7b4-8899ea88d289" providerId="ADAL" clId="{ADEEF08A-D719-4B50-A383-4105EDA2C206}" dt="2026-07-14T12:42:45.033" v="6134" actId="47"/>
-        <pc:sldMkLst>
-          <pc:docMk/>
-          <pc:sldMk cId="3870071406" sldId="2145706313"/>
-        </pc:sldMkLst>
-      </pc:sldChg>
-      <pc:sldChg chg="add del">
-        <pc:chgData name="Graf Thomas, SCS-INI-NET-VNC-E2E" userId="487bc3e3-9ce7-4cdd-b7b4-8899ea88d289" providerId="ADAL" clId="{ADEEF08A-D719-4B50-A383-4105EDA2C206}" dt="2026-07-14T12:42:45.033" v="6134" actId="47"/>
-        <pc:sldMkLst>
-          <pc:docMk/>
-          <pc:sldMk cId="2884885474" sldId="2145706314"/>
-        </pc:sldMkLst>
-      </pc:sldChg>
-      <pc:sldChg chg="modSp add del mod">
-        <pc:chgData name="Graf Thomas, SCS-INI-NET-VNC-E2E" userId="487bc3e3-9ce7-4cdd-b7b4-8899ea88d289" providerId="ADAL" clId="{ADEEF08A-D719-4B50-A383-4105EDA2C206}" dt="2026-07-14T12:42:45.033" v="6134" actId="47"/>
-        <pc:sldMkLst>
-          <pc:docMk/>
-          <pc:sldMk cId="822671291" sldId="2145706315"/>
-        </pc:sldMkLst>
-      </pc:sldChg>
-      <pc:sldChg chg="modSp add del mod">
-        <pc:chgData name="Graf Thomas, SCS-INI-NET-VNC-E2E" userId="487bc3e3-9ce7-4cdd-b7b4-8899ea88d289" providerId="ADAL" clId="{ADEEF08A-D719-4B50-A383-4105EDA2C206}" dt="2026-03-06T15:27:05.528" v="6106" actId="47"/>
-        <pc:sldMkLst>
-          <pc:docMk/>
-          <pc:sldMk cId="3812470375" sldId="2145706316"/>
-        </pc:sldMkLst>
-      </pc:sldChg>
-    </pc:docChg>
-  </pc:docChgLst>
-  <pc:docChgLst>
     <pc:chgData name="Graf Thomas, SCS-INI-NET-VNC-E2E" userId="487bc3e3-9ce7-4cdd-b7b4-8899ea88d289" providerId="ADAL" clId="{54A39940-08FA-4A7E-9BB9-600FEA25ABAF}"/>
     <pc:docChg chg="undo redo custSel addSld delSld modSld sldOrd">
       <pc:chgData name="Graf Thomas, SCS-INI-NET-VNC-E2E" userId="487bc3e3-9ce7-4cdd-b7b4-8899ea88d289" providerId="ADAL" clId="{54A39940-08FA-4A7E-9BB9-600FEA25ABAF}" dt="2025-10-26T13:07:06.475" v="9735" actId="14100"/>
@@ -1042,6 +600,438 @@
         <pc:sldMkLst>
           <pc:docMk/>
           <pc:sldMk cId="3305081943" sldId="2145706306"/>
+        </pc:sldMkLst>
+      </pc:sldChg>
+    </pc:docChg>
+  </pc:docChgLst>
+  <pc:docChgLst>
+    <pc:chgData name="Graf Thomas, SCS-INI-NET-VNC-E2E" userId="487bc3e3-9ce7-4cdd-b7b4-8899ea88d289" providerId="ADAL" clId="{ADEEF08A-D719-4B50-A383-4105EDA2C206}"/>
+    <pc:docChg chg="undo redo custSel addSld delSld modSld sldOrd">
+      <pc:chgData name="Graf Thomas, SCS-INI-NET-VNC-E2E" userId="487bc3e3-9ce7-4cdd-b7b4-8899ea88d289" providerId="ADAL" clId="{ADEEF08A-D719-4B50-A383-4105EDA2C206}" dt="2026-07-16T14:31:16.073" v="7504" actId="20577"/>
+      <pc:docMkLst>
+        <pc:docMk/>
+      </pc:docMkLst>
+      <pc:sldChg chg="modSp mod">
+        <pc:chgData name="Graf Thomas, SCS-INI-NET-VNC-E2E" userId="487bc3e3-9ce7-4cdd-b7b4-8899ea88d289" providerId="ADAL" clId="{ADEEF08A-D719-4B50-A383-4105EDA2C206}" dt="2026-07-16T14:31:16.073" v="7504" actId="20577"/>
+        <pc:sldMkLst>
+          <pc:docMk/>
+          <pc:sldMk cId="3578665336" sldId="1041"/>
+        </pc:sldMkLst>
+        <pc:spChg chg="mod">
+          <ac:chgData name="Graf Thomas, SCS-INI-NET-VNC-E2E" userId="487bc3e3-9ce7-4cdd-b7b4-8899ea88d289" providerId="ADAL" clId="{ADEEF08A-D719-4B50-A383-4105EDA2C206}" dt="2026-07-14T12:41:23.213" v="6114" actId="20577"/>
+          <ac:spMkLst>
+            <pc:docMk/>
+            <pc:sldMk cId="3578665336" sldId="1041"/>
+            <ac:spMk id="5" creationId="{C26208B2-0D10-4C23-B2DE-372A62E98644}"/>
+          </ac:spMkLst>
+        </pc:spChg>
+        <pc:spChg chg="mod">
+          <ac:chgData name="Graf Thomas, SCS-INI-NET-VNC-E2E" userId="487bc3e3-9ce7-4cdd-b7b4-8899ea88d289" providerId="ADAL" clId="{ADEEF08A-D719-4B50-A383-4105EDA2C206}" dt="2026-07-16T14:31:16.073" v="7504" actId="20577"/>
+          <ac:spMkLst>
+            <pc:docMk/>
+            <pc:sldMk cId="3578665336" sldId="1041"/>
+            <ac:spMk id="6" creationId="{6CAA0765-1318-4A03-8F91-D3ECC43D8FA7}"/>
+          </ac:spMkLst>
+        </pc:spChg>
+      </pc:sldChg>
+      <pc:sldChg chg="modSp del mod">
+        <pc:chgData name="Graf Thomas, SCS-INI-NET-VNC-E2E" userId="487bc3e3-9ce7-4cdd-b7b4-8899ea88d289" providerId="ADAL" clId="{ADEEF08A-D719-4B50-A383-4105EDA2C206}" dt="2026-07-14T12:55:18.417" v="6196" actId="47"/>
+        <pc:sldMkLst>
+          <pc:docMk/>
+          <pc:sldMk cId="1088069469" sldId="26422"/>
+        </pc:sldMkLst>
+      </pc:sldChg>
+      <pc:sldChg chg="addSp modSp mod">
+        <pc:chgData name="Graf Thomas, SCS-INI-NET-VNC-E2E" userId="487bc3e3-9ce7-4cdd-b7b4-8899ea88d289" providerId="ADAL" clId="{ADEEF08A-D719-4B50-A383-4105EDA2C206}" dt="2026-03-06T15:14:32.681" v="6011" actId="14100"/>
+        <pc:sldMkLst>
+          <pc:docMk/>
+          <pc:sldMk cId="670772560" sldId="2145706220"/>
+        </pc:sldMkLst>
+      </pc:sldChg>
+      <pc:sldChg chg="delSp modSp add mod">
+        <pc:chgData name="Graf Thomas, SCS-INI-NET-VNC-E2E" userId="487bc3e3-9ce7-4cdd-b7b4-8899ea88d289" providerId="ADAL" clId="{ADEEF08A-D719-4B50-A383-4105EDA2C206}" dt="2026-07-14T12:41:55.778" v="6133"/>
+        <pc:sldMkLst>
+          <pc:docMk/>
+          <pc:sldMk cId="2750719351" sldId="2145706243"/>
+        </pc:sldMkLst>
+        <pc:spChg chg="mod">
+          <ac:chgData name="Graf Thomas, SCS-INI-NET-VNC-E2E" userId="487bc3e3-9ce7-4cdd-b7b4-8899ea88d289" providerId="ADAL" clId="{ADEEF08A-D719-4B50-A383-4105EDA2C206}" dt="2026-07-14T12:41:55.778" v="6133"/>
+          <ac:spMkLst>
+            <pc:docMk/>
+            <pc:sldMk cId="2750719351" sldId="2145706243"/>
+            <ac:spMk id="3" creationId="{E1C8AC62-B5C5-ADE4-1957-88D3A14E964A}"/>
+          </ac:spMkLst>
+        </pc:spChg>
+      </pc:sldChg>
+      <pc:sldChg chg="addSp delSp modSp del mod">
+        <pc:chgData name="Graf Thomas, SCS-INI-NET-VNC-E2E" userId="487bc3e3-9ce7-4cdd-b7b4-8899ea88d289" providerId="ADAL" clId="{ADEEF08A-D719-4B50-A383-4105EDA2C206}" dt="2026-07-14T12:55:56.511" v="6197" actId="47"/>
+        <pc:sldMkLst>
+          <pc:docMk/>
+          <pc:sldMk cId="1315775908" sldId="2145706280"/>
+        </pc:sldMkLst>
+      </pc:sldChg>
+      <pc:sldChg chg="addSp delSp modSp del mod">
+        <pc:chgData name="Graf Thomas, SCS-INI-NET-VNC-E2E" userId="487bc3e3-9ce7-4cdd-b7b4-8899ea88d289" providerId="ADAL" clId="{ADEEF08A-D719-4B50-A383-4105EDA2C206}" dt="2026-07-14T12:55:56.511" v="6197" actId="47"/>
+        <pc:sldMkLst>
+          <pc:docMk/>
+          <pc:sldMk cId="3685482022" sldId="2145706295"/>
+        </pc:sldMkLst>
+      </pc:sldChg>
+      <pc:sldChg chg="addSp delSp modSp del mod">
+        <pc:chgData name="Graf Thomas, SCS-INI-NET-VNC-E2E" userId="487bc3e3-9ce7-4cdd-b7b4-8899ea88d289" providerId="ADAL" clId="{ADEEF08A-D719-4B50-A383-4105EDA2C206}" dt="2026-07-14T12:56:53.974" v="6205" actId="47"/>
+        <pc:sldMkLst>
+          <pc:docMk/>
+          <pc:sldMk cId="1475201924" sldId="2145706296"/>
+        </pc:sldMkLst>
+      </pc:sldChg>
+      <pc:sldChg chg="addSp delSp modSp del mod">
+        <pc:chgData name="Graf Thomas, SCS-INI-NET-VNC-E2E" userId="487bc3e3-9ce7-4cdd-b7b4-8899ea88d289" providerId="ADAL" clId="{ADEEF08A-D719-4B50-A383-4105EDA2C206}" dt="2026-07-14T12:56:44.698" v="6204" actId="47"/>
+        <pc:sldMkLst>
+          <pc:docMk/>
+          <pc:sldMk cId="710783608" sldId="2145706297"/>
+        </pc:sldMkLst>
+      </pc:sldChg>
+      <pc:sldChg chg="addSp delSp modSp mod ord">
+        <pc:chgData name="Graf Thomas, SCS-INI-NET-VNC-E2E" userId="487bc3e3-9ce7-4cdd-b7b4-8899ea88d289" providerId="ADAL" clId="{ADEEF08A-D719-4B50-A383-4105EDA2C206}" dt="2026-07-14T12:56:59.627" v="6207"/>
+        <pc:sldMkLst>
+          <pc:docMk/>
+          <pc:sldMk cId="3625312977" sldId="2145706298"/>
+        </pc:sldMkLst>
+        <pc:picChg chg="add mod">
+          <ac:chgData name="Graf Thomas, SCS-INI-NET-VNC-E2E" userId="487bc3e3-9ce7-4cdd-b7b4-8899ea88d289" providerId="ADAL" clId="{ADEEF08A-D719-4B50-A383-4105EDA2C206}" dt="2026-07-14T12:56:39.058" v="6203" actId="1076"/>
+          <ac:picMkLst>
+            <pc:docMk/>
+            <pc:sldMk cId="3625312977" sldId="2145706298"/>
+            <ac:picMk id="3" creationId="{3D20887A-63D9-A4B9-AA81-58DA821129FA}"/>
+          </ac:picMkLst>
+        </pc:picChg>
+      </pc:sldChg>
+      <pc:sldChg chg="del">
+        <pc:chgData name="Graf Thomas, SCS-INI-NET-VNC-E2E" userId="487bc3e3-9ce7-4cdd-b7b4-8899ea88d289" providerId="ADAL" clId="{ADEEF08A-D719-4B50-A383-4105EDA2C206}" dt="2026-03-06T12:57:35.600" v="1725" actId="47"/>
+        <pc:sldMkLst>
+          <pc:docMk/>
+          <pc:sldMk cId="2117458142" sldId="2145706299"/>
+        </pc:sldMkLst>
+      </pc:sldChg>
+      <pc:sldChg chg="del">
+        <pc:chgData name="Graf Thomas, SCS-INI-NET-VNC-E2E" userId="487bc3e3-9ce7-4cdd-b7b4-8899ea88d289" providerId="ADAL" clId="{ADEEF08A-D719-4B50-A383-4105EDA2C206}" dt="2026-07-14T12:55:18.417" v="6196" actId="47"/>
+        <pc:sldMkLst>
+          <pc:docMk/>
+          <pc:sldMk cId="1230411846" sldId="2145706300"/>
+        </pc:sldMkLst>
+      </pc:sldChg>
+      <pc:sldChg chg="modSp del mod">
+        <pc:chgData name="Graf Thomas, SCS-INI-NET-VNC-E2E" userId="487bc3e3-9ce7-4cdd-b7b4-8899ea88d289" providerId="ADAL" clId="{ADEEF08A-D719-4B50-A383-4105EDA2C206}" dt="2026-07-14T12:55:18.417" v="6196" actId="47"/>
+        <pc:sldMkLst>
+          <pc:docMk/>
+          <pc:sldMk cId="4162477740" sldId="2145706301"/>
+        </pc:sldMkLst>
+      </pc:sldChg>
+      <pc:sldChg chg="modSp mod ord">
+        <pc:chgData name="Graf Thomas, SCS-INI-NET-VNC-E2E" userId="487bc3e3-9ce7-4cdd-b7b4-8899ea88d289" providerId="ADAL" clId="{ADEEF08A-D719-4B50-A383-4105EDA2C206}" dt="2026-07-14T13:29:47.977" v="7257" actId="400"/>
+        <pc:sldMkLst>
+          <pc:docMk/>
+          <pc:sldMk cId="1190312228" sldId="2145706302"/>
+        </pc:sldMkLst>
+      </pc:sldChg>
+      <pc:sldChg chg="addSp modSp mod ord">
+        <pc:chgData name="Graf Thomas, SCS-INI-NET-VNC-E2E" userId="487bc3e3-9ce7-4cdd-b7b4-8899ea88d289" providerId="ADAL" clId="{ADEEF08A-D719-4B50-A383-4105EDA2C206}" dt="2026-07-14T13:14:24.593" v="6603" actId="13926"/>
+        <pc:sldMkLst>
+          <pc:docMk/>
+          <pc:sldMk cId="4251917088" sldId="2145706303"/>
+        </pc:sldMkLst>
+        <pc:spChg chg="mod">
+          <ac:chgData name="Graf Thomas, SCS-INI-NET-VNC-E2E" userId="487bc3e3-9ce7-4cdd-b7b4-8899ea88d289" providerId="ADAL" clId="{ADEEF08A-D719-4B50-A383-4105EDA2C206}" dt="2026-07-14T13:14:03.698" v="6600" actId="20577"/>
+          <ac:spMkLst>
+            <pc:docMk/>
+            <pc:sldMk cId="4251917088" sldId="2145706303"/>
+            <ac:spMk id="2" creationId="{9D734BEF-C196-3BAF-0F2E-FB66BF042884}"/>
+          </ac:spMkLst>
+        </pc:spChg>
+        <pc:spChg chg="mod">
+          <ac:chgData name="Graf Thomas, SCS-INI-NET-VNC-E2E" userId="487bc3e3-9ce7-4cdd-b7b4-8899ea88d289" providerId="ADAL" clId="{ADEEF08A-D719-4B50-A383-4105EDA2C206}" dt="2026-07-14T13:06:13.034" v="6332" actId="20577"/>
+          <ac:spMkLst>
+            <pc:docMk/>
+            <pc:sldMk cId="4251917088" sldId="2145706303"/>
+            <ac:spMk id="3" creationId="{6EA985DA-ABCF-AB10-5C45-1B7050950E17}"/>
+          </ac:spMkLst>
+        </pc:spChg>
+        <pc:spChg chg="add mod">
+          <ac:chgData name="Graf Thomas, SCS-INI-NET-VNC-E2E" userId="487bc3e3-9ce7-4cdd-b7b4-8899ea88d289" providerId="ADAL" clId="{ADEEF08A-D719-4B50-A383-4105EDA2C206}" dt="2026-07-14T13:14:24.593" v="6603" actId="13926"/>
+          <ac:spMkLst>
+            <pc:docMk/>
+            <pc:sldMk cId="4251917088" sldId="2145706303"/>
+            <ac:spMk id="5" creationId="{9656C51F-D666-FF4B-6E06-11C9E3E8A8A2}"/>
+          </ac:spMkLst>
+        </pc:spChg>
+      </pc:sldChg>
+      <pc:sldChg chg="modSp del mod">
+        <pc:chgData name="Graf Thomas, SCS-INI-NET-VNC-E2E" userId="487bc3e3-9ce7-4cdd-b7b4-8899ea88d289" providerId="ADAL" clId="{ADEEF08A-D719-4B50-A383-4105EDA2C206}" dt="2026-07-14T12:57:44.073" v="6210" actId="47"/>
+        <pc:sldMkLst>
+          <pc:docMk/>
+          <pc:sldMk cId="2204044421" sldId="2145706304"/>
+        </pc:sldMkLst>
+      </pc:sldChg>
+      <pc:sldChg chg="modSp del mod ord">
+        <pc:chgData name="Graf Thomas, SCS-INI-NET-VNC-E2E" userId="487bc3e3-9ce7-4cdd-b7b4-8899ea88d289" providerId="ADAL" clId="{ADEEF08A-D719-4B50-A383-4105EDA2C206}" dt="2026-07-14T13:25:45.052" v="6971" actId="47"/>
+        <pc:sldMkLst>
+          <pc:docMk/>
+          <pc:sldMk cId="3686017286" sldId="2145706305"/>
+        </pc:sldMkLst>
+      </pc:sldChg>
+      <pc:sldChg chg="delSp modSp mod">
+        <pc:chgData name="Graf Thomas, SCS-INI-NET-VNC-E2E" userId="487bc3e3-9ce7-4cdd-b7b4-8899ea88d289" providerId="ADAL" clId="{ADEEF08A-D719-4B50-A383-4105EDA2C206}" dt="2026-07-14T13:27:26.795" v="7186" actId="20577"/>
+        <pc:sldMkLst>
+          <pc:docMk/>
+          <pc:sldMk cId="3305081943" sldId="2145706306"/>
+        </pc:sldMkLst>
+        <pc:spChg chg="mod">
+          <ac:chgData name="Graf Thomas, SCS-INI-NET-VNC-E2E" userId="487bc3e3-9ce7-4cdd-b7b4-8899ea88d289" providerId="ADAL" clId="{ADEEF08A-D719-4B50-A383-4105EDA2C206}" dt="2026-07-14T13:25:50.342" v="6972" actId="20577"/>
+          <ac:spMkLst>
+            <pc:docMk/>
+            <pc:sldMk cId="3305081943" sldId="2145706306"/>
+            <ac:spMk id="2" creationId="{B37520E1-A4E0-F3CA-29AD-D2D9ADADBEF0}"/>
+          </ac:spMkLst>
+        </pc:spChg>
+        <pc:spChg chg="mod">
+          <ac:chgData name="Graf Thomas, SCS-INI-NET-VNC-E2E" userId="487bc3e3-9ce7-4cdd-b7b4-8899ea88d289" providerId="ADAL" clId="{ADEEF08A-D719-4B50-A383-4105EDA2C206}" dt="2026-07-14T13:27:26.795" v="7186" actId="20577"/>
+          <ac:spMkLst>
+            <pc:docMk/>
+            <pc:sldMk cId="3305081943" sldId="2145706306"/>
+            <ac:spMk id="3" creationId="{3EA36F6F-A76C-ACD7-BA9E-6565DCCE91FE}"/>
+          </ac:spMkLst>
+        </pc:spChg>
+      </pc:sldChg>
+      <pc:sldChg chg="addSp delSp modSp add del mod">
+        <pc:chgData name="Graf Thomas, SCS-INI-NET-VNC-E2E" userId="487bc3e3-9ce7-4cdd-b7b4-8899ea88d289" providerId="ADAL" clId="{ADEEF08A-D719-4B50-A383-4105EDA2C206}" dt="2026-07-14T12:55:18.417" v="6196" actId="47"/>
+        <pc:sldMkLst>
+          <pc:docMk/>
+          <pc:sldMk cId="2590364080" sldId="2145706307"/>
+        </pc:sldMkLst>
+      </pc:sldChg>
+      <pc:sldChg chg="addSp delSp modSp add del mod">
+        <pc:chgData name="Graf Thomas, SCS-INI-NET-VNC-E2E" userId="487bc3e3-9ce7-4cdd-b7b4-8899ea88d289" providerId="ADAL" clId="{ADEEF08A-D719-4B50-A383-4105EDA2C206}" dt="2026-07-14T12:55:18.417" v="6196" actId="47"/>
+        <pc:sldMkLst>
+          <pc:docMk/>
+          <pc:sldMk cId="1296954665" sldId="2145706308"/>
+        </pc:sldMkLst>
+      </pc:sldChg>
+      <pc:sldChg chg="addSp delSp modSp add del mod">
+        <pc:chgData name="Graf Thomas, SCS-INI-NET-VNC-E2E" userId="487bc3e3-9ce7-4cdd-b7b4-8899ea88d289" providerId="ADAL" clId="{ADEEF08A-D719-4B50-A383-4105EDA2C206}" dt="2026-07-14T13:29:15.698" v="7256" actId="20577"/>
+        <pc:sldMkLst>
+          <pc:docMk/>
+          <pc:sldMk cId="2961389282" sldId="2145706309"/>
+        </pc:sldMkLst>
+        <pc:spChg chg="mod">
+          <ac:chgData name="Graf Thomas, SCS-INI-NET-VNC-E2E" userId="487bc3e3-9ce7-4cdd-b7b4-8899ea88d289" providerId="ADAL" clId="{ADEEF08A-D719-4B50-A383-4105EDA2C206}" dt="2026-07-14T13:29:15.698" v="7256" actId="20577"/>
+          <ac:spMkLst>
+            <pc:docMk/>
+            <pc:sldMk cId="2961389282" sldId="2145706309"/>
+            <ac:spMk id="3" creationId="{3F4CBE7F-1450-A754-E524-9EE662BEDE60}"/>
+          </ac:spMkLst>
+        </pc:spChg>
+      </pc:sldChg>
+      <pc:sldChg chg="modSp add del mod">
+        <pc:chgData name="Graf Thomas, SCS-INI-NET-VNC-E2E" userId="487bc3e3-9ce7-4cdd-b7b4-8899ea88d289" providerId="ADAL" clId="{ADEEF08A-D719-4B50-A383-4105EDA2C206}" dt="2026-07-14T12:54:53.444" v="6195" actId="47"/>
+        <pc:sldMkLst>
+          <pc:docMk/>
+          <pc:sldMk cId="3526121720" sldId="2145706310"/>
+        </pc:sldMkLst>
+      </pc:sldChg>
+      <pc:sldChg chg="modSp add mod">
+        <pc:chgData name="Graf Thomas, SCS-INI-NET-VNC-E2E" userId="487bc3e3-9ce7-4cdd-b7b4-8899ea88d289" providerId="ADAL" clId="{ADEEF08A-D719-4B50-A383-4105EDA2C206}" dt="2026-07-16T14:30:57.597" v="7503" actId="20577"/>
+        <pc:sldMkLst>
+          <pc:docMk/>
+          <pc:sldMk cId="4128600093" sldId="2145706310"/>
+        </pc:sldMkLst>
+        <pc:spChg chg="mod">
+          <ac:chgData name="Graf Thomas, SCS-INI-NET-VNC-E2E" userId="487bc3e3-9ce7-4cdd-b7b4-8899ea88d289" providerId="ADAL" clId="{ADEEF08A-D719-4B50-A383-4105EDA2C206}" dt="2026-07-16T14:30:57.597" v="7503" actId="20577"/>
+          <ac:spMkLst>
+            <pc:docMk/>
+            <pc:sldMk cId="4128600093" sldId="2145706310"/>
+            <ac:spMk id="3" creationId="{CB0EE0D0-E2FC-EC67-C3D8-B007AACC1C77}"/>
+          </ac:spMkLst>
+        </pc:spChg>
+      </pc:sldChg>
+      <pc:sldChg chg="add del">
+        <pc:chgData name="Graf Thomas, SCS-INI-NET-VNC-E2E" userId="487bc3e3-9ce7-4cdd-b7b4-8899ea88d289" providerId="ADAL" clId="{ADEEF08A-D719-4B50-A383-4105EDA2C206}" dt="2026-07-14T12:42:45.033" v="6134" actId="47"/>
+        <pc:sldMkLst>
+          <pc:docMk/>
+          <pc:sldMk cId="1403244520" sldId="2145706311"/>
+        </pc:sldMkLst>
+      </pc:sldChg>
+      <pc:sldChg chg="modSp add mod">
+        <pc:chgData name="Graf Thomas, SCS-INI-NET-VNC-E2E" userId="487bc3e3-9ce7-4cdd-b7b4-8899ea88d289" providerId="ADAL" clId="{ADEEF08A-D719-4B50-A383-4105EDA2C206}" dt="2026-07-14T13:23:36.982" v="6930" actId="1076"/>
+        <pc:sldMkLst>
+          <pc:docMk/>
+          <pc:sldMk cId="2687771710" sldId="2145706311"/>
+        </pc:sldMkLst>
+        <pc:spChg chg="mod">
+          <ac:chgData name="Graf Thomas, SCS-INI-NET-VNC-E2E" userId="487bc3e3-9ce7-4cdd-b7b4-8899ea88d289" providerId="ADAL" clId="{ADEEF08A-D719-4B50-A383-4105EDA2C206}" dt="2026-07-14T13:22:33.586" v="6903" actId="5793"/>
+          <ac:spMkLst>
+            <pc:docMk/>
+            <pc:sldMk cId="2687771710" sldId="2145706311"/>
+            <ac:spMk id="2" creationId="{AB2DDFA9-710A-5629-89B2-FB87E211CD78}"/>
+          </ac:spMkLst>
+        </pc:spChg>
+        <pc:spChg chg="mod">
+          <ac:chgData name="Graf Thomas, SCS-INI-NET-VNC-E2E" userId="487bc3e3-9ce7-4cdd-b7b4-8899ea88d289" providerId="ADAL" clId="{ADEEF08A-D719-4B50-A383-4105EDA2C206}" dt="2026-07-14T13:22:55.594" v="6923" actId="20577"/>
+          <ac:spMkLst>
+            <pc:docMk/>
+            <pc:sldMk cId="2687771710" sldId="2145706311"/>
+            <ac:spMk id="3" creationId="{421E468E-B525-66BD-FBA4-8EB776CE47B6}"/>
+          </ac:spMkLst>
+        </pc:spChg>
+        <pc:spChg chg="mod">
+          <ac:chgData name="Graf Thomas, SCS-INI-NET-VNC-E2E" userId="487bc3e3-9ce7-4cdd-b7b4-8899ea88d289" providerId="ADAL" clId="{ADEEF08A-D719-4B50-A383-4105EDA2C206}" dt="2026-07-14T13:23:36.982" v="6930" actId="1076"/>
+          <ac:spMkLst>
+            <pc:docMk/>
+            <pc:sldMk cId="2687771710" sldId="2145706311"/>
+            <ac:spMk id="5" creationId="{2D333956-C5AE-D528-B067-D9A012810329}"/>
+          </ac:spMkLst>
+        </pc:spChg>
+      </pc:sldChg>
+      <pc:sldChg chg="add del">
+        <pc:chgData name="Graf Thomas, SCS-INI-NET-VNC-E2E" userId="487bc3e3-9ce7-4cdd-b7b4-8899ea88d289" providerId="ADAL" clId="{ADEEF08A-D719-4B50-A383-4105EDA2C206}" dt="2026-07-14T12:42:45.033" v="6134" actId="47"/>
+        <pc:sldMkLst>
+          <pc:docMk/>
+          <pc:sldMk cId="632967186" sldId="2145706312"/>
+        </pc:sldMkLst>
+      </pc:sldChg>
+      <pc:sldChg chg="modSp add mod">
+        <pc:chgData name="Graf Thomas, SCS-INI-NET-VNC-E2E" userId="487bc3e3-9ce7-4cdd-b7b4-8899ea88d289" providerId="ADAL" clId="{ADEEF08A-D719-4B50-A383-4105EDA2C206}" dt="2026-07-14T13:23:50.593" v="6938" actId="20577"/>
+        <pc:sldMkLst>
+          <pc:docMk/>
+          <pc:sldMk cId="3807185294" sldId="2145706312"/>
+        </pc:sldMkLst>
+        <pc:spChg chg="mod">
+          <ac:chgData name="Graf Thomas, SCS-INI-NET-VNC-E2E" userId="487bc3e3-9ce7-4cdd-b7b4-8899ea88d289" providerId="ADAL" clId="{ADEEF08A-D719-4B50-A383-4105EDA2C206}" dt="2026-07-14T13:23:50.593" v="6938" actId="20577"/>
+          <ac:spMkLst>
+            <pc:docMk/>
+            <pc:sldMk cId="3807185294" sldId="2145706312"/>
+            <ac:spMk id="2" creationId="{5B8888DB-A90D-A25F-9FAA-CB0DFB34C2A9}"/>
+          </ac:spMkLst>
+        </pc:spChg>
+        <pc:spChg chg="mod">
+          <ac:chgData name="Graf Thomas, SCS-INI-NET-VNC-E2E" userId="487bc3e3-9ce7-4cdd-b7b4-8899ea88d289" providerId="ADAL" clId="{ADEEF08A-D719-4B50-A383-4105EDA2C206}" dt="2026-07-14T13:18:52.189" v="6783" actId="20577"/>
+          <ac:spMkLst>
+            <pc:docMk/>
+            <pc:sldMk cId="3807185294" sldId="2145706312"/>
+            <ac:spMk id="3" creationId="{D1A52B7B-3570-1B5D-1F67-9B38890F5748}"/>
+          </ac:spMkLst>
+        </pc:spChg>
+        <pc:spChg chg="mod">
+          <ac:chgData name="Graf Thomas, SCS-INI-NET-VNC-E2E" userId="487bc3e3-9ce7-4cdd-b7b4-8899ea88d289" providerId="ADAL" clId="{ADEEF08A-D719-4B50-A383-4105EDA2C206}" dt="2026-07-14T13:21:02.081" v="6809" actId="13926"/>
+          <ac:spMkLst>
+            <pc:docMk/>
+            <pc:sldMk cId="3807185294" sldId="2145706312"/>
+            <ac:spMk id="5" creationId="{ACF3B6D0-4561-839A-14B8-04636B057F64}"/>
+          </ac:spMkLst>
+        </pc:spChg>
+      </pc:sldChg>
+      <pc:sldChg chg="modSp add mod ord">
+        <pc:chgData name="Graf Thomas, SCS-INI-NET-VNC-E2E" userId="487bc3e3-9ce7-4cdd-b7b4-8899ea88d289" providerId="ADAL" clId="{ADEEF08A-D719-4B50-A383-4105EDA2C206}" dt="2026-07-16T14:29:56.742" v="7486" actId="20577"/>
+        <pc:sldMkLst>
+          <pc:docMk/>
+          <pc:sldMk cId="1452467401" sldId="2145706313"/>
+        </pc:sldMkLst>
+        <pc:spChg chg="mod">
+          <ac:chgData name="Graf Thomas, SCS-INI-NET-VNC-E2E" userId="487bc3e3-9ce7-4cdd-b7b4-8899ea88d289" providerId="ADAL" clId="{ADEEF08A-D719-4B50-A383-4105EDA2C206}" dt="2026-07-14T13:21:32.190" v="6845" actId="20577"/>
+          <ac:spMkLst>
+            <pc:docMk/>
+            <pc:sldMk cId="1452467401" sldId="2145706313"/>
+            <ac:spMk id="2" creationId="{8DE65009-4589-3EEA-F6BA-6387E69395C3}"/>
+          </ac:spMkLst>
+        </pc:spChg>
+        <pc:spChg chg="mod">
+          <ac:chgData name="Graf Thomas, SCS-INI-NET-VNC-E2E" userId="487bc3e3-9ce7-4cdd-b7b4-8899ea88d289" providerId="ADAL" clId="{ADEEF08A-D719-4B50-A383-4105EDA2C206}" dt="2026-07-16T14:29:56.742" v="7486" actId="20577"/>
+          <ac:spMkLst>
+            <pc:docMk/>
+            <pc:sldMk cId="1452467401" sldId="2145706313"/>
+            <ac:spMk id="3" creationId="{BC3C6DC3-F83A-8266-9A3C-EC72FFB72F03}"/>
+          </ac:spMkLst>
+        </pc:spChg>
+      </pc:sldChg>
+      <pc:sldChg chg="add del">
+        <pc:chgData name="Graf Thomas, SCS-INI-NET-VNC-E2E" userId="487bc3e3-9ce7-4cdd-b7b4-8899ea88d289" providerId="ADAL" clId="{ADEEF08A-D719-4B50-A383-4105EDA2C206}" dt="2026-07-14T12:42:45.033" v="6134" actId="47"/>
+        <pc:sldMkLst>
+          <pc:docMk/>
+          <pc:sldMk cId="3870071406" sldId="2145706313"/>
+        </pc:sldMkLst>
+      </pc:sldChg>
+      <pc:sldChg chg="add del">
+        <pc:chgData name="Graf Thomas, SCS-INI-NET-VNC-E2E" userId="487bc3e3-9ce7-4cdd-b7b4-8899ea88d289" providerId="ADAL" clId="{ADEEF08A-D719-4B50-A383-4105EDA2C206}" dt="2026-07-14T12:42:45.033" v="6134" actId="47"/>
+        <pc:sldMkLst>
+          <pc:docMk/>
+          <pc:sldMk cId="2884885474" sldId="2145706314"/>
+        </pc:sldMkLst>
+      </pc:sldChg>
+      <pc:sldChg chg="modSp add del mod">
+        <pc:chgData name="Graf Thomas, SCS-INI-NET-VNC-E2E" userId="487bc3e3-9ce7-4cdd-b7b4-8899ea88d289" providerId="ADAL" clId="{ADEEF08A-D719-4B50-A383-4105EDA2C206}" dt="2026-07-14T12:42:45.033" v="6134" actId="47"/>
+        <pc:sldMkLst>
+          <pc:docMk/>
+          <pc:sldMk cId="822671291" sldId="2145706315"/>
+        </pc:sldMkLst>
+      </pc:sldChg>
+      <pc:sldChg chg="modSp mod">
+        <pc:chgData name="Graf Thomas, SCS-INI-NET-VNC-E2E" userId="487bc3e3-9ce7-4cdd-b7b4-8899ea88d289" providerId="ADAL" clId="{ADEEF08A-D719-4B50-A383-4105EDA2C206}" dt="2026-07-16T14:30:34.526" v="7491" actId="6549"/>
+        <pc:sldMkLst>
+          <pc:docMk/>
+          <pc:sldMk cId="2939312507" sldId="2145706315"/>
+        </pc:sldMkLst>
+        <pc:spChg chg="mod">
+          <ac:chgData name="Graf Thomas, SCS-INI-NET-VNC-E2E" userId="487bc3e3-9ce7-4cdd-b7b4-8899ea88d289" providerId="ADAL" clId="{ADEEF08A-D719-4B50-A383-4105EDA2C206}" dt="2026-07-16T14:30:34.526" v="7491" actId="6549"/>
+          <ac:spMkLst>
+            <pc:docMk/>
+            <pc:sldMk cId="2939312507" sldId="2145706315"/>
+            <ac:spMk id="3" creationId="{C3BE6826-2677-F704-29DF-A2C833731421}"/>
+          </ac:spMkLst>
+        </pc:spChg>
+      </pc:sldChg>
+      <pc:sldChg chg="modSp mod">
+        <pc:chgData name="Graf Thomas, SCS-INI-NET-VNC-E2E" userId="487bc3e3-9ce7-4cdd-b7b4-8899ea88d289" providerId="ADAL" clId="{ADEEF08A-D719-4B50-A383-4105EDA2C206}" dt="2026-07-16T14:30:20.114" v="7487" actId="790"/>
+        <pc:sldMkLst>
+          <pc:docMk/>
+          <pc:sldMk cId="1872852499" sldId="2145706316"/>
+        </pc:sldMkLst>
+        <pc:spChg chg="mod">
+          <ac:chgData name="Graf Thomas, SCS-INI-NET-VNC-E2E" userId="487bc3e3-9ce7-4cdd-b7b4-8899ea88d289" providerId="ADAL" clId="{ADEEF08A-D719-4B50-A383-4105EDA2C206}" dt="2026-07-16T14:30:20.114" v="7487" actId="790"/>
+          <ac:spMkLst>
+            <pc:docMk/>
+            <pc:sldMk cId="1872852499" sldId="2145706316"/>
+            <ac:spMk id="2" creationId="{C139E37C-89FD-6EBA-520E-409ED1136494}"/>
+          </ac:spMkLst>
+        </pc:spChg>
+        <pc:spChg chg="mod">
+          <ac:chgData name="Graf Thomas, SCS-INI-NET-VNC-E2E" userId="487bc3e3-9ce7-4cdd-b7b4-8899ea88d289" providerId="ADAL" clId="{ADEEF08A-D719-4B50-A383-4105EDA2C206}" dt="2026-07-16T14:30:20.114" v="7487" actId="790"/>
+          <ac:spMkLst>
+            <pc:docMk/>
+            <pc:sldMk cId="1872852499" sldId="2145706316"/>
+            <ac:spMk id="3" creationId="{14533B4E-F532-2573-F0DA-58EA96731AA3}"/>
+          </ac:spMkLst>
+        </pc:spChg>
+        <pc:spChg chg="mod">
+          <ac:chgData name="Graf Thomas, SCS-INI-NET-VNC-E2E" userId="487bc3e3-9ce7-4cdd-b7b4-8899ea88d289" providerId="ADAL" clId="{ADEEF08A-D719-4B50-A383-4105EDA2C206}" dt="2026-07-16T14:30:20.114" v="7487" actId="790"/>
+          <ac:spMkLst>
+            <pc:docMk/>
+            <pc:sldMk cId="1872852499" sldId="2145706316"/>
+            <ac:spMk id="5" creationId="{2D7ED6FF-80FC-84F4-9A7F-3E310B55AD18}"/>
+          </ac:spMkLst>
+        </pc:spChg>
+        <pc:spChg chg="mod">
+          <ac:chgData name="Graf Thomas, SCS-INI-NET-VNC-E2E" userId="487bc3e3-9ce7-4cdd-b7b4-8899ea88d289" providerId="ADAL" clId="{ADEEF08A-D719-4B50-A383-4105EDA2C206}" dt="2026-07-16T14:30:20.114" v="7487" actId="790"/>
+          <ac:spMkLst>
+            <pc:docMk/>
+            <pc:sldMk cId="1872852499" sldId="2145706316"/>
+            <ac:spMk id="6" creationId="{AB67B72F-E7A1-6923-AC3C-23DB42139983}"/>
+          </ac:spMkLst>
+        </pc:spChg>
+      </pc:sldChg>
+      <pc:sldChg chg="modSp add del mod">
+        <pc:chgData name="Graf Thomas, SCS-INI-NET-VNC-E2E" userId="487bc3e3-9ce7-4cdd-b7b4-8899ea88d289" providerId="ADAL" clId="{ADEEF08A-D719-4B50-A383-4105EDA2C206}" dt="2026-03-06T15:27:05.528" v="6106" actId="47"/>
+        <pc:sldMkLst>
+          <pc:docMk/>
+          <pc:sldMk cId="3812470375" sldId="2145706316"/>
         </pc:sldMkLst>
       </pc:sldChg>
     </pc:docChg>
@@ -6393,7 +6383,7 @@
               <a:rPr lang="en-US" sz="1400" dirty="0">
                 <a:latin typeface="+mj-lt"/>
               </a:rPr>
-              <a:t>14. July </a:t>
+              <a:t>16. July </a:t>
             </a:r>
             <a:r>
               <a:rPr lang="en-US" sz="1400" dirty="0">
@@ -9941,7 +9931,7 @@
               <a:rPr lang="en-US" sz="2100" dirty="0">
                 <a:latin typeface="Calibri body"/>
               </a:rPr>
-              <a:t>Avoid duplicating BGP semantics already standardized in IDR.</a:t>
+              <a:t>Avoid duplicating BGP semantics already standardized at IDR working group.</a:t>
             </a:r>
           </a:p>
           <a:p>
@@ -9958,7 +9948,7 @@
               <a:rPr lang="en-US" sz="2100" dirty="0">
                 <a:latin typeface="Calibri body"/>
               </a:rPr>
-              <a:t>We have an open request to draft-</a:t>
+              <a:t>draft-</a:t>
             </a:r>
             <a:r>
               <a:rPr lang="en-US" sz="2100" dirty="0" err="1">
@@ -9994,23 +9984,26 @@
               <a:rPr lang="en-US" sz="2100" dirty="0">
                 <a:latin typeface="Calibri body"/>
               </a:rPr>
-              <a:t>-model authors to </a:t>
+              <a:t>-model authors </a:t>
             </a:r>
             <a:r>
               <a:rPr lang="en-US" sz="2100" b="1" dirty="0">
                 <a:latin typeface="Calibri body"/>
-              </a:rPr>
-              <a:t>restructure </a:t>
+                <a:hlinkClick r:id="rId3"/>
+              </a:rPr>
+              <a:t>restructured </a:t>
             </a:r>
             <a:r>
               <a:rPr lang="en-US" sz="2100" b="1" dirty="0" err="1">
                 <a:latin typeface="Calibri body"/>
+                <a:hlinkClick r:id="rId3"/>
               </a:rPr>
               <a:t>ietf-bgp</a:t>
             </a:r>
             <a:r>
               <a:rPr lang="en-US" sz="2100" b="1" dirty="0">
                 <a:latin typeface="Calibri body"/>
+                <a:hlinkClick r:id="rId3"/>
               </a:rPr>
               <a:t> from submodules to standalone reusable modules </a:t>
             </a:r>
@@ -10018,7 +10011,68 @@
               <a:rPr lang="en-US" sz="2100" dirty="0">
                 <a:latin typeface="Calibri body"/>
               </a:rPr>
-              <a:t>(since submodules cannot be imported independently of the main module).</a:t>
+              <a:t>(since submodules cannot be imported independently of the main module) and we are looking forward that these changes are being mirrored to the </a:t>
+            </a:r>
+            <a:r>
+              <a:rPr lang="en-US" sz="2100" b="1" dirty="0">
+                <a:latin typeface="Calibri body"/>
+                <a:hlinkClick r:id="rId2"/>
+              </a:rPr>
+              <a:t>draft-</a:t>
+            </a:r>
+            <a:r>
+              <a:rPr lang="en-US" sz="2100" b="1" dirty="0" err="1">
+                <a:latin typeface="Calibri body"/>
+                <a:hlinkClick r:id="rId2"/>
+              </a:rPr>
+              <a:t>ietf</a:t>
+            </a:r>
+            <a:r>
+              <a:rPr lang="en-US" sz="2100" b="1" dirty="0">
+                <a:latin typeface="Calibri body"/>
+                <a:hlinkClick r:id="rId2"/>
+              </a:rPr>
+              <a:t>-</a:t>
+            </a:r>
+            <a:r>
+              <a:rPr lang="en-US" sz="2100" b="1" dirty="0" err="1">
+                <a:latin typeface="Calibri body"/>
+                <a:hlinkClick r:id="rId2"/>
+              </a:rPr>
+              <a:t>idr</a:t>
+            </a:r>
+            <a:r>
+              <a:rPr lang="en-US" sz="2100" b="1" dirty="0">
+                <a:latin typeface="Calibri body"/>
+                <a:hlinkClick r:id="rId2"/>
+              </a:rPr>
+              <a:t>-</a:t>
+            </a:r>
+            <a:r>
+              <a:rPr lang="en-US" sz="2100" b="1" dirty="0" err="1">
+                <a:latin typeface="Calibri body"/>
+                <a:hlinkClick r:id="rId2"/>
+              </a:rPr>
+              <a:t>bgp</a:t>
+            </a:r>
+            <a:r>
+              <a:rPr lang="en-US" sz="2100" b="1" dirty="0">
+                <a:latin typeface="Calibri body"/>
+                <a:hlinkClick r:id="rId2"/>
+              </a:rPr>
+              <a:t>-model</a:t>
+            </a:r>
+            <a:r>
+              <a:rPr lang="en-US" sz="2100" b="1" dirty="0">
+                <a:latin typeface="Calibri body"/>
+              </a:rPr>
+              <a:t> </a:t>
+            </a:r>
+            <a:r>
+              <a:rPr lang="en-US" sz="2100" dirty="0">
+                <a:latin typeface="Calibri body"/>
+              </a:rPr>
+              <a:t>document.</a:t>
             </a:r>
           </a:p>
           <a:p>
@@ -10035,7 +10089,7 @@
               <a:rPr lang="en-US" sz="2100" dirty="0">
                 <a:latin typeface="Calibri body"/>
               </a:rPr>
-              <a:t>YANG modules in this draft could then be simplified to import only the specific modules needed, avoiding to pull in BGP configuration and policy related content which is not needed for telemetry use cases.</a:t>
+              <a:t>YANG modules in this document could then be simplified to import only the specific modules needed and not importing BGP configuration and policy related schema content which is not needed for telemetry use cases.</a:t>
             </a:r>
             <a:endParaRPr lang="en-US" sz="2100" dirty="0"/>
           </a:p>
@@ -10673,34 +10727,34 @@
           <a:lstStyle/>
           <a:p>
             <a:r>
-              <a:rPr lang="en-US" sz="2800" b="1" dirty="0"/>
+              <a:rPr lang="en-US" sz="2800" b="1" noProof="0" dirty="0"/>
               <a:t>BMP YANG Telemetry Message</a:t>
             </a:r>
             <a:br>
-              <a:rPr lang="en-US" sz="3600" dirty="0"/>
+              <a:rPr lang="en-US" sz="3600" noProof="0" dirty="0"/>
             </a:br>
             <a:r>
-              <a:rPr lang="en-US" sz="2700" dirty="0">
+              <a:rPr lang="en-US" sz="2700" noProof="0" dirty="0">
                 <a:solidFill>
                   <a:schemeClr val="bg2">
                     <a:lumMod val="75000"/>
                   </a:schemeClr>
                 </a:solidFill>
               </a:rPr>
-              <a:t>New `</a:t>
-            </a:r>
-            <a:r>
-              <a:rPr lang="en-US" sz="2700" dirty="0" err="1">
+              <a:t>New </a:t>
+            </a:r>
+            <a:r>
+              <a:rPr lang="en-US" sz="2700" noProof="0" dirty="0" err="1">
                 <a:solidFill>
                   <a:schemeClr val="bg2">
                     <a:lumMod val="75000"/>
                   </a:schemeClr>
                 </a:solidFill>
               </a:rPr>
-              <a:t>ietf</a:t>
-            </a:r>
-            <a:r>
-              <a:rPr lang="en-US" sz="2700" dirty="0">
+              <a:t>`ietf</a:t>
+            </a:r>
+            <a:r>
+              <a:rPr lang="en-US" sz="2700" noProof="0" dirty="0">
                 <a:solidFill>
                   <a:schemeClr val="bg2">
                     <a:lumMod val="75000"/>
@@ -10710,7 +10764,7 @@
               <a:t>-bmp-</a:t>
             </a:r>
             <a:r>
-              <a:rPr lang="en-US" sz="2700" dirty="0" err="1">
+              <a:rPr lang="en-US" sz="2700" noProof="0" dirty="0" err="1">
                 <a:solidFill>
                   <a:schemeClr val="bg2">
                     <a:lumMod val="75000"/>
@@ -10720,7 +10774,7 @@
               <a:t>tlv</a:t>
             </a:r>
             <a:r>
-              <a:rPr lang="en-US" sz="2700" dirty="0">
+              <a:rPr lang="en-US" sz="2700" noProof="0" dirty="0">
                 <a:solidFill>
                   <a:schemeClr val="bg2">
                     <a:lumMod val="75000"/>
@@ -10770,154 +10824,10 @@
               <a:buNone/>
             </a:pPr>
             <a:r>
-              <a:rPr lang="de-CH" sz="2100" dirty="0">
+              <a:rPr lang="en-US" sz="2100" noProof="0" dirty="0">
                 <a:latin typeface="Calibri body"/>
               </a:rPr>
-              <a:t>Dedicated </a:t>
-            </a:r>
-            <a:r>
-              <a:rPr lang="de-CH" sz="2100" dirty="0" err="1">
-                <a:latin typeface="Calibri body"/>
-              </a:rPr>
-              <a:t>module</a:t>
-            </a:r>
-            <a:r>
-              <a:rPr lang="de-CH" sz="2100" dirty="0">
-                <a:latin typeface="Calibri body"/>
-              </a:rPr>
-              <a:t> </a:t>
-            </a:r>
-            <a:r>
-              <a:rPr lang="de-CH" sz="2100" dirty="0" err="1">
-                <a:latin typeface="Calibri body"/>
-              </a:rPr>
-              <a:t>modeling</a:t>
-            </a:r>
-            <a:r>
-              <a:rPr lang="de-CH" sz="2100" dirty="0">
-                <a:latin typeface="Calibri body"/>
-              </a:rPr>
-              <a:t> </a:t>
-            </a:r>
-            <a:r>
-              <a:rPr lang="de-CH" sz="2100" dirty="0" err="1">
-                <a:latin typeface="Calibri body"/>
-              </a:rPr>
-              <a:t>the</a:t>
-            </a:r>
-            <a:r>
-              <a:rPr lang="de-CH" sz="2100" dirty="0">
-                <a:latin typeface="Calibri body"/>
-              </a:rPr>
-              <a:t> </a:t>
-            </a:r>
-            <a:r>
-              <a:rPr lang="de-CH" sz="2100" dirty="0" err="1">
-                <a:latin typeface="Calibri body"/>
-              </a:rPr>
-              <a:t>decoded</a:t>
-            </a:r>
-            <a:r>
-              <a:rPr lang="de-CH" sz="2100" dirty="0">
-                <a:latin typeface="Calibri body"/>
-              </a:rPr>
-              <a:t> </a:t>
-            </a:r>
-            <a:r>
-              <a:rPr lang="de-CH" sz="2100" dirty="0" err="1">
-                <a:latin typeface="Calibri body"/>
-              </a:rPr>
-              <a:t>value</a:t>
-            </a:r>
-            <a:r>
-              <a:rPr lang="de-CH" sz="2100" dirty="0">
-                <a:latin typeface="Calibri body"/>
-              </a:rPr>
-              <a:t> </a:t>
-            </a:r>
-            <a:r>
-              <a:rPr lang="de-CH" sz="2100" dirty="0" err="1">
-                <a:latin typeface="Calibri body"/>
-              </a:rPr>
-              <a:t>of</a:t>
-            </a:r>
-            <a:r>
-              <a:rPr lang="de-CH" sz="2100" dirty="0">
-                <a:latin typeface="Calibri body"/>
-              </a:rPr>
-              <a:t> BMP TLVs, </a:t>
-            </a:r>
-            <a:r>
-              <a:rPr lang="de-CH" sz="2100" dirty="0" err="1">
-                <a:latin typeface="Calibri body"/>
-              </a:rPr>
-              <a:t>consolidates</a:t>
-            </a:r>
-            <a:r>
-              <a:rPr lang="de-CH" sz="2100" dirty="0">
-                <a:latin typeface="Calibri body"/>
-              </a:rPr>
-              <a:t> TLV </a:t>
-            </a:r>
-            <a:r>
-              <a:rPr lang="de-CH" sz="2100" dirty="0" err="1">
-                <a:latin typeface="Calibri body"/>
-              </a:rPr>
-              <a:t>groupings</a:t>
-            </a:r>
-            <a:r>
-              <a:rPr lang="de-CH" sz="2100" dirty="0">
-                <a:latin typeface="Calibri body"/>
-              </a:rPr>
-              <a:t> </a:t>
-            </a:r>
-            <a:r>
-              <a:rPr lang="de-CH" sz="2100" dirty="0" err="1">
-                <a:latin typeface="Calibri body"/>
-              </a:rPr>
-              <a:t>from</a:t>
-            </a:r>
-            <a:r>
-              <a:rPr lang="de-CH" sz="2100" dirty="0">
-                <a:latin typeface="Calibri body"/>
-              </a:rPr>
-              <a:t> multiple </a:t>
-            </a:r>
-            <a:r>
-              <a:rPr lang="de-CH" sz="2100" dirty="0" err="1">
-                <a:latin typeface="Calibri body"/>
-              </a:rPr>
-              <a:t>specs</a:t>
-            </a:r>
-            <a:r>
-              <a:rPr lang="de-CH" sz="2100" dirty="0">
-                <a:latin typeface="Calibri body"/>
-              </a:rPr>
-              <a:t> in </a:t>
-            </a:r>
-            <a:r>
-              <a:rPr lang="de-CH" sz="2100" dirty="0" err="1">
-                <a:latin typeface="Calibri body"/>
-              </a:rPr>
-              <a:t>one</a:t>
-            </a:r>
-            <a:r>
-              <a:rPr lang="de-CH" sz="2100" dirty="0">
-                <a:latin typeface="Calibri body"/>
-              </a:rPr>
-              <a:t> </a:t>
-            </a:r>
-            <a:r>
-              <a:rPr lang="de-CH" sz="2100" dirty="0" err="1">
-                <a:latin typeface="Calibri body"/>
-              </a:rPr>
-              <a:t>place</a:t>
-            </a:r>
-            <a:r>
-              <a:rPr lang="de-CH" sz="2100" dirty="0">
-                <a:latin typeface="Calibri body"/>
-              </a:rPr>
-              <a:t>:</a:t>
+              <a:t>Dedicated module modeling the decoded value of BMP TLVs, consolidates TLV groupings from multiple specs in one place:</a:t>
             </a:r>
           </a:p>
           <a:p>
@@ -10930,14 +10840,14 @@
               </a:spcBef>
             </a:pPr>
             <a:r>
-              <a:rPr lang="de-CH" sz="2100" dirty="0">
+              <a:rPr lang="en-US" sz="2100" noProof="0" dirty="0">
                 <a:latin typeface="Calibri body"/>
                 <a:hlinkClick r:id="rId2"/>
               </a:rPr>
               <a:t>RFC 7854</a:t>
             </a:r>
             <a:r>
-              <a:rPr lang="de-CH" sz="2100" dirty="0">
+              <a:rPr lang="en-US" sz="2100" noProof="0" dirty="0">
                 <a:latin typeface="Calibri body"/>
               </a:rPr>
               <a:t> (BMP): Info, Term, RM TLVs</a:t>
@@ -10953,29 +10863,17 @@
               </a:spcBef>
             </a:pPr>
             <a:r>
-              <a:rPr lang="de-CH" sz="2100" dirty="0">
+              <a:rPr lang="en-US" sz="2100" noProof="0" dirty="0">
                 <a:latin typeface="Calibri body"/>
                 <a:hlinkClick r:id="rId3"/>
               </a:rPr>
               <a:t>RFC 9069 </a:t>
             </a:r>
             <a:r>
-              <a:rPr lang="de-CH" sz="2100" dirty="0">
+              <a:rPr lang="en-US" sz="2100" noProof="0" dirty="0">
                 <a:latin typeface="Calibri body"/>
               </a:rPr>
-              <a:t>(</a:t>
-            </a:r>
-            <a:r>
-              <a:rPr lang="de-CH" sz="2100" dirty="0" err="1">
-                <a:latin typeface="Calibri body"/>
-              </a:rPr>
-              <a:t>Loc-Rib</a:t>
-            </a:r>
-            <a:r>
-              <a:rPr lang="de-CH" sz="2100" dirty="0">
-                <a:latin typeface="Calibri body"/>
-              </a:rPr>
-              <a:t>): VRF/Table Name TLV</a:t>
+              <a:t>(Loc-Rib): VRF/Table Name TLV</a:t>
             </a:r>
           </a:p>
           <a:p>
@@ -10988,14 +10886,14 @@
               </a:spcBef>
             </a:pPr>
             <a:r>
-              <a:rPr lang="de-CH" sz="2100" dirty="0">
+              <a:rPr lang="en-US" sz="2100" noProof="0" dirty="0">
                 <a:latin typeface="Calibri body"/>
                 <a:hlinkClick r:id="rId4"/>
               </a:rPr>
               <a:t>draft-ietf-grow-bmp-tlv</a:t>
             </a:r>
             <a:r>
-              <a:rPr lang="de-CH" sz="2100" dirty="0">
+              <a:rPr lang="en-US" sz="2100" noProof="0" dirty="0">
                 <a:latin typeface="Calibri body"/>
               </a:rPr>
               <a:t> (BMP v4)</a:t>
@@ -11010,7 +10908,7 @@
                 <a:spcPts val="0"/>
               </a:spcBef>
             </a:pPr>
-            <a:endParaRPr lang="de-CH" sz="2100" dirty="0">
+            <a:endParaRPr lang="en-US" sz="2100" noProof="0" dirty="0">
               <a:latin typeface="Calibri body"/>
             </a:endParaRPr>
           </a:p>
@@ -11025,240 +10923,12 @@
               <a:buNone/>
             </a:pPr>
             <a:r>
-              <a:rPr lang="de-CH" sz="2100" dirty="0">
+              <a:rPr lang="en-US" sz="2100" noProof="0" dirty="0">
                 <a:latin typeface="Calibri body"/>
               </a:rPr>
-              <a:t>Message-type </a:t>
-            </a:r>
-            <a:r>
-              <a:rPr lang="de-CH" sz="2100" dirty="0" err="1">
-                <a:latin typeface="Calibri body"/>
-              </a:rPr>
-              <a:t>specific</a:t>
-            </a:r>
-            <a:r>
-              <a:rPr lang="de-CH" sz="2100" dirty="0">
-                <a:latin typeface="Calibri body"/>
-              </a:rPr>
-              <a:t> </a:t>
-            </a:r>
-            <a:r>
-              <a:rPr lang="de-CH" sz="2100" dirty="0" err="1">
-                <a:latin typeface="Calibri body"/>
-              </a:rPr>
-              <a:t>groupings</a:t>
-            </a:r>
-            <a:r>
-              <a:rPr lang="de-CH" sz="2100" dirty="0">
-                <a:latin typeface="Calibri body"/>
-              </a:rPr>
-              <a:t> </a:t>
-            </a:r>
-            <a:r>
-              <a:rPr lang="de-CH" sz="2100" dirty="0" err="1">
-                <a:latin typeface="Calibri body"/>
-              </a:rPr>
-              <a:t>are</a:t>
-            </a:r>
-            <a:r>
-              <a:rPr lang="de-CH" sz="2100" dirty="0">
-                <a:latin typeface="Calibri body"/>
-              </a:rPr>
-              <a:t> </a:t>
-            </a:r>
-            <a:r>
-              <a:rPr lang="de-CH" sz="2100" dirty="0" err="1">
-                <a:latin typeface="Calibri body"/>
-              </a:rPr>
-              <a:t>provided</a:t>
-            </a:r>
-            <a:r>
-              <a:rPr lang="de-CH" sz="2100" dirty="0">
-                <a:latin typeface="Calibri body"/>
-              </a:rPr>
-              <a:t>, </a:t>
-            </a:r>
-            <a:r>
-              <a:rPr lang="de-CH" sz="2100" dirty="0" err="1">
-                <a:latin typeface="Calibri body"/>
-              </a:rPr>
-              <a:t>to</a:t>
-            </a:r>
-            <a:r>
-              <a:rPr lang="de-CH" sz="2100" dirty="0">
-                <a:latin typeface="Calibri body"/>
-              </a:rPr>
-              <a:t> </a:t>
-            </a:r>
-            <a:r>
-              <a:rPr lang="de-CH" sz="2100" dirty="0" err="1">
-                <a:latin typeface="Calibri body"/>
-              </a:rPr>
-              <a:t>determine</a:t>
-            </a:r>
-            <a:r>
-              <a:rPr lang="de-CH" sz="2100" dirty="0">
-                <a:latin typeface="Calibri body"/>
-              </a:rPr>
-              <a:t> </a:t>
-            </a:r>
-            <a:r>
-              <a:rPr lang="de-CH" sz="2100" dirty="0" err="1">
-                <a:latin typeface="Calibri body"/>
-              </a:rPr>
-              <a:t>which</a:t>
-            </a:r>
-            <a:r>
-              <a:rPr lang="de-CH" sz="2100" dirty="0">
-                <a:latin typeface="Calibri body"/>
-              </a:rPr>
-              <a:t> TLVs </a:t>
-            </a:r>
-            <a:r>
-              <a:rPr lang="de-CH" sz="2100" dirty="0" err="1">
-                <a:latin typeface="Calibri body"/>
-              </a:rPr>
-              <a:t>are</a:t>
-            </a:r>
-            <a:r>
-              <a:rPr lang="de-CH" sz="2100" dirty="0">
-                <a:latin typeface="Calibri body"/>
-              </a:rPr>
-              <a:t> </a:t>
-            </a:r>
-            <a:r>
-              <a:rPr lang="de-CH" sz="2100" dirty="0" err="1">
-                <a:latin typeface="Calibri body"/>
-              </a:rPr>
-              <a:t>applicable</a:t>
-            </a:r>
-            <a:r>
-              <a:rPr lang="de-CH" sz="2100" dirty="0">
-                <a:latin typeface="Calibri body"/>
-              </a:rPr>
-              <a:t>. All </a:t>
-            </a:r>
-            <a:r>
-              <a:rPr lang="de-CH" sz="2100" dirty="0" err="1">
-                <a:latin typeface="Calibri body"/>
-              </a:rPr>
-              <a:t>message-types</a:t>
-            </a:r>
-            <a:r>
-              <a:rPr lang="de-CH" sz="2100" dirty="0">
-                <a:latin typeface="Calibri body"/>
-              </a:rPr>
-              <a:t> </a:t>
-            </a:r>
-            <a:r>
-              <a:rPr lang="de-CH" sz="2100" dirty="0" err="1">
-                <a:latin typeface="Calibri body"/>
-              </a:rPr>
-              <a:t>have</a:t>
-            </a:r>
-            <a:r>
-              <a:rPr lang="de-CH" sz="2100" dirty="0">
-                <a:latin typeface="Calibri body"/>
-              </a:rPr>
-              <a:t> a </a:t>
-            </a:r>
-            <a:r>
-              <a:rPr lang="de-CH" sz="2100" dirty="0" err="1">
-                <a:latin typeface="Calibri body"/>
-              </a:rPr>
-              <a:t>common</a:t>
-            </a:r>
-            <a:r>
-              <a:rPr lang="de-CH" sz="2100" dirty="0">
-                <a:latin typeface="Calibri body"/>
-              </a:rPr>
-              <a:t> </a:t>
-            </a:r>
-            <a:r>
-              <a:rPr lang="de-CH" sz="2100" dirty="0" err="1">
-                <a:latin typeface="Calibri body"/>
-              </a:rPr>
-              <a:t>set</a:t>
-            </a:r>
-            <a:r>
-              <a:rPr lang="de-CH" sz="2100" dirty="0">
-                <a:latin typeface="Calibri body"/>
-              </a:rPr>
-              <a:t> </a:t>
-            </a:r>
-            <a:r>
-              <a:rPr lang="de-CH" sz="2100" dirty="0" err="1">
-                <a:latin typeface="Calibri body"/>
-              </a:rPr>
-              <a:t>of</a:t>
-            </a:r>
-            <a:r>
-              <a:rPr lang="de-CH" sz="2100" dirty="0">
-                <a:latin typeface="Calibri body"/>
-              </a:rPr>
-              <a:t> TLVs </a:t>
-            </a:r>
-            <a:r>
-              <a:rPr lang="de-CH" sz="2100" dirty="0" err="1">
-                <a:latin typeface="Calibri body"/>
-              </a:rPr>
-              <a:t>represented</a:t>
-            </a:r>
-            <a:r>
-              <a:rPr lang="de-CH" sz="2100" dirty="0">
-                <a:latin typeface="Calibri body"/>
-              </a:rPr>
-              <a:t> </a:t>
-            </a:r>
-            <a:r>
-              <a:rPr lang="de-CH" sz="2100" dirty="0" err="1">
-                <a:latin typeface="Calibri body"/>
-              </a:rPr>
-              <a:t>by</a:t>
-            </a:r>
-            <a:r>
-              <a:rPr lang="de-CH" sz="2100" dirty="0">
-                <a:latin typeface="Calibri body"/>
-              </a:rPr>
-              <a:t> </a:t>
-            </a:r>
-            <a:r>
-              <a:rPr lang="de-CH" sz="2100" dirty="0" err="1">
-                <a:latin typeface="Calibri body"/>
-              </a:rPr>
-              <a:t>sequence-number</a:t>
-            </a:r>
-            <a:r>
-              <a:rPr lang="de-CH" sz="2100" dirty="0">
-                <a:latin typeface="Calibri body"/>
-              </a:rPr>
-              <a:t>, </a:t>
-            </a:r>
-            <a:r>
-              <a:rPr lang="de-CH" sz="2100" dirty="0" err="1">
-                <a:latin typeface="Calibri body"/>
-              </a:rPr>
-              <a:t>timestamps</a:t>
-            </a:r>
-            <a:r>
-              <a:rPr lang="de-CH" sz="2100" dirty="0">
-                <a:latin typeface="Calibri body"/>
-              </a:rPr>
-              <a:t>, and </a:t>
-            </a:r>
-            <a:r>
-              <a:rPr lang="de-CH" sz="2100" dirty="0" err="1">
-                <a:latin typeface="Calibri body"/>
-              </a:rPr>
-              <a:t>extended-flags</a:t>
-            </a:r>
-            <a:r>
-              <a:rPr lang="de-CH" sz="2100" dirty="0">
-                <a:latin typeface="Calibri body"/>
-              </a:rPr>
-              <a:t>. </a:t>
-            </a:r>
-            <a:endParaRPr lang="en-US" sz="2100" dirty="0"/>
+              <a:t>Message-type specific groupings are provided, to determine which TLVs are applicable. All message-types have a common set of TLVs represented by sequence-number, timestamps, and extended-flags. </a:t>
+            </a:r>
+            <a:endParaRPr lang="en-US" sz="2100" noProof="0" dirty="0"/>
           </a:p>
         </p:txBody>
       </p:sp>
@@ -11289,10 +10959,10 @@
           <a:lstStyle/>
           <a:p>
             <a:fld id="{FC4AC485-25DE-431E-B345-9C0A15BB7F8A}" type="slidenum">
-              <a:rPr lang="en-US" sz="1400" smtClean="0"/>
+              <a:rPr lang="en-US" sz="1400" noProof="0" smtClean="0"/>
               <a:t>5</a:t>
             </a:fld>
-            <a:endParaRPr lang="en-US" sz="1400" dirty="0"/>
+            <a:endParaRPr lang="en-US" sz="1400" noProof="0" dirty="0"/>
           </a:p>
         </p:txBody>
       </p:sp>
@@ -11325,131 +10995,54 @@
           <a:lstStyle/>
           <a:p>
             <a:r>
-              <a:rPr lang="de-CH" sz="900" dirty="0" err="1">
-                <a:latin typeface="Courier New" panose="02070309020205020404" pitchFamily="49" charset="0"/>
-                <a:cs typeface="Courier New" panose="02070309020205020404" pitchFamily="49" charset="0"/>
-              </a:rPr>
-              <a:t>module</a:t>
-            </a:r>
-            <a:r>
-              <a:rPr lang="de-CH" sz="900" dirty="0">
-                <a:latin typeface="Courier New" panose="02070309020205020404" pitchFamily="49" charset="0"/>
-                <a:cs typeface="Courier New" panose="02070309020205020404" pitchFamily="49" charset="0"/>
-              </a:rPr>
-              <a:t>: </a:t>
-            </a:r>
-            <a:r>
-              <a:rPr lang="de-CH" sz="900" dirty="0" err="1">
+              <a:rPr lang="en-US" sz="900" noProof="0" dirty="0">
+                <a:latin typeface="Courier New" panose="02070309020205020404" pitchFamily="49" charset="0"/>
+                <a:cs typeface="Courier New" panose="02070309020205020404" pitchFamily="49" charset="0"/>
+              </a:rPr>
+              <a:t>module: </a:t>
+            </a:r>
+            <a:r>
+              <a:rPr lang="en-US" sz="900" noProof="0" dirty="0" err="1">
                 <a:latin typeface="Courier New" panose="02070309020205020404" pitchFamily="49" charset="0"/>
                 <a:cs typeface="Courier New" panose="02070309020205020404" pitchFamily="49" charset="0"/>
               </a:rPr>
               <a:t>ietf</a:t>
             </a:r>
             <a:r>
-              <a:rPr lang="de-CH" sz="900" dirty="0">
-                <a:latin typeface="Courier New" panose="02070309020205020404" pitchFamily="49" charset="0"/>
-                <a:cs typeface="Courier New" panose="02070309020205020404" pitchFamily="49" charset="0"/>
-              </a:rPr>
-              <a:t>-</a:t>
-            </a:r>
-            <a:r>
-              <a:rPr lang="de-CH" sz="900" dirty="0" err="1">
-                <a:latin typeface="Courier New" panose="02070309020205020404" pitchFamily="49" charset="0"/>
-                <a:cs typeface="Courier New" panose="02070309020205020404" pitchFamily="49" charset="0"/>
-              </a:rPr>
-              <a:t>bmp</a:t>
-            </a:r>
-            <a:r>
-              <a:rPr lang="de-CH" sz="900" dirty="0">
-                <a:latin typeface="Courier New" panose="02070309020205020404" pitchFamily="49" charset="0"/>
-                <a:cs typeface="Courier New" panose="02070309020205020404" pitchFamily="49" charset="0"/>
-              </a:rPr>
-              <a:t>-</a:t>
-            </a:r>
-            <a:r>
-              <a:rPr lang="de-CH" sz="900" dirty="0" err="1">
-                <a:latin typeface="Courier New" panose="02070309020205020404" pitchFamily="49" charset="0"/>
-                <a:cs typeface="Courier New" panose="02070309020205020404" pitchFamily="49" charset="0"/>
-              </a:rPr>
-              <a:t>telemetry</a:t>
-            </a:r>
-            <a:r>
-              <a:rPr lang="de-CH" sz="900" dirty="0">
-                <a:latin typeface="Courier New" panose="02070309020205020404" pitchFamily="49" charset="0"/>
-                <a:cs typeface="Courier New" panose="02070309020205020404" pitchFamily="49" charset="0"/>
-              </a:rPr>
-              <a:t>-message</a:t>
-            </a:r>
-          </a:p>
-          <a:p>
-            <a:endParaRPr lang="de-CH" sz="900" dirty="0">
+              <a:rPr lang="en-US" sz="900" noProof="0" dirty="0">
+                <a:latin typeface="Courier New" panose="02070309020205020404" pitchFamily="49" charset="0"/>
+                <a:cs typeface="Courier New" panose="02070309020205020404" pitchFamily="49" charset="0"/>
+              </a:rPr>
+              <a:t>-bmp-telemetry-message</a:t>
+            </a:r>
+          </a:p>
+          <a:p>
+            <a:endParaRPr lang="en-US" sz="900" noProof="0" dirty="0">
               <a:latin typeface="Courier New" panose="02070309020205020404" pitchFamily="49" charset="0"/>
               <a:cs typeface="Courier New" panose="02070309020205020404" pitchFamily="49" charset="0"/>
             </a:endParaRPr>
           </a:p>
           <a:p>
             <a:r>
-              <a:rPr lang="de-CH" sz="900" dirty="0">
-                <a:latin typeface="Courier New" panose="02070309020205020404" pitchFamily="49" charset="0"/>
-                <a:cs typeface="Courier New" panose="02070309020205020404" pitchFamily="49" charset="0"/>
-              </a:rPr>
-              <a:t>  </a:t>
-            </a:r>
-            <a:r>
-              <a:rPr lang="de-CH" sz="900" dirty="0" err="1">
-                <a:latin typeface="Courier New" panose="02070309020205020404" pitchFamily="49" charset="0"/>
-                <a:cs typeface="Courier New" panose="02070309020205020404" pitchFamily="49" charset="0"/>
-              </a:rPr>
-              <a:t>structure</a:t>
-            </a:r>
-            <a:r>
-              <a:rPr lang="de-CH" sz="900" dirty="0">
-                <a:latin typeface="Courier New" panose="02070309020205020404" pitchFamily="49" charset="0"/>
-                <a:cs typeface="Courier New" panose="02070309020205020404" pitchFamily="49" charset="0"/>
-              </a:rPr>
-              <a:t> </a:t>
-            </a:r>
-            <a:r>
-              <a:rPr lang="de-CH" sz="900" dirty="0" err="1">
-                <a:latin typeface="Courier New" panose="02070309020205020404" pitchFamily="49" charset="0"/>
-                <a:cs typeface="Courier New" panose="02070309020205020404" pitchFamily="49" charset="0"/>
-              </a:rPr>
-              <a:t>message</a:t>
-            </a:r>
-            <a:r>
-              <a:rPr lang="de-CH" sz="900" dirty="0">
-                <a:latin typeface="Courier New" panose="02070309020205020404" pitchFamily="49" charset="0"/>
-                <a:cs typeface="Courier New" panose="02070309020205020404" pitchFamily="49" charset="0"/>
-              </a:rPr>
-              <a:t>:</a:t>
-            </a:r>
-          </a:p>
-          <a:p>
-            <a:r>
-              <a:rPr lang="de-CH" sz="900" dirty="0">
-                <a:latin typeface="Courier New" panose="02070309020205020404" pitchFamily="49" charset="0"/>
-                <a:cs typeface="Courier New" panose="02070309020205020404" pitchFamily="49" charset="0"/>
-              </a:rPr>
-              <a:t>    +-- (</a:t>
-            </a:r>
-            <a:r>
-              <a:rPr lang="de-CH" sz="900" dirty="0" err="1">
-                <a:latin typeface="Courier New" panose="02070309020205020404" pitchFamily="49" charset="0"/>
-                <a:cs typeface="Courier New" panose="02070309020205020404" pitchFamily="49" charset="0"/>
-              </a:rPr>
-              <a:t>message</a:t>
-            </a:r>
-            <a:r>
-              <a:rPr lang="de-CH" sz="900" dirty="0">
-                <a:latin typeface="Courier New" panose="02070309020205020404" pitchFamily="49" charset="0"/>
-                <a:cs typeface="Courier New" panose="02070309020205020404" pitchFamily="49" charset="0"/>
-              </a:rPr>
-              <a:t>-type)?</a:t>
-            </a:r>
-          </a:p>
-          <a:p>
-            <a:r>
-              <a:rPr lang="de-CH" sz="900" dirty="0">
+              <a:rPr lang="en-US" sz="900" noProof="0" dirty="0">
+                <a:latin typeface="Courier New" panose="02070309020205020404" pitchFamily="49" charset="0"/>
+                <a:cs typeface="Courier New" panose="02070309020205020404" pitchFamily="49" charset="0"/>
+              </a:rPr>
+              <a:t>  structure message:</a:t>
+            </a:r>
+          </a:p>
+          <a:p>
+            <a:r>
+              <a:rPr lang="en-US" sz="900" noProof="0" dirty="0">
+                <a:latin typeface="Courier New" panose="02070309020205020404" pitchFamily="49" charset="0"/>
+                <a:cs typeface="Courier New" panose="02070309020205020404" pitchFamily="49" charset="0"/>
+              </a:rPr>
+              <a:t>    +-- (message-type)?</a:t>
+            </a:r>
+          </a:p>
+          <a:p>
+            <a:r>
+              <a:rPr lang="en-US" sz="900" noProof="0" dirty="0">
                 <a:latin typeface="Courier New" panose="02070309020205020404" pitchFamily="49" charset="0"/>
                 <a:cs typeface="Courier New" panose="02070309020205020404" pitchFamily="49" charset="0"/>
               </a:rPr>
@@ -11458,7 +11051,7 @@
           </a:p>
           <a:p>
             <a:r>
-              <a:rPr lang="de-CH" sz="900" dirty="0">
+              <a:rPr lang="en-US" sz="900" noProof="0" dirty="0">
                 <a:latin typeface="Courier New" panose="02070309020205020404" pitchFamily="49" charset="0"/>
                 <a:cs typeface="Courier New" panose="02070309020205020404" pitchFamily="49" charset="0"/>
               </a:rPr>
@@ -11467,477 +11060,301 @@
           </a:p>
           <a:p>
             <a:r>
-              <a:rPr lang="de-CH" sz="900" dirty="0">
+              <a:rPr lang="en-US" sz="900" noProof="0" dirty="0">
                 <a:latin typeface="Courier New" panose="02070309020205020404" pitchFamily="49" charset="0"/>
                 <a:cs typeface="Courier New" panose="02070309020205020404" pitchFamily="49" charset="0"/>
               </a:rPr>
               <a:t>       |     +-- peer-type             </a:t>
             </a:r>
             <a:r>
-              <a:rPr lang="de-CH" sz="900" dirty="0" err="1">
+              <a:rPr lang="en-US" sz="900" noProof="0" dirty="0" err="1">
                 <a:latin typeface="Courier New" panose="02070309020205020404" pitchFamily="49" charset="0"/>
                 <a:cs typeface="Courier New" panose="02070309020205020404" pitchFamily="49" charset="0"/>
               </a:rPr>
               <a:t>peer-type</a:t>
             </a:r>
-            <a:endParaRPr lang="de-CH" sz="900" dirty="0">
+            <a:endParaRPr lang="en-US" sz="900" noProof="0" dirty="0">
               <a:latin typeface="Courier New" panose="02070309020205020404" pitchFamily="49" charset="0"/>
               <a:cs typeface="Courier New" panose="02070309020205020404" pitchFamily="49" charset="0"/>
             </a:endParaRPr>
           </a:p>
           <a:p>
             <a:r>
-              <a:rPr lang="de-CH" sz="900" dirty="0">
-                <a:latin typeface="Courier New" panose="02070309020205020404" pitchFamily="49" charset="0"/>
-                <a:cs typeface="Courier New" panose="02070309020205020404" pitchFamily="49" charset="0"/>
-              </a:rPr>
-              <a:t>       |     +-- peer-</a:t>
-            </a:r>
-            <a:r>
-              <a:rPr lang="de-CH" sz="900" dirty="0" err="1">
-                <a:latin typeface="Courier New" panose="02070309020205020404" pitchFamily="49" charset="0"/>
-                <a:cs typeface="Courier New" panose="02070309020205020404" pitchFamily="49" charset="0"/>
-              </a:rPr>
-              <a:t>flags</a:t>
-            </a:r>
-            <a:endParaRPr lang="de-CH" sz="900" dirty="0">
+              <a:rPr lang="en-US" sz="900" noProof="0" dirty="0">
+                <a:latin typeface="Courier New" panose="02070309020205020404" pitchFamily="49" charset="0"/>
+                <a:cs typeface="Courier New" panose="02070309020205020404" pitchFamily="49" charset="0"/>
+              </a:rPr>
+              <a:t>       |     +-- peer-flags</a:t>
+            </a:r>
+          </a:p>
+          <a:p>
+            <a:r>
+              <a:rPr lang="en-US" sz="900" noProof="0" dirty="0">
+                <a:latin typeface="Courier New" panose="02070309020205020404" pitchFamily="49" charset="0"/>
+                <a:cs typeface="Courier New" panose="02070309020205020404" pitchFamily="49" charset="0"/>
+              </a:rPr>
+              <a:t>       |     |  +-- ipv6-peer?        </a:t>
+            </a:r>
+            <a:r>
+              <a:rPr lang="en-US" sz="900" noProof="0" dirty="0" err="1">
+                <a:latin typeface="Courier New" panose="02070309020205020404" pitchFamily="49" charset="0"/>
+                <a:cs typeface="Courier New" panose="02070309020205020404" pitchFamily="49" charset="0"/>
+              </a:rPr>
+              <a:t>boolean</a:t>
+            </a:r>
+            <a:endParaRPr lang="en-US" sz="900" noProof="0" dirty="0">
               <a:latin typeface="Courier New" panose="02070309020205020404" pitchFamily="49" charset="0"/>
               <a:cs typeface="Courier New" panose="02070309020205020404" pitchFamily="49" charset="0"/>
             </a:endParaRPr>
           </a:p>
           <a:p>
             <a:r>
-              <a:rPr lang="de-CH" sz="900" dirty="0">
-                <a:latin typeface="Courier New" panose="02070309020205020404" pitchFamily="49" charset="0"/>
-                <a:cs typeface="Courier New" panose="02070309020205020404" pitchFamily="49" charset="0"/>
-              </a:rPr>
-              <a:t>       |     |  +-- ipv6-peer?        </a:t>
-            </a:r>
-            <a:r>
-              <a:rPr lang="de-CH" sz="900" dirty="0" err="1">
+              <a:rPr lang="en-US" sz="900" noProof="0" dirty="0">
+                <a:latin typeface="Courier New" panose="02070309020205020404" pitchFamily="49" charset="0"/>
+                <a:cs typeface="Courier New" panose="02070309020205020404" pitchFamily="49" charset="0"/>
+              </a:rPr>
+              <a:t>       |     |  +-- post-policy?      </a:t>
+            </a:r>
+            <a:r>
+              <a:rPr lang="en-US" sz="900" noProof="0" dirty="0" err="1">
                 <a:latin typeface="Courier New" panose="02070309020205020404" pitchFamily="49" charset="0"/>
                 <a:cs typeface="Courier New" panose="02070309020205020404" pitchFamily="49" charset="0"/>
               </a:rPr>
               <a:t>boolean</a:t>
             </a:r>
-            <a:endParaRPr lang="de-CH" sz="900" dirty="0">
+            <a:endParaRPr lang="en-US" sz="900" noProof="0" dirty="0">
               <a:latin typeface="Courier New" panose="02070309020205020404" pitchFamily="49" charset="0"/>
               <a:cs typeface="Courier New" panose="02070309020205020404" pitchFamily="49" charset="0"/>
             </a:endParaRPr>
           </a:p>
           <a:p>
             <a:r>
-              <a:rPr lang="de-CH" sz="900" dirty="0">
-                <a:latin typeface="Courier New" panose="02070309020205020404" pitchFamily="49" charset="0"/>
-                <a:cs typeface="Courier New" panose="02070309020205020404" pitchFamily="49" charset="0"/>
-              </a:rPr>
-              <a:t>       |     |  +-- post-</a:t>
-            </a:r>
-            <a:r>
-              <a:rPr lang="de-CH" sz="900" dirty="0" err="1">
-                <a:latin typeface="Courier New" panose="02070309020205020404" pitchFamily="49" charset="0"/>
-                <a:cs typeface="Courier New" panose="02070309020205020404" pitchFamily="49" charset="0"/>
-              </a:rPr>
-              <a:t>policy</a:t>
-            </a:r>
-            <a:r>
-              <a:rPr lang="de-CH" sz="900" dirty="0">
-                <a:latin typeface="Courier New" panose="02070309020205020404" pitchFamily="49" charset="0"/>
-                <a:cs typeface="Courier New" panose="02070309020205020404" pitchFamily="49" charset="0"/>
-              </a:rPr>
-              <a:t>?      </a:t>
-            </a:r>
-            <a:r>
-              <a:rPr lang="de-CH" sz="900" dirty="0" err="1">
+              <a:rPr lang="en-US" sz="900" noProof="0" dirty="0">
+                <a:latin typeface="Courier New" panose="02070309020205020404" pitchFamily="49" charset="0"/>
+                <a:cs typeface="Courier New" panose="02070309020205020404" pitchFamily="49" charset="0"/>
+              </a:rPr>
+              <a:t>       |     |  +-- legacy-as-path?   </a:t>
+            </a:r>
+            <a:r>
+              <a:rPr lang="en-US" sz="900" noProof="0" dirty="0" err="1">
                 <a:latin typeface="Courier New" panose="02070309020205020404" pitchFamily="49" charset="0"/>
                 <a:cs typeface="Courier New" panose="02070309020205020404" pitchFamily="49" charset="0"/>
               </a:rPr>
               <a:t>boolean</a:t>
             </a:r>
-            <a:endParaRPr lang="de-CH" sz="900" dirty="0">
+            <a:endParaRPr lang="en-US" sz="900" noProof="0" dirty="0">
               <a:latin typeface="Courier New" panose="02070309020205020404" pitchFamily="49" charset="0"/>
               <a:cs typeface="Courier New" panose="02070309020205020404" pitchFamily="49" charset="0"/>
             </a:endParaRPr>
           </a:p>
           <a:p>
             <a:r>
-              <a:rPr lang="de-CH" sz="900" dirty="0">
-                <a:latin typeface="Courier New" panose="02070309020205020404" pitchFamily="49" charset="0"/>
-                <a:cs typeface="Courier New" panose="02070309020205020404" pitchFamily="49" charset="0"/>
-              </a:rPr>
-              <a:t>       |     |  +-- legacy-</a:t>
-            </a:r>
-            <a:r>
-              <a:rPr lang="de-CH" sz="900" dirty="0" err="1">
-                <a:latin typeface="Courier New" panose="02070309020205020404" pitchFamily="49" charset="0"/>
-                <a:cs typeface="Courier New" panose="02070309020205020404" pitchFamily="49" charset="0"/>
-              </a:rPr>
-              <a:t>as</a:t>
-            </a:r>
-            <a:r>
-              <a:rPr lang="de-CH" sz="900" dirty="0">
-                <a:latin typeface="Courier New" panose="02070309020205020404" pitchFamily="49" charset="0"/>
-                <a:cs typeface="Courier New" panose="02070309020205020404" pitchFamily="49" charset="0"/>
-              </a:rPr>
-              <a:t>-</a:t>
-            </a:r>
-            <a:r>
-              <a:rPr lang="de-CH" sz="900" dirty="0" err="1">
-                <a:latin typeface="Courier New" panose="02070309020205020404" pitchFamily="49" charset="0"/>
-                <a:cs typeface="Courier New" panose="02070309020205020404" pitchFamily="49" charset="0"/>
-              </a:rPr>
-              <a:t>path</a:t>
-            </a:r>
-            <a:r>
-              <a:rPr lang="de-CH" sz="900" dirty="0">
-                <a:latin typeface="Courier New" panose="02070309020205020404" pitchFamily="49" charset="0"/>
-                <a:cs typeface="Courier New" panose="02070309020205020404" pitchFamily="49" charset="0"/>
-              </a:rPr>
-              <a:t>?   </a:t>
-            </a:r>
-            <a:r>
-              <a:rPr lang="de-CH" sz="900" dirty="0" err="1">
+              <a:rPr lang="en-US" sz="900" noProof="0" dirty="0">
+                <a:latin typeface="Courier New" panose="02070309020205020404" pitchFamily="49" charset="0"/>
+                <a:cs typeface="Courier New" panose="02070309020205020404" pitchFamily="49" charset="0"/>
+              </a:rPr>
+              <a:t>       |     |  +-- adj-rib-out?      </a:t>
+            </a:r>
+            <a:r>
+              <a:rPr lang="en-US" sz="900" noProof="0" dirty="0" err="1">
                 <a:latin typeface="Courier New" panose="02070309020205020404" pitchFamily="49" charset="0"/>
                 <a:cs typeface="Courier New" panose="02070309020205020404" pitchFamily="49" charset="0"/>
               </a:rPr>
               <a:t>boolean</a:t>
             </a:r>
-            <a:endParaRPr lang="de-CH" sz="900" dirty="0">
+            <a:endParaRPr lang="en-US" sz="900" noProof="0" dirty="0">
               <a:latin typeface="Courier New" panose="02070309020205020404" pitchFamily="49" charset="0"/>
               <a:cs typeface="Courier New" panose="02070309020205020404" pitchFamily="49" charset="0"/>
             </a:endParaRPr>
           </a:p>
           <a:p>
             <a:r>
-              <a:rPr lang="de-CH" sz="900" dirty="0">
-                <a:latin typeface="Courier New" panose="02070309020205020404" pitchFamily="49" charset="0"/>
-                <a:cs typeface="Courier New" panose="02070309020205020404" pitchFamily="49" charset="0"/>
-              </a:rPr>
-              <a:t>       |     |  +-- </a:t>
-            </a:r>
-            <a:r>
-              <a:rPr lang="de-CH" sz="900" dirty="0" err="1">
-                <a:latin typeface="Courier New" panose="02070309020205020404" pitchFamily="49" charset="0"/>
-                <a:cs typeface="Courier New" panose="02070309020205020404" pitchFamily="49" charset="0"/>
-              </a:rPr>
-              <a:t>adj</a:t>
-            </a:r>
-            <a:r>
-              <a:rPr lang="de-CH" sz="900" dirty="0">
-                <a:latin typeface="Courier New" panose="02070309020205020404" pitchFamily="49" charset="0"/>
-                <a:cs typeface="Courier New" panose="02070309020205020404" pitchFamily="49" charset="0"/>
-              </a:rPr>
-              <a:t>-</a:t>
-            </a:r>
-            <a:r>
-              <a:rPr lang="de-CH" sz="900" dirty="0" err="1">
-                <a:latin typeface="Courier New" panose="02070309020205020404" pitchFamily="49" charset="0"/>
-                <a:cs typeface="Courier New" panose="02070309020205020404" pitchFamily="49" charset="0"/>
-              </a:rPr>
-              <a:t>rib</a:t>
-            </a:r>
-            <a:r>
-              <a:rPr lang="de-CH" sz="900" dirty="0">
-                <a:latin typeface="Courier New" panose="02070309020205020404" pitchFamily="49" charset="0"/>
-                <a:cs typeface="Courier New" panose="02070309020205020404" pitchFamily="49" charset="0"/>
-              </a:rPr>
-              <a:t>-out?      </a:t>
-            </a:r>
-            <a:r>
-              <a:rPr lang="de-CH" sz="900" dirty="0" err="1">
+              <a:rPr lang="en-US" sz="900" noProof="0" dirty="0">
+                <a:latin typeface="Courier New" panose="02070309020205020404" pitchFamily="49" charset="0"/>
+                <a:cs typeface="Courier New" panose="02070309020205020404" pitchFamily="49" charset="0"/>
+              </a:rPr>
+              <a:t>       |     |  +-- filtered?         </a:t>
+            </a:r>
+            <a:r>
+              <a:rPr lang="en-US" sz="900" noProof="0" dirty="0" err="1">
                 <a:latin typeface="Courier New" panose="02070309020205020404" pitchFamily="49" charset="0"/>
                 <a:cs typeface="Courier New" panose="02070309020205020404" pitchFamily="49" charset="0"/>
               </a:rPr>
               <a:t>boolean</a:t>
             </a:r>
-            <a:endParaRPr lang="de-CH" sz="900" dirty="0">
+            <a:endParaRPr lang="en-US" sz="900" noProof="0" dirty="0">
               <a:latin typeface="Courier New" panose="02070309020205020404" pitchFamily="49" charset="0"/>
               <a:cs typeface="Courier New" panose="02070309020205020404" pitchFamily="49" charset="0"/>
             </a:endParaRPr>
           </a:p>
           <a:p>
             <a:r>
-              <a:rPr lang="de-CH" sz="900" dirty="0">
-                <a:latin typeface="Courier New" panose="02070309020205020404" pitchFamily="49" charset="0"/>
-                <a:cs typeface="Courier New" panose="02070309020205020404" pitchFamily="49" charset="0"/>
-              </a:rPr>
-              <a:t>       |     |  +-- </a:t>
-            </a:r>
-            <a:r>
-              <a:rPr lang="de-CH" sz="900" dirty="0" err="1">
-                <a:latin typeface="Courier New" panose="02070309020205020404" pitchFamily="49" charset="0"/>
-                <a:cs typeface="Courier New" panose="02070309020205020404" pitchFamily="49" charset="0"/>
-              </a:rPr>
-              <a:t>filtered</a:t>
-            </a:r>
-            <a:r>
-              <a:rPr lang="de-CH" sz="900" dirty="0">
-                <a:latin typeface="Courier New" panose="02070309020205020404" pitchFamily="49" charset="0"/>
-                <a:cs typeface="Courier New" panose="02070309020205020404" pitchFamily="49" charset="0"/>
-              </a:rPr>
-              <a:t>?         </a:t>
-            </a:r>
-            <a:r>
-              <a:rPr lang="de-CH" sz="900" dirty="0" err="1">
-                <a:latin typeface="Courier New" panose="02070309020205020404" pitchFamily="49" charset="0"/>
-                <a:cs typeface="Courier New" panose="02070309020205020404" pitchFamily="49" charset="0"/>
-              </a:rPr>
-              <a:t>boolean</a:t>
-            </a:r>
-            <a:endParaRPr lang="de-CH" sz="900" dirty="0">
+              <a:rPr lang="en-US" sz="900" noProof="0" dirty="0">
+                <a:latin typeface="Courier New" panose="02070309020205020404" pitchFamily="49" charset="0"/>
+                <a:cs typeface="Courier New" panose="02070309020205020404" pitchFamily="49" charset="0"/>
+              </a:rPr>
+              <a:t>       |     +-- peer-distinguisher    </a:t>
+            </a:r>
+            <a:r>
+              <a:rPr lang="en-US" sz="900" noProof="0" dirty="0" err="1">
+                <a:latin typeface="Courier New" panose="02070309020205020404" pitchFamily="49" charset="0"/>
+                <a:cs typeface="Courier New" panose="02070309020205020404" pitchFamily="49" charset="0"/>
+              </a:rPr>
+              <a:t>rt-types:route-distinguisher</a:t>
+            </a:r>
+            <a:endParaRPr lang="en-US" sz="900" noProof="0" dirty="0">
               <a:latin typeface="Courier New" panose="02070309020205020404" pitchFamily="49" charset="0"/>
               <a:cs typeface="Courier New" panose="02070309020205020404" pitchFamily="49" charset="0"/>
             </a:endParaRPr>
           </a:p>
           <a:p>
             <a:r>
-              <a:rPr lang="de-CH" sz="900" dirty="0">
-                <a:latin typeface="Courier New" panose="02070309020205020404" pitchFamily="49" charset="0"/>
-                <a:cs typeface="Courier New" panose="02070309020205020404" pitchFamily="49" charset="0"/>
-              </a:rPr>
-              <a:t>       |     +-- peer-</a:t>
-            </a:r>
-            <a:r>
-              <a:rPr lang="de-CH" sz="900" dirty="0" err="1">
-                <a:latin typeface="Courier New" panose="02070309020205020404" pitchFamily="49" charset="0"/>
-                <a:cs typeface="Courier New" panose="02070309020205020404" pitchFamily="49" charset="0"/>
-              </a:rPr>
-              <a:t>distinguisher</a:t>
-            </a:r>
-            <a:r>
-              <a:rPr lang="de-CH" sz="900" dirty="0">
-                <a:latin typeface="Courier New" panose="02070309020205020404" pitchFamily="49" charset="0"/>
-                <a:cs typeface="Courier New" panose="02070309020205020404" pitchFamily="49" charset="0"/>
-              </a:rPr>
-              <a:t>    </a:t>
-            </a:r>
-            <a:r>
-              <a:rPr lang="de-CH" sz="900" dirty="0" err="1">
-                <a:latin typeface="Courier New" panose="02070309020205020404" pitchFamily="49" charset="0"/>
-                <a:cs typeface="Courier New" panose="02070309020205020404" pitchFamily="49" charset="0"/>
-              </a:rPr>
-              <a:t>rt-types:route-distinguisher</a:t>
-            </a:r>
-            <a:endParaRPr lang="de-CH" sz="900" dirty="0">
+              <a:rPr lang="en-US" sz="900" noProof="0" dirty="0">
+                <a:latin typeface="Courier New" panose="02070309020205020404" pitchFamily="49" charset="0"/>
+                <a:cs typeface="Courier New" panose="02070309020205020404" pitchFamily="49" charset="0"/>
+              </a:rPr>
+              <a:t>       |     +-- peer-address          </a:t>
+            </a:r>
+            <a:r>
+              <a:rPr lang="en-US" sz="900" noProof="0" dirty="0" err="1">
+                <a:latin typeface="Courier New" panose="02070309020205020404" pitchFamily="49" charset="0"/>
+                <a:cs typeface="Courier New" panose="02070309020205020404" pitchFamily="49" charset="0"/>
+              </a:rPr>
+              <a:t>inet:ip-address</a:t>
+            </a:r>
+            <a:endParaRPr lang="en-US" sz="900" noProof="0" dirty="0">
               <a:latin typeface="Courier New" panose="02070309020205020404" pitchFamily="49" charset="0"/>
               <a:cs typeface="Courier New" panose="02070309020205020404" pitchFamily="49" charset="0"/>
             </a:endParaRPr>
           </a:p>
           <a:p>
             <a:r>
-              <a:rPr lang="de-CH" sz="900" dirty="0">
+              <a:rPr lang="en-US" sz="900" noProof="0" dirty="0">
+                <a:latin typeface="Courier New" panose="02070309020205020404" pitchFamily="49" charset="0"/>
+                <a:cs typeface="Courier New" panose="02070309020205020404" pitchFamily="49" charset="0"/>
+              </a:rPr>
+              <a:t>       |     +-- peer-as               uint32</a:t>
+            </a:r>
+          </a:p>
+          <a:p>
+            <a:r>
+              <a:rPr lang="en-US" sz="900" noProof="0" dirty="0">
                 <a:latin typeface="Courier New" panose="02070309020205020404" pitchFamily="49" charset="0"/>
                 <a:cs typeface="Courier New" panose="02070309020205020404" pitchFamily="49" charset="0"/>
               </a:rPr>
               <a:t>       |     +-- peer-</a:t>
             </a:r>
             <a:r>
-              <a:rPr lang="de-CH" sz="900" dirty="0" err="1">
-                <a:latin typeface="Courier New" panose="02070309020205020404" pitchFamily="49" charset="0"/>
-                <a:cs typeface="Courier New" panose="02070309020205020404" pitchFamily="49" charset="0"/>
-              </a:rPr>
-              <a:t>address</a:t>
-            </a:r>
-            <a:r>
-              <a:rPr lang="de-CH" sz="900" dirty="0">
-                <a:latin typeface="Courier New" panose="02070309020205020404" pitchFamily="49" charset="0"/>
-                <a:cs typeface="Courier New" panose="02070309020205020404" pitchFamily="49" charset="0"/>
-              </a:rPr>
-              <a:t>          </a:t>
-            </a:r>
-            <a:r>
-              <a:rPr lang="de-CH" sz="900" dirty="0" err="1">
-                <a:latin typeface="Courier New" panose="02070309020205020404" pitchFamily="49" charset="0"/>
-                <a:cs typeface="Courier New" panose="02070309020205020404" pitchFamily="49" charset="0"/>
-              </a:rPr>
-              <a:t>inet:ip-address</a:t>
-            </a:r>
-            <a:endParaRPr lang="de-CH" sz="900" dirty="0">
+              <a:rPr lang="en-US" sz="900" noProof="0" dirty="0" err="1">
+                <a:latin typeface="Courier New" panose="02070309020205020404" pitchFamily="49" charset="0"/>
+                <a:cs typeface="Courier New" panose="02070309020205020404" pitchFamily="49" charset="0"/>
+              </a:rPr>
+              <a:t>bgp</a:t>
+            </a:r>
+            <a:r>
+              <a:rPr lang="en-US" sz="900" noProof="0" dirty="0">
+                <a:latin typeface="Courier New" panose="02070309020205020404" pitchFamily="49" charset="0"/>
+                <a:cs typeface="Courier New" panose="02070309020205020404" pitchFamily="49" charset="0"/>
+              </a:rPr>
+              <a:t>-id           inet:ipv4-address</a:t>
+            </a:r>
+          </a:p>
+          <a:p>
+            <a:r>
+              <a:rPr lang="en-US" sz="900" noProof="0" dirty="0">
+                <a:latin typeface="Courier New" panose="02070309020205020404" pitchFamily="49" charset="0"/>
+                <a:cs typeface="Courier New" panose="02070309020205020404" pitchFamily="49" charset="0"/>
+              </a:rPr>
+              <a:t>       |     +-- timestamp?            </a:t>
+            </a:r>
+            <a:r>
+              <a:rPr lang="en-US" sz="900" noProof="0" dirty="0" err="1">
+                <a:latin typeface="Courier New" panose="02070309020205020404" pitchFamily="49" charset="0"/>
+                <a:cs typeface="Courier New" panose="02070309020205020404" pitchFamily="49" charset="0"/>
+              </a:rPr>
+              <a:t>yang:date-and-time</a:t>
+            </a:r>
+            <a:endParaRPr lang="en-US" sz="900" noProof="0" dirty="0">
               <a:latin typeface="Courier New" panose="02070309020205020404" pitchFamily="49" charset="0"/>
               <a:cs typeface="Courier New" panose="02070309020205020404" pitchFamily="49" charset="0"/>
             </a:endParaRPr>
           </a:p>
           <a:p>
             <a:r>
-              <a:rPr lang="de-CH" sz="900" dirty="0">
-                <a:latin typeface="Courier New" panose="02070309020205020404" pitchFamily="49" charset="0"/>
-                <a:cs typeface="Courier New" panose="02070309020205020404" pitchFamily="49" charset="0"/>
-              </a:rPr>
-              <a:t>       |     +-- peer-</a:t>
-            </a:r>
-            <a:r>
-              <a:rPr lang="de-CH" sz="900" dirty="0" err="1">
-                <a:latin typeface="Courier New" panose="02070309020205020404" pitchFamily="49" charset="0"/>
-                <a:cs typeface="Courier New" panose="02070309020205020404" pitchFamily="49" charset="0"/>
-              </a:rPr>
-              <a:t>as</a:t>
-            </a:r>
-            <a:r>
-              <a:rPr lang="de-CH" sz="900" dirty="0">
-                <a:latin typeface="Courier New" panose="02070309020205020404" pitchFamily="49" charset="0"/>
-                <a:cs typeface="Courier New" panose="02070309020205020404" pitchFamily="49" charset="0"/>
-              </a:rPr>
-              <a:t>               uint32</a:t>
-            </a:r>
-          </a:p>
-          <a:p>
-            <a:r>
-              <a:rPr lang="de-CH" sz="900" dirty="0">
-                <a:latin typeface="Courier New" panose="02070309020205020404" pitchFamily="49" charset="0"/>
-                <a:cs typeface="Courier New" panose="02070309020205020404" pitchFamily="49" charset="0"/>
-              </a:rPr>
-              <a:t>       |     +-- peer-</a:t>
-            </a:r>
-            <a:r>
-              <a:rPr lang="de-CH" sz="900" dirty="0" err="1">
-                <a:latin typeface="Courier New" panose="02070309020205020404" pitchFamily="49" charset="0"/>
-                <a:cs typeface="Courier New" panose="02070309020205020404" pitchFamily="49" charset="0"/>
-              </a:rPr>
-              <a:t>bgp</a:t>
-            </a:r>
-            <a:r>
-              <a:rPr lang="de-CH" sz="900" dirty="0">
+              <a:rPr lang="en-US" sz="900" noProof="0" dirty="0">
+                <a:latin typeface="Courier New" panose="02070309020205020404" pitchFamily="49" charset="0"/>
+                <a:cs typeface="Courier New" panose="02070309020205020404" pitchFamily="49" charset="0"/>
+              </a:rPr>
+              <a:t>       |     +-- </a:t>
+            </a:r>
+            <a:r>
+              <a:rPr lang="en-US" sz="900" noProof="0" dirty="0" err="1">
+                <a:latin typeface="Courier New" panose="02070309020205020404" pitchFamily="49" charset="0"/>
+                <a:cs typeface="Courier New" panose="02070309020205020404" pitchFamily="49" charset="0"/>
+              </a:rPr>
+              <a:t>afi</a:t>
+            </a:r>
+            <a:r>
+              <a:rPr lang="en-US" sz="900" noProof="0" dirty="0">
                 <a:latin typeface="Courier New" panose="02070309020205020404" pitchFamily="49" charset="0"/>
                 <a:cs typeface="Courier New" panose="02070309020205020404" pitchFamily="49" charset="0"/>
               </a:rPr>
               <a:t>-</a:t>
             </a:r>
             <a:r>
-              <a:rPr lang="de-CH" sz="900" dirty="0" err="1">
-                <a:latin typeface="Courier New" panose="02070309020205020404" pitchFamily="49" charset="0"/>
-                <a:cs typeface="Courier New" panose="02070309020205020404" pitchFamily="49" charset="0"/>
-              </a:rPr>
-              <a:t>id</a:t>
-            </a:r>
-            <a:r>
-              <a:rPr lang="de-CH" sz="900" dirty="0">
-                <a:latin typeface="Courier New" panose="02070309020205020404" pitchFamily="49" charset="0"/>
-                <a:cs typeface="Courier New" panose="02070309020205020404" pitchFamily="49" charset="0"/>
-              </a:rPr>
-              <a:t>           inet:ipv4-address</a:t>
-            </a:r>
-          </a:p>
-          <a:p>
-            <a:r>
-              <a:rPr lang="de-CH" sz="900" dirty="0">
-                <a:latin typeface="Courier New" panose="02070309020205020404" pitchFamily="49" charset="0"/>
-                <a:cs typeface="Courier New" panose="02070309020205020404" pitchFamily="49" charset="0"/>
-              </a:rPr>
-              <a:t>       |     +-- </a:t>
-            </a:r>
-            <a:r>
-              <a:rPr lang="de-CH" sz="900" dirty="0" err="1">
-                <a:latin typeface="Courier New" panose="02070309020205020404" pitchFamily="49" charset="0"/>
-                <a:cs typeface="Courier New" panose="02070309020205020404" pitchFamily="49" charset="0"/>
-              </a:rPr>
-              <a:t>timestamp</a:t>
-            </a:r>
-            <a:r>
-              <a:rPr lang="de-CH" sz="900" dirty="0">
-                <a:latin typeface="Courier New" panose="02070309020205020404" pitchFamily="49" charset="0"/>
-                <a:cs typeface="Courier New" panose="02070309020205020404" pitchFamily="49" charset="0"/>
-              </a:rPr>
-              <a:t>?            </a:t>
-            </a:r>
-            <a:r>
-              <a:rPr lang="de-CH" sz="900" dirty="0" err="1">
-                <a:latin typeface="Courier New" panose="02070309020205020404" pitchFamily="49" charset="0"/>
-                <a:cs typeface="Courier New" panose="02070309020205020404" pitchFamily="49" charset="0"/>
-              </a:rPr>
-              <a:t>yang:date-and-time</a:t>
-            </a:r>
-            <a:endParaRPr lang="de-CH" sz="900" dirty="0">
+              <a:rPr lang="en-US" sz="900" noProof="0" dirty="0" err="1">
+                <a:latin typeface="Courier New" panose="02070309020205020404" pitchFamily="49" charset="0"/>
+                <a:cs typeface="Courier New" panose="02070309020205020404" pitchFamily="49" charset="0"/>
+              </a:rPr>
+              <a:t>safi</a:t>
+            </a:r>
+            <a:r>
+              <a:rPr lang="en-US" sz="900" noProof="0" dirty="0">
+                <a:latin typeface="Courier New" panose="02070309020205020404" pitchFamily="49" charset="0"/>
+                <a:cs typeface="Courier New" panose="02070309020205020404" pitchFamily="49" charset="0"/>
+              </a:rPr>
+              <a:t>-type         </a:t>
+            </a:r>
+            <a:r>
+              <a:rPr lang="en-US" sz="900" noProof="0" dirty="0" err="1">
+                <a:latin typeface="Courier New" panose="02070309020205020404" pitchFamily="49" charset="0"/>
+                <a:cs typeface="Courier New" panose="02070309020205020404" pitchFamily="49" charset="0"/>
+              </a:rPr>
+              <a:t>identityref</a:t>
+            </a:r>
+            <a:endParaRPr lang="en-US" sz="900" noProof="0" dirty="0">
               <a:latin typeface="Courier New" panose="02070309020205020404" pitchFamily="49" charset="0"/>
               <a:cs typeface="Courier New" panose="02070309020205020404" pitchFamily="49" charset="0"/>
             </a:endParaRPr>
           </a:p>
           <a:p>
             <a:r>
-              <a:rPr lang="de-CH" sz="900" dirty="0">
-                <a:latin typeface="Courier New" panose="02070309020205020404" pitchFamily="49" charset="0"/>
-                <a:cs typeface="Courier New" panose="02070309020205020404" pitchFamily="49" charset="0"/>
-              </a:rPr>
-              <a:t>       |     +-- </a:t>
-            </a:r>
-            <a:r>
-              <a:rPr lang="de-CH" sz="900" dirty="0" err="1">
-                <a:latin typeface="Courier New" panose="02070309020205020404" pitchFamily="49" charset="0"/>
-                <a:cs typeface="Courier New" panose="02070309020205020404" pitchFamily="49" charset="0"/>
-              </a:rPr>
-              <a:t>afi</a:t>
-            </a:r>
-            <a:r>
-              <a:rPr lang="de-CH" sz="900" dirty="0">
-                <a:latin typeface="Courier New" panose="02070309020205020404" pitchFamily="49" charset="0"/>
-                <a:cs typeface="Courier New" panose="02070309020205020404" pitchFamily="49" charset="0"/>
-              </a:rPr>
-              <a:t>-</a:t>
-            </a:r>
-            <a:r>
-              <a:rPr lang="de-CH" sz="900" dirty="0" err="1">
-                <a:latin typeface="Courier New" panose="02070309020205020404" pitchFamily="49" charset="0"/>
-                <a:cs typeface="Courier New" panose="02070309020205020404" pitchFamily="49" charset="0"/>
-              </a:rPr>
-              <a:t>safi</a:t>
-            </a:r>
-            <a:r>
-              <a:rPr lang="de-CH" sz="900" dirty="0">
-                <a:latin typeface="Courier New" panose="02070309020205020404" pitchFamily="49" charset="0"/>
-                <a:cs typeface="Courier New" panose="02070309020205020404" pitchFamily="49" charset="0"/>
-              </a:rPr>
-              <a:t>-type         </a:t>
-            </a:r>
-            <a:r>
-              <a:rPr lang="de-CH" sz="900" dirty="0" err="1">
-                <a:latin typeface="Courier New" panose="02070309020205020404" pitchFamily="49" charset="0"/>
-                <a:cs typeface="Courier New" panose="02070309020205020404" pitchFamily="49" charset="0"/>
-              </a:rPr>
-              <a:t>identityref</a:t>
-            </a:r>
-            <a:endParaRPr lang="de-CH" sz="900" dirty="0">
+              <a:rPr lang="en-US" sz="900" noProof="0" dirty="0">
+                <a:latin typeface="Courier New" panose="02070309020205020404" pitchFamily="49" charset="0"/>
+                <a:cs typeface="Courier New" panose="02070309020205020404" pitchFamily="49" charset="0"/>
+              </a:rPr>
+              <a:t>       |     +-- rib-entry</a:t>
+            </a:r>
+          </a:p>
+          <a:p>
+            <a:endParaRPr lang="en-US" sz="900" noProof="0" dirty="0">
               <a:latin typeface="Courier New" panose="02070309020205020404" pitchFamily="49" charset="0"/>
               <a:cs typeface="Courier New" panose="02070309020205020404" pitchFamily="49" charset="0"/>
             </a:endParaRPr>
           </a:p>
           <a:p>
             <a:r>
-              <a:rPr lang="de-CH" sz="900" dirty="0">
+              <a:rPr lang="en-US" sz="900" noProof="0" dirty="0">
+                <a:highlight>
+                  <a:srgbClr val="FFFF00"/>
+                </a:highlight>
                 <a:latin typeface="Courier New" panose="02070309020205020404" pitchFamily="49" charset="0"/>
                 <a:cs typeface="Courier New" panose="02070309020205020404" pitchFamily="49" charset="0"/>
               </a:rPr>
               <a:t>       |     +-- </a:t>
             </a:r>
             <a:r>
-              <a:rPr lang="de-CH" sz="900" dirty="0" err="1">
-                <a:latin typeface="Courier New" panose="02070309020205020404" pitchFamily="49" charset="0"/>
-                <a:cs typeface="Courier New" panose="02070309020205020404" pitchFamily="49" charset="0"/>
-              </a:rPr>
-              <a:t>rib-entry</a:t>
-            </a:r>
-            <a:endParaRPr lang="de-CH" sz="900" dirty="0">
-              <a:latin typeface="Courier New" panose="02070309020205020404" pitchFamily="49" charset="0"/>
-              <a:cs typeface="Courier New" panose="02070309020205020404" pitchFamily="49" charset="0"/>
-            </a:endParaRPr>
-          </a:p>
-          <a:p>
-            <a:endParaRPr lang="de-CH" sz="900" dirty="0">
-              <a:latin typeface="Courier New" panose="02070309020205020404" pitchFamily="49" charset="0"/>
-              <a:cs typeface="Courier New" panose="02070309020205020404" pitchFamily="49" charset="0"/>
-            </a:endParaRPr>
-          </a:p>
-          <a:p>
-            <a:r>
-              <a:rPr lang="de-CH" sz="900" dirty="0">
-                <a:highlight>
-                  <a:srgbClr val="FFFF00"/>
-                </a:highlight>
-                <a:latin typeface="Courier New" panose="02070309020205020404" pitchFamily="49" charset="0"/>
-                <a:cs typeface="Courier New" panose="02070309020205020404" pitchFamily="49" charset="0"/>
-              </a:rPr>
-              <a:t>       |     +-- </a:t>
-            </a:r>
-            <a:r>
-              <a:rPr lang="de-CH" sz="900" dirty="0" err="1">
+              <a:rPr lang="en-US" sz="900" noProof="0" dirty="0" err="1">
                 <a:highlight>
                   <a:srgbClr val="FFFF00"/>
                 </a:highlight>
@@ -11947,46 +11364,62 @@
               <a:t>vrf</a:t>
             </a:r>
             <a:r>
-              <a:rPr lang="de-CH" sz="900" dirty="0">
-                <a:highlight>
-                  <a:srgbClr val="FFFF00"/>
-                </a:highlight>
-                <a:latin typeface="Courier New" panose="02070309020205020404" pitchFamily="49" charset="0"/>
-                <a:cs typeface="Courier New" panose="02070309020205020404" pitchFamily="49" charset="0"/>
-              </a:rPr>
-              <a:t>-</a:t>
-            </a:r>
-            <a:r>
-              <a:rPr lang="de-CH" sz="900" dirty="0" err="1">
-                <a:highlight>
-                  <a:srgbClr val="FFFF00"/>
-                </a:highlight>
-                <a:latin typeface="Courier New" panose="02070309020205020404" pitchFamily="49" charset="0"/>
-                <a:cs typeface="Courier New" panose="02070309020205020404" pitchFamily="49" charset="0"/>
-              </a:rPr>
-              <a:t>table</a:t>
-            </a:r>
-            <a:r>
-              <a:rPr lang="de-CH" sz="900" dirty="0">
-                <a:highlight>
-                  <a:srgbClr val="FFFF00"/>
-                </a:highlight>
-                <a:latin typeface="Courier New" panose="02070309020205020404" pitchFamily="49" charset="0"/>
-                <a:cs typeface="Courier New" panose="02070309020205020404" pitchFamily="49" charset="0"/>
-              </a:rPr>
-              <a:t>-name?       </a:t>
-            </a:r>
-            <a:r>
-              <a:rPr lang="de-CH" sz="900" dirty="0" err="1">
-                <a:highlight>
-                  <a:srgbClr val="FFFF00"/>
-                </a:highlight>
-                <a:latin typeface="Courier New" panose="02070309020205020404" pitchFamily="49" charset="0"/>
-                <a:cs typeface="Courier New" panose="02070309020205020404" pitchFamily="49" charset="0"/>
-              </a:rPr>
-              <a:t>string</a:t>
-            </a:r>
-            <a:endParaRPr lang="de-CH" sz="900" dirty="0">
+              <a:rPr lang="en-US" sz="900" noProof="0" dirty="0">
+                <a:highlight>
+                  <a:srgbClr val="FFFF00"/>
+                </a:highlight>
+                <a:latin typeface="Courier New" panose="02070309020205020404" pitchFamily="49" charset="0"/>
+                <a:cs typeface="Courier New" panose="02070309020205020404" pitchFamily="49" charset="0"/>
+              </a:rPr>
+              <a:t>-table-name?       string</a:t>
+            </a:r>
+          </a:p>
+          <a:p>
+            <a:r>
+              <a:rPr lang="en-US" sz="900" noProof="0" dirty="0">
+                <a:highlight>
+                  <a:srgbClr val="FFFF00"/>
+                </a:highlight>
+                <a:latin typeface="Courier New" panose="02070309020205020404" pitchFamily="49" charset="0"/>
+                <a:cs typeface="Courier New" panose="02070309020205020404" pitchFamily="49" charset="0"/>
+              </a:rPr>
+              <a:t>       |     +-- sequence-number?      uint64</a:t>
+            </a:r>
+          </a:p>
+          <a:p>
+            <a:r>
+              <a:rPr lang="en-US" sz="900" noProof="0" dirty="0">
+                <a:highlight>
+                  <a:srgbClr val="FFFF00"/>
+                </a:highlight>
+                <a:latin typeface="Courier New" panose="02070309020205020404" pitchFamily="49" charset="0"/>
+                <a:cs typeface="Courier New" panose="02070309020205020404" pitchFamily="49" charset="0"/>
+              </a:rPr>
+              <a:t>       |     +-- timestamps* [timestamp-type]</a:t>
+            </a:r>
+          </a:p>
+          <a:p>
+            <a:r>
+              <a:rPr lang="en-US" sz="900" noProof="0" dirty="0">
+                <a:highlight>
+                  <a:srgbClr val="FFFF00"/>
+                </a:highlight>
+                <a:latin typeface="Courier New" panose="02070309020205020404" pitchFamily="49" charset="0"/>
+                <a:cs typeface="Courier New" panose="02070309020205020404" pitchFamily="49" charset="0"/>
+              </a:rPr>
+              <a:t>       |     |  +-- timestamp-type    </a:t>
+            </a:r>
+            <a:r>
+              <a:rPr lang="en-US" sz="900" noProof="0" dirty="0" err="1">
+                <a:highlight>
+                  <a:srgbClr val="FFFF00"/>
+                </a:highlight>
+                <a:latin typeface="Courier New" panose="02070309020205020404" pitchFamily="49" charset="0"/>
+                <a:cs typeface="Courier New" panose="02070309020205020404" pitchFamily="49" charset="0"/>
+              </a:rPr>
+              <a:t>timestamp-type</a:t>
+            </a:r>
+            <a:endParaRPr lang="en-US" sz="900" noProof="0" dirty="0">
               <a:highlight>
                 <a:srgbClr val="FFFF00"/>
               </a:highlight>
@@ -11996,173 +11429,17 @@
           </a:p>
           <a:p>
             <a:r>
-              <a:rPr lang="de-CH" sz="900" dirty="0">
-                <a:highlight>
-                  <a:srgbClr val="FFFF00"/>
-                </a:highlight>
-                <a:latin typeface="Courier New" panose="02070309020205020404" pitchFamily="49" charset="0"/>
-                <a:cs typeface="Courier New" panose="02070309020205020404" pitchFamily="49" charset="0"/>
-              </a:rPr>
-              <a:t>       |     +-- </a:t>
-            </a:r>
-            <a:r>
-              <a:rPr lang="de-CH" sz="900" dirty="0" err="1">
-                <a:highlight>
-                  <a:srgbClr val="FFFF00"/>
-                </a:highlight>
-                <a:latin typeface="Courier New" panose="02070309020205020404" pitchFamily="49" charset="0"/>
-                <a:cs typeface="Courier New" panose="02070309020205020404" pitchFamily="49" charset="0"/>
-              </a:rPr>
-              <a:t>sequence-number</a:t>
-            </a:r>
-            <a:r>
-              <a:rPr lang="de-CH" sz="900" dirty="0">
-                <a:highlight>
-                  <a:srgbClr val="FFFF00"/>
-                </a:highlight>
-                <a:latin typeface="Courier New" panose="02070309020205020404" pitchFamily="49" charset="0"/>
-                <a:cs typeface="Courier New" panose="02070309020205020404" pitchFamily="49" charset="0"/>
-              </a:rPr>
-              <a:t>?      uint64</a:t>
-            </a:r>
-          </a:p>
-          <a:p>
-            <a:r>
-              <a:rPr lang="de-CH" sz="900" dirty="0">
-                <a:highlight>
-                  <a:srgbClr val="FFFF00"/>
-                </a:highlight>
-                <a:latin typeface="Courier New" panose="02070309020205020404" pitchFamily="49" charset="0"/>
-                <a:cs typeface="Courier New" panose="02070309020205020404" pitchFamily="49" charset="0"/>
-              </a:rPr>
-              <a:t>       |     +-- </a:t>
-            </a:r>
-            <a:r>
-              <a:rPr lang="de-CH" sz="900" dirty="0" err="1">
-                <a:highlight>
-                  <a:srgbClr val="FFFF00"/>
-                </a:highlight>
-                <a:latin typeface="Courier New" panose="02070309020205020404" pitchFamily="49" charset="0"/>
-                <a:cs typeface="Courier New" panose="02070309020205020404" pitchFamily="49" charset="0"/>
-              </a:rPr>
-              <a:t>timestamps</a:t>
-            </a:r>
-            <a:r>
-              <a:rPr lang="de-CH" sz="900" dirty="0">
-                <a:highlight>
-                  <a:srgbClr val="FFFF00"/>
-                </a:highlight>
-                <a:latin typeface="Courier New" panose="02070309020205020404" pitchFamily="49" charset="0"/>
-                <a:cs typeface="Courier New" panose="02070309020205020404" pitchFamily="49" charset="0"/>
-              </a:rPr>
-              <a:t>* [</a:t>
-            </a:r>
-            <a:r>
-              <a:rPr lang="de-CH" sz="900" dirty="0" err="1">
-                <a:highlight>
-                  <a:srgbClr val="FFFF00"/>
-                </a:highlight>
-                <a:latin typeface="Courier New" panose="02070309020205020404" pitchFamily="49" charset="0"/>
-                <a:cs typeface="Courier New" panose="02070309020205020404" pitchFamily="49" charset="0"/>
-              </a:rPr>
-              <a:t>timestamp</a:t>
-            </a:r>
-            <a:r>
-              <a:rPr lang="de-CH" sz="900" dirty="0">
-                <a:highlight>
-                  <a:srgbClr val="FFFF00"/>
-                </a:highlight>
-                <a:latin typeface="Courier New" panose="02070309020205020404" pitchFamily="49" charset="0"/>
-                <a:cs typeface="Courier New" panose="02070309020205020404" pitchFamily="49" charset="0"/>
-              </a:rPr>
-              <a:t>-type]</a:t>
-            </a:r>
-          </a:p>
-          <a:p>
-            <a:r>
-              <a:rPr lang="de-CH" sz="900" dirty="0">
-                <a:highlight>
-                  <a:srgbClr val="FFFF00"/>
-                </a:highlight>
-                <a:latin typeface="Courier New" panose="02070309020205020404" pitchFamily="49" charset="0"/>
-                <a:cs typeface="Courier New" panose="02070309020205020404" pitchFamily="49" charset="0"/>
-              </a:rPr>
-              <a:t>       |     |  +-- </a:t>
-            </a:r>
-            <a:r>
-              <a:rPr lang="de-CH" sz="900" dirty="0" err="1">
-                <a:highlight>
-                  <a:srgbClr val="FFFF00"/>
-                </a:highlight>
-                <a:latin typeface="Courier New" panose="02070309020205020404" pitchFamily="49" charset="0"/>
-                <a:cs typeface="Courier New" panose="02070309020205020404" pitchFamily="49" charset="0"/>
-              </a:rPr>
-              <a:t>timestamp</a:t>
-            </a:r>
-            <a:r>
-              <a:rPr lang="de-CH" sz="900" dirty="0">
-                <a:highlight>
-                  <a:srgbClr val="FFFF00"/>
-                </a:highlight>
-                <a:latin typeface="Courier New" panose="02070309020205020404" pitchFamily="49" charset="0"/>
-                <a:cs typeface="Courier New" panose="02070309020205020404" pitchFamily="49" charset="0"/>
-              </a:rPr>
-              <a:t>-type    </a:t>
-            </a:r>
-            <a:r>
-              <a:rPr lang="de-CH" sz="900" dirty="0" err="1">
-                <a:highlight>
-                  <a:srgbClr val="FFFF00"/>
-                </a:highlight>
-                <a:latin typeface="Courier New" panose="02070309020205020404" pitchFamily="49" charset="0"/>
-                <a:cs typeface="Courier New" panose="02070309020205020404" pitchFamily="49" charset="0"/>
-              </a:rPr>
-              <a:t>timestamp</a:t>
-            </a:r>
-            <a:r>
-              <a:rPr lang="de-CH" sz="900" dirty="0">
-                <a:highlight>
-                  <a:srgbClr val="FFFF00"/>
-                </a:highlight>
-                <a:latin typeface="Courier New" panose="02070309020205020404" pitchFamily="49" charset="0"/>
-                <a:cs typeface="Courier New" panose="02070309020205020404" pitchFamily="49" charset="0"/>
-              </a:rPr>
-              <a:t>-type</a:t>
-            </a:r>
-          </a:p>
-          <a:p>
-            <a:r>
-              <a:rPr lang="de-CH" sz="900" dirty="0">
-                <a:highlight>
-                  <a:srgbClr val="FFFF00"/>
-                </a:highlight>
-                <a:latin typeface="Courier New" panose="02070309020205020404" pitchFamily="49" charset="0"/>
-                <a:cs typeface="Courier New" panose="02070309020205020404" pitchFamily="49" charset="0"/>
-              </a:rPr>
-              <a:t>       |     |  +-- </a:t>
-            </a:r>
-            <a:r>
-              <a:rPr lang="de-CH" sz="900" dirty="0" err="1">
-                <a:highlight>
-                  <a:srgbClr val="FFFF00"/>
-                </a:highlight>
-                <a:latin typeface="Courier New" panose="02070309020205020404" pitchFamily="49" charset="0"/>
-                <a:cs typeface="Courier New" panose="02070309020205020404" pitchFamily="49" charset="0"/>
-              </a:rPr>
-              <a:t>timestamp</a:t>
-            </a:r>
-            <a:r>
-              <a:rPr lang="de-CH" sz="900" dirty="0">
-                <a:highlight>
-                  <a:srgbClr val="FFFF00"/>
-                </a:highlight>
-                <a:latin typeface="Courier New" panose="02070309020205020404" pitchFamily="49" charset="0"/>
-                <a:cs typeface="Courier New" panose="02070309020205020404" pitchFamily="49" charset="0"/>
-              </a:rPr>
-              <a:t>         </a:t>
-            </a:r>
-            <a:r>
-              <a:rPr lang="de-CH" sz="900" dirty="0" err="1">
+              <a:rPr lang="en-US" sz="900" noProof="0" dirty="0">
+                <a:highlight>
+                  <a:srgbClr val="FFFF00"/>
+                </a:highlight>
+                <a:latin typeface="Courier New" panose="02070309020205020404" pitchFamily="49" charset="0"/>
+                <a:cs typeface="Courier New" panose="02070309020205020404" pitchFamily="49" charset="0"/>
+              </a:rPr>
+              <a:t>       |     |  +-- timestamp         </a:t>
+            </a:r>
+            <a:r>
+              <a:rPr lang="en-US" sz="900" noProof="0" dirty="0" err="1">
                 <a:highlight>
                   <a:srgbClr val="FFFF00"/>
                 </a:highlight>
@@ -12171,7 +11448,7 @@
               </a:rPr>
               <a:t>yang:date-and-time</a:t>
             </a:r>
-            <a:endParaRPr lang="de-CH" sz="900" dirty="0">
+            <a:endParaRPr lang="en-US" sz="900" noProof="0" dirty="0">
               <a:highlight>
                 <a:srgbClr val="FFFF00"/>
               </a:highlight>
@@ -12181,39 +11458,19 @@
           </a:p>
           <a:p>
             <a:r>
-              <a:rPr lang="de-CH" sz="900" dirty="0">
-                <a:highlight>
-                  <a:srgbClr val="FFFF00"/>
-                </a:highlight>
-                <a:latin typeface="Courier New" panose="02070309020205020404" pitchFamily="49" charset="0"/>
-                <a:cs typeface="Courier New" panose="02070309020205020404" pitchFamily="49" charset="0"/>
-              </a:rPr>
-              <a:t>       |     +-- </a:t>
-            </a:r>
-            <a:r>
-              <a:rPr lang="de-CH" sz="900" dirty="0" err="1">
-                <a:highlight>
-                  <a:srgbClr val="FFFF00"/>
-                </a:highlight>
-                <a:latin typeface="Courier New" panose="02070309020205020404" pitchFamily="49" charset="0"/>
-                <a:cs typeface="Courier New" panose="02070309020205020404" pitchFamily="49" charset="0"/>
-              </a:rPr>
-              <a:t>extended-flags</a:t>
-            </a:r>
-            <a:r>
-              <a:rPr lang="de-CH" sz="900" dirty="0">
-                <a:highlight>
-                  <a:srgbClr val="FFFF00"/>
-                </a:highlight>
-                <a:latin typeface="Courier New" panose="02070309020205020404" pitchFamily="49" charset="0"/>
-                <a:cs typeface="Courier New" panose="02070309020205020404" pitchFamily="49" charset="0"/>
-              </a:rPr>
-              <a:t>!</a:t>
-            </a:r>
-          </a:p>
-          <a:p>
-            <a:r>
-              <a:rPr lang="de-CH" sz="900" dirty="0">
+              <a:rPr lang="en-US" sz="900" noProof="0" dirty="0">
+                <a:highlight>
+                  <a:srgbClr val="FFFF00"/>
+                </a:highlight>
+                <a:latin typeface="Courier New" panose="02070309020205020404" pitchFamily="49" charset="0"/>
+                <a:cs typeface="Courier New" panose="02070309020205020404" pitchFamily="49" charset="0"/>
+              </a:rPr>
+              <a:t>       |     +-- extended-flags!</a:t>
+            </a:r>
+          </a:p>
+          <a:p>
+            <a:r>
+              <a:rPr lang="en-US" sz="900" noProof="0" dirty="0">
                 <a:highlight>
                   <a:srgbClr val="FFFF00"/>
                 </a:highlight>
@@ -12223,7 +11480,7 @@
               <a:t>       |        +-- ipv6-peer?        </a:t>
             </a:r>
             <a:r>
-              <a:rPr lang="de-CH" sz="900" dirty="0" err="1">
+              <a:rPr lang="en-US" sz="900" noProof="0" dirty="0" err="1">
                 <a:highlight>
                   <a:srgbClr val="FFFF00"/>
                 </a:highlight>
@@ -12232,7 +11489,7 @@
               </a:rPr>
               <a:t>boolean</a:t>
             </a:r>
-            <a:endParaRPr lang="de-CH" sz="900" dirty="0">
+            <a:endParaRPr lang="en-US" sz="900" noProof="0" dirty="0">
               <a:highlight>
                 <a:srgbClr val="FFFF00"/>
               </a:highlight>
@@ -12242,37 +11499,17 @@
           </a:p>
           <a:p>
             <a:r>
-              <a:rPr lang="de-CH" sz="900" dirty="0">
-                <a:highlight>
-                  <a:srgbClr val="FFFF00"/>
-                </a:highlight>
-                <a:latin typeface="Courier New" panose="02070309020205020404" pitchFamily="49" charset="0"/>
-                <a:cs typeface="Courier New" panose="02070309020205020404" pitchFamily="49" charset="0"/>
-              </a:rPr>
-              <a:t>       |        +-- post-</a:t>
-            </a:r>
-            <a:r>
-              <a:rPr lang="de-CH" sz="900" dirty="0" err="1">
-                <a:highlight>
-                  <a:srgbClr val="FFFF00"/>
-                </a:highlight>
-                <a:latin typeface="Courier New" panose="02070309020205020404" pitchFamily="49" charset="0"/>
-                <a:cs typeface="Courier New" panose="02070309020205020404" pitchFamily="49" charset="0"/>
-              </a:rPr>
-              <a:t>policy</a:t>
-            </a:r>
-            <a:r>
-              <a:rPr lang="de-CH" sz="900" dirty="0">
-                <a:highlight>
-                  <a:srgbClr val="FFFF00"/>
-                </a:highlight>
-                <a:latin typeface="Courier New" panose="02070309020205020404" pitchFamily="49" charset="0"/>
-                <a:cs typeface="Courier New" panose="02070309020205020404" pitchFamily="49" charset="0"/>
-              </a:rPr>
-              <a:t>?      </a:t>
-            </a:r>
-            <a:r>
-              <a:rPr lang="de-CH" sz="900" dirty="0" err="1">
+              <a:rPr lang="en-US" sz="900" noProof="0" dirty="0">
+                <a:highlight>
+                  <a:srgbClr val="FFFF00"/>
+                </a:highlight>
+                <a:latin typeface="Courier New" panose="02070309020205020404" pitchFamily="49" charset="0"/>
+                <a:cs typeface="Courier New" panose="02070309020205020404" pitchFamily="49" charset="0"/>
+              </a:rPr>
+              <a:t>       |        +-- post-policy?      </a:t>
+            </a:r>
+            <a:r>
+              <a:rPr lang="en-US" sz="900" noProof="0" dirty="0" err="1">
                 <a:highlight>
                   <a:srgbClr val="FFFF00"/>
                 </a:highlight>
@@ -12281,7 +11518,7 @@
               </a:rPr>
               <a:t>boolean</a:t>
             </a:r>
-            <a:endParaRPr lang="de-CH" sz="900" dirty="0">
+            <a:endParaRPr lang="en-US" sz="900" noProof="0" dirty="0">
               <a:highlight>
                 <a:srgbClr val="FFFF00"/>
               </a:highlight>
@@ -12291,57 +11528,17 @@
           </a:p>
           <a:p>
             <a:r>
-              <a:rPr lang="de-CH" sz="900" dirty="0">
-                <a:highlight>
-                  <a:srgbClr val="FFFF00"/>
-                </a:highlight>
-                <a:latin typeface="Courier New" panose="02070309020205020404" pitchFamily="49" charset="0"/>
-                <a:cs typeface="Courier New" panose="02070309020205020404" pitchFamily="49" charset="0"/>
-              </a:rPr>
-              <a:t>       |        +-- legacy-</a:t>
-            </a:r>
-            <a:r>
-              <a:rPr lang="de-CH" sz="900" dirty="0" err="1">
-                <a:highlight>
-                  <a:srgbClr val="FFFF00"/>
-                </a:highlight>
-                <a:latin typeface="Courier New" panose="02070309020205020404" pitchFamily="49" charset="0"/>
-                <a:cs typeface="Courier New" panose="02070309020205020404" pitchFamily="49" charset="0"/>
-              </a:rPr>
-              <a:t>as</a:t>
-            </a:r>
-            <a:r>
-              <a:rPr lang="de-CH" sz="900" dirty="0">
-                <a:highlight>
-                  <a:srgbClr val="FFFF00"/>
-                </a:highlight>
-                <a:latin typeface="Courier New" panose="02070309020205020404" pitchFamily="49" charset="0"/>
-                <a:cs typeface="Courier New" panose="02070309020205020404" pitchFamily="49" charset="0"/>
-              </a:rPr>
-              <a:t>-</a:t>
-            </a:r>
-            <a:r>
-              <a:rPr lang="de-CH" sz="900" dirty="0" err="1">
-                <a:highlight>
-                  <a:srgbClr val="FFFF00"/>
-                </a:highlight>
-                <a:latin typeface="Courier New" panose="02070309020205020404" pitchFamily="49" charset="0"/>
-                <a:cs typeface="Courier New" panose="02070309020205020404" pitchFamily="49" charset="0"/>
-              </a:rPr>
-              <a:t>path</a:t>
-            </a:r>
-            <a:r>
-              <a:rPr lang="de-CH" sz="900" dirty="0">
-                <a:highlight>
-                  <a:srgbClr val="FFFF00"/>
-                </a:highlight>
-                <a:latin typeface="Courier New" panose="02070309020205020404" pitchFamily="49" charset="0"/>
-                <a:cs typeface="Courier New" panose="02070309020205020404" pitchFamily="49" charset="0"/>
-              </a:rPr>
-              <a:t>?   </a:t>
-            </a:r>
-            <a:r>
-              <a:rPr lang="de-CH" sz="900" dirty="0" err="1">
+              <a:rPr lang="en-US" sz="900" noProof="0" dirty="0">
+                <a:highlight>
+                  <a:srgbClr val="FFFF00"/>
+                </a:highlight>
+                <a:latin typeface="Courier New" panose="02070309020205020404" pitchFamily="49" charset="0"/>
+                <a:cs typeface="Courier New" panose="02070309020205020404" pitchFamily="49" charset="0"/>
+              </a:rPr>
+              <a:t>       |        +-- legacy-as-path?   </a:t>
+            </a:r>
+            <a:r>
+              <a:rPr lang="en-US" sz="900" noProof="0" dirty="0" err="1">
                 <a:highlight>
                   <a:srgbClr val="FFFF00"/>
                 </a:highlight>
@@ -12350,7 +11547,7 @@
               </a:rPr>
               <a:t>boolean</a:t>
             </a:r>
-            <a:endParaRPr lang="de-CH" sz="900" dirty="0">
+            <a:endParaRPr lang="en-US" sz="900" noProof="0" dirty="0">
               <a:highlight>
                 <a:srgbClr val="FFFF00"/>
               </a:highlight>
@@ -12360,57 +11557,17 @@
           </a:p>
           <a:p>
             <a:r>
-              <a:rPr lang="de-CH" sz="900" dirty="0">
-                <a:highlight>
-                  <a:srgbClr val="FFFF00"/>
-                </a:highlight>
-                <a:latin typeface="Courier New" panose="02070309020205020404" pitchFamily="49" charset="0"/>
-                <a:cs typeface="Courier New" panose="02070309020205020404" pitchFamily="49" charset="0"/>
-              </a:rPr>
-              <a:t>       |        +-- </a:t>
-            </a:r>
-            <a:r>
-              <a:rPr lang="de-CH" sz="900" dirty="0" err="1">
-                <a:highlight>
-                  <a:srgbClr val="FFFF00"/>
-                </a:highlight>
-                <a:latin typeface="Courier New" panose="02070309020205020404" pitchFamily="49" charset="0"/>
-                <a:cs typeface="Courier New" panose="02070309020205020404" pitchFamily="49" charset="0"/>
-              </a:rPr>
-              <a:t>adj</a:t>
-            </a:r>
-            <a:r>
-              <a:rPr lang="de-CH" sz="900" dirty="0">
-                <a:highlight>
-                  <a:srgbClr val="FFFF00"/>
-                </a:highlight>
-                <a:latin typeface="Courier New" panose="02070309020205020404" pitchFamily="49" charset="0"/>
-                <a:cs typeface="Courier New" panose="02070309020205020404" pitchFamily="49" charset="0"/>
-              </a:rPr>
-              <a:t>-</a:t>
-            </a:r>
-            <a:r>
-              <a:rPr lang="de-CH" sz="900" dirty="0" err="1">
-                <a:highlight>
-                  <a:srgbClr val="FFFF00"/>
-                </a:highlight>
-                <a:latin typeface="Courier New" panose="02070309020205020404" pitchFamily="49" charset="0"/>
-                <a:cs typeface="Courier New" panose="02070309020205020404" pitchFamily="49" charset="0"/>
-              </a:rPr>
-              <a:t>rib</a:t>
-            </a:r>
-            <a:r>
-              <a:rPr lang="de-CH" sz="900" dirty="0">
-                <a:highlight>
-                  <a:srgbClr val="FFFF00"/>
-                </a:highlight>
-                <a:latin typeface="Courier New" panose="02070309020205020404" pitchFamily="49" charset="0"/>
-                <a:cs typeface="Courier New" panose="02070309020205020404" pitchFamily="49" charset="0"/>
-              </a:rPr>
-              <a:t>-out?      </a:t>
-            </a:r>
-            <a:r>
-              <a:rPr lang="de-CH" sz="900" dirty="0" err="1">
+              <a:rPr lang="en-US" sz="900" noProof="0" dirty="0">
+                <a:highlight>
+                  <a:srgbClr val="FFFF00"/>
+                </a:highlight>
+                <a:latin typeface="Courier New" panose="02070309020205020404" pitchFamily="49" charset="0"/>
+                <a:cs typeface="Courier New" panose="02070309020205020404" pitchFamily="49" charset="0"/>
+              </a:rPr>
+              <a:t>       |        +-- adj-rib-out?      </a:t>
+            </a:r>
+            <a:r>
+              <a:rPr lang="en-US" sz="900" noProof="0" dirty="0" err="1">
                 <a:highlight>
                   <a:srgbClr val="FFFF00"/>
                 </a:highlight>
@@ -12419,7 +11576,7 @@
               </a:rPr>
               <a:t>boolean</a:t>
             </a:r>
-            <a:endParaRPr lang="de-CH" sz="900" dirty="0">
+            <a:endParaRPr lang="en-US" sz="900" noProof="0" dirty="0">
               <a:highlight>
                 <a:srgbClr val="FFFF00"/>
               </a:highlight>
@@ -12429,37 +11586,17 @@
           </a:p>
           <a:p>
             <a:r>
-              <a:rPr lang="de-CH" sz="900" dirty="0">
-                <a:highlight>
-                  <a:srgbClr val="FFFF00"/>
-                </a:highlight>
-                <a:latin typeface="Courier New" panose="02070309020205020404" pitchFamily="49" charset="0"/>
-                <a:cs typeface="Courier New" panose="02070309020205020404" pitchFamily="49" charset="0"/>
-              </a:rPr>
-              <a:t>       |        +-- </a:t>
-            </a:r>
-            <a:r>
-              <a:rPr lang="de-CH" sz="900" dirty="0" err="1">
-                <a:highlight>
-                  <a:srgbClr val="FFFF00"/>
-                </a:highlight>
-                <a:latin typeface="Courier New" panose="02070309020205020404" pitchFamily="49" charset="0"/>
-                <a:cs typeface="Courier New" panose="02070309020205020404" pitchFamily="49" charset="0"/>
-              </a:rPr>
-              <a:t>filtered</a:t>
-            </a:r>
-            <a:r>
-              <a:rPr lang="de-CH" sz="900" dirty="0">
-                <a:highlight>
-                  <a:srgbClr val="FFFF00"/>
-                </a:highlight>
-                <a:latin typeface="Courier New" panose="02070309020205020404" pitchFamily="49" charset="0"/>
-                <a:cs typeface="Courier New" panose="02070309020205020404" pitchFamily="49" charset="0"/>
-              </a:rPr>
-              <a:t>?         </a:t>
-            </a:r>
-            <a:r>
-              <a:rPr lang="de-CH" sz="900" dirty="0" err="1">
+              <a:rPr lang="en-US" sz="900" noProof="0" dirty="0">
+                <a:highlight>
+                  <a:srgbClr val="FFFF00"/>
+                </a:highlight>
+                <a:latin typeface="Courier New" panose="02070309020205020404" pitchFamily="49" charset="0"/>
+                <a:cs typeface="Courier New" panose="02070309020205020404" pitchFamily="49" charset="0"/>
+              </a:rPr>
+              <a:t>       |        +-- filtered?         </a:t>
+            </a:r>
+            <a:r>
+              <a:rPr lang="en-US" sz="900" noProof="0" dirty="0" err="1">
                 <a:highlight>
                   <a:srgbClr val="FFFF00"/>
                 </a:highlight>
@@ -12468,7 +11605,7 @@
               </a:rPr>
               <a:t>boolean</a:t>
             </a:r>
-            <a:endParaRPr lang="de-CH" sz="900" dirty="0">
+            <a:endParaRPr lang="en-US" sz="900" noProof="0" dirty="0">
               <a:highlight>
                 <a:srgbClr val="FFFF00"/>
               </a:highlight>
@@ -17615,7 +16752,7 @@
             </a:r>
             <a:r>
               <a:rPr lang="de-CH" sz="2100" dirty="0" err="1"/>
-              <a:t>included</a:t>
+              <a:t>including</a:t>
             </a:r>
             <a:r>
               <a:rPr lang="de-CH" sz="2100" dirty="0"/>
@@ -17623,7 +16760,7 @@
             </a:r>
             <a:r>
               <a:rPr lang="de-CH" sz="2100" dirty="0" err="1"/>
-              <a:t>stats</a:t>
+              <a:t>statistics</a:t>
             </a:r>
             <a:r>
               <a:rPr lang="de-CH" sz="2100" dirty="0"/>
